--- a/chapter1/ASE_1_SoftwareEngineering.pptx
+++ b/chapter1/ASE_1_SoftwareEngineering.pptx
@@ -5,7 +5,7 @@
     <p:sldMasterId id="2147483902" r:id="rId4"/>
   </p:sldMasterIdLst>
   <p:notesMasterIdLst>
-    <p:notesMasterId r:id="rId63"/>
+    <p:notesMasterId r:id="rId64"/>
   </p:notesMasterIdLst>
   <p:sldIdLst>
     <p:sldId id="256" r:id="rId5"/>
@@ -35,37 +35,38 @@
     <p:sldId id="346" r:id="rId29"/>
     <p:sldId id="347" r:id="rId30"/>
     <p:sldId id="348" r:id="rId31"/>
-    <p:sldId id="349" r:id="rId32"/>
-    <p:sldId id="350" r:id="rId33"/>
-    <p:sldId id="351" r:id="rId34"/>
-    <p:sldId id="322" r:id="rId35"/>
-    <p:sldId id="291" r:id="rId36"/>
-    <p:sldId id="345" r:id="rId37"/>
-    <p:sldId id="343" r:id="rId38"/>
-    <p:sldId id="344" r:id="rId39"/>
-    <p:sldId id="305" r:id="rId40"/>
-    <p:sldId id="306" r:id="rId41"/>
-    <p:sldId id="307" r:id="rId42"/>
-    <p:sldId id="323" r:id="rId43"/>
-    <p:sldId id="324" r:id="rId44"/>
-    <p:sldId id="339" r:id="rId45"/>
-    <p:sldId id="340" r:id="rId46"/>
-    <p:sldId id="341" r:id="rId47"/>
-    <p:sldId id="342" r:id="rId48"/>
-    <p:sldId id="352" r:id="rId49"/>
-    <p:sldId id="353" r:id="rId50"/>
-    <p:sldId id="325" r:id="rId51"/>
-    <p:sldId id="354" r:id="rId52"/>
-    <p:sldId id="356" r:id="rId53"/>
-    <p:sldId id="357" r:id="rId54"/>
-    <p:sldId id="358" r:id="rId55"/>
-    <p:sldId id="355" r:id="rId56"/>
-    <p:sldId id="326" r:id="rId57"/>
-    <p:sldId id="337" r:id="rId58"/>
-    <p:sldId id="304" r:id="rId59"/>
-    <p:sldId id="318" r:id="rId60"/>
-    <p:sldId id="330" r:id="rId61"/>
-    <p:sldId id="374" r:id="rId62"/>
+    <p:sldId id="375" r:id="rId32"/>
+    <p:sldId id="349" r:id="rId33"/>
+    <p:sldId id="350" r:id="rId34"/>
+    <p:sldId id="351" r:id="rId35"/>
+    <p:sldId id="322" r:id="rId36"/>
+    <p:sldId id="291" r:id="rId37"/>
+    <p:sldId id="345" r:id="rId38"/>
+    <p:sldId id="343" r:id="rId39"/>
+    <p:sldId id="344" r:id="rId40"/>
+    <p:sldId id="305" r:id="rId41"/>
+    <p:sldId id="306" r:id="rId42"/>
+    <p:sldId id="307" r:id="rId43"/>
+    <p:sldId id="323" r:id="rId44"/>
+    <p:sldId id="324" r:id="rId45"/>
+    <p:sldId id="339" r:id="rId46"/>
+    <p:sldId id="340" r:id="rId47"/>
+    <p:sldId id="341" r:id="rId48"/>
+    <p:sldId id="342" r:id="rId49"/>
+    <p:sldId id="352" r:id="rId50"/>
+    <p:sldId id="353" r:id="rId51"/>
+    <p:sldId id="325" r:id="rId52"/>
+    <p:sldId id="354" r:id="rId53"/>
+    <p:sldId id="356" r:id="rId54"/>
+    <p:sldId id="357" r:id="rId55"/>
+    <p:sldId id="358" r:id="rId56"/>
+    <p:sldId id="355" r:id="rId57"/>
+    <p:sldId id="326" r:id="rId58"/>
+    <p:sldId id="337" r:id="rId59"/>
+    <p:sldId id="304" r:id="rId60"/>
+    <p:sldId id="318" r:id="rId61"/>
+    <p:sldId id="330" r:id="rId62"/>
+    <p:sldId id="374" r:id="rId63"/>
   </p:sldIdLst>
   <p:sldSz cx="12192000" cy="6858000"/>
   <p:notesSz cx="6858000" cy="9144000"/>
@@ -213,8 +214,175 @@
 </p:presentation>
 </file>
 
+<file path=ppt/revisionInfo.xml><?xml version="1.0" encoding="utf-8"?>
+<p1510:revInfo xmlns:a="http://schemas.openxmlformats.org/drawingml/2006/main" xmlns:r="http://schemas.openxmlformats.org/officeDocument/2006/relationships" xmlns:p1510="http://schemas.microsoft.com/office/powerpoint/2015/10/main">
+  <p1510:revLst>
+    <p1510:client id="{2D3CB156-12ED-476E-891B-0F4654264055}" v="2" dt="2025-09-24T03:22:10.531"/>
+  </p1510:revLst>
+</p1510:revInfo>
+</file>
+
 <file path=ppt/changesInfos/changesInfo1.xml><?xml version="1.0" encoding="utf-8"?>
 <pc:chgInfo xmlns:a="http://schemas.openxmlformats.org/drawingml/2006/main" xmlns:r="http://schemas.openxmlformats.org/officeDocument/2006/relationships" xmlns:ac="http://schemas.microsoft.com/office/drawing/2013/main/command" xmlns:pc="http://schemas.microsoft.com/office/powerpoint/2013/main/command">
+  <pc:docChgLst>
+    <pc:chgData name="Xin Zou" userId="260b9726081dae15" providerId="LiveId" clId="{9D297BCE-98D2-4025-9670-F2ABFDE5436C}"/>
+    <pc:docChg chg="custSel modSld">
+      <pc:chgData name="Xin Zou" userId="260b9726081dae15" providerId="LiveId" clId="{9D297BCE-98D2-4025-9670-F2ABFDE5436C}" dt="2025-09-24T03:50:24.492" v="32" actId="20577"/>
+      <pc:docMkLst>
+        <pc:docMk/>
+      </pc:docMkLst>
+      <pc:sldChg chg="modSp mod">
+        <pc:chgData name="Xin Zou" userId="260b9726081dae15" providerId="LiveId" clId="{9D297BCE-98D2-4025-9670-F2ABFDE5436C}" dt="2025-09-24T03:50:24.492" v="32" actId="20577"/>
+        <pc:sldMkLst>
+          <pc:docMk/>
+          <pc:sldMk cId="0" sldId="291"/>
+        </pc:sldMkLst>
+        <pc:spChg chg="mod">
+          <ac:chgData name="Xin Zou" userId="260b9726081dae15" providerId="LiveId" clId="{9D297BCE-98D2-4025-9670-F2ABFDE5436C}" dt="2025-09-24T03:50:24.492" v="32" actId="20577"/>
+          <ac:spMkLst>
+            <pc:docMk/>
+            <pc:sldMk cId="0" sldId="291"/>
+            <ac:spMk id="19459" creationId="{00000000-0000-0000-0000-000000000000}"/>
+          </ac:spMkLst>
+        </pc:spChg>
+      </pc:sldChg>
+      <pc:sldChg chg="mod modShow">
+        <pc:chgData name="Xin Zou" userId="260b9726081dae15" providerId="LiveId" clId="{9D297BCE-98D2-4025-9670-F2ABFDE5436C}" dt="2025-09-24T03:24:15.446" v="16" actId="729"/>
+        <pc:sldMkLst>
+          <pc:docMk/>
+          <pc:sldMk cId="0" sldId="304"/>
+        </pc:sldMkLst>
+      </pc:sldChg>
+      <pc:sldChg chg="modSp mod">
+        <pc:chgData name="Xin Zou" userId="260b9726081dae15" providerId="LiveId" clId="{9D297BCE-98D2-4025-9670-F2ABFDE5436C}" dt="2025-09-24T03:18:57.870" v="0" actId="5793"/>
+        <pc:sldMkLst>
+          <pc:docMk/>
+          <pc:sldMk cId="4110949276" sldId="321"/>
+        </pc:sldMkLst>
+        <pc:spChg chg="mod">
+          <ac:chgData name="Xin Zou" userId="260b9726081dae15" providerId="LiveId" clId="{9D297BCE-98D2-4025-9670-F2ABFDE5436C}" dt="2025-09-24T03:18:57.870" v="0" actId="5793"/>
+          <ac:spMkLst>
+            <pc:docMk/>
+            <pc:sldMk cId="4110949276" sldId="321"/>
+            <ac:spMk id="3" creationId="{00000000-0000-0000-0000-000000000000}"/>
+          </ac:spMkLst>
+        </pc:spChg>
+      </pc:sldChg>
+      <pc:sldChg chg="modSp mod">
+        <pc:chgData name="Xin Zou" userId="260b9726081dae15" providerId="LiveId" clId="{9D297BCE-98D2-4025-9670-F2ABFDE5436C}" dt="2025-09-24T03:21:04.755" v="7" actId="27636"/>
+        <pc:sldMkLst>
+          <pc:docMk/>
+          <pc:sldMk cId="1901926812" sldId="324"/>
+        </pc:sldMkLst>
+        <pc:spChg chg="mod">
+          <ac:chgData name="Xin Zou" userId="260b9726081dae15" providerId="LiveId" clId="{9D297BCE-98D2-4025-9670-F2ABFDE5436C}" dt="2025-09-24T03:21:04.755" v="7" actId="27636"/>
+          <ac:spMkLst>
+            <pc:docMk/>
+            <pc:sldMk cId="1901926812" sldId="324"/>
+            <ac:spMk id="3" creationId="{00000000-0000-0000-0000-000000000000}"/>
+          </ac:spMkLst>
+        </pc:spChg>
+      </pc:sldChg>
+      <pc:sldChg chg="modSp mod">
+        <pc:chgData name="Xin Zou" userId="260b9726081dae15" providerId="LiveId" clId="{9D297BCE-98D2-4025-9670-F2ABFDE5436C}" dt="2025-09-24T03:20:41.999" v="5" actId="20577"/>
+        <pc:sldMkLst>
+          <pc:docMk/>
+          <pc:sldMk cId="2232409806" sldId="344"/>
+        </pc:sldMkLst>
+        <pc:spChg chg="mod">
+          <ac:chgData name="Xin Zou" userId="260b9726081dae15" providerId="LiveId" clId="{9D297BCE-98D2-4025-9670-F2ABFDE5436C}" dt="2025-09-24T03:20:41.999" v="5" actId="20577"/>
+          <ac:spMkLst>
+            <pc:docMk/>
+            <pc:sldMk cId="2232409806" sldId="344"/>
+            <ac:spMk id="3" creationId="{AFC80473-C2CB-4379-8AD6-61591627ED9F}"/>
+          </ac:spMkLst>
+        </pc:spChg>
+      </pc:sldChg>
+      <pc:sldChg chg="modSp mod">
+        <pc:chgData name="Xin Zou" userId="260b9726081dae15" providerId="LiveId" clId="{9D297BCE-98D2-4025-9670-F2ABFDE5436C}" dt="2025-09-24T03:20:24.895" v="3" actId="1076"/>
+        <pc:sldMkLst>
+          <pc:docMk/>
+          <pc:sldMk cId="448027658" sldId="345"/>
+        </pc:sldMkLst>
+        <pc:spChg chg="mod">
+          <ac:chgData name="Xin Zou" userId="260b9726081dae15" providerId="LiveId" clId="{9D297BCE-98D2-4025-9670-F2ABFDE5436C}" dt="2025-09-24T03:20:24.895" v="3" actId="1076"/>
+          <ac:spMkLst>
+            <pc:docMk/>
+            <pc:sldMk cId="448027658" sldId="345"/>
+            <ac:spMk id="3" creationId="{05105991-655B-4992-8AC4-905DE58F2176}"/>
+          </ac:spMkLst>
+        </pc:spChg>
+      </pc:sldChg>
+      <pc:sldChg chg="modSp mod">
+        <pc:chgData name="Xin Zou" userId="260b9726081dae15" providerId="LiveId" clId="{9D297BCE-98D2-4025-9670-F2ABFDE5436C}" dt="2025-09-24T03:20:02.177" v="2" actId="27636"/>
+        <pc:sldMkLst>
+          <pc:docMk/>
+          <pc:sldMk cId="1373211857" sldId="351"/>
+        </pc:sldMkLst>
+        <pc:spChg chg="mod">
+          <ac:chgData name="Xin Zou" userId="260b9726081dae15" providerId="LiveId" clId="{9D297BCE-98D2-4025-9670-F2ABFDE5436C}" dt="2025-09-24T03:20:02.177" v="2" actId="27636"/>
+          <ac:spMkLst>
+            <pc:docMk/>
+            <pc:sldMk cId="1373211857" sldId="351"/>
+            <ac:spMk id="3" creationId="{0FA4E4D2-BEFC-49ED-A9B3-D81606F857E8}"/>
+          </ac:spMkLst>
+        </pc:spChg>
+      </pc:sldChg>
+      <pc:sldChg chg="modSp mod">
+        <pc:chgData name="Xin Zou" userId="260b9726081dae15" providerId="LiveId" clId="{9D297BCE-98D2-4025-9670-F2ABFDE5436C}" dt="2025-09-24T03:22:22.787" v="11" actId="14100"/>
+        <pc:sldMkLst>
+          <pc:docMk/>
+          <pc:sldMk cId="1612837189" sldId="356"/>
+        </pc:sldMkLst>
+        <pc:spChg chg="mod">
+          <ac:chgData name="Xin Zou" userId="260b9726081dae15" providerId="LiveId" clId="{9D297BCE-98D2-4025-9670-F2ABFDE5436C}" dt="2025-09-24T03:22:22.787" v="11" actId="14100"/>
+          <ac:spMkLst>
+            <pc:docMk/>
+            <pc:sldMk cId="1612837189" sldId="356"/>
+            <ac:spMk id="3" creationId="{67053C4F-420C-45C2-97BC-F7BCEA9BF982}"/>
+          </ac:spMkLst>
+        </pc:spChg>
+        <pc:picChg chg="mod">
+          <ac:chgData name="Xin Zou" userId="260b9726081dae15" providerId="LiveId" clId="{9D297BCE-98D2-4025-9670-F2ABFDE5436C}" dt="2025-09-24T03:22:10.531" v="10" actId="14100"/>
+          <ac:picMkLst>
+            <pc:docMk/>
+            <pc:sldMk cId="1612837189" sldId="356"/>
+            <ac:picMk id="5126" creationId="{34ACDF57-80AE-4A5B-A128-EF5782F7AB63}"/>
+          </ac:picMkLst>
+        </pc:picChg>
+      </pc:sldChg>
+      <pc:sldChg chg="modSp mod">
+        <pc:chgData name="Xin Zou" userId="260b9726081dae15" providerId="LiveId" clId="{9D297BCE-98D2-4025-9670-F2ABFDE5436C}" dt="2025-09-24T03:23:03.966" v="15" actId="404"/>
+        <pc:sldMkLst>
+          <pc:docMk/>
+          <pc:sldMk cId="3875081412" sldId="357"/>
+        </pc:sldMkLst>
+        <pc:spChg chg="mod">
+          <ac:chgData name="Xin Zou" userId="260b9726081dae15" providerId="LiveId" clId="{9D297BCE-98D2-4025-9670-F2ABFDE5436C}" dt="2025-09-24T03:23:03.966" v="15" actId="404"/>
+          <ac:spMkLst>
+            <pc:docMk/>
+            <pc:sldMk cId="3875081412" sldId="357"/>
+            <ac:spMk id="3" creationId="{DDDF9A79-8643-4F82-A55C-FF3B4DBAD4B2}"/>
+          </ac:spMkLst>
+        </pc:spChg>
+      </pc:sldChg>
+      <pc:sldChg chg="modSp mod">
+        <pc:chgData name="Xin Zou" userId="260b9726081dae15" providerId="LiveId" clId="{9D297BCE-98D2-4025-9670-F2ABFDE5436C}" dt="2025-09-24T03:49:13.617" v="18" actId="404"/>
+        <pc:sldMkLst>
+          <pc:docMk/>
+          <pc:sldMk cId="3836370380" sldId="375"/>
+        </pc:sldMkLst>
+        <pc:spChg chg="mod">
+          <ac:chgData name="Xin Zou" userId="260b9726081dae15" providerId="LiveId" clId="{9D297BCE-98D2-4025-9670-F2ABFDE5436C}" dt="2025-09-24T03:49:13.617" v="18" actId="404"/>
+          <ac:spMkLst>
+            <pc:docMk/>
+            <pc:sldMk cId="3836370380" sldId="375"/>
+            <ac:spMk id="2" creationId="{5EA60B4C-B131-1B47-28AD-D2684BFDFFCC}"/>
+          </ac:spMkLst>
+        </pc:spChg>
+      </pc:sldChg>
+    </pc:docChg>
+  </pc:docChgLst>
   <pc:docChgLst>
     <pc:chgData name="Xin Zou" userId="260b9726081dae15" providerId="LiveId" clId="{F7909621-AD8C-4BA3-ADF9-F483C4CE731E}"/>
     <pc:docChg chg="custSel modSld">
@@ -228,14 +396,6 @@
           <pc:docMk/>
           <pc:sldMk cId="0" sldId="256"/>
         </pc:sldMkLst>
-        <pc:spChg chg="mod">
-          <ac:chgData name="Xin Zou" userId="260b9726081dae15" providerId="LiveId" clId="{F7909621-AD8C-4BA3-ADF9-F483C4CE731E}" dt="2019-09-04T03:30:35.151" v="2"/>
-          <ac:spMkLst>
-            <pc:docMk/>
-            <pc:sldMk cId="0" sldId="256"/>
-            <ac:spMk id="5123" creationId="{00000000-0000-0000-0000-000000000000}"/>
-          </ac:spMkLst>
-        </pc:spChg>
       </pc:sldChg>
       <pc:sldChg chg="modSp">
         <pc:chgData name="Xin Zou" userId="260b9726081dae15" providerId="LiveId" clId="{F7909621-AD8C-4BA3-ADF9-F483C4CE731E}" dt="2019-09-04T03:32:10.807" v="10" actId="27636"/>
@@ -243,14 +403,6 @@
           <pc:docMk/>
           <pc:sldMk cId="0" sldId="304"/>
         </pc:sldMkLst>
-        <pc:spChg chg="mod">
-          <ac:chgData name="Xin Zou" userId="260b9726081dae15" providerId="LiveId" clId="{F7909621-AD8C-4BA3-ADF9-F483C4CE731E}" dt="2019-09-04T03:32:10.807" v="10" actId="27636"/>
-          <ac:spMkLst>
-            <pc:docMk/>
-            <pc:sldMk cId="0" sldId="304"/>
-            <ac:spMk id="29699" creationId="{00000000-0000-0000-0000-000000000000}"/>
-          </ac:spMkLst>
-        </pc:spChg>
       </pc:sldChg>
       <pc:sldChg chg="modSp">
         <pc:chgData name="Xin Zou" userId="260b9726081dae15" providerId="LiveId" clId="{F7909621-AD8C-4BA3-ADF9-F483C4CE731E}" dt="2019-09-04T03:48:18.046" v="13"/>
@@ -258,14 +410,6 @@
           <pc:docMk/>
           <pc:sldMk cId="3875081412" sldId="357"/>
         </pc:sldMkLst>
-        <pc:spChg chg="mod">
-          <ac:chgData name="Xin Zou" userId="260b9726081dae15" providerId="LiveId" clId="{F7909621-AD8C-4BA3-ADF9-F483C4CE731E}" dt="2019-09-04T03:48:18.046" v="13"/>
-          <ac:spMkLst>
-            <pc:docMk/>
-            <pc:sldMk cId="3875081412" sldId="357"/>
-            <ac:spMk id="3" creationId="{DDDF9A79-8643-4F82-A55C-FF3B4DBAD4B2}"/>
-          </ac:spMkLst>
-        </pc:spChg>
       </pc:sldChg>
     </pc:docChg>
   </pc:docChgLst>
@@ -282,14 +426,6 @@
           <pc:docMk/>
           <pc:sldMk cId="0" sldId="291"/>
         </pc:sldMkLst>
-        <pc:spChg chg="mod">
-          <ac:chgData name="Xin Zou" userId="260b9726081dae15" providerId="LiveId" clId="{DEE92855-7029-4449-8D1C-EA3BBA661312}" dt="2019-09-12T02:02:22.345" v="0" actId="2711"/>
-          <ac:spMkLst>
-            <pc:docMk/>
-            <pc:sldMk cId="0" sldId="291"/>
-            <ac:spMk id="19458" creationId="{00000000-0000-0000-0000-000000000000}"/>
-          </ac:spMkLst>
-        </pc:spChg>
       </pc:sldChg>
       <pc:sldChg chg="modSp">
         <pc:chgData name="Xin Zou" userId="260b9726081dae15" providerId="LiveId" clId="{DEE92855-7029-4449-8D1C-EA3BBA661312}" dt="2019-09-12T02:03:09.276" v="10" actId="14100"/>
@@ -297,14 +433,6 @@
           <pc:docMk/>
           <pc:sldMk cId="398621879" sldId="343"/>
         </pc:sldMkLst>
-        <pc:spChg chg="mod">
-          <ac:chgData name="Xin Zou" userId="260b9726081dae15" providerId="LiveId" clId="{DEE92855-7029-4449-8D1C-EA3BBA661312}" dt="2019-09-12T02:03:09.276" v="10" actId="14100"/>
-          <ac:spMkLst>
-            <pc:docMk/>
-            <pc:sldMk cId="398621879" sldId="343"/>
-            <ac:spMk id="3" creationId="{05105991-655B-4992-8AC4-905DE58F2176}"/>
-          </ac:spMkLst>
-        </pc:spChg>
       </pc:sldChg>
       <pc:sldChg chg="modSp">
         <pc:chgData name="Xin Zou" userId="260b9726081dae15" providerId="LiveId" clId="{DEE92855-7029-4449-8D1C-EA3BBA661312}" dt="2019-09-12T02:04:08.103" v="12" actId="1076"/>
@@ -312,14 +440,36 @@
           <pc:docMk/>
           <pc:sldMk cId="1957216409" sldId="353"/>
         </pc:sldMkLst>
-        <pc:picChg chg="mod">
-          <ac:chgData name="Xin Zou" userId="260b9726081dae15" providerId="LiveId" clId="{DEE92855-7029-4449-8D1C-EA3BBA661312}" dt="2019-09-12T02:04:08.103" v="12" actId="1076"/>
-          <ac:picMkLst>
-            <pc:docMk/>
-            <pc:sldMk cId="1957216409" sldId="353"/>
-            <ac:picMk id="12" creationId="{2F23FC39-9A9E-4D31-AE04-27712188C158}"/>
-          </ac:picMkLst>
-        </pc:picChg>
+      </pc:sldChg>
+    </pc:docChg>
+  </pc:docChgLst>
+  <pc:docChgLst>
+    <pc:chgData name="Xin Zou" userId="260b9726081dae15" providerId="LiveId" clId="{A68DB0F5-96DC-4D94-A584-52A8F35D33DE}"/>
+    <pc:docChg chg="undo custSel addSld modSld">
+      <pc:chgData name="Xin Zou" userId="260b9726081dae15" providerId="LiveId" clId="{A68DB0F5-96DC-4D94-A584-52A8F35D33DE}" dt="2025-06-06T07:14:28.407" v="332"/>
+      <pc:docMkLst>
+        <pc:docMk/>
+      </pc:docMkLst>
+      <pc:sldChg chg="modSp mod">
+        <pc:chgData name="Xin Zou" userId="260b9726081dae15" providerId="LiveId" clId="{A68DB0F5-96DC-4D94-A584-52A8F35D33DE}" dt="2025-06-06T07:14:10.473" v="331"/>
+        <pc:sldMkLst>
+          <pc:docMk/>
+          <pc:sldMk cId="884238867" sldId="348"/>
+        </pc:sldMkLst>
+      </pc:sldChg>
+      <pc:sldChg chg="modSp">
+        <pc:chgData name="Xin Zou" userId="260b9726081dae15" providerId="LiveId" clId="{A68DB0F5-96DC-4D94-A584-52A8F35D33DE}" dt="2025-06-06T07:14:28.407" v="332"/>
+        <pc:sldMkLst>
+          <pc:docMk/>
+          <pc:sldMk cId="2123279561" sldId="349"/>
+        </pc:sldMkLst>
+      </pc:sldChg>
+      <pc:sldChg chg="addSp delSp modSp new mod modNotesTx">
+        <pc:chgData name="Xin Zou" userId="260b9726081dae15" providerId="LiveId" clId="{A68DB0F5-96DC-4D94-A584-52A8F35D33DE}" dt="2025-06-06T07:11:48.456" v="330" actId="20577"/>
+        <pc:sldMkLst>
+          <pc:docMk/>
+          <pc:sldMk cId="3836370380" sldId="375"/>
+        </pc:sldMkLst>
       </pc:sldChg>
     </pc:docChg>
   </pc:docChgLst>
@@ -336,22 +486,6 @@
           <pc:docMk/>
           <pc:sldMk cId="0" sldId="256"/>
         </pc:sldMkLst>
-        <pc:spChg chg="mod">
-          <ac:chgData name="Xin Zou" userId="260b9726081dae15" providerId="LiveId" clId="{C7191B37-39E9-464A-80F0-C31627521F9C}" dt="2018-10-08T17:35:37.097" v="3108" actId="2711"/>
-          <ac:spMkLst>
-            <pc:docMk/>
-            <pc:sldMk cId="0" sldId="256"/>
-            <ac:spMk id="3074" creationId="{00000000-0000-0000-0000-000000000000}"/>
-          </ac:spMkLst>
-        </pc:spChg>
-        <pc:spChg chg="mod">
-          <ac:chgData name="Xin Zou" userId="260b9726081dae15" providerId="LiveId" clId="{C7191B37-39E9-464A-80F0-C31627521F9C}" dt="2018-10-08T17:35:29.459" v="3107" actId="20577"/>
-          <ac:spMkLst>
-            <pc:docMk/>
-            <pc:sldMk cId="0" sldId="256"/>
-            <ac:spMk id="5123" creationId="{00000000-0000-0000-0000-000000000000}"/>
-          </ac:spMkLst>
-        </pc:spChg>
       </pc:sldChg>
       <pc:sldChg chg="modSp">
         <pc:chgData name="Xin Zou" userId="260b9726081dae15" providerId="LiveId" clId="{C7191B37-39E9-464A-80F0-C31627521F9C}" dt="2018-10-08T05:41:00.801" v="2971"/>
@@ -359,14 +493,6 @@
           <pc:docMk/>
           <pc:sldMk cId="0" sldId="284"/>
         </pc:sldMkLst>
-        <pc:picChg chg="mod">
-          <ac:chgData name="Xin Zou" userId="260b9726081dae15" providerId="LiveId" clId="{C7191B37-39E9-464A-80F0-C31627521F9C}" dt="2018-10-08T05:41:00.801" v="2971"/>
-          <ac:picMkLst>
-            <pc:docMk/>
-            <pc:sldMk cId="0" sldId="284"/>
-            <ac:picMk id="7171" creationId="{00000000-0000-0000-0000-000000000000}"/>
-          </ac:picMkLst>
-        </pc:picChg>
       </pc:sldChg>
       <pc:sldChg chg="modSp">
         <pc:chgData name="Xin Zou" userId="260b9726081dae15" providerId="LiveId" clId="{C7191B37-39E9-464A-80F0-C31627521F9C}" dt="2018-10-08T05:41:00.801" v="2971"/>
@@ -374,14 +500,6 @@
           <pc:docMk/>
           <pc:sldMk cId="0" sldId="285"/>
         </pc:sldMkLst>
-        <pc:picChg chg="mod">
-          <ac:chgData name="Xin Zou" userId="260b9726081dae15" providerId="LiveId" clId="{C7191B37-39E9-464A-80F0-C31627521F9C}" dt="2018-10-08T05:41:00.801" v="2971"/>
-          <ac:picMkLst>
-            <pc:docMk/>
-            <pc:sldMk cId="0" sldId="285"/>
-            <ac:picMk id="9219" creationId="{00000000-0000-0000-0000-000000000000}"/>
-          </ac:picMkLst>
-        </pc:picChg>
       </pc:sldChg>
       <pc:sldChg chg="modSp">
         <pc:chgData name="Xin Zou" userId="260b9726081dae15" providerId="LiveId" clId="{C7191B37-39E9-464A-80F0-C31627521F9C}" dt="2018-10-08T05:41:00.801" v="2971"/>
@@ -389,14 +507,6 @@
           <pc:docMk/>
           <pc:sldMk cId="0" sldId="286"/>
         </pc:sldMkLst>
-        <pc:picChg chg="mod">
-          <ac:chgData name="Xin Zou" userId="260b9726081dae15" providerId="LiveId" clId="{C7191B37-39E9-464A-80F0-C31627521F9C}" dt="2018-10-08T05:41:00.801" v="2971"/>
-          <ac:picMkLst>
-            <pc:docMk/>
-            <pc:sldMk cId="0" sldId="286"/>
-            <ac:picMk id="6147" creationId="{00000000-0000-0000-0000-000000000000}"/>
-          </ac:picMkLst>
-        </pc:picChg>
       </pc:sldChg>
       <pc:sldChg chg="modSp">
         <pc:chgData name="Xin Zou" userId="260b9726081dae15" providerId="LiveId" clId="{C7191B37-39E9-464A-80F0-C31627521F9C}" dt="2018-10-08T05:41:00.801" v="2971"/>
@@ -404,14 +514,6 @@
           <pc:docMk/>
           <pc:sldMk cId="0" sldId="287"/>
         </pc:sldMkLst>
-        <pc:picChg chg="mod">
-          <ac:chgData name="Xin Zou" userId="260b9726081dae15" providerId="LiveId" clId="{C7191B37-39E9-464A-80F0-C31627521F9C}" dt="2018-10-08T05:41:00.801" v="2971"/>
-          <ac:picMkLst>
-            <pc:docMk/>
-            <pc:sldMk cId="0" sldId="287"/>
-            <ac:picMk id="8195" creationId="{00000000-0000-0000-0000-000000000000}"/>
-          </ac:picMkLst>
-        </pc:picChg>
       </pc:sldChg>
       <pc:sldChg chg="modSp modNotesTx">
         <pc:chgData name="Xin Zou" userId="260b9726081dae15" providerId="LiveId" clId="{C7191B37-39E9-464A-80F0-C31627521F9C}" dt="2018-10-02T21:38:38.508" v="731" actId="20577"/>
@@ -419,22 +521,6 @@
           <pc:docMk/>
           <pc:sldMk cId="0" sldId="291"/>
         </pc:sldMkLst>
-        <pc:spChg chg="mod">
-          <ac:chgData name="Xin Zou" userId="260b9726081dae15" providerId="LiveId" clId="{C7191B37-39E9-464A-80F0-C31627521F9C}" dt="2018-10-02T21:38:25.821" v="654"/>
-          <ac:spMkLst>
-            <pc:docMk/>
-            <pc:sldMk cId="0" sldId="291"/>
-            <ac:spMk id="19458" creationId="{00000000-0000-0000-0000-000000000000}"/>
-          </ac:spMkLst>
-        </pc:spChg>
-        <pc:spChg chg="mod">
-          <ac:chgData name="Xin Zou" userId="260b9726081dae15" providerId="LiveId" clId="{C7191B37-39E9-464A-80F0-C31627521F9C}" dt="2018-10-02T21:38:33.135" v="717" actId="6549"/>
-          <ac:spMkLst>
-            <pc:docMk/>
-            <pc:sldMk cId="0" sldId="291"/>
-            <ac:spMk id="19459" creationId="{00000000-0000-0000-0000-000000000000}"/>
-          </ac:spMkLst>
-        </pc:spChg>
       </pc:sldChg>
       <pc:sldChg chg="modSp">
         <pc:chgData name="Xin Zou" userId="260b9726081dae15" providerId="LiveId" clId="{C7191B37-39E9-464A-80F0-C31627521F9C}" dt="2018-10-08T05:41:00.801" v="2971"/>
@@ -442,14 +528,6 @@
           <pc:docMk/>
           <pc:sldMk cId="0" sldId="294"/>
         </pc:sldMkLst>
-        <pc:picChg chg="mod">
-          <ac:chgData name="Xin Zou" userId="260b9726081dae15" providerId="LiveId" clId="{C7191B37-39E9-464A-80F0-C31627521F9C}" dt="2018-10-08T05:41:00.801" v="2971"/>
-          <ac:picMkLst>
-            <pc:docMk/>
-            <pc:sldMk cId="0" sldId="294"/>
-            <ac:picMk id="18435" creationId="{00000000-0000-0000-0000-000000000000}"/>
-          </ac:picMkLst>
-        </pc:picChg>
       </pc:sldChg>
       <pc:sldChg chg="modSp">
         <pc:chgData name="Xin Zou" userId="260b9726081dae15" providerId="LiveId" clId="{C7191B37-39E9-464A-80F0-C31627521F9C}" dt="2018-10-08T05:41:00.801" v="2971"/>
@@ -457,14 +535,6 @@
           <pc:docMk/>
           <pc:sldMk cId="0" sldId="296"/>
         </pc:sldMkLst>
-        <pc:picChg chg="mod">
-          <ac:chgData name="Xin Zou" userId="260b9726081dae15" providerId="LiveId" clId="{C7191B37-39E9-464A-80F0-C31627521F9C}" dt="2018-10-08T05:41:00.801" v="2971"/>
-          <ac:picMkLst>
-            <pc:docMk/>
-            <pc:sldMk cId="0" sldId="296"/>
-            <ac:picMk id="17411" creationId="{00000000-0000-0000-0000-000000000000}"/>
-          </ac:picMkLst>
-        </pc:picChg>
       </pc:sldChg>
       <pc:sldChg chg="modSp">
         <pc:chgData name="Xin Zou" userId="260b9726081dae15" providerId="LiveId" clId="{C7191B37-39E9-464A-80F0-C31627521F9C}" dt="2018-10-08T05:41:01.402" v="2972" actId="27636"/>
@@ -472,14 +542,6 @@
           <pc:docMk/>
           <pc:sldMk cId="0" sldId="302"/>
         </pc:sldMkLst>
-        <pc:spChg chg="mod">
-          <ac:chgData name="Xin Zou" userId="260b9726081dae15" providerId="LiveId" clId="{C7191B37-39E9-464A-80F0-C31627521F9C}" dt="2018-10-08T05:41:01.402" v="2972" actId="27636"/>
-          <ac:spMkLst>
-            <pc:docMk/>
-            <pc:sldMk cId="0" sldId="302"/>
-            <ac:spMk id="12291" creationId="{00000000-0000-0000-0000-000000000000}"/>
-          </ac:spMkLst>
-        </pc:spChg>
       </pc:sldChg>
       <pc:sldChg chg="modSp">
         <pc:chgData name="Xin Zou" userId="260b9726081dae15" providerId="LiveId" clId="{C7191B37-39E9-464A-80F0-C31627521F9C}" dt="2018-10-08T05:41:02.180" v="2979" actId="27636"/>
@@ -487,14 +549,6 @@
           <pc:docMk/>
           <pc:sldMk cId="0" sldId="304"/>
         </pc:sldMkLst>
-        <pc:spChg chg="mod">
-          <ac:chgData name="Xin Zou" userId="260b9726081dae15" providerId="LiveId" clId="{C7191B37-39E9-464A-80F0-C31627521F9C}" dt="2018-10-08T05:41:02.180" v="2979" actId="27636"/>
-          <ac:spMkLst>
-            <pc:docMk/>
-            <pc:sldMk cId="0" sldId="304"/>
-            <ac:spMk id="29699" creationId="{00000000-0000-0000-0000-000000000000}"/>
-          </ac:spMkLst>
-        </pc:spChg>
       </pc:sldChg>
       <pc:sldChg chg="modSp">
         <pc:chgData name="Xin Zou" userId="260b9726081dae15" providerId="LiveId" clId="{C7191B37-39E9-464A-80F0-C31627521F9C}" dt="2018-10-08T05:41:34.091" v="2985" actId="27636"/>
@@ -502,22 +556,6 @@
           <pc:docMk/>
           <pc:sldMk cId="0" sldId="305"/>
         </pc:sldMkLst>
-        <pc:spChg chg="mod">
-          <ac:chgData name="Xin Zou" userId="260b9726081dae15" providerId="LiveId" clId="{C7191B37-39E9-464A-80F0-C31627521F9C}" dt="2018-10-02T21:53:19.471" v="1481"/>
-          <ac:spMkLst>
-            <pc:docMk/>
-            <pc:sldMk cId="0" sldId="305"/>
-            <ac:spMk id="22530" creationId="{00000000-0000-0000-0000-000000000000}"/>
-          </ac:spMkLst>
-        </pc:spChg>
-        <pc:spChg chg="mod">
-          <ac:chgData name="Xin Zou" userId="260b9726081dae15" providerId="LiveId" clId="{C7191B37-39E9-464A-80F0-C31627521F9C}" dt="2018-10-08T05:41:34.091" v="2985" actId="27636"/>
-          <ac:spMkLst>
-            <pc:docMk/>
-            <pc:sldMk cId="0" sldId="305"/>
-            <ac:spMk id="22531" creationId="{00000000-0000-0000-0000-000000000000}"/>
-          </ac:spMkLst>
-        </pc:spChg>
       </pc:sldChg>
       <pc:sldChg chg="modSp">
         <pc:chgData name="Xin Zou" userId="260b9726081dae15" providerId="LiveId" clId="{C7191B37-39E9-464A-80F0-C31627521F9C}" dt="2018-10-02T21:55:11.153" v="1872" actId="6549"/>
@@ -525,14 +563,6 @@
           <pc:docMk/>
           <pc:sldMk cId="0" sldId="306"/>
         </pc:sldMkLst>
-        <pc:spChg chg="mod">
-          <ac:chgData name="Xin Zou" userId="260b9726081dae15" providerId="LiveId" clId="{C7191B37-39E9-464A-80F0-C31627521F9C}" dt="2018-10-02T21:55:11.153" v="1872" actId="6549"/>
-          <ac:spMkLst>
-            <pc:docMk/>
-            <pc:sldMk cId="0" sldId="306"/>
-            <ac:spMk id="23554" creationId="{00000000-0000-0000-0000-000000000000}"/>
-          </ac:spMkLst>
-        </pc:spChg>
       </pc:sldChg>
       <pc:sldChg chg="modSp">
         <pc:chgData name="Xin Zou" userId="260b9726081dae15" providerId="LiveId" clId="{C7191B37-39E9-464A-80F0-C31627521F9C}" dt="2018-10-08T05:41:34.177" v="2986" actId="27636"/>
@@ -540,22 +570,6 @@
           <pc:docMk/>
           <pc:sldMk cId="0" sldId="307"/>
         </pc:sldMkLst>
-        <pc:spChg chg="mod">
-          <ac:chgData name="Xin Zou" userId="260b9726081dae15" providerId="LiveId" clId="{C7191B37-39E9-464A-80F0-C31627521F9C}" dt="2018-10-02T21:55:19.538" v="1878"/>
-          <ac:spMkLst>
-            <pc:docMk/>
-            <pc:sldMk cId="0" sldId="307"/>
-            <ac:spMk id="24578" creationId="{00000000-0000-0000-0000-000000000000}"/>
-          </ac:spMkLst>
-        </pc:spChg>
-        <pc:spChg chg="mod">
-          <ac:chgData name="Xin Zou" userId="260b9726081dae15" providerId="LiveId" clId="{C7191B37-39E9-464A-80F0-C31627521F9C}" dt="2018-10-08T05:41:34.177" v="2986" actId="27636"/>
-          <ac:spMkLst>
-            <pc:docMk/>
-            <pc:sldMk cId="0" sldId="307"/>
-            <ac:spMk id="24579" creationId="{00000000-0000-0000-0000-000000000000}"/>
-          </ac:spMkLst>
-        </pc:spChg>
       </pc:sldChg>
       <pc:sldChg chg="modSp modAnim">
         <pc:chgData name="Xin Zou" userId="260b9726081dae15" providerId="LiveId" clId="{C7191B37-39E9-464A-80F0-C31627521F9C}" dt="2018-10-02T21:37:51.844" v="605"/>
@@ -563,22 +577,6 @@
           <pc:docMk/>
           <pc:sldMk cId="0" sldId="311"/>
         </pc:sldMkLst>
-        <pc:spChg chg="mod">
-          <ac:chgData name="Xin Zou" userId="260b9726081dae15" providerId="LiveId" clId="{C7191B37-39E9-464A-80F0-C31627521F9C}" dt="2018-10-02T21:37:51.844" v="605"/>
-          <ac:spMkLst>
-            <pc:docMk/>
-            <pc:sldMk cId="0" sldId="311"/>
-            <ac:spMk id="3" creationId="{00000000-0000-0000-0000-000000000000}"/>
-          </ac:spMkLst>
-        </pc:spChg>
-        <pc:spChg chg="mod">
-          <ac:chgData name="Xin Zou" userId="260b9726081dae15" providerId="LiveId" clId="{C7191B37-39E9-464A-80F0-C31627521F9C}" dt="2018-10-02T21:36:27.395" v="488"/>
-          <ac:spMkLst>
-            <pc:docMk/>
-            <pc:sldMk cId="0" sldId="311"/>
-            <ac:spMk id="14338" creationId="{00000000-0000-0000-0000-000000000000}"/>
-          </ac:spMkLst>
-        </pc:spChg>
       </pc:sldChg>
       <pc:sldChg chg="modSp">
         <pc:chgData name="Xin Zou" userId="260b9726081dae15" providerId="LiveId" clId="{C7191B37-39E9-464A-80F0-C31627521F9C}" dt="2018-10-08T05:41:00.801" v="2971"/>
@@ -586,46 +584,6 @@
           <pc:docMk/>
           <pc:sldMk cId="821573508" sldId="313"/>
         </pc:sldMkLst>
-        <pc:graphicFrameChg chg="mod">
-          <ac:chgData name="Xin Zou" userId="260b9726081dae15" providerId="LiveId" clId="{C7191B37-39E9-464A-80F0-C31627521F9C}" dt="2018-10-08T05:41:00.801" v="2971"/>
-          <ac:graphicFrameMkLst>
-            <pc:docMk/>
-            <pc:sldMk cId="821573508" sldId="313"/>
-            <ac:graphicFrameMk id="4" creationId="{00000000-0000-0000-0000-000000000000}"/>
-          </ac:graphicFrameMkLst>
-        </pc:graphicFrameChg>
-        <pc:picChg chg="mod">
-          <ac:chgData name="Xin Zou" userId="260b9726081dae15" providerId="LiveId" clId="{C7191B37-39E9-464A-80F0-C31627521F9C}" dt="2018-10-08T05:41:00.801" v="2971"/>
-          <ac:picMkLst>
-            <pc:docMk/>
-            <pc:sldMk cId="821573508" sldId="313"/>
-            <ac:picMk id="5" creationId="{00000000-0000-0000-0000-000000000000}"/>
-          </ac:picMkLst>
-        </pc:picChg>
-        <pc:picChg chg="mod">
-          <ac:chgData name="Xin Zou" userId="260b9726081dae15" providerId="LiveId" clId="{C7191B37-39E9-464A-80F0-C31627521F9C}" dt="2018-10-08T05:41:00.801" v="2971"/>
-          <ac:picMkLst>
-            <pc:docMk/>
-            <pc:sldMk cId="821573508" sldId="313"/>
-            <ac:picMk id="7" creationId="{00000000-0000-0000-0000-000000000000}"/>
-          </ac:picMkLst>
-        </pc:picChg>
-        <pc:picChg chg="mod">
-          <ac:chgData name="Xin Zou" userId="260b9726081dae15" providerId="LiveId" clId="{C7191B37-39E9-464A-80F0-C31627521F9C}" dt="2018-10-08T05:41:00.801" v="2971"/>
-          <ac:picMkLst>
-            <pc:docMk/>
-            <pc:sldMk cId="821573508" sldId="313"/>
-            <ac:picMk id="8" creationId="{00000000-0000-0000-0000-000000000000}"/>
-          </ac:picMkLst>
-        </pc:picChg>
-        <pc:picChg chg="mod">
-          <ac:chgData name="Xin Zou" userId="260b9726081dae15" providerId="LiveId" clId="{C7191B37-39E9-464A-80F0-C31627521F9C}" dt="2018-10-08T05:41:00.801" v="2971"/>
-          <ac:picMkLst>
-            <pc:docMk/>
-            <pc:sldMk cId="821573508" sldId="313"/>
-            <ac:picMk id="9" creationId="{00000000-0000-0000-0000-000000000000}"/>
-          </ac:picMkLst>
-        </pc:picChg>
       </pc:sldChg>
       <pc:sldChg chg="modSp">
         <pc:chgData name="Xin Zou" userId="260b9726081dae15" providerId="LiveId" clId="{C7191B37-39E9-464A-80F0-C31627521F9C}" dt="2018-10-08T05:41:00.801" v="2971"/>
@@ -633,14 +591,6 @@
           <pc:docMk/>
           <pc:sldMk cId="3190123368" sldId="314"/>
         </pc:sldMkLst>
-        <pc:picChg chg="mod">
-          <ac:chgData name="Xin Zou" userId="260b9726081dae15" providerId="LiveId" clId="{C7191B37-39E9-464A-80F0-C31627521F9C}" dt="2018-10-08T05:41:00.801" v="2971"/>
-          <ac:picMkLst>
-            <pc:docMk/>
-            <pc:sldMk cId="3190123368" sldId="314"/>
-            <ac:picMk id="26627" creationId="{00000000-0000-0000-0000-000000000000}"/>
-          </ac:picMkLst>
-        </pc:picChg>
       </pc:sldChg>
       <pc:sldChg chg="modSp">
         <pc:chgData name="Xin Zou" userId="260b9726081dae15" providerId="LiveId" clId="{C7191B37-39E9-464A-80F0-C31627521F9C}" dt="2018-10-08T05:41:33.898" v="2982" actId="27636"/>
@@ -648,14 +598,6 @@
           <pc:docMk/>
           <pc:sldMk cId="2592908535" sldId="319"/>
         </pc:sldMkLst>
-        <pc:spChg chg="mod">
-          <ac:chgData name="Xin Zou" userId="260b9726081dae15" providerId="LiveId" clId="{C7191B37-39E9-464A-80F0-C31627521F9C}" dt="2018-10-08T05:41:33.898" v="2982" actId="27636"/>
-          <ac:spMkLst>
-            <pc:docMk/>
-            <pc:sldMk cId="2592908535" sldId="319"/>
-            <ac:spMk id="25603" creationId="{00000000-0000-0000-0000-000000000000}"/>
-          </ac:spMkLst>
-        </pc:spChg>
       </pc:sldChg>
       <pc:sldChg chg="modSp">
         <pc:chgData name="Xin Zou" userId="260b9726081dae15" providerId="LiveId" clId="{C7191B37-39E9-464A-80F0-C31627521F9C}" dt="2018-10-08T05:41:01.806" v="2973" actId="27636"/>
@@ -663,22 +605,6 @@
           <pc:docMk/>
           <pc:sldMk cId="2982333462" sldId="320"/>
         </pc:sldMkLst>
-        <pc:spChg chg="mod">
-          <ac:chgData name="Xin Zou" userId="260b9726081dae15" providerId="LiveId" clId="{C7191B37-39E9-464A-80F0-C31627521F9C}" dt="2018-10-02T21:04:13.150" v="63"/>
-          <ac:spMkLst>
-            <pc:docMk/>
-            <pc:sldMk cId="2982333462" sldId="320"/>
-            <ac:spMk id="26626" creationId="{00000000-0000-0000-0000-000000000000}"/>
-          </ac:spMkLst>
-        </pc:spChg>
-        <pc:spChg chg="mod">
-          <ac:chgData name="Xin Zou" userId="260b9726081dae15" providerId="LiveId" clId="{C7191B37-39E9-464A-80F0-C31627521F9C}" dt="2018-10-08T05:41:01.806" v="2973" actId="27636"/>
-          <ac:spMkLst>
-            <pc:docMk/>
-            <pc:sldMk cId="2982333462" sldId="320"/>
-            <ac:spMk id="26627" creationId="{00000000-0000-0000-0000-000000000000}"/>
-          </ac:spMkLst>
-        </pc:spChg>
       </pc:sldChg>
       <pc:sldChg chg="modSp">
         <pc:chgData name="Xin Zou" userId="260b9726081dae15" providerId="LiveId" clId="{C7191B37-39E9-464A-80F0-C31627521F9C}" dt="2018-10-02T21:36:14.497" v="456"/>
@@ -686,14 +612,6 @@
           <pc:docMk/>
           <pc:sldMk cId="4110949276" sldId="321"/>
         </pc:sldMkLst>
-        <pc:spChg chg="mod">
-          <ac:chgData name="Xin Zou" userId="260b9726081dae15" providerId="LiveId" clId="{C7191B37-39E9-464A-80F0-C31627521F9C}" dt="2018-10-02T21:36:14.497" v="456"/>
-          <ac:spMkLst>
-            <pc:docMk/>
-            <pc:sldMk cId="4110949276" sldId="321"/>
-            <ac:spMk id="2" creationId="{00000000-0000-0000-0000-000000000000}"/>
-          </ac:spMkLst>
-        </pc:spChg>
       </pc:sldChg>
       <pc:sldChg chg="modSp">
         <pc:chgData name="Xin Zou" userId="260b9726081dae15" providerId="LiveId" clId="{C7191B37-39E9-464A-80F0-C31627521F9C}" dt="2018-10-02T22:26:49.072" v="2098" actId="16037"/>
@@ -701,14 +619,6 @@
           <pc:docMk/>
           <pc:sldMk cId="2436269639" sldId="322"/>
         </pc:sldMkLst>
-        <pc:spChg chg="mod">
-          <ac:chgData name="Xin Zou" userId="260b9726081dae15" providerId="LiveId" clId="{C7191B37-39E9-464A-80F0-C31627521F9C}" dt="2018-10-02T22:26:49.072" v="2098" actId="16037"/>
-          <ac:spMkLst>
-            <pc:docMk/>
-            <pc:sldMk cId="2436269639" sldId="322"/>
-            <ac:spMk id="2" creationId="{00000000-0000-0000-0000-000000000000}"/>
-          </ac:spMkLst>
-        </pc:spChg>
       </pc:sldChg>
       <pc:sldChg chg="modSp">
         <pc:chgData name="Xin Zou" userId="260b9726081dae15" providerId="LiveId" clId="{C7191B37-39E9-464A-80F0-C31627521F9C}" dt="2018-10-08T05:41:00.801" v="2971"/>
@@ -716,38 +626,6 @@
           <pc:docMk/>
           <pc:sldMk cId="375656699" sldId="323"/>
         </pc:sldMkLst>
-        <pc:spChg chg="mod">
-          <ac:chgData name="Xin Zou" userId="260b9726081dae15" providerId="LiveId" clId="{C7191B37-39E9-464A-80F0-C31627521F9C}" dt="2018-10-08T05:41:00.801" v="2971"/>
-          <ac:spMkLst>
-            <pc:docMk/>
-            <pc:sldMk cId="375656699" sldId="323"/>
-            <ac:spMk id="3" creationId="{00000000-0000-0000-0000-000000000000}"/>
-          </ac:spMkLst>
-        </pc:spChg>
-        <pc:picChg chg="mod">
-          <ac:chgData name="Xin Zou" userId="260b9726081dae15" providerId="LiveId" clId="{C7191B37-39E9-464A-80F0-C31627521F9C}" dt="2018-10-08T05:41:00.801" v="2971"/>
-          <ac:picMkLst>
-            <pc:docMk/>
-            <pc:sldMk cId="375656699" sldId="323"/>
-            <ac:picMk id="1027" creationId="{00000000-0000-0000-0000-000000000000}"/>
-          </ac:picMkLst>
-        </pc:picChg>
-        <pc:picChg chg="mod">
-          <ac:chgData name="Xin Zou" userId="260b9726081dae15" providerId="LiveId" clId="{C7191B37-39E9-464A-80F0-C31627521F9C}" dt="2018-10-08T05:41:00.801" v="2971"/>
-          <ac:picMkLst>
-            <pc:docMk/>
-            <pc:sldMk cId="375656699" sldId="323"/>
-            <ac:picMk id="1028" creationId="{00000000-0000-0000-0000-000000000000}"/>
-          </ac:picMkLst>
-        </pc:picChg>
-        <pc:picChg chg="mod">
-          <ac:chgData name="Xin Zou" userId="260b9726081dae15" providerId="LiveId" clId="{C7191B37-39E9-464A-80F0-C31627521F9C}" dt="2018-10-08T05:41:00.801" v="2971"/>
-          <ac:picMkLst>
-            <pc:docMk/>
-            <pc:sldMk cId="375656699" sldId="323"/>
-            <ac:picMk id="1029" creationId="{00000000-0000-0000-0000-000000000000}"/>
-          </ac:picMkLst>
-        </pc:picChg>
       </pc:sldChg>
       <pc:sldChg chg="modSp">
         <pc:chgData name="Xin Zou" userId="260b9726081dae15" providerId="LiveId" clId="{C7191B37-39E9-464A-80F0-C31627521F9C}" dt="2018-10-08T05:41:34.203" v="2987" actId="27636"/>
@@ -755,14 +633,6 @@
           <pc:docMk/>
           <pc:sldMk cId="1901926812" sldId="324"/>
         </pc:sldMkLst>
-        <pc:spChg chg="mod">
-          <ac:chgData name="Xin Zou" userId="260b9726081dae15" providerId="LiveId" clId="{C7191B37-39E9-464A-80F0-C31627521F9C}" dt="2018-10-08T05:41:34.203" v="2987" actId="27636"/>
-          <ac:spMkLst>
-            <pc:docMk/>
-            <pc:sldMk cId="1901926812" sldId="324"/>
-            <ac:spMk id="3" creationId="{00000000-0000-0000-0000-000000000000}"/>
-          </ac:spMkLst>
-        </pc:spChg>
       </pc:sldChg>
       <pc:sldChg chg="modSp">
         <pc:chgData name="Xin Zou" userId="260b9726081dae15" providerId="LiveId" clId="{C7191B37-39E9-464A-80F0-C31627521F9C}" dt="2018-10-08T05:41:34.278" v="2989" actId="27636"/>
@@ -770,14 +640,6 @@
           <pc:docMk/>
           <pc:sldMk cId="905460715" sldId="325"/>
         </pc:sldMkLst>
-        <pc:spChg chg="mod">
-          <ac:chgData name="Xin Zou" userId="260b9726081dae15" providerId="LiveId" clId="{C7191B37-39E9-464A-80F0-C31627521F9C}" dt="2018-10-08T05:41:34.278" v="2989" actId="27636"/>
-          <ac:spMkLst>
-            <pc:docMk/>
-            <pc:sldMk cId="905460715" sldId="325"/>
-            <ac:spMk id="3" creationId="{00000000-0000-0000-0000-000000000000}"/>
-          </ac:spMkLst>
-        </pc:spChg>
       </pc:sldChg>
       <pc:sldChg chg="modSp">
         <pc:chgData name="Xin Zou" userId="260b9726081dae15" providerId="LiveId" clId="{C7191B37-39E9-464A-80F0-C31627521F9C}" dt="2018-10-03T04:20:55.005" v="2969" actId="6549"/>
@@ -785,14 +647,6 @@
           <pc:docMk/>
           <pc:sldMk cId="767424033" sldId="326"/>
         </pc:sldMkLst>
-        <pc:spChg chg="mod">
-          <ac:chgData name="Xin Zou" userId="260b9726081dae15" providerId="LiveId" clId="{C7191B37-39E9-464A-80F0-C31627521F9C}" dt="2018-10-03T04:20:55.005" v="2969" actId="6549"/>
-          <ac:spMkLst>
-            <pc:docMk/>
-            <pc:sldMk cId="767424033" sldId="326"/>
-            <ac:spMk id="3" creationId="{00000000-0000-0000-0000-000000000000}"/>
-          </ac:spMkLst>
-        </pc:spChg>
       </pc:sldChg>
       <pc:sldChg chg="modSp">
         <pc:chgData name="Xin Zou" userId="260b9726081dae15" providerId="LiveId" clId="{C7191B37-39E9-464A-80F0-C31627521F9C}" dt="2018-10-08T05:41:34.391" v="2991" actId="27636"/>
@@ -800,62 +654,6 @@
           <pc:docMk/>
           <pc:sldMk cId="1678637684" sldId="337"/>
         </pc:sldMkLst>
-        <pc:spChg chg="mod">
-          <ac:chgData name="Xin Zou" userId="260b9726081dae15" providerId="LiveId" clId="{C7191B37-39E9-464A-80F0-C31627521F9C}" dt="2018-10-08T05:41:00.801" v="2971"/>
-          <ac:spMkLst>
-            <pc:docMk/>
-            <pc:sldMk cId="1678637684" sldId="337"/>
-            <ac:spMk id="2" creationId="{00000000-0000-0000-0000-000000000000}"/>
-          </ac:spMkLst>
-        </pc:spChg>
-        <pc:spChg chg="mod">
-          <ac:chgData name="Xin Zou" userId="260b9726081dae15" providerId="LiveId" clId="{C7191B37-39E9-464A-80F0-C31627521F9C}" dt="2018-10-08T05:41:34.391" v="2991" actId="27636"/>
-          <ac:spMkLst>
-            <pc:docMk/>
-            <pc:sldMk cId="1678637684" sldId="337"/>
-            <ac:spMk id="3" creationId="{00000000-0000-0000-0000-000000000000}"/>
-          </ac:spMkLst>
-        </pc:spChg>
-        <pc:picChg chg="mod">
-          <ac:chgData name="Xin Zou" userId="260b9726081dae15" providerId="LiveId" clId="{C7191B37-39E9-464A-80F0-C31627521F9C}" dt="2018-10-08T05:41:00.801" v="2971"/>
-          <ac:picMkLst>
-            <pc:docMk/>
-            <pc:sldMk cId="1678637684" sldId="337"/>
-            <ac:picMk id="5" creationId="{00000000-0000-0000-0000-000000000000}"/>
-          </ac:picMkLst>
-        </pc:picChg>
-        <pc:picChg chg="mod">
-          <ac:chgData name="Xin Zou" userId="260b9726081dae15" providerId="LiveId" clId="{C7191B37-39E9-464A-80F0-C31627521F9C}" dt="2018-10-08T05:41:00.801" v="2971"/>
-          <ac:picMkLst>
-            <pc:docMk/>
-            <pc:sldMk cId="1678637684" sldId="337"/>
-            <ac:picMk id="6" creationId="{00000000-0000-0000-0000-000000000000}"/>
-          </ac:picMkLst>
-        </pc:picChg>
-        <pc:picChg chg="mod">
-          <ac:chgData name="Xin Zou" userId="260b9726081dae15" providerId="LiveId" clId="{C7191B37-39E9-464A-80F0-C31627521F9C}" dt="2018-10-08T05:41:00.801" v="2971"/>
-          <ac:picMkLst>
-            <pc:docMk/>
-            <pc:sldMk cId="1678637684" sldId="337"/>
-            <ac:picMk id="7" creationId="{00000000-0000-0000-0000-000000000000}"/>
-          </ac:picMkLst>
-        </pc:picChg>
-        <pc:picChg chg="mod">
-          <ac:chgData name="Xin Zou" userId="260b9726081dae15" providerId="LiveId" clId="{C7191B37-39E9-464A-80F0-C31627521F9C}" dt="2018-10-08T05:41:00.801" v="2971"/>
-          <ac:picMkLst>
-            <pc:docMk/>
-            <pc:sldMk cId="1678637684" sldId="337"/>
-            <ac:picMk id="8" creationId="{00000000-0000-0000-0000-000000000000}"/>
-          </ac:picMkLst>
-        </pc:picChg>
-        <pc:picChg chg="mod">
-          <ac:chgData name="Xin Zou" userId="260b9726081dae15" providerId="LiveId" clId="{C7191B37-39E9-464A-80F0-C31627521F9C}" dt="2018-10-08T05:41:00.801" v="2971"/>
-          <ac:picMkLst>
-            <pc:docMk/>
-            <pc:sldMk cId="1678637684" sldId="337"/>
-            <ac:picMk id="9" creationId="{00000000-0000-0000-0000-000000000000}"/>
-          </ac:picMkLst>
-        </pc:picChg>
       </pc:sldChg>
       <pc:sldChg chg="modSp">
         <pc:chgData name="Xin Zou" userId="260b9726081dae15" providerId="LiveId" clId="{C7191B37-39E9-464A-80F0-C31627521F9C}" dt="2018-10-08T05:41:00.801" v="2971"/>
@@ -863,14 +661,6 @@
           <pc:docMk/>
           <pc:sldMk cId="3128164546" sldId="339"/>
         </pc:sldMkLst>
-        <pc:picChg chg="mod">
-          <ac:chgData name="Xin Zou" userId="260b9726081dae15" providerId="LiveId" clId="{C7191B37-39E9-464A-80F0-C31627521F9C}" dt="2018-10-08T05:41:00.801" v="2971"/>
-          <ac:picMkLst>
-            <pc:docMk/>
-            <pc:sldMk cId="3128164546" sldId="339"/>
-            <ac:picMk id="4" creationId="{00000000-0000-0000-0000-000000000000}"/>
-          </ac:picMkLst>
-        </pc:picChg>
       </pc:sldChg>
       <pc:sldChg chg="modSp">
         <pc:chgData name="Xin Zou" userId="260b9726081dae15" providerId="LiveId" clId="{C7191B37-39E9-464A-80F0-C31627521F9C}" dt="2018-10-08T05:41:00.801" v="2971"/>
@@ -878,14 +668,6 @@
           <pc:docMk/>
           <pc:sldMk cId="1426053382" sldId="340"/>
         </pc:sldMkLst>
-        <pc:picChg chg="mod">
-          <ac:chgData name="Xin Zou" userId="260b9726081dae15" providerId="LiveId" clId="{C7191B37-39E9-464A-80F0-C31627521F9C}" dt="2018-10-08T05:41:00.801" v="2971"/>
-          <ac:picMkLst>
-            <pc:docMk/>
-            <pc:sldMk cId="1426053382" sldId="340"/>
-            <ac:picMk id="4" creationId="{00000000-0000-0000-0000-000000000000}"/>
-          </ac:picMkLst>
-        </pc:picChg>
       </pc:sldChg>
       <pc:sldChg chg="addSp delSp modSp add ord">
         <pc:chgData name="Xin Zou" userId="260b9726081dae15" providerId="LiveId" clId="{C7191B37-39E9-464A-80F0-C31627521F9C}" dt="2018-10-08T05:41:34.065" v="2984" actId="27636"/>
@@ -893,30 +675,6 @@
           <pc:docMk/>
           <pc:sldMk cId="398621879" sldId="343"/>
         </pc:sldMkLst>
-        <pc:spChg chg="mod">
-          <ac:chgData name="Xin Zou" userId="260b9726081dae15" providerId="LiveId" clId="{C7191B37-39E9-464A-80F0-C31627521F9C}" dt="2018-10-02T21:51:37.534" v="1362" actId="20577"/>
-          <ac:spMkLst>
-            <pc:docMk/>
-            <pc:sldMk cId="398621879" sldId="343"/>
-            <ac:spMk id="2" creationId="{729BBF23-2373-4FD4-9AE4-69D1D32A5AB6}"/>
-          </ac:spMkLst>
-        </pc:spChg>
-        <pc:spChg chg="add del mod">
-          <ac:chgData name="Xin Zou" userId="260b9726081dae15" providerId="LiveId" clId="{C7191B37-39E9-464A-80F0-C31627521F9C}" dt="2018-10-08T05:41:34.065" v="2984" actId="27636"/>
-          <ac:spMkLst>
-            <pc:docMk/>
-            <pc:sldMk cId="398621879" sldId="343"/>
-            <ac:spMk id="3" creationId="{05105991-655B-4992-8AC4-905DE58F2176}"/>
-          </ac:spMkLst>
-        </pc:spChg>
-        <pc:spChg chg="add del">
-          <ac:chgData name="Xin Zou" userId="260b9726081dae15" providerId="LiveId" clId="{C7191B37-39E9-464A-80F0-C31627521F9C}" dt="2018-10-02T21:40:45.132" v="741"/>
-          <ac:spMkLst>
-            <pc:docMk/>
-            <pc:sldMk cId="398621879" sldId="343"/>
-            <ac:spMk id="4" creationId="{7AE5834E-BBD6-4A78-A850-9E8783B7744A}"/>
-          </ac:spMkLst>
-        </pc:spChg>
       </pc:sldChg>
       <pc:sldChg chg="modSp add">
         <pc:chgData name="Xin Zou" userId="260b9726081dae15" providerId="LiveId" clId="{C7191B37-39E9-464A-80F0-C31627521F9C}" dt="2018-10-08T05:41:01.961" v="2975" actId="27636"/>
@@ -924,22 +682,6 @@
           <pc:docMk/>
           <pc:sldMk cId="2232409806" sldId="344"/>
         </pc:sldMkLst>
-        <pc:spChg chg="mod">
-          <ac:chgData name="Xin Zou" userId="260b9726081dae15" providerId="LiveId" clId="{C7191B37-39E9-464A-80F0-C31627521F9C}" dt="2018-10-02T21:52:54.891" v="1417"/>
-          <ac:spMkLst>
-            <pc:docMk/>
-            <pc:sldMk cId="2232409806" sldId="344"/>
-            <ac:spMk id="2" creationId="{75F5FD93-C02B-49F3-9B90-E278FF3C3DE8}"/>
-          </ac:spMkLst>
-        </pc:spChg>
-        <pc:spChg chg="mod">
-          <ac:chgData name="Xin Zou" userId="260b9726081dae15" providerId="LiveId" clId="{C7191B37-39E9-464A-80F0-C31627521F9C}" dt="2018-10-08T05:41:01.961" v="2975" actId="27636"/>
-          <ac:spMkLst>
-            <pc:docMk/>
-            <pc:sldMk cId="2232409806" sldId="344"/>
-            <ac:spMk id="3" creationId="{AFC80473-C2CB-4379-8AD6-61591627ED9F}"/>
-          </ac:spMkLst>
-        </pc:spChg>
       </pc:sldChg>
       <pc:sldChg chg="addSp modSp add">
         <pc:chgData name="Xin Zou" userId="260b9726081dae15" providerId="LiveId" clId="{C7191B37-39E9-464A-80F0-C31627521F9C}" dt="2018-10-08T05:41:00.801" v="2971"/>
@@ -947,30 +689,6 @@
           <pc:docMk/>
           <pc:sldMk cId="448027658" sldId="345"/>
         </pc:sldMkLst>
-        <pc:spChg chg="mod">
-          <ac:chgData name="Xin Zou" userId="260b9726081dae15" providerId="LiveId" clId="{C7191B37-39E9-464A-80F0-C31627521F9C}" dt="2018-10-02T21:45:22.226" v="976" actId="27636"/>
-          <ac:spMkLst>
-            <pc:docMk/>
-            <pc:sldMk cId="448027658" sldId="345"/>
-            <ac:spMk id="2" creationId="{729BBF23-2373-4FD4-9AE4-69D1D32A5AB6}"/>
-          </ac:spMkLst>
-        </pc:spChg>
-        <pc:spChg chg="mod">
-          <ac:chgData name="Xin Zou" userId="260b9726081dae15" providerId="LiveId" clId="{C7191B37-39E9-464A-80F0-C31627521F9C}" dt="2018-10-08T05:41:00.801" v="2971"/>
-          <ac:spMkLst>
-            <pc:docMk/>
-            <pc:sldMk cId="448027658" sldId="345"/>
-            <ac:spMk id="3" creationId="{05105991-655B-4992-8AC4-905DE58F2176}"/>
-          </ac:spMkLst>
-        </pc:spChg>
-        <pc:picChg chg="add mod">
-          <ac:chgData name="Xin Zou" userId="260b9726081dae15" providerId="LiveId" clId="{C7191B37-39E9-464A-80F0-C31627521F9C}" dt="2018-10-08T05:41:00.801" v="2971"/>
-          <ac:picMkLst>
-            <pc:docMk/>
-            <pc:sldMk cId="448027658" sldId="345"/>
-            <ac:picMk id="3074" creationId="{892EC2D3-36C2-4D46-8FBB-C31D7BD1B914}"/>
-          </ac:picMkLst>
-        </pc:picChg>
       </pc:sldChg>
       <pc:sldChg chg="modSp add">
         <pc:chgData name="Xin Zou" userId="260b9726081dae15" providerId="LiveId" clId="{C7191B37-39E9-464A-80F0-C31627521F9C}" dt="2018-10-02T22:34:51.510" v="2119" actId="6549"/>
@@ -978,22 +696,6 @@
           <pc:docMk/>
           <pc:sldMk cId="4131179668" sldId="346"/>
         </pc:sldMkLst>
-        <pc:spChg chg="mod">
-          <ac:chgData name="Xin Zou" userId="260b9726081dae15" providerId="LiveId" clId="{C7191B37-39E9-464A-80F0-C31627521F9C}" dt="2018-10-02T22:12:28.325" v="1951"/>
-          <ac:spMkLst>
-            <pc:docMk/>
-            <pc:sldMk cId="4131179668" sldId="346"/>
-            <ac:spMk id="2" creationId="{BBE06833-18FF-40FB-8528-405C07686983}"/>
-          </ac:spMkLst>
-        </pc:spChg>
-        <pc:spChg chg="mod">
-          <ac:chgData name="Xin Zou" userId="260b9726081dae15" providerId="LiveId" clId="{C7191B37-39E9-464A-80F0-C31627521F9C}" dt="2018-10-02T22:34:51.510" v="2119" actId="6549"/>
-          <ac:spMkLst>
-            <pc:docMk/>
-            <pc:sldMk cId="4131179668" sldId="346"/>
-            <ac:spMk id="3" creationId="{9E214A16-91DA-4062-9BFC-87D0639DA81B}"/>
-          </ac:spMkLst>
-        </pc:spChg>
       </pc:sldChg>
       <pc:sldChg chg="modSp add">
         <pc:chgData name="Xin Zou" userId="260b9726081dae15" providerId="LiveId" clId="{C7191B37-39E9-464A-80F0-C31627521F9C}" dt="2018-10-08T05:41:01.875" v="2974" actId="27636"/>
@@ -1001,22 +703,6 @@
           <pc:docMk/>
           <pc:sldMk cId="3139242268" sldId="347"/>
         </pc:sldMkLst>
-        <pc:spChg chg="mod">
-          <ac:chgData name="Xin Zou" userId="260b9726081dae15" providerId="LiveId" clId="{C7191B37-39E9-464A-80F0-C31627521F9C}" dt="2018-10-02T22:13:23.824" v="2033"/>
-          <ac:spMkLst>
-            <pc:docMk/>
-            <pc:sldMk cId="3139242268" sldId="347"/>
-            <ac:spMk id="2" creationId="{FDAA107D-9843-421D-9402-32397C9A2C44}"/>
-          </ac:spMkLst>
-        </pc:spChg>
-        <pc:spChg chg="mod">
-          <ac:chgData name="Xin Zou" userId="260b9726081dae15" providerId="LiveId" clId="{C7191B37-39E9-464A-80F0-C31627521F9C}" dt="2018-10-08T05:41:01.875" v="2974" actId="27636"/>
-          <ac:spMkLst>
-            <pc:docMk/>
-            <pc:sldMk cId="3139242268" sldId="347"/>
-            <ac:spMk id="3" creationId="{6F76B870-06A1-443F-9B1C-9AEA743EDF78}"/>
-          </ac:spMkLst>
-        </pc:spChg>
       </pc:sldChg>
       <pc:sldChg chg="modSp add">
         <pc:chgData name="Xin Zou" userId="260b9726081dae15" providerId="LiveId" clId="{C7191B37-39E9-464A-80F0-C31627521F9C}" dt="2018-10-02T22:14:10.683" v="2036"/>
@@ -1024,14 +710,6 @@
           <pc:docMk/>
           <pc:sldMk cId="884238867" sldId="348"/>
         </pc:sldMkLst>
-        <pc:spChg chg="mod">
-          <ac:chgData name="Xin Zou" userId="260b9726081dae15" providerId="LiveId" clId="{C7191B37-39E9-464A-80F0-C31627521F9C}" dt="2018-10-02T22:14:10.683" v="2036"/>
-          <ac:spMkLst>
-            <pc:docMk/>
-            <pc:sldMk cId="884238867" sldId="348"/>
-            <ac:spMk id="3" creationId="{E1AF90C2-B6FA-4AD4-B9C0-1AEBF7DD580D}"/>
-          </ac:spMkLst>
-        </pc:spChg>
       </pc:sldChg>
       <pc:sldChg chg="modSp add">
         <pc:chgData name="Xin Zou" userId="260b9726081dae15" providerId="LiveId" clId="{C7191B37-39E9-464A-80F0-C31627521F9C}" dt="2018-10-02T22:14:25.383" v="2038"/>
@@ -1039,14 +717,6 @@
           <pc:docMk/>
           <pc:sldMk cId="2123279561" sldId="349"/>
         </pc:sldMkLst>
-        <pc:spChg chg="mod">
-          <ac:chgData name="Xin Zou" userId="260b9726081dae15" providerId="LiveId" clId="{C7191B37-39E9-464A-80F0-C31627521F9C}" dt="2018-10-02T22:14:25.383" v="2038"/>
-          <ac:spMkLst>
-            <pc:docMk/>
-            <pc:sldMk cId="2123279561" sldId="349"/>
-            <ac:spMk id="3" creationId="{33FAEA2C-2297-4D36-A6D1-9C6D93E4E91A}"/>
-          </ac:spMkLst>
-        </pc:spChg>
       </pc:sldChg>
       <pc:sldChg chg="modSp add">
         <pc:chgData name="Xin Zou" userId="260b9726081dae15" providerId="LiveId" clId="{C7191B37-39E9-464A-80F0-C31627521F9C}" dt="2018-10-02T22:15:01.091" v="2044"/>
@@ -1054,22 +724,6 @@
           <pc:docMk/>
           <pc:sldMk cId="463745865" sldId="350"/>
         </pc:sldMkLst>
-        <pc:spChg chg="mod">
-          <ac:chgData name="Xin Zou" userId="260b9726081dae15" providerId="LiveId" clId="{C7191B37-39E9-464A-80F0-C31627521F9C}" dt="2018-10-02T22:15:01.091" v="2044"/>
-          <ac:spMkLst>
-            <pc:docMk/>
-            <pc:sldMk cId="463745865" sldId="350"/>
-            <ac:spMk id="2" creationId="{162AED86-CD5A-478A-A45A-4F9B2D208EC4}"/>
-          </ac:spMkLst>
-        </pc:spChg>
-        <pc:spChg chg="mod">
-          <ac:chgData name="Xin Zou" userId="260b9726081dae15" providerId="LiveId" clId="{C7191B37-39E9-464A-80F0-C31627521F9C}" dt="2018-10-02T22:14:58.960" v="2043"/>
-          <ac:spMkLst>
-            <pc:docMk/>
-            <pc:sldMk cId="463745865" sldId="350"/>
-            <ac:spMk id="3" creationId="{FC6F580A-2846-4332-949E-4192AB137126}"/>
-          </ac:spMkLst>
-        </pc:spChg>
       </pc:sldChg>
       <pc:sldChg chg="modSp add">
         <pc:chgData name="Xin Zou" userId="260b9726081dae15" providerId="LiveId" clId="{C7191B37-39E9-464A-80F0-C31627521F9C}" dt="2018-10-08T05:41:34.003" v="2983" actId="27636"/>
@@ -1077,22 +731,6 @@
           <pc:docMk/>
           <pc:sldMk cId="1373211857" sldId="351"/>
         </pc:sldMkLst>
-        <pc:spChg chg="mod">
-          <ac:chgData name="Xin Zou" userId="260b9726081dae15" providerId="LiveId" clId="{C7191B37-39E9-464A-80F0-C31627521F9C}" dt="2018-10-02T22:35:50.735" v="2135"/>
-          <ac:spMkLst>
-            <pc:docMk/>
-            <pc:sldMk cId="1373211857" sldId="351"/>
-            <ac:spMk id="2" creationId="{73BF1C45-F79D-4715-A111-8C79ADF369FD}"/>
-          </ac:spMkLst>
-        </pc:spChg>
-        <pc:spChg chg="mod">
-          <ac:chgData name="Xin Zou" userId="260b9726081dae15" providerId="LiveId" clId="{C7191B37-39E9-464A-80F0-C31627521F9C}" dt="2018-10-08T05:41:34.003" v="2983" actId="27636"/>
-          <ac:spMkLst>
-            <pc:docMk/>
-            <pc:sldMk cId="1373211857" sldId="351"/>
-            <ac:spMk id="3" creationId="{0FA4E4D2-BEFC-49ED-A9B3-D81606F857E8}"/>
-          </ac:spMkLst>
-        </pc:spChg>
       </pc:sldChg>
       <pc:sldChg chg="modSp add modAnim">
         <pc:chgData name="Xin Zou" userId="260b9726081dae15" providerId="LiveId" clId="{C7191B37-39E9-464A-80F0-C31627521F9C}" dt="2018-10-08T05:41:34.240" v="2988" actId="27636"/>
@@ -1100,22 +738,6 @@
           <pc:docMk/>
           <pc:sldMk cId="3889425858" sldId="352"/>
         </pc:sldMkLst>
-        <pc:spChg chg="mod">
-          <ac:chgData name="Xin Zou" userId="260b9726081dae15" providerId="LiveId" clId="{C7191B37-39E9-464A-80F0-C31627521F9C}" dt="2018-10-02T22:49:26.965" v="2377"/>
-          <ac:spMkLst>
-            <pc:docMk/>
-            <pc:sldMk cId="3889425858" sldId="352"/>
-            <ac:spMk id="2" creationId="{BC1E4FD5-46D1-4555-8AC1-2692CEA9F979}"/>
-          </ac:spMkLst>
-        </pc:spChg>
-        <pc:spChg chg="mod">
-          <ac:chgData name="Xin Zou" userId="260b9726081dae15" providerId="LiveId" clId="{C7191B37-39E9-464A-80F0-C31627521F9C}" dt="2018-10-08T05:41:34.240" v="2988" actId="27636"/>
-          <ac:spMkLst>
-            <pc:docMk/>
-            <pc:sldMk cId="3889425858" sldId="352"/>
-            <ac:spMk id="3" creationId="{6944B1D5-7794-47C3-8F2A-3780196FDF74}"/>
-          </ac:spMkLst>
-        </pc:spChg>
       </pc:sldChg>
       <pc:sldChg chg="addSp delSp modSp add">
         <pc:chgData name="Xin Zou" userId="260b9726081dae15" providerId="LiveId" clId="{C7191B37-39E9-464A-80F0-C31627521F9C}" dt="2018-10-08T05:41:00.801" v="2971"/>
@@ -1123,110 +745,6 @@
           <pc:docMk/>
           <pc:sldMk cId="1957216409" sldId="353"/>
         </pc:sldMkLst>
-        <pc:spChg chg="del">
-          <ac:chgData name="Xin Zou" userId="260b9726081dae15" providerId="LiveId" clId="{C7191B37-39E9-464A-80F0-C31627521F9C}" dt="2018-10-02T22:47:50.349" v="2298" actId="478"/>
-          <ac:spMkLst>
-            <pc:docMk/>
-            <pc:sldMk cId="1957216409" sldId="353"/>
-            <ac:spMk id="2" creationId="{3421A92F-4493-4A7C-B7EA-E057AA730DA7}"/>
-          </ac:spMkLst>
-        </pc:spChg>
-        <pc:spChg chg="del mod">
-          <ac:chgData name="Xin Zou" userId="260b9726081dae15" providerId="LiveId" clId="{C7191B37-39E9-464A-80F0-C31627521F9C}" dt="2018-10-02T22:47:47.166" v="2297" actId="478"/>
-          <ac:spMkLst>
-            <pc:docMk/>
-            <pc:sldMk cId="1957216409" sldId="353"/>
-            <ac:spMk id="3" creationId="{975A0347-6113-4FCE-B403-7F2FCFF8E4EF}"/>
-          </ac:spMkLst>
-        </pc:spChg>
-        <pc:spChg chg="add del mod">
-          <ac:chgData name="Xin Zou" userId="260b9726081dae15" providerId="LiveId" clId="{C7191B37-39E9-464A-80F0-C31627521F9C}" dt="2018-10-02T22:47:43.280" v="2296"/>
-          <ac:spMkLst>
-            <pc:docMk/>
-            <pc:sldMk cId="1957216409" sldId="353"/>
-            <ac:spMk id="6" creationId="{218E1DD7-CD46-41C4-B669-12855015B536}"/>
-          </ac:spMkLst>
-        </pc:spChg>
-        <pc:spChg chg="add del mod">
-          <ac:chgData name="Xin Zou" userId="260b9726081dae15" providerId="LiveId" clId="{C7191B37-39E9-464A-80F0-C31627521F9C}" dt="2018-10-02T22:47:43.280" v="2296"/>
-          <ac:spMkLst>
-            <pc:docMk/>
-            <pc:sldMk cId="1957216409" sldId="353"/>
-            <ac:spMk id="7" creationId="{8BD99DDE-5960-4DCB-BF98-0B82A82C978F}"/>
-          </ac:spMkLst>
-        </pc:spChg>
-        <pc:spChg chg="add del">
-          <ac:chgData name="Xin Zou" userId="260b9726081dae15" providerId="LiveId" clId="{C7191B37-39E9-464A-80F0-C31627521F9C}" dt="2018-10-02T22:47:59.311" v="2300"/>
-          <ac:spMkLst>
-            <pc:docMk/>
-            <pc:sldMk cId="1957216409" sldId="353"/>
-            <ac:spMk id="10" creationId="{A7725465-1C7B-4061-8AC2-D09D91E0B4FF}"/>
-          </ac:spMkLst>
-        </pc:spChg>
-        <pc:spChg chg="add del">
-          <ac:chgData name="Xin Zou" userId="260b9726081dae15" providerId="LiveId" clId="{C7191B37-39E9-464A-80F0-C31627521F9C}" dt="2018-10-02T22:47:59.311" v="2300"/>
-          <ac:spMkLst>
-            <pc:docMk/>
-            <pc:sldMk cId="1957216409" sldId="353"/>
-            <ac:spMk id="11" creationId="{5801733F-1D2E-445D-8104-66F361C491D3}"/>
-          </ac:spMkLst>
-        </pc:spChg>
-        <pc:spChg chg="add del mod">
-          <ac:chgData name="Xin Zou" userId="260b9726081dae15" providerId="LiveId" clId="{C7191B37-39E9-464A-80F0-C31627521F9C}" dt="2018-10-02T22:48:37.566" v="2305"/>
-          <ac:spMkLst>
-            <pc:docMk/>
-            <pc:sldMk cId="1957216409" sldId="353"/>
-            <ac:spMk id="13" creationId="{81C0270F-D417-4251-9A72-10A5D44E0585}"/>
-          </ac:spMkLst>
-        </pc:spChg>
-        <pc:spChg chg="add mod">
-          <ac:chgData name="Xin Zou" userId="260b9726081dae15" providerId="LiveId" clId="{C7191B37-39E9-464A-80F0-C31627521F9C}" dt="2018-10-08T05:41:00.801" v="2971"/>
-          <ac:spMkLst>
-            <pc:docMk/>
-            <pc:sldMk cId="1957216409" sldId="353"/>
-            <ac:spMk id="14" creationId="{D9414AD9-E62D-4F19-8526-ECEB4502AD26}"/>
-          </ac:spMkLst>
-        </pc:spChg>
-        <pc:graphicFrameChg chg="add del mod">
-          <ac:chgData name="Xin Zou" userId="260b9726081dae15" providerId="LiveId" clId="{C7191B37-39E9-464A-80F0-C31627521F9C}" dt="2018-10-02T22:47:43.280" v="2296"/>
-          <ac:graphicFrameMkLst>
-            <pc:docMk/>
-            <pc:sldMk cId="1957216409" sldId="353"/>
-            <ac:graphicFrameMk id="4" creationId="{EAC22298-8AAA-4A67-80D8-0B82D51A4649}"/>
-          </ac:graphicFrameMkLst>
-        </pc:graphicFrameChg>
-        <pc:graphicFrameChg chg="add del mod">
-          <ac:chgData name="Xin Zou" userId="260b9726081dae15" providerId="LiveId" clId="{C7191B37-39E9-464A-80F0-C31627521F9C}" dt="2018-10-02T22:47:43.280" v="2296"/>
-          <ac:graphicFrameMkLst>
-            <pc:docMk/>
-            <pc:sldMk cId="1957216409" sldId="353"/>
-            <ac:graphicFrameMk id="5" creationId="{4E59B683-395A-447C-B75A-02CAAEEDED68}"/>
-          </ac:graphicFrameMkLst>
-        </pc:graphicFrameChg>
-        <pc:graphicFrameChg chg="add del">
-          <ac:chgData name="Xin Zou" userId="260b9726081dae15" providerId="LiveId" clId="{C7191B37-39E9-464A-80F0-C31627521F9C}" dt="2018-10-02T22:47:59.311" v="2300"/>
-          <ac:graphicFrameMkLst>
-            <pc:docMk/>
-            <pc:sldMk cId="1957216409" sldId="353"/>
-            <ac:graphicFrameMk id="8" creationId="{50946918-AC41-4F00-9F21-BD4403404D71}"/>
-          </ac:graphicFrameMkLst>
-        </pc:graphicFrameChg>
-        <pc:graphicFrameChg chg="add del">
-          <ac:chgData name="Xin Zou" userId="260b9726081dae15" providerId="LiveId" clId="{C7191B37-39E9-464A-80F0-C31627521F9C}" dt="2018-10-02T22:47:59.311" v="2300"/>
-          <ac:graphicFrameMkLst>
-            <pc:docMk/>
-            <pc:sldMk cId="1957216409" sldId="353"/>
-            <ac:graphicFrameMk id="9" creationId="{1E44A8A1-74A8-479E-83C7-2A50721931B0}"/>
-          </ac:graphicFrameMkLst>
-        </pc:graphicFrameChg>
-        <pc:picChg chg="add mod">
-          <ac:chgData name="Xin Zou" userId="260b9726081dae15" providerId="LiveId" clId="{C7191B37-39E9-464A-80F0-C31627521F9C}" dt="2018-10-08T05:41:00.801" v="2971"/>
-          <ac:picMkLst>
-            <pc:docMk/>
-            <pc:sldMk cId="1957216409" sldId="353"/>
-            <ac:picMk id="12" creationId="{2F23FC39-9A9E-4D31-AE04-27712188C158}"/>
-          </ac:picMkLst>
-        </pc:picChg>
       </pc:sldChg>
       <pc:sldChg chg="modSp add">
         <pc:chgData name="Xin Zou" userId="260b9726081dae15" providerId="LiveId" clId="{C7191B37-39E9-464A-80F0-C31627521F9C}" dt="2018-10-02T22:58:55.280" v="2567" actId="6549"/>
@@ -1234,22 +752,6 @@
           <pc:docMk/>
           <pc:sldMk cId="2338638659" sldId="354"/>
         </pc:sldMkLst>
-        <pc:spChg chg="mod">
-          <ac:chgData name="Xin Zou" userId="260b9726081dae15" providerId="LiveId" clId="{C7191B37-39E9-464A-80F0-C31627521F9C}" dt="2018-10-02T22:52:42.682" v="2424"/>
-          <ac:spMkLst>
-            <pc:docMk/>
-            <pc:sldMk cId="2338638659" sldId="354"/>
-            <ac:spMk id="2" creationId="{31B71AFA-30C0-4DAF-A7BF-4F4B50CDA3FE}"/>
-          </ac:spMkLst>
-        </pc:spChg>
-        <pc:spChg chg="mod">
-          <ac:chgData name="Xin Zou" userId="260b9726081dae15" providerId="LiveId" clId="{C7191B37-39E9-464A-80F0-C31627521F9C}" dt="2018-10-02T22:58:55.280" v="2567" actId="6549"/>
-          <ac:spMkLst>
-            <pc:docMk/>
-            <pc:sldMk cId="2338638659" sldId="354"/>
-            <ac:spMk id="3" creationId="{67053C4F-420C-45C2-97BC-F7BCEA9BF982}"/>
-          </ac:spMkLst>
-        </pc:spChg>
       </pc:sldChg>
       <pc:sldChg chg="addSp delSp modSp add ord">
         <pc:chgData name="Xin Zou" userId="260b9726081dae15" providerId="LiveId" clId="{C7191B37-39E9-464A-80F0-C31627521F9C}" dt="2018-10-03T04:20:13.627" v="2949" actId="27636"/>
@@ -1257,30 +759,6 @@
           <pc:docMk/>
           <pc:sldMk cId="2264470809" sldId="355"/>
         </pc:sldMkLst>
-        <pc:spChg chg="mod">
-          <ac:chgData name="Xin Zou" userId="260b9726081dae15" providerId="LiveId" clId="{C7191B37-39E9-464A-80F0-C31627521F9C}" dt="2018-10-03T04:20:00.256" v="2946"/>
-          <ac:spMkLst>
-            <pc:docMk/>
-            <pc:sldMk cId="2264470809" sldId="355"/>
-            <ac:spMk id="2" creationId="{31B71AFA-30C0-4DAF-A7BF-4F4B50CDA3FE}"/>
-          </ac:spMkLst>
-        </pc:spChg>
-        <pc:spChg chg="mod">
-          <ac:chgData name="Xin Zou" userId="260b9726081dae15" providerId="LiveId" clId="{C7191B37-39E9-464A-80F0-C31627521F9C}" dt="2018-10-03T04:20:13.627" v="2949" actId="27636"/>
-          <ac:spMkLst>
-            <pc:docMk/>
-            <pc:sldMk cId="2264470809" sldId="355"/>
-            <ac:spMk id="3" creationId="{67053C4F-420C-45C2-97BC-F7BCEA9BF982}"/>
-          </ac:spMkLst>
-        </pc:spChg>
-        <pc:spChg chg="add del">
-          <ac:chgData name="Xin Zou" userId="260b9726081dae15" providerId="LiveId" clId="{C7191B37-39E9-464A-80F0-C31627521F9C}" dt="2018-10-02T22:59:08.450" v="2571"/>
-          <ac:spMkLst>
-            <pc:docMk/>
-            <pc:sldMk cId="2264470809" sldId="355"/>
-            <ac:spMk id="4" creationId="{C547C341-7C7E-44A5-837B-BD89E59F3189}"/>
-          </ac:spMkLst>
-        </pc:spChg>
       </pc:sldChg>
       <pc:sldChg chg="addSp modSp add">
         <pc:chgData name="Xin Zou" userId="260b9726081dae15" providerId="LiveId" clId="{C7191B37-39E9-464A-80F0-C31627521F9C}" dt="2018-10-08T05:41:34.318" v="2990" actId="27636"/>
@@ -1288,38 +766,6 @@
           <pc:docMk/>
           <pc:sldMk cId="1612837189" sldId="356"/>
         </pc:sldMkLst>
-        <pc:spChg chg="mod">
-          <ac:chgData name="Xin Zou" userId="260b9726081dae15" providerId="LiveId" clId="{C7191B37-39E9-464A-80F0-C31627521F9C}" dt="2018-10-08T05:41:34.318" v="2990" actId="27636"/>
-          <ac:spMkLst>
-            <pc:docMk/>
-            <pc:sldMk cId="1612837189" sldId="356"/>
-            <ac:spMk id="3" creationId="{67053C4F-420C-45C2-97BC-F7BCEA9BF982}"/>
-          </ac:spMkLst>
-        </pc:spChg>
-        <pc:picChg chg="add mod">
-          <ac:chgData name="Xin Zou" userId="260b9726081dae15" providerId="LiveId" clId="{C7191B37-39E9-464A-80F0-C31627521F9C}" dt="2018-10-08T05:41:00.801" v="2971"/>
-          <ac:picMkLst>
-            <pc:docMk/>
-            <pc:sldMk cId="1612837189" sldId="356"/>
-            <ac:picMk id="5122" creationId="{6F4FBE6D-6CA7-445A-8621-691E147844BC}"/>
-          </ac:picMkLst>
-        </pc:picChg>
-        <pc:picChg chg="add mod">
-          <ac:chgData name="Xin Zou" userId="260b9726081dae15" providerId="LiveId" clId="{C7191B37-39E9-464A-80F0-C31627521F9C}" dt="2018-10-08T05:41:00.801" v="2971"/>
-          <ac:picMkLst>
-            <pc:docMk/>
-            <pc:sldMk cId="1612837189" sldId="356"/>
-            <ac:picMk id="5124" creationId="{50F77647-09B8-4F65-AF81-67D876EEA13C}"/>
-          </ac:picMkLst>
-        </pc:picChg>
-        <pc:picChg chg="add mod">
-          <ac:chgData name="Xin Zou" userId="260b9726081dae15" providerId="LiveId" clId="{C7191B37-39E9-464A-80F0-C31627521F9C}" dt="2018-10-08T05:41:00.801" v="2971"/>
-          <ac:picMkLst>
-            <pc:docMk/>
-            <pc:sldMk cId="1612837189" sldId="356"/>
-            <ac:picMk id="5126" creationId="{34ACDF57-80AE-4A5B-A128-EF5782F7AB63}"/>
-          </ac:picMkLst>
-        </pc:picChg>
       </pc:sldChg>
       <pc:sldChg chg="modSp add">
         <pc:chgData name="Xin Zou" userId="260b9726081dae15" providerId="LiveId" clId="{C7191B37-39E9-464A-80F0-C31627521F9C}" dt="2018-10-08T05:41:02.130" v="2978" actId="27636"/>
@@ -1327,22 +773,6 @@
           <pc:docMk/>
           <pc:sldMk cId="3875081412" sldId="357"/>
         </pc:sldMkLst>
-        <pc:spChg chg="mod">
-          <ac:chgData name="Xin Zou" userId="260b9726081dae15" providerId="LiveId" clId="{C7191B37-39E9-464A-80F0-C31627521F9C}" dt="2018-10-02T23:24:51.244" v="2766" actId="5793"/>
-          <ac:spMkLst>
-            <pc:docMk/>
-            <pc:sldMk cId="3875081412" sldId="357"/>
-            <ac:spMk id="2" creationId="{BB31A824-EB53-4D94-AD9A-7DB7E6F42DAC}"/>
-          </ac:spMkLst>
-        </pc:spChg>
-        <pc:spChg chg="mod">
-          <ac:chgData name="Xin Zou" userId="260b9726081dae15" providerId="LiveId" clId="{C7191B37-39E9-464A-80F0-C31627521F9C}" dt="2018-10-08T05:41:02.130" v="2978" actId="27636"/>
-          <ac:spMkLst>
-            <pc:docMk/>
-            <pc:sldMk cId="3875081412" sldId="357"/>
-            <ac:spMk id="3" creationId="{DDDF9A79-8643-4F82-A55C-FF3B4DBAD4B2}"/>
-          </ac:spMkLst>
-        </pc:spChg>
       </pc:sldChg>
       <pc:sldChg chg="addSp delSp modSp add">
         <pc:chgData name="Xin Zou" userId="260b9726081dae15" providerId="LiveId" clId="{C7191B37-39E9-464A-80F0-C31627521F9C}" dt="2018-10-08T05:41:00.801" v="2971"/>
@@ -1350,54 +780,6 @@
           <pc:docMk/>
           <pc:sldMk cId="3412302101" sldId="358"/>
         </pc:sldMkLst>
-        <pc:spChg chg="mod">
-          <ac:chgData name="Xin Zou" userId="260b9726081dae15" providerId="LiveId" clId="{C7191B37-39E9-464A-80F0-C31627521F9C}" dt="2018-10-03T04:21:36.690" v="2970" actId="20577"/>
-          <ac:spMkLst>
-            <pc:docMk/>
-            <pc:sldMk cId="3412302101" sldId="358"/>
-            <ac:spMk id="2" creationId="{0C4F57B8-22E0-4EF8-878A-829B98F5E0B2}"/>
-          </ac:spMkLst>
-        </pc:spChg>
-        <pc:spChg chg="del">
-          <ac:chgData name="Xin Zou" userId="260b9726081dae15" providerId="LiveId" clId="{C7191B37-39E9-464A-80F0-C31627521F9C}" dt="2018-10-02T23:26:07.850" v="2788"/>
-          <ac:spMkLst>
-            <pc:docMk/>
-            <pc:sldMk cId="3412302101" sldId="358"/>
-            <ac:spMk id="3" creationId="{9EE485B0-BBAC-4893-B412-077E25E19ABD}"/>
-          </ac:spMkLst>
-        </pc:spChg>
-        <pc:picChg chg="add mod">
-          <ac:chgData name="Xin Zou" userId="260b9726081dae15" providerId="LiveId" clId="{C7191B37-39E9-464A-80F0-C31627521F9C}" dt="2018-10-08T05:41:00.801" v="2971"/>
-          <ac:picMkLst>
-            <pc:docMk/>
-            <pc:sldMk cId="3412302101" sldId="358"/>
-            <ac:picMk id="6146" creationId="{91D9FA36-CAA6-45F6-B310-847B96A6DAB6}"/>
-          </ac:picMkLst>
-        </pc:picChg>
-        <pc:picChg chg="add mod">
-          <ac:chgData name="Xin Zou" userId="260b9726081dae15" providerId="LiveId" clId="{C7191B37-39E9-464A-80F0-C31627521F9C}" dt="2018-10-08T05:41:00.801" v="2971"/>
-          <ac:picMkLst>
-            <pc:docMk/>
-            <pc:sldMk cId="3412302101" sldId="358"/>
-            <ac:picMk id="6148" creationId="{31DB50DD-322B-4430-9628-84B3DB8721C7}"/>
-          </ac:picMkLst>
-        </pc:picChg>
-        <pc:picChg chg="add mod">
-          <ac:chgData name="Xin Zou" userId="260b9726081dae15" providerId="LiveId" clId="{C7191B37-39E9-464A-80F0-C31627521F9C}" dt="2018-10-08T05:41:00.801" v="2971"/>
-          <ac:picMkLst>
-            <pc:docMk/>
-            <pc:sldMk cId="3412302101" sldId="358"/>
-            <ac:picMk id="6150" creationId="{EE635FB0-4BD1-4C27-A2A5-9B264967759A}"/>
-          </ac:picMkLst>
-        </pc:picChg>
-        <pc:picChg chg="add mod">
-          <ac:chgData name="Xin Zou" userId="260b9726081dae15" providerId="LiveId" clId="{C7191B37-39E9-464A-80F0-C31627521F9C}" dt="2018-10-08T05:41:00.801" v="2971"/>
-          <ac:picMkLst>
-            <pc:docMk/>
-            <pc:sldMk cId="3412302101" sldId="358"/>
-            <ac:picMk id="6152" creationId="{8FFE880B-084D-4A1E-AD38-9FC1B9D54D7F}"/>
-          </ac:picMkLst>
-        </pc:picChg>
       </pc:sldChg>
       <pc:sldChg chg="add">
         <pc:chgData name="Xin Zou" userId="260b9726081dae15" providerId="LiveId" clId="{C7191B37-39E9-464A-80F0-C31627521F9C}" dt="2018-10-08T05:41:29.185" v="2980"/>
@@ -1412,62 +794,6 @@
           <pc:docMk/>
           <pc:sldMasterMk cId="0" sldId="2147483890"/>
         </pc:sldMasterMkLst>
-        <pc:spChg chg="mod">
-          <ac:chgData name="Xin Zou" userId="260b9726081dae15" providerId="LiveId" clId="{C7191B37-39E9-464A-80F0-C31627521F9C}" dt="2018-10-08T05:41:00.801" v="2971"/>
-          <ac:spMkLst>
-            <pc:docMk/>
-            <pc:sldMasterMk cId="0" sldId="2147483890"/>
-            <ac:spMk id="2" creationId="{00000000-0000-0000-0000-000000000000}"/>
-          </ac:spMkLst>
-        </pc:spChg>
-        <pc:spChg chg="mod">
-          <ac:chgData name="Xin Zou" userId="260b9726081dae15" providerId="LiveId" clId="{C7191B37-39E9-464A-80F0-C31627521F9C}" dt="2018-10-08T05:41:00.801" v="2971"/>
-          <ac:spMkLst>
-            <pc:docMk/>
-            <pc:sldMasterMk cId="0" sldId="2147483890"/>
-            <ac:spMk id="3" creationId="{00000000-0000-0000-0000-000000000000}"/>
-          </ac:spMkLst>
-        </pc:spChg>
-        <pc:spChg chg="mod">
-          <ac:chgData name="Xin Zou" userId="260b9726081dae15" providerId="LiveId" clId="{C7191B37-39E9-464A-80F0-C31627521F9C}" dt="2018-10-08T05:41:00.801" v="2971"/>
-          <ac:spMkLst>
-            <pc:docMk/>
-            <pc:sldMasterMk cId="0" sldId="2147483890"/>
-            <ac:spMk id="4" creationId="{00000000-0000-0000-0000-000000000000}"/>
-          </ac:spMkLst>
-        </pc:spChg>
-        <pc:spChg chg="mod">
-          <ac:chgData name="Xin Zou" userId="260b9726081dae15" providerId="LiveId" clId="{C7191B37-39E9-464A-80F0-C31627521F9C}" dt="2018-10-08T05:41:00.801" v="2971"/>
-          <ac:spMkLst>
-            <pc:docMk/>
-            <pc:sldMasterMk cId="0" sldId="2147483890"/>
-            <ac:spMk id="5" creationId="{00000000-0000-0000-0000-000000000000}"/>
-          </ac:spMkLst>
-        </pc:spChg>
-        <pc:spChg chg="mod">
-          <ac:chgData name="Xin Zou" userId="260b9726081dae15" providerId="LiveId" clId="{C7191B37-39E9-464A-80F0-C31627521F9C}" dt="2018-10-08T05:41:00.801" v="2971"/>
-          <ac:spMkLst>
-            <pc:docMk/>
-            <pc:sldMasterMk cId="0" sldId="2147483890"/>
-            <ac:spMk id="6" creationId="{00000000-0000-0000-0000-000000000000}"/>
-          </ac:spMkLst>
-        </pc:spChg>
-        <pc:spChg chg="mod">
-          <ac:chgData name="Xin Zou" userId="260b9726081dae15" providerId="LiveId" clId="{C7191B37-39E9-464A-80F0-C31627521F9C}" dt="2018-10-08T05:41:00.801" v="2971"/>
-          <ac:spMkLst>
-            <pc:docMk/>
-            <pc:sldMasterMk cId="0" sldId="2147483890"/>
-            <ac:spMk id="7" creationId="{00000000-0000-0000-0000-000000000000}"/>
-          </ac:spMkLst>
-        </pc:spChg>
-        <pc:spChg chg="mod">
-          <ac:chgData name="Xin Zou" userId="260b9726081dae15" providerId="LiveId" clId="{C7191B37-39E9-464A-80F0-C31627521F9C}" dt="2018-10-08T05:41:00.801" v="2971"/>
-          <ac:spMkLst>
-            <pc:docMk/>
-            <pc:sldMasterMk cId="0" sldId="2147483890"/>
-            <ac:spMk id="10" creationId="{00000000-0000-0000-0000-000000000000}"/>
-          </ac:spMkLst>
-        </pc:spChg>
         <pc:sldLayoutChg chg="modSp setBg">
           <pc:chgData name="Xin Zou" userId="260b9726081dae15" providerId="LiveId" clId="{C7191B37-39E9-464A-80F0-C31627521F9C}" dt="2018-10-08T05:41:00.801" v="2971"/>
           <pc:sldLayoutMkLst>
@@ -1475,42 +801,6 @@
             <pc:sldMasterMk cId="0" sldId="2147483890"/>
             <pc:sldLayoutMk cId="0" sldId="2147483891"/>
           </pc:sldLayoutMkLst>
-          <pc:spChg chg="mod">
-            <ac:chgData name="Xin Zou" userId="260b9726081dae15" providerId="LiveId" clId="{C7191B37-39E9-464A-80F0-C31627521F9C}" dt="2018-10-08T05:41:00.801" v="2971"/>
-            <ac:spMkLst>
-              <pc:docMk/>
-              <pc:sldMasterMk cId="0" sldId="2147483890"/>
-              <pc:sldLayoutMk cId="0" sldId="2147483891"/>
-              <ac:spMk id="2" creationId="{00000000-0000-0000-0000-000000000000}"/>
-            </ac:spMkLst>
-          </pc:spChg>
-          <pc:spChg chg="mod">
-            <ac:chgData name="Xin Zou" userId="260b9726081dae15" providerId="LiveId" clId="{C7191B37-39E9-464A-80F0-C31627521F9C}" dt="2018-10-08T05:41:00.801" v="2971"/>
-            <ac:spMkLst>
-              <pc:docMk/>
-              <pc:sldMasterMk cId="0" sldId="2147483890"/>
-              <pc:sldLayoutMk cId="0" sldId="2147483891"/>
-              <ac:spMk id="3" creationId="{00000000-0000-0000-0000-000000000000}"/>
-            </ac:spMkLst>
-          </pc:spChg>
-          <pc:spChg chg="mod">
-            <ac:chgData name="Xin Zou" userId="260b9726081dae15" providerId="LiveId" clId="{C7191B37-39E9-464A-80F0-C31627521F9C}" dt="2018-10-08T05:41:00.801" v="2971"/>
-            <ac:spMkLst>
-              <pc:docMk/>
-              <pc:sldMasterMk cId="0" sldId="2147483890"/>
-              <pc:sldLayoutMk cId="0" sldId="2147483891"/>
-              <ac:spMk id="9" creationId="{00000000-0000-0000-0000-000000000000}"/>
-            </ac:spMkLst>
-          </pc:spChg>
-          <pc:spChg chg="mod">
-            <ac:chgData name="Xin Zou" userId="260b9726081dae15" providerId="LiveId" clId="{C7191B37-39E9-464A-80F0-C31627521F9C}" dt="2018-10-08T05:41:00.801" v="2971"/>
-            <ac:spMkLst>
-              <pc:docMk/>
-              <pc:sldMasterMk cId="0" sldId="2147483890"/>
-              <pc:sldLayoutMk cId="0" sldId="2147483891"/>
-              <ac:spMk id="10" creationId="{00000000-0000-0000-0000-000000000000}"/>
-            </ac:spMkLst>
-          </pc:spChg>
         </pc:sldLayoutChg>
         <pc:sldLayoutChg chg="modSp">
           <pc:chgData name="Xin Zou" userId="260b9726081dae15" providerId="LiveId" clId="{C7191B37-39E9-464A-80F0-C31627521F9C}" dt="2018-10-08T05:41:00.801" v="2971"/>
@@ -1519,15 +809,6 @@
             <pc:sldMasterMk cId="0" sldId="2147483890"/>
             <pc:sldLayoutMk cId="0" sldId="2147483892"/>
           </pc:sldLayoutMkLst>
-          <pc:spChg chg="mod">
-            <ac:chgData name="Xin Zou" userId="260b9726081dae15" providerId="LiveId" clId="{C7191B37-39E9-464A-80F0-C31627521F9C}" dt="2018-10-08T05:41:00.801" v="2971"/>
-            <ac:spMkLst>
-              <pc:docMk/>
-              <pc:sldMasterMk cId="0" sldId="2147483890"/>
-              <pc:sldLayoutMk cId="0" sldId="2147483892"/>
-              <ac:spMk id="2" creationId="{00000000-0000-0000-0000-000000000000}"/>
-            </ac:spMkLst>
-          </pc:spChg>
         </pc:sldLayoutChg>
         <pc:sldLayoutChg chg="modSp setBg">
           <pc:chgData name="Xin Zou" userId="260b9726081dae15" providerId="LiveId" clId="{C7191B37-39E9-464A-80F0-C31627521F9C}" dt="2018-10-08T05:41:00.801" v="2971"/>
@@ -1536,42 +817,6 @@
             <pc:sldMasterMk cId="0" sldId="2147483890"/>
             <pc:sldLayoutMk cId="0" sldId="2147483893"/>
           </pc:sldLayoutMkLst>
-          <pc:spChg chg="mod">
-            <ac:chgData name="Xin Zou" userId="260b9726081dae15" providerId="LiveId" clId="{C7191B37-39E9-464A-80F0-C31627521F9C}" dt="2018-10-08T05:41:00.801" v="2971"/>
-            <ac:spMkLst>
-              <pc:docMk/>
-              <pc:sldMasterMk cId="0" sldId="2147483890"/>
-              <pc:sldLayoutMk cId="0" sldId="2147483893"/>
-              <ac:spMk id="2" creationId="{00000000-0000-0000-0000-000000000000}"/>
-            </ac:spMkLst>
-          </pc:spChg>
-          <pc:spChg chg="mod">
-            <ac:chgData name="Xin Zou" userId="260b9726081dae15" providerId="LiveId" clId="{C7191B37-39E9-464A-80F0-C31627521F9C}" dt="2018-10-08T05:41:00.801" v="2971"/>
-            <ac:spMkLst>
-              <pc:docMk/>
-              <pc:sldMasterMk cId="0" sldId="2147483890"/>
-              <pc:sldLayoutMk cId="0" sldId="2147483893"/>
-              <ac:spMk id="3" creationId="{00000000-0000-0000-0000-000000000000}"/>
-            </ac:spMkLst>
-          </pc:spChg>
-          <pc:spChg chg="mod">
-            <ac:chgData name="Xin Zou" userId="260b9726081dae15" providerId="LiveId" clId="{C7191B37-39E9-464A-80F0-C31627521F9C}" dt="2018-10-08T05:41:00.801" v="2971"/>
-            <ac:spMkLst>
-              <pc:docMk/>
-              <pc:sldMasterMk cId="0" sldId="2147483890"/>
-              <pc:sldLayoutMk cId="0" sldId="2147483893"/>
-              <ac:spMk id="9" creationId="{00000000-0000-0000-0000-000000000000}"/>
-            </ac:spMkLst>
-          </pc:spChg>
-          <pc:spChg chg="mod">
-            <ac:chgData name="Xin Zou" userId="260b9726081dae15" providerId="LiveId" clId="{C7191B37-39E9-464A-80F0-C31627521F9C}" dt="2018-10-08T05:41:00.801" v="2971"/>
-            <ac:spMkLst>
-              <pc:docMk/>
-              <pc:sldMasterMk cId="0" sldId="2147483890"/>
-              <pc:sldLayoutMk cId="0" sldId="2147483893"/>
-              <ac:spMk id="12" creationId="{00000000-0000-0000-0000-000000000000}"/>
-            </ac:spMkLst>
-          </pc:spChg>
         </pc:sldLayoutChg>
         <pc:sldLayoutChg chg="modSp">
           <pc:chgData name="Xin Zou" userId="260b9726081dae15" providerId="LiveId" clId="{C7191B37-39E9-464A-80F0-C31627521F9C}" dt="2018-10-08T05:41:00.801" v="2971"/>
@@ -1580,24 +825,6 @@
             <pc:sldMasterMk cId="0" sldId="2147483890"/>
             <pc:sldLayoutMk cId="0" sldId="2147483894"/>
           </pc:sldLayoutMkLst>
-          <pc:spChg chg="mod">
-            <ac:chgData name="Xin Zou" userId="260b9726081dae15" providerId="LiveId" clId="{C7191B37-39E9-464A-80F0-C31627521F9C}" dt="2018-10-08T05:41:00.801" v="2971"/>
-            <ac:spMkLst>
-              <pc:docMk/>
-              <pc:sldMasterMk cId="0" sldId="2147483890"/>
-              <pc:sldLayoutMk cId="0" sldId="2147483894"/>
-              <ac:spMk id="3" creationId="{00000000-0000-0000-0000-000000000000}"/>
-            </ac:spMkLst>
-          </pc:spChg>
-          <pc:spChg chg="mod">
-            <ac:chgData name="Xin Zou" userId="260b9726081dae15" providerId="LiveId" clId="{C7191B37-39E9-464A-80F0-C31627521F9C}" dt="2018-10-08T05:41:00.801" v="2971"/>
-            <ac:spMkLst>
-              <pc:docMk/>
-              <pc:sldMasterMk cId="0" sldId="2147483890"/>
-              <pc:sldLayoutMk cId="0" sldId="2147483894"/>
-              <ac:spMk id="4" creationId="{00000000-0000-0000-0000-000000000000}"/>
-            </ac:spMkLst>
-          </pc:spChg>
         </pc:sldLayoutChg>
         <pc:sldLayoutChg chg="modSp">
           <pc:chgData name="Xin Zou" userId="260b9726081dae15" providerId="LiveId" clId="{C7191B37-39E9-464A-80F0-C31627521F9C}" dt="2018-10-08T05:41:00.801" v="2971"/>
@@ -1606,42 +833,6 @@
             <pc:sldMasterMk cId="0" sldId="2147483890"/>
             <pc:sldLayoutMk cId="0" sldId="2147483895"/>
           </pc:sldLayoutMkLst>
-          <pc:spChg chg="mod">
-            <ac:chgData name="Xin Zou" userId="260b9726081dae15" providerId="LiveId" clId="{C7191B37-39E9-464A-80F0-C31627521F9C}" dt="2018-10-08T05:41:00.801" v="2971"/>
-            <ac:spMkLst>
-              <pc:docMk/>
-              <pc:sldMasterMk cId="0" sldId="2147483890"/>
-              <pc:sldLayoutMk cId="0" sldId="2147483895"/>
-              <ac:spMk id="3" creationId="{00000000-0000-0000-0000-000000000000}"/>
-            </ac:spMkLst>
-          </pc:spChg>
-          <pc:spChg chg="mod">
-            <ac:chgData name="Xin Zou" userId="260b9726081dae15" providerId="LiveId" clId="{C7191B37-39E9-464A-80F0-C31627521F9C}" dt="2018-10-08T05:41:00.801" v="2971"/>
-            <ac:spMkLst>
-              <pc:docMk/>
-              <pc:sldMasterMk cId="0" sldId="2147483890"/>
-              <pc:sldLayoutMk cId="0" sldId="2147483895"/>
-              <ac:spMk id="4" creationId="{00000000-0000-0000-0000-000000000000}"/>
-            </ac:spMkLst>
-          </pc:spChg>
-          <pc:spChg chg="mod">
-            <ac:chgData name="Xin Zou" userId="260b9726081dae15" providerId="LiveId" clId="{C7191B37-39E9-464A-80F0-C31627521F9C}" dt="2018-10-08T05:41:00.801" v="2971"/>
-            <ac:spMkLst>
-              <pc:docMk/>
-              <pc:sldMasterMk cId="0" sldId="2147483890"/>
-              <pc:sldLayoutMk cId="0" sldId="2147483895"/>
-              <ac:spMk id="5" creationId="{00000000-0000-0000-0000-000000000000}"/>
-            </ac:spMkLst>
-          </pc:spChg>
-          <pc:spChg chg="mod">
-            <ac:chgData name="Xin Zou" userId="260b9726081dae15" providerId="LiveId" clId="{C7191B37-39E9-464A-80F0-C31627521F9C}" dt="2018-10-08T05:41:00.801" v="2971"/>
-            <ac:spMkLst>
-              <pc:docMk/>
-              <pc:sldMasterMk cId="0" sldId="2147483890"/>
-              <pc:sldLayoutMk cId="0" sldId="2147483895"/>
-              <ac:spMk id="6" creationId="{00000000-0000-0000-0000-000000000000}"/>
-            </ac:spMkLst>
-          </pc:spChg>
         </pc:sldLayoutChg>
         <pc:sldLayoutChg chg="modSp">
           <pc:chgData name="Xin Zou" userId="260b9726081dae15" providerId="LiveId" clId="{C7191B37-39E9-464A-80F0-C31627521F9C}" dt="2018-10-08T05:41:00.801" v="2971"/>
@@ -1650,51 +841,6 @@
             <pc:sldMasterMk cId="0" sldId="2147483890"/>
             <pc:sldLayoutMk cId="0" sldId="2147483898"/>
           </pc:sldLayoutMkLst>
-          <pc:spChg chg="mod">
-            <ac:chgData name="Xin Zou" userId="260b9726081dae15" providerId="LiveId" clId="{C7191B37-39E9-464A-80F0-C31627521F9C}" dt="2018-10-08T05:41:00.801" v="2971"/>
-            <ac:spMkLst>
-              <pc:docMk/>
-              <pc:sldMasterMk cId="0" sldId="2147483890"/>
-              <pc:sldLayoutMk cId="0" sldId="2147483898"/>
-              <ac:spMk id="2" creationId="{00000000-0000-0000-0000-000000000000}"/>
-            </ac:spMkLst>
-          </pc:spChg>
-          <pc:spChg chg="mod">
-            <ac:chgData name="Xin Zou" userId="260b9726081dae15" providerId="LiveId" clId="{C7191B37-39E9-464A-80F0-C31627521F9C}" dt="2018-10-08T05:41:00.801" v="2971"/>
-            <ac:spMkLst>
-              <pc:docMk/>
-              <pc:sldMasterMk cId="0" sldId="2147483890"/>
-              <pc:sldLayoutMk cId="0" sldId="2147483898"/>
-              <ac:spMk id="3" creationId="{00000000-0000-0000-0000-000000000000}"/>
-            </ac:spMkLst>
-          </pc:spChg>
-          <pc:spChg chg="mod">
-            <ac:chgData name="Xin Zou" userId="260b9726081dae15" providerId="LiveId" clId="{C7191B37-39E9-464A-80F0-C31627521F9C}" dt="2018-10-08T05:41:00.801" v="2971"/>
-            <ac:spMkLst>
-              <pc:docMk/>
-              <pc:sldMasterMk cId="0" sldId="2147483890"/>
-              <pc:sldLayoutMk cId="0" sldId="2147483898"/>
-              <ac:spMk id="4" creationId="{00000000-0000-0000-0000-000000000000}"/>
-            </ac:spMkLst>
-          </pc:spChg>
-          <pc:spChg chg="mod">
-            <ac:chgData name="Xin Zou" userId="260b9726081dae15" providerId="LiveId" clId="{C7191B37-39E9-464A-80F0-C31627521F9C}" dt="2018-10-08T05:41:00.801" v="2971"/>
-            <ac:spMkLst>
-              <pc:docMk/>
-              <pc:sldMasterMk cId="0" sldId="2147483890"/>
-              <pc:sldLayoutMk cId="0" sldId="2147483898"/>
-              <ac:spMk id="9" creationId="{00000000-0000-0000-0000-000000000000}"/>
-            </ac:spMkLst>
-          </pc:spChg>
-          <pc:spChg chg="mod">
-            <ac:chgData name="Xin Zou" userId="260b9726081dae15" providerId="LiveId" clId="{C7191B37-39E9-464A-80F0-C31627521F9C}" dt="2018-10-08T05:41:00.801" v="2971"/>
-            <ac:spMkLst>
-              <pc:docMk/>
-              <pc:sldMasterMk cId="0" sldId="2147483890"/>
-              <pc:sldLayoutMk cId="0" sldId="2147483898"/>
-              <ac:spMk id="12" creationId="{00000000-0000-0000-0000-000000000000}"/>
-            </ac:spMkLst>
-          </pc:spChg>
         </pc:sldLayoutChg>
         <pc:sldLayoutChg chg="modSp setBg">
           <pc:chgData name="Xin Zou" userId="260b9726081dae15" providerId="LiveId" clId="{C7191B37-39E9-464A-80F0-C31627521F9C}" dt="2018-10-08T05:41:00.801" v="2971"/>
@@ -1703,78 +849,6 @@
             <pc:sldMasterMk cId="0" sldId="2147483890"/>
             <pc:sldLayoutMk cId="0" sldId="2147483899"/>
           </pc:sldLayoutMkLst>
-          <pc:spChg chg="mod">
-            <ac:chgData name="Xin Zou" userId="260b9726081dae15" providerId="LiveId" clId="{C7191B37-39E9-464A-80F0-C31627521F9C}" dt="2018-10-08T05:41:00.801" v="2971"/>
-            <ac:spMkLst>
-              <pc:docMk/>
-              <pc:sldMasterMk cId="0" sldId="2147483890"/>
-              <pc:sldLayoutMk cId="0" sldId="2147483899"/>
-              <ac:spMk id="2" creationId="{00000000-0000-0000-0000-000000000000}"/>
-            </ac:spMkLst>
-          </pc:spChg>
-          <pc:spChg chg="mod">
-            <ac:chgData name="Xin Zou" userId="260b9726081dae15" providerId="LiveId" clId="{C7191B37-39E9-464A-80F0-C31627521F9C}" dt="2018-10-08T05:41:00.801" v="2971"/>
-            <ac:spMkLst>
-              <pc:docMk/>
-              <pc:sldMasterMk cId="0" sldId="2147483890"/>
-              <pc:sldLayoutMk cId="0" sldId="2147483899"/>
-              <ac:spMk id="3" creationId="{00000000-0000-0000-0000-000000000000}"/>
-            </ac:spMkLst>
-          </pc:spChg>
-          <pc:spChg chg="mod">
-            <ac:chgData name="Xin Zou" userId="260b9726081dae15" providerId="LiveId" clId="{C7191B37-39E9-464A-80F0-C31627521F9C}" dt="2018-10-08T05:41:00.801" v="2971"/>
-            <ac:spMkLst>
-              <pc:docMk/>
-              <pc:sldMasterMk cId="0" sldId="2147483890"/>
-              <pc:sldLayoutMk cId="0" sldId="2147483899"/>
-              <ac:spMk id="4" creationId="{00000000-0000-0000-0000-000000000000}"/>
-            </ac:spMkLst>
-          </pc:spChg>
-          <pc:spChg chg="mod">
-            <ac:chgData name="Xin Zou" userId="260b9726081dae15" providerId="LiveId" clId="{C7191B37-39E9-464A-80F0-C31627521F9C}" dt="2018-10-08T05:41:00.801" v="2971"/>
-            <ac:spMkLst>
-              <pc:docMk/>
-              <pc:sldMasterMk cId="0" sldId="2147483890"/>
-              <pc:sldLayoutMk cId="0" sldId="2147483899"/>
-              <ac:spMk id="5" creationId="{00000000-0000-0000-0000-000000000000}"/>
-            </ac:spMkLst>
-          </pc:spChg>
-          <pc:spChg chg="mod">
-            <ac:chgData name="Xin Zou" userId="260b9726081dae15" providerId="LiveId" clId="{C7191B37-39E9-464A-80F0-C31627521F9C}" dt="2018-10-08T05:41:00.801" v="2971"/>
-            <ac:spMkLst>
-              <pc:docMk/>
-              <pc:sldMasterMk cId="0" sldId="2147483890"/>
-              <pc:sldLayoutMk cId="0" sldId="2147483899"/>
-              <ac:spMk id="6" creationId="{00000000-0000-0000-0000-000000000000}"/>
-            </ac:spMkLst>
-          </pc:spChg>
-          <pc:spChg chg="mod">
-            <ac:chgData name="Xin Zou" userId="260b9726081dae15" providerId="LiveId" clId="{C7191B37-39E9-464A-80F0-C31627521F9C}" dt="2018-10-08T05:41:00.801" v="2971"/>
-            <ac:spMkLst>
-              <pc:docMk/>
-              <pc:sldMasterMk cId="0" sldId="2147483890"/>
-              <pc:sldLayoutMk cId="0" sldId="2147483899"/>
-              <ac:spMk id="7" creationId="{00000000-0000-0000-0000-000000000000}"/>
-            </ac:spMkLst>
-          </pc:spChg>
-          <pc:spChg chg="mod">
-            <ac:chgData name="Xin Zou" userId="260b9726081dae15" providerId="LiveId" clId="{C7191B37-39E9-464A-80F0-C31627521F9C}" dt="2018-10-08T05:41:00.801" v="2971"/>
-            <ac:spMkLst>
-              <pc:docMk/>
-              <pc:sldMasterMk cId="0" sldId="2147483890"/>
-              <pc:sldLayoutMk cId="0" sldId="2147483899"/>
-              <ac:spMk id="9" creationId="{00000000-0000-0000-0000-000000000000}"/>
-            </ac:spMkLst>
-          </pc:spChg>
-          <pc:spChg chg="mod">
-            <ac:chgData name="Xin Zou" userId="260b9726081dae15" providerId="LiveId" clId="{C7191B37-39E9-464A-80F0-C31627521F9C}" dt="2018-10-08T05:41:00.801" v="2971"/>
-            <ac:spMkLst>
-              <pc:docMk/>
-              <pc:sldMasterMk cId="0" sldId="2147483890"/>
-              <pc:sldLayoutMk cId="0" sldId="2147483899"/>
-              <ac:spMk id="11" creationId="{00000000-0000-0000-0000-000000000000}"/>
-            </ac:spMkLst>
-          </pc:spChg>
         </pc:sldLayoutChg>
         <pc:sldLayoutChg chg="modSp">
           <pc:chgData name="Xin Zou" userId="260b9726081dae15" providerId="LiveId" clId="{C7191B37-39E9-464A-80F0-C31627521F9C}" dt="2018-10-08T05:41:00.801" v="2971"/>
@@ -1783,51 +857,6 @@
             <pc:sldMasterMk cId="0" sldId="2147483890"/>
             <pc:sldLayoutMk cId="0" sldId="2147483901"/>
           </pc:sldLayoutMkLst>
-          <pc:spChg chg="mod">
-            <ac:chgData name="Xin Zou" userId="260b9726081dae15" providerId="LiveId" clId="{C7191B37-39E9-464A-80F0-C31627521F9C}" dt="2018-10-08T05:41:00.801" v="2971"/>
-            <ac:spMkLst>
-              <pc:docMk/>
-              <pc:sldMasterMk cId="0" sldId="2147483890"/>
-              <pc:sldLayoutMk cId="0" sldId="2147483901"/>
-              <ac:spMk id="2" creationId="{00000000-0000-0000-0000-000000000000}"/>
-            </ac:spMkLst>
-          </pc:spChg>
-          <pc:spChg chg="mod">
-            <ac:chgData name="Xin Zou" userId="260b9726081dae15" providerId="LiveId" clId="{C7191B37-39E9-464A-80F0-C31627521F9C}" dt="2018-10-08T05:41:00.801" v="2971"/>
-            <ac:spMkLst>
-              <pc:docMk/>
-              <pc:sldMasterMk cId="0" sldId="2147483890"/>
-              <pc:sldLayoutMk cId="0" sldId="2147483901"/>
-              <ac:spMk id="3" creationId="{00000000-0000-0000-0000-000000000000}"/>
-            </ac:spMkLst>
-          </pc:spChg>
-          <pc:spChg chg="mod">
-            <ac:chgData name="Xin Zou" userId="260b9726081dae15" providerId="LiveId" clId="{C7191B37-39E9-464A-80F0-C31627521F9C}" dt="2018-10-08T05:41:00.801" v="2971"/>
-            <ac:spMkLst>
-              <pc:docMk/>
-              <pc:sldMasterMk cId="0" sldId="2147483890"/>
-              <pc:sldLayoutMk cId="0" sldId="2147483901"/>
-              <ac:spMk id="5" creationId="{00000000-0000-0000-0000-000000000000}"/>
-            </ac:spMkLst>
-          </pc:spChg>
-          <pc:spChg chg="mod">
-            <ac:chgData name="Xin Zou" userId="260b9726081dae15" providerId="LiveId" clId="{C7191B37-39E9-464A-80F0-C31627521F9C}" dt="2018-10-08T05:41:00.801" v="2971"/>
-            <ac:spMkLst>
-              <pc:docMk/>
-              <pc:sldMasterMk cId="0" sldId="2147483890"/>
-              <pc:sldLayoutMk cId="0" sldId="2147483901"/>
-              <ac:spMk id="8" creationId="{00000000-0000-0000-0000-000000000000}"/>
-            </ac:spMkLst>
-          </pc:spChg>
-          <pc:spChg chg="mod">
-            <ac:chgData name="Xin Zou" userId="260b9726081dae15" providerId="LiveId" clId="{C7191B37-39E9-464A-80F0-C31627521F9C}" dt="2018-10-08T05:41:00.801" v="2971"/>
-            <ac:spMkLst>
-              <pc:docMk/>
-              <pc:sldMasterMk cId="0" sldId="2147483890"/>
-              <pc:sldLayoutMk cId="0" sldId="2147483901"/>
-              <ac:spMk id="9" creationId="{00000000-0000-0000-0000-000000000000}"/>
-            </ac:spMkLst>
-          </pc:spChg>
         </pc:sldLayoutChg>
       </pc:sldMasterChg>
     </pc:docChg>
@@ -1926,7 +955,7 @@
               <a:pPr>
                 <a:defRPr/>
               </a:pPr>
-              <a:t>9/12/2019</a:t>
+              <a:t>9/24/2025</a:t>
             </a:fld>
             <a:endParaRPr lang="en-US"/>
           </a:p>
@@ -2349,7 +1378,7 @@
       </p:grpSpPr>
       <p:sp>
         <p:nvSpPr>
-          <p:cNvPr id="36866" name="Slide Image Placeholder 1"/>
+          <p:cNvPr id="35842" name="Slide Image Placeholder 1"/>
           <p:cNvSpPr>
             <a:spLocks noGrp="1" noRot="1" noChangeAspect="1" noTextEdit="1"/>
           </p:cNvSpPr>
@@ -2384,7 +1413,7 @@
       </p:sp>
       <p:sp>
         <p:nvSpPr>
-          <p:cNvPr id="36867" name="Notes Placeholder 2"/>
+          <p:cNvPr id="35843" name="Notes Placeholder 2"/>
           <p:cNvSpPr>
             <a:spLocks noGrp="1"/>
           </p:cNvSpPr>
@@ -2422,13 +1451,41 @@
           </a:bodyPr>
           <a:lstStyle/>
           <a:p>
-            <a:endParaRPr lang="en-US"/>
-          </a:p>
-        </p:txBody>
-      </p:sp>
-      <p:sp>
-        <p:nvSpPr>
-          <p:cNvPr id="36868" name="Slide Number Placeholder 3"/>
+            <a:pPr marL="0" lvl="1" eaLnBrk="1" hangingPunct="1">
+              <a:spcBef>
+                <a:spcPct val="0"/>
+              </a:spcBef>
+            </a:pPr>
+            <a:r>
+              <a:rPr lang="zh-CN" altLang="en-US" sz="2200" dirty="0"/>
+              <a:t>成本很大</a:t>
+            </a:r>
+            <a:endParaRPr lang="en-US" altLang="zh-CN" sz="2200" dirty="0"/>
+          </a:p>
+          <a:p>
+            <a:pPr marL="0" lvl="1" eaLnBrk="1" hangingPunct="1">
+              <a:spcBef>
+                <a:spcPct val="0"/>
+              </a:spcBef>
+            </a:pPr>
+            <a:r>
+              <a:rPr lang="en-US" altLang="zh-CN" sz="2200" dirty="0"/>
+              <a:t>Quiz – housing &amp; 1Billion$</a:t>
+            </a:r>
+          </a:p>
+          <a:p>
+            <a:pPr eaLnBrk="1" hangingPunct="1">
+              <a:spcBef>
+                <a:spcPct val="0"/>
+              </a:spcBef>
+            </a:pPr>
+            <a:endParaRPr lang="en-US" dirty="0"/>
+          </a:p>
+        </p:txBody>
+      </p:sp>
+      <p:sp>
+        <p:nvSpPr>
+          <p:cNvPr id="35844" name="Slide Number Placeholder 3"/>
           <p:cNvSpPr>
             <a:spLocks noGrp="1"/>
           </p:cNvSpPr>
@@ -2563,10 +1620,10 @@
             </a:lvl9pPr>
           </a:lstStyle>
           <a:p>
-            <a:fld id="{3F4CE25E-E002-44E5-ACD7-66C89E0F12B2}" type="slidenum">
+            <a:fld id="{9FA30708-CCA8-4933-B01C-46738CEF215D}" type="slidenum">
               <a:rPr lang="en-US" smtClean="0"/>
               <a:pPr/>
-              <a:t>37</a:t>
+              <a:t>33</a:t>
             </a:fld>
             <a:endParaRPr lang="en-US"/>
           </a:p>
@@ -2575,7 +1632,7 @@
     </p:spTree>
     <p:extLst>
       <p:ext uri="{BB962C8B-B14F-4D97-AF65-F5344CB8AC3E}">
-        <p14:creationId xmlns:p14="http://schemas.microsoft.com/office/powerpoint/2010/main" val="3762966191"/>
+        <p14:creationId xmlns:p14="http://schemas.microsoft.com/office/powerpoint/2010/main" val="45289420"/>
       </p:ext>
     </p:extLst>
   </p:cSld>
@@ -2604,333 +1661,7 @@
       </p:grpSpPr>
       <p:sp>
         <p:nvSpPr>
-          <p:cNvPr id="2" name="Slide Image Placeholder 1"/>
-          <p:cNvSpPr>
-            <a:spLocks noGrp="1" noRot="1" noChangeAspect="1"/>
-          </p:cNvSpPr>
-          <p:nvPr>
-            <p:ph type="sldImg"/>
-          </p:nvPr>
-        </p:nvSpPr>
-        <p:spPr>
-          <a:xfrm>
-            <a:off x="381000" y="685800"/>
-            <a:ext cx="6096000" cy="3429000"/>
-          </a:xfrm>
-        </p:spPr>
-      </p:sp>
-      <p:sp>
-        <p:nvSpPr>
-          <p:cNvPr id="3" name="Notes Placeholder 2"/>
-          <p:cNvSpPr>
-            <a:spLocks noGrp="1"/>
-          </p:cNvSpPr>
-          <p:nvPr>
-            <p:ph type="body" idx="1"/>
-          </p:nvPr>
-        </p:nvSpPr>
-        <p:spPr/>
-        <p:txBody>
-          <a:bodyPr/>
-          <a:lstStyle/>
-          <a:p>
-            <a:endParaRPr lang="en-US" dirty="0"/>
-          </a:p>
-        </p:txBody>
-      </p:sp>
-      <p:sp>
-        <p:nvSpPr>
-          <p:cNvPr id="4" name="Slide Number Placeholder 3"/>
-          <p:cNvSpPr>
-            <a:spLocks noGrp="1"/>
-          </p:cNvSpPr>
-          <p:nvPr>
-            <p:ph type="sldNum" sz="quarter" idx="5"/>
-          </p:nvPr>
-        </p:nvSpPr>
-        <p:spPr/>
-        <p:txBody>
-          <a:bodyPr/>
-          <a:lstStyle/>
-          <a:p>
-            <a:pPr>
-              <a:defRPr/>
-            </a:pPr>
-            <a:fld id="{C5ADAB1E-5BE0-4555-8709-524C8D586A6B}" type="slidenum">
-              <a:rPr lang="en-US" smtClean="0"/>
-              <a:pPr>
-                <a:defRPr/>
-              </a:pPr>
-              <a:t>45</a:t>
-            </a:fld>
-            <a:endParaRPr lang="en-US"/>
-          </a:p>
-        </p:txBody>
-      </p:sp>
-    </p:spTree>
-    <p:extLst>
-      <p:ext uri="{BB962C8B-B14F-4D97-AF65-F5344CB8AC3E}">
-        <p14:creationId xmlns:p14="http://schemas.microsoft.com/office/powerpoint/2010/main" val="3572653862"/>
-      </p:ext>
-    </p:extLst>
-  </p:cSld>
-  <p:clrMapOvr>
-    <a:masterClrMapping/>
-  </p:clrMapOvr>
-</p:notes>
-</file>
-
-<file path=ppt/notesSlides/notesSlide12.xml><?xml version="1.0" encoding="utf-8"?>
-<p:notes xmlns:a="http://schemas.openxmlformats.org/drawingml/2006/main" xmlns:r="http://schemas.openxmlformats.org/officeDocument/2006/relationships" xmlns:p="http://schemas.openxmlformats.org/presentationml/2006/main">
-  <p:cSld>
-    <p:spTree>
-      <p:nvGrpSpPr>
-        <p:cNvPr id="1" name=""/>
-        <p:cNvGrpSpPr/>
-        <p:nvPr/>
-      </p:nvGrpSpPr>
-      <p:grpSpPr>
-        <a:xfrm>
-          <a:off x="0" y="0"/>
-          <a:ext cx="0" cy="0"/>
-          <a:chOff x="0" y="0"/>
-          <a:chExt cx="0" cy="0"/>
-        </a:xfrm>
-      </p:grpSpPr>
-      <p:sp>
-        <p:nvSpPr>
-          <p:cNvPr id="2" name="Slide Image Placeholder 1"/>
-          <p:cNvSpPr>
-            <a:spLocks noGrp="1" noRot="1" noChangeAspect="1"/>
-          </p:cNvSpPr>
-          <p:nvPr>
-            <p:ph type="sldImg"/>
-          </p:nvPr>
-        </p:nvSpPr>
-        <p:spPr>
-          <a:xfrm>
-            <a:off x="381000" y="685800"/>
-            <a:ext cx="6096000" cy="3429000"/>
-          </a:xfrm>
-        </p:spPr>
-      </p:sp>
-      <p:sp>
-        <p:nvSpPr>
-          <p:cNvPr id="3" name="Notes Placeholder 2"/>
-          <p:cNvSpPr>
-            <a:spLocks noGrp="1"/>
-          </p:cNvSpPr>
-          <p:nvPr>
-            <p:ph type="body" idx="1"/>
-          </p:nvPr>
-        </p:nvSpPr>
-        <p:spPr/>
-        <p:txBody>
-          <a:bodyPr/>
-          <a:lstStyle/>
-          <a:p>
-            <a:endParaRPr lang="en-US" dirty="0"/>
-          </a:p>
-        </p:txBody>
-      </p:sp>
-      <p:sp>
-        <p:nvSpPr>
-          <p:cNvPr id="4" name="Slide Number Placeholder 3"/>
-          <p:cNvSpPr>
-            <a:spLocks noGrp="1"/>
-          </p:cNvSpPr>
-          <p:nvPr>
-            <p:ph type="sldNum" sz="quarter" idx="5"/>
-          </p:nvPr>
-        </p:nvSpPr>
-        <p:spPr/>
-        <p:txBody>
-          <a:bodyPr/>
-          <a:lstStyle/>
-          <a:p>
-            <a:pPr>
-              <a:defRPr/>
-            </a:pPr>
-            <a:fld id="{C5ADAB1E-5BE0-4555-8709-524C8D586A6B}" type="slidenum">
-              <a:rPr lang="en-US" smtClean="0"/>
-              <a:pPr>
-                <a:defRPr/>
-              </a:pPr>
-              <a:t>51</a:t>
-            </a:fld>
-            <a:endParaRPr lang="en-US"/>
-          </a:p>
-        </p:txBody>
-      </p:sp>
-    </p:spTree>
-    <p:extLst>
-      <p:ext uri="{BB962C8B-B14F-4D97-AF65-F5344CB8AC3E}">
-        <p14:creationId xmlns:p14="http://schemas.microsoft.com/office/powerpoint/2010/main" val="122513713"/>
-      </p:ext>
-    </p:extLst>
-  </p:cSld>
-  <p:clrMapOvr>
-    <a:masterClrMapping/>
-  </p:clrMapOvr>
-</p:notes>
-</file>
-
-<file path=ppt/notesSlides/notesSlide13.xml><?xml version="1.0" encoding="utf-8"?>
-<p:notes xmlns:a="http://schemas.openxmlformats.org/drawingml/2006/main" xmlns:r="http://schemas.openxmlformats.org/officeDocument/2006/relationships" xmlns:p="http://schemas.openxmlformats.org/presentationml/2006/main">
-  <p:cSld>
-    <p:spTree>
-      <p:nvGrpSpPr>
-        <p:cNvPr id="1" name=""/>
-        <p:cNvGrpSpPr/>
-        <p:nvPr/>
-      </p:nvGrpSpPr>
-      <p:grpSpPr>
-        <a:xfrm>
-          <a:off x="0" y="0"/>
-          <a:ext cx="0" cy="0"/>
-          <a:chOff x="0" y="0"/>
-          <a:chExt cx="0" cy="0"/>
-        </a:xfrm>
-      </p:grpSpPr>
-      <p:sp>
-        <p:nvSpPr>
-          <p:cNvPr id="2" name="幻灯片图像占位符 1"/>
-          <p:cNvSpPr>
-            <a:spLocks noGrp="1" noRot="1" noChangeAspect="1"/>
-          </p:cNvSpPr>
-          <p:nvPr>
-            <p:ph type="sldImg"/>
-          </p:nvPr>
-        </p:nvSpPr>
-        <p:spPr>
-          <a:xfrm>
-            <a:off x="381000" y="685800"/>
-            <a:ext cx="6096000" cy="3429000"/>
-          </a:xfrm>
-        </p:spPr>
-      </p:sp>
-      <p:sp>
-        <p:nvSpPr>
-          <p:cNvPr id="3" name="备注占位符 2"/>
-          <p:cNvSpPr>
-            <a:spLocks noGrp="1"/>
-          </p:cNvSpPr>
-          <p:nvPr>
-            <p:ph type="body" idx="1"/>
-          </p:nvPr>
-        </p:nvSpPr>
-        <p:spPr/>
-        <p:txBody>
-          <a:bodyPr/>
-          <a:lstStyle/>
-          <a:p>
-            <a:r>
-              <a:rPr lang="zh-CN" altLang="en-US" dirty="0"/>
-              <a:t>那些塔吊，就是建筑工程的工具， </a:t>
-            </a:r>
-            <a:r>
-              <a:rPr lang="zh-CN" altLang="en-US"/>
-              <a:t>当产品交付时</a:t>
-            </a:r>
-            <a:r>
-              <a:rPr lang="zh-CN" altLang="en-US" dirty="0"/>
-              <a:t>，它们就消失了。 </a:t>
-            </a:r>
-            <a:endParaRPr lang="en-US" altLang="zh-CN" dirty="0"/>
-          </a:p>
-          <a:p>
-            <a:endParaRPr lang="en-US" dirty="0"/>
-          </a:p>
-          <a:p>
-            <a:r>
-              <a:rPr lang="zh-CN" altLang="en-US" dirty="0"/>
-              <a:t>提问：在软件的构建过程中， 有什么样的工具，像塔吊那样？ </a:t>
-            </a:r>
-            <a:endParaRPr lang="en-US" altLang="zh-CN" dirty="0"/>
-          </a:p>
-          <a:p>
-            <a:endParaRPr lang="en-US" dirty="0"/>
-          </a:p>
-          <a:p>
-            <a:r>
-              <a:rPr lang="zh-CN" altLang="en-US" dirty="0"/>
-              <a:t>塔吊也有一个设计，建造，安装，使用，拆卸的过程：</a:t>
-            </a:r>
-            <a:endParaRPr lang="en-US" dirty="0"/>
-          </a:p>
-          <a:p>
-            <a:r>
-              <a:rPr lang="en-US" dirty="0"/>
-              <a:t>	http://www.wuji8.com/meta/565085646.html</a:t>
-            </a:r>
-          </a:p>
-          <a:p>
-            <a:endParaRPr lang="en-US" dirty="0"/>
-          </a:p>
-        </p:txBody>
-      </p:sp>
-      <p:sp>
-        <p:nvSpPr>
-          <p:cNvPr id="4" name="灯片编号占位符 3"/>
-          <p:cNvSpPr>
-            <a:spLocks noGrp="1"/>
-          </p:cNvSpPr>
-          <p:nvPr>
-            <p:ph type="sldNum" sz="quarter" idx="10"/>
-          </p:nvPr>
-        </p:nvSpPr>
-        <p:spPr/>
-        <p:txBody>
-          <a:bodyPr/>
-          <a:lstStyle/>
-          <a:p>
-            <a:pPr>
-              <a:defRPr/>
-            </a:pPr>
-            <a:fld id="{C5ADAB1E-5BE0-4555-8709-524C8D586A6B}" type="slidenum">
-              <a:rPr lang="en-US" smtClean="0"/>
-              <a:pPr>
-                <a:defRPr/>
-              </a:pPr>
-              <a:t>54</a:t>
-            </a:fld>
-            <a:endParaRPr lang="en-US"/>
-          </a:p>
-        </p:txBody>
-      </p:sp>
-    </p:spTree>
-    <p:extLst>
-      <p:ext uri="{BB962C8B-B14F-4D97-AF65-F5344CB8AC3E}">
-        <p14:creationId xmlns:p14="http://schemas.microsoft.com/office/powerpoint/2010/main" val="277751624"/>
-      </p:ext>
-    </p:extLst>
-  </p:cSld>
-  <p:clrMapOvr>
-    <a:masterClrMapping/>
-  </p:clrMapOvr>
-</p:notes>
-</file>
-
-<file path=ppt/notesSlides/notesSlide2.xml><?xml version="1.0" encoding="utf-8"?>
-<p:notes xmlns:a="http://schemas.openxmlformats.org/drawingml/2006/main" xmlns:r="http://schemas.openxmlformats.org/officeDocument/2006/relationships" xmlns:p="http://schemas.openxmlformats.org/presentationml/2006/main">
-  <p:cSld>
-    <p:spTree>
-      <p:nvGrpSpPr>
-        <p:cNvPr id="1" name=""/>
-        <p:cNvGrpSpPr/>
-        <p:nvPr/>
-      </p:nvGrpSpPr>
-      <p:grpSpPr>
-        <a:xfrm>
-          <a:off x="0" y="0"/>
-          <a:ext cx="0" cy="0"/>
-          <a:chOff x="0" y="0"/>
-          <a:chExt cx="0" cy="0"/>
-        </a:xfrm>
-      </p:grpSpPr>
-      <p:sp>
-        <p:nvSpPr>
-          <p:cNvPr id="31746" name="Slide Image Placeholder 1"/>
+          <p:cNvPr id="36866" name="Slide Image Placeholder 1"/>
           <p:cNvSpPr>
             <a:spLocks noGrp="1" noRot="1" noChangeAspect="1" noTextEdit="1"/>
           </p:cNvSpPr>
@@ -2965,7 +1696,7 @@
       </p:sp>
       <p:sp>
         <p:nvSpPr>
-          <p:cNvPr id="3" name="Notes Placeholder 2"/>
+          <p:cNvPr id="36867" name="Notes Placeholder 2"/>
           <p:cNvSpPr>
             <a:spLocks noGrp="1"/>
           </p:cNvSpPr>
@@ -2973,276 +1704,43 @@
             <p:ph type="body" idx="1"/>
           </p:nvPr>
         </p:nvSpPr>
-        <p:spPr/>
-        <p:txBody>
-          <a:bodyPr>
-            <a:normAutofit fontScale="40000" lnSpcReduction="20000"/>
+        <p:spPr bwMode="auto">
+          <a:noFill/>
+          <a:extLst>
+            <a:ext uri="{909E8E84-426E-40DD-AFC4-6F175D3DCCD1}">
+              <a14:hiddenFill xmlns:a14="http://schemas.microsoft.com/office/drawing/2010/main">
+                <a:solidFill>
+                  <a:srgbClr val="FFFFFF"/>
+                </a:solidFill>
+              </a14:hiddenFill>
+            </a:ext>
+            <a:ext uri="{91240B29-F687-4F45-9708-019B960494DF}">
+              <a14:hiddenLine xmlns:a14="http://schemas.microsoft.com/office/drawing/2010/main" w="9525">
+                <a:solidFill>
+                  <a:srgbClr val="000000"/>
+                </a:solidFill>
+                <a:miter lim="800000"/>
+                <a:headEnd/>
+                <a:tailEnd/>
+              </a14:hiddenLine>
+            </a:ext>
+          </a:extLst>
+        </p:spPr>
+        <p:txBody>
+          <a:bodyPr wrap="square" numCol="1" anchor="t" anchorCtr="0" compatLnSpc="1">
+            <a:prstTxWarp prst="textNoShape">
+              <a:avLst/>
+            </a:prstTxWarp>
           </a:bodyPr>
           <a:lstStyle/>
           <a:p>
-            <a:pPr eaLnBrk="1" fontAlgn="auto" hangingPunct="1">
-              <a:spcBef>
-                <a:spcPts val="0"/>
-              </a:spcBef>
-              <a:spcAft>
-                <a:spcPts val="0"/>
-              </a:spcAft>
-              <a:defRPr/>
-            </a:pPr>
-            <a:r>
-              <a:rPr lang="en-US" dirty="0"/>
-              <a:t>BEND, Ore. (AP) - Last weekend, Bend gas station owner Kent Couch settled down in his lawn chair with some drinks and snacks - and a parachute.</a:t>
-            </a:r>
-            <a:br>
-              <a:rPr lang="en-US" dirty="0"/>
-            </a:br>
-            <a:br>
-              <a:rPr lang="en-US" dirty="0"/>
-            </a:br>
-            <a:r>
-              <a:rPr lang="en-US" dirty="0"/>
-              <a:t>Attached to the lawn chair were 105 balloons of various colors, each 4 feet around. Bundled together, the balloons rise three stories high.</a:t>
-            </a:r>
-            <a:br>
-              <a:rPr lang="en-US" dirty="0"/>
-            </a:br>
-            <a:br>
-              <a:rPr lang="en-US" dirty="0"/>
-            </a:br>
-            <a:r>
-              <a:rPr lang="en-US" dirty="0"/>
-              <a:t>Couch carried a global positioning system device, a two-way radio, a digital camcorder and a cell phone. He also had instruments to measure his altitude and speed and about four plastic bags holding five gallons of water each to act as a ballast - he could turn a spigot, release water and rise.</a:t>
-            </a:r>
-            <a:br>
-              <a:rPr lang="en-US" dirty="0"/>
-            </a:br>
-            <a:br>
-              <a:rPr lang="en-US" dirty="0"/>
-            </a:br>
-            <a:r>
-              <a:rPr lang="en-US" dirty="0"/>
-              <a:t>Destination: Idaho.</a:t>
-            </a:r>
-            <a:br>
-              <a:rPr lang="en-US" dirty="0"/>
-            </a:br>
-            <a:br>
-              <a:rPr lang="en-US" dirty="0"/>
-            </a:br>
-            <a:r>
-              <a:rPr lang="en-US" dirty="0"/>
-              <a:t>Nearly nine hours later, Couch was short of Idaho. But he was 193 miles from home, in a farmer's field near Union, having crossed much of Oregon at 11,000 feet and higher.</a:t>
-            </a:r>
-            <a:br>
-              <a:rPr lang="en-US" dirty="0"/>
-            </a:br>
-            <a:br>
-              <a:rPr lang="en-US" dirty="0"/>
-            </a:br>
-            <a:r>
-              <a:rPr lang="en-US" dirty="0"/>
-              <a:t>Couch, 47, is the latest American to emulate Larry Walters - who in 1982 rose three miles above Los Angeles in a lawn chair lifted by balloons.</a:t>
-            </a:r>
-            <a:br>
-              <a:rPr lang="en-US" dirty="0"/>
-            </a:br>
-            <a:br>
-              <a:rPr lang="en-US" dirty="0"/>
-            </a:br>
-            <a:r>
-              <a:rPr lang="en-US" dirty="0"/>
-              <a:t>Walters surprised an airline pilot, who radioed the control tower that he had just passed a guy in a lawn chair with a gun. The weapon was to shoot balloons and descend. Walters paid a $1,500 penalty for violating air traffic rules. Eleven years later, he committed suicide at age 44.</a:t>
-            </a:r>
-            <a:br>
-              <a:rPr lang="en-US" dirty="0"/>
-            </a:br>
-            <a:br>
-              <a:rPr lang="en-US" dirty="0"/>
-            </a:br>
-            <a:r>
-              <a:rPr lang="en-US" dirty="0"/>
-              <a:t>Why would Couch try such a flight?</a:t>
-            </a:r>
-            <a:br>
-              <a:rPr lang="en-US" dirty="0"/>
-            </a:br>
-            <a:br>
-              <a:rPr lang="en-US" dirty="0"/>
-            </a:br>
-            <a:r>
-              <a:rPr lang="en-US" dirty="0"/>
-              <a:t>"When you're a little kid and you're holding a helium balloon, it has to cross your mind," he told the Bend Bulletin.</a:t>
-            </a:r>
-            <a:br>
-              <a:rPr lang="en-US" dirty="0"/>
-            </a:br>
-            <a:br>
-              <a:rPr lang="en-US" dirty="0"/>
-            </a:br>
-            <a:r>
-              <a:rPr lang="en-US" dirty="0"/>
-              <a:t>"When you're laying in the grass on a summer day, and you see the clouds, you wish you could jump on them," he told the Bulletin. "This is as close as you can come to jumping on them. It's just like that."</a:t>
-            </a:r>
-            <a:br>
-              <a:rPr lang="en-US" dirty="0"/>
-            </a:br>
-            <a:br>
-              <a:rPr lang="en-US" dirty="0"/>
-            </a:br>
-            <a:r>
-              <a:rPr lang="en-US" dirty="0"/>
-              <a:t>It was Couch's second flight.</a:t>
-            </a:r>
-            <a:br>
-              <a:rPr lang="en-US" dirty="0"/>
-            </a:br>
-            <a:br>
-              <a:rPr lang="en-US" dirty="0"/>
-            </a:br>
-            <a:r>
-              <a:rPr lang="en-US" dirty="0"/>
-              <a:t>In September, he got to 15,000 feet on a six-hour trip. Like Walters, he used a BB gun to pop the balloons, but he went into a rapid descent. He jettisoned his goods, including food, drink and BB gun. Eventually, he parachuted to safety.</a:t>
-            </a:r>
-            <a:br>
-              <a:rPr lang="en-US" dirty="0"/>
-            </a:br>
-            <a:br>
-              <a:rPr lang="en-US" dirty="0"/>
-            </a:br>
-            <a:r>
-              <a:rPr lang="en-US" dirty="0"/>
-              <a:t>This time he was better prepared. The balloons had a new configuration, so it was easier to reach up and release a bit of helium instead of simply cutting off a balloon.</a:t>
-            </a:r>
-            <a:br>
-              <a:rPr lang="en-US" dirty="0"/>
-            </a:br>
-            <a:br>
-              <a:rPr lang="en-US" dirty="0"/>
-            </a:br>
-            <a:r>
-              <a:rPr lang="en-US" dirty="0"/>
-              <a:t>To fly, Couch dressed in shirt, sweater, jeans, work boots and sunglasses handed him at the last minute.</a:t>
-            </a:r>
-            <a:br>
-              <a:rPr lang="en-US" dirty="0"/>
-            </a:br>
-            <a:br>
-              <a:rPr lang="en-US" dirty="0"/>
-            </a:br>
-            <a:r>
-              <a:rPr lang="en-US" dirty="0"/>
-              <a:t>He took off at 6:06 a.m. Saturday after kissing his wife, Susan, goodbye and petting his Chihuahua, Isabella.</a:t>
-            </a:r>
-            <a:br>
-              <a:rPr lang="en-US" dirty="0"/>
-            </a:br>
-            <a:br>
-              <a:rPr lang="en-US" dirty="0"/>
-            </a:br>
-            <a:r>
-              <a:rPr lang="en-US" dirty="0"/>
-              <a:t>"See you in Idaho!" he said.</a:t>
-            </a:r>
-            <a:br>
-              <a:rPr lang="en-US" dirty="0"/>
-            </a:br>
-            <a:br>
-              <a:rPr lang="en-US" dirty="0"/>
-            </a:br>
-            <a:r>
-              <a:rPr lang="en-US" dirty="0"/>
-              <a:t>As he made about 25 miles an hour at altitudes of 11,000 feet to 13,000 feet, chase vehicles followed.</a:t>
-            </a:r>
-            <a:br>
-              <a:rPr lang="en-US" dirty="0"/>
-            </a:br>
-            <a:br>
-              <a:rPr lang="en-US" dirty="0"/>
-            </a:br>
-            <a:r>
-              <a:rPr lang="en-US" dirty="0"/>
-              <a:t>A three-car caravan filled with his friends, family and his dog followed Couch as he traveled from below.</a:t>
-            </a:r>
-            <a:br>
-              <a:rPr lang="en-US" dirty="0"/>
-            </a:br>
-            <a:br>
-              <a:rPr lang="en-US" dirty="0"/>
-            </a:br>
-            <a:r>
-              <a:rPr lang="en-US" dirty="0"/>
-              <a:t>Even at two miles high, Couch said, he could hear cattle lowing and children talking. He heard gunshots, which worried him. A black butterfly flew past. He passed through clouds. He said they were fluffy.</a:t>
-            </a:r>
-            <a:br>
-              <a:rPr lang="en-US" dirty="0"/>
-            </a:br>
-            <a:br>
-              <a:rPr lang="en-US" dirty="0"/>
-            </a:br>
-            <a:r>
-              <a:rPr lang="en-US" dirty="0"/>
-              <a:t>Couch stopped when he was down to a gallon of water and just eight pounds of ballast. Concerned about the rugged terrain outside La Grande, including Hells Canyon, Couch decided to come back to earth.</a:t>
-            </a:r>
-            <a:br>
-              <a:rPr lang="en-US" dirty="0"/>
-            </a:br>
-            <a:br>
-              <a:rPr lang="en-US" dirty="0"/>
-            </a:br>
-            <a:r>
-              <a:rPr lang="en-US" dirty="0"/>
-              <a:t>This time, he was able to pop enough balloons to set the craft down, although he suffered rope burns. But once he was down, he jumped out, and the wind grabbed his gear, chair and remaining balloons, sweeping all aloft.</a:t>
-            </a:r>
-            <a:br>
-              <a:rPr lang="en-US" dirty="0"/>
-            </a:br>
-            <a:br>
-              <a:rPr lang="en-US" dirty="0"/>
-            </a:br>
-            <a:r>
-              <a:rPr lang="en-US" dirty="0"/>
-              <a:t>Afterward, Couch said he's thought about ways to improve the trip, especially the landing, but whether he'll take a third trip is up to his wife.</a:t>
-            </a:r>
-            <a:br>
-              <a:rPr lang="en-US" dirty="0"/>
-            </a:br>
-            <a:br>
-              <a:rPr lang="en-US" dirty="0"/>
-            </a:br>
-            <a:r>
-              <a:rPr lang="en-US" dirty="0"/>
-              <a:t>"I'm not saying I won't do it again, but I told her I'd let her decide if I did it again," he said.</a:t>
-            </a:r>
-            <a:br>
-              <a:rPr lang="en-US" dirty="0"/>
-            </a:br>
-            <a:br>
-              <a:rPr lang="en-US" dirty="0"/>
-            </a:br>
-            <a:r>
-              <a:rPr lang="en-US" dirty="0"/>
-              <a:t>Susan Couch said she's thinking about saying no. But she said she was willing to go along with last weekend's trip.</a:t>
-            </a:r>
-            <a:br>
-              <a:rPr lang="en-US" dirty="0"/>
-            </a:br>
-            <a:br>
-              <a:rPr lang="en-US" dirty="0"/>
-            </a:br>
-            <a:r>
-              <a:rPr lang="en-US" dirty="0"/>
-              <a:t>"I know he'd be thinking about it more and more, it would always be on his mind." she said. "This way, at least he's fulfilled his dream."</a:t>
-            </a:r>
-            <a:br>
-              <a:rPr lang="en-US" dirty="0"/>
-            </a:br>
-            <a:endParaRPr lang="en-US" dirty="0"/>
-          </a:p>
-        </p:txBody>
-      </p:sp>
-      <p:sp>
-        <p:nvSpPr>
-          <p:cNvPr id="31748" name="Slide Number Placeholder 3"/>
+            <a:endParaRPr lang="en-US"/>
+          </a:p>
+        </p:txBody>
+      </p:sp>
+      <p:sp>
+        <p:nvSpPr>
+          <p:cNvPr id="36868" name="Slide Number Placeholder 3"/>
           <p:cNvSpPr>
             <a:spLocks noGrp="1"/>
           </p:cNvSpPr>
@@ -3377,10 +1875,10 @@
             </a:lvl9pPr>
           </a:lstStyle>
           <a:p>
-            <a:fld id="{2551ACDB-B434-4061-BA28-70898E2A9AA7}" type="slidenum">
+            <a:fld id="{3F4CE25E-E002-44E5-ACD7-66C89E0F12B2}" type="slidenum">
               <a:rPr lang="en-US" smtClean="0"/>
               <a:pPr/>
-              <a:t>4</a:t>
+              <a:t>38</a:t>
             </a:fld>
             <a:endParaRPr lang="en-US"/>
           </a:p>
@@ -3389,7 +1887,7 @@
     </p:spTree>
     <p:extLst>
       <p:ext uri="{BB962C8B-B14F-4D97-AF65-F5344CB8AC3E}">
-        <p14:creationId xmlns:p14="http://schemas.microsoft.com/office/powerpoint/2010/main" val="4250614303"/>
+        <p14:creationId xmlns:p14="http://schemas.microsoft.com/office/powerpoint/2010/main" val="3762966191"/>
       </p:ext>
     </p:extLst>
   </p:cSld>
@@ -3399,7 +1897,7 @@
 </p:notes>
 </file>
 
-<file path=ppt/notesSlides/notesSlide3.xml><?xml version="1.0" encoding="utf-8"?>
+<file path=ppt/notesSlides/notesSlide12.xml><?xml version="1.0" encoding="utf-8"?>
 <p:notes xmlns:a="http://schemas.openxmlformats.org/drawingml/2006/main" xmlns:r="http://schemas.openxmlformats.org/officeDocument/2006/relationships" xmlns:p="http://schemas.openxmlformats.org/presentationml/2006/main">
   <p:cSld>
     <p:spTree>
@@ -3418,7 +1916,333 @@
       </p:grpSpPr>
       <p:sp>
         <p:nvSpPr>
-          <p:cNvPr id="32770" name="Slide Image Placeholder 1"/>
+          <p:cNvPr id="2" name="Slide Image Placeholder 1"/>
+          <p:cNvSpPr>
+            <a:spLocks noGrp="1" noRot="1" noChangeAspect="1"/>
+          </p:cNvSpPr>
+          <p:nvPr>
+            <p:ph type="sldImg"/>
+          </p:nvPr>
+        </p:nvSpPr>
+        <p:spPr>
+          <a:xfrm>
+            <a:off x="381000" y="685800"/>
+            <a:ext cx="6096000" cy="3429000"/>
+          </a:xfrm>
+        </p:spPr>
+      </p:sp>
+      <p:sp>
+        <p:nvSpPr>
+          <p:cNvPr id="3" name="Notes Placeholder 2"/>
+          <p:cNvSpPr>
+            <a:spLocks noGrp="1"/>
+          </p:cNvSpPr>
+          <p:nvPr>
+            <p:ph type="body" idx="1"/>
+          </p:nvPr>
+        </p:nvSpPr>
+        <p:spPr/>
+        <p:txBody>
+          <a:bodyPr/>
+          <a:lstStyle/>
+          <a:p>
+            <a:endParaRPr lang="en-US" dirty="0"/>
+          </a:p>
+        </p:txBody>
+      </p:sp>
+      <p:sp>
+        <p:nvSpPr>
+          <p:cNvPr id="4" name="Slide Number Placeholder 3"/>
+          <p:cNvSpPr>
+            <a:spLocks noGrp="1"/>
+          </p:cNvSpPr>
+          <p:nvPr>
+            <p:ph type="sldNum" sz="quarter" idx="5"/>
+          </p:nvPr>
+        </p:nvSpPr>
+        <p:spPr/>
+        <p:txBody>
+          <a:bodyPr/>
+          <a:lstStyle/>
+          <a:p>
+            <a:pPr>
+              <a:defRPr/>
+            </a:pPr>
+            <a:fld id="{C5ADAB1E-5BE0-4555-8709-524C8D586A6B}" type="slidenum">
+              <a:rPr lang="en-US" smtClean="0"/>
+              <a:pPr>
+                <a:defRPr/>
+              </a:pPr>
+              <a:t>46</a:t>
+            </a:fld>
+            <a:endParaRPr lang="en-US"/>
+          </a:p>
+        </p:txBody>
+      </p:sp>
+    </p:spTree>
+    <p:extLst>
+      <p:ext uri="{BB962C8B-B14F-4D97-AF65-F5344CB8AC3E}">
+        <p14:creationId xmlns:p14="http://schemas.microsoft.com/office/powerpoint/2010/main" val="3572653862"/>
+      </p:ext>
+    </p:extLst>
+  </p:cSld>
+  <p:clrMapOvr>
+    <a:masterClrMapping/>
+  </p:clrMapOvr>
+</p:notes>
+</file>
+
+<file path=ppt/notesSlides/notesSlide13.xml><?xml version="1.0" encoding="utf-8"?>
+<p:notes xmlns:a="http://schemas.openxmlformats.org/drawingml/2006/main" xmlns:r="http://schemas.openxmlformats.org/officeDocument/2006/relationships" xmlns:p="http://schemas.openxmlformats.org/presentationml/2006/main">
+  <p:cSld>
+    <p:spTree>
+      <p:nvGrpSpPr>
+        <p:cNvPr id="1" name=""/>
+        <p:cNvGrpSpPr/>
+        <p:nvPr/>
+      </p:nvGrpSpPr>
+      <p:grpSpPr>
+        <a:xfrm>
+          <a:off x="0" y="0"/>
+          <a:ext cx="0" cy="0"/>
+          <a:chOff x="0" y="0"/>
+          <a:chExt cx="0" cy="0"/>
+        </a:xfrm>
+      </p:grpSpPr>
+      <p:sp>
+        <p:nvSpPr>
+          <p:cNvPr id="2" name="Slide Image Placeholder 1"/>
+          <p:cNvSpPr>
+            <a:spLocks noGrp="1" noRot="1" noChangeAspect="1"/>
+          </p:cNvSpPr>
+          <p:nvPr>
+            <p:ph type="sldImg"/>
+          </p:nvPr>
+        </p:nvSpPr>
+        <p:spPr>
+          <a:xfrm>
+            <a:off x="381000" y="685800"/>
+            <a:ext cx="6096000" cy="3429000"/>
+          </a:xfrm>
+        </p:spPr>
+      </p:sp>
+      <p:sp>
+        <p:nvSpPr>
+          <p:cNvPr id="3" name="Notes Placeholder 2"/>
+          <p:cNvSpPr>
+            <a:spLocks noGrp="1"/>
+          </p:cNvSpPr>
+          <p:nvPr>
+            <p:ph type="body" idx="1"/>
+          </p:nvPr>
+        </p:nvSpPr>
+        <p:spPr/>
+        <p:txBody>
+          <a:bodyPr/>
+          <a:lstStyle/>
+          <a:p>
+            <a:endParaRPr lang="en-US" dirty="0"/>
+          </a:p>
+        </p:txBody>
+      </p:sp>
+      <p:sp>
+        <p:nvSpPr>
+          <p:cNvPr id="4" name="Slide Number Placeholder 3"/>
+          <p:cNvSpPr>
+            <a:spLocks noGrp="1"/>
+          </p:cNvSpPr>
+          <p:nvPr>
+            <p:ph type="sldNum" sz="quarter" idx="5"/>
+          </p:nvPr>
+        </p:nvSpPr>
+        <p:spPr/>
+        <p:txBody>
+          <a:bodyPr/>
+          <a:lstStyle/>
+          <a:p>
+            <a:pPr>
+              <a:defRPr/>
+            </a:pPr>
+            <a:fld id="{C5ADAB1E-5BE0-4555-8709-524C8D586A6B}" type="slidenum">
+              <a:rPr lang="en-US" smtClean="0"/>
+              <a:pPr>
+                <a:defRPr/>
+              </a:pPr>
+              <a:t>52</a:t>
+            </a:fld>
+            <a:endParaRPr lang="en-US"/>
+          </a:p>
+        </p:txBody>
+      </p:sp>
+    </p:spTree>
+    <p:extLst>
+      <p:ext uri="{BB962C8B-B14F-4D97-AF65-F5344CB8AC3E}">
+        <p14:creationId xmlns:p14="http://schemas.microsoft.com/office/powerpoint/2010/main" val="122513713"/>
+      </p:ext>
+    </p:extLst>
+  </p:cSld>
+  <p:clrMapOvr>
+    <a:masterClrMapping/>
+  </p:clrMapOvr>
+</p:notes>
+</file>
+
+<file path=ppt/notesSlides/notesSlide14.xml><?xml version="1.0" encoding="utf-8"?>
+<p:notes xmlns:a="http://schemas.openxmlformats.org/drawingml/2006/main" xmlns:r="http://schemas.openxmlformats.org/officeDocument/2006/relationships" xmlns:p="http://schemas.openxmlformats.org/presentationml/2006/main">
+  <p:cSld>
+    <p:spTree>
+      <p:nvGrpSpPr>
+        <p:cNvPr id="1" name=""/>
+        <p:cNvGrpSpPr/>
+        <p:nvPr/>
+      </p:nvGrpSpPr>
+      <p:grpSpPr>
+        <a:xfrm>
+          <a:off x="0" y="0"/>
+          <a:ext cx="0" cy="0"/>
+          <a:chOff x="0" y="0"/>
+          <a:chExt cx="0" cy="0"/>
+        </a:xfrm>
+      </p:grpSpPr>
+      <p:sp>
+        <p:nvSpPr>
+          <p:cNvPr id="2" name="幻灯片图像占位符 1"/>
+          <p:cNvSpPr>
+            <a:spLocks noGrp="1" noRot="1" noChangeAspect="1"/>
+          </p:cNvSpPr>
+          <p:nvPr>
+            <p:ph type="sldImg"/>
+          </p:nvPr>
+        </p:nvSpPr>
+        <p:spPr>
+          <a:xfrm>
+            <a:off x="381000" y="685800"/>
+            <a:ext cx="6096000" cy="3429000"/>
+          </a:xfrm>
+        </p:spPr>
+      </p:sp>
+      <p:sp>
+        <p:nvSpPr>
+          <p:cNvPr id="3" name="备注占位符 2"/>
+          <p:cNvSpPr>
+            <a:spLocks noGrp="1"/>
+          </p:cNvSpPr>
+          <p:nvPr>
+            <p:ph type="body" idx="1"/>
+          </p:nvPr>
+        </p:nvSpPr>
+        <p:spPr/>
+        <p:txBody>
+          <a:bodyPr/>
+          <a:lstStyle/>
+          <a:p>
+            <a:r>
+              <a:rPr lang="zh-CN" altLang="en-US" dirty="0"/>
+              <a:t>那些塔吊，就是建筑工程的工具， </a:t>
+            </a:r>
+            <a:r>
+              <a:rPr lang="zh-CN" altLang="en-US"/>
+              <a:t>当产品交付时</a:t>
+            </a:r>
+            <a:r>
+              <a:rPr lang="zh-CN" altLang="en-US" dirty="0"/>
+              <a:t>，它们就消失了。 </a:t>
+            </a:r>
+            <a:endParaRPr lang="en-US" altLang="zh-CN" dirty="0"/>
+          </a:p>
+          <a:p>
+            <a:endParaRPr lang="en-US" dirty="0"/>
+          </a:p>
+          <a:p>
+            <a:r>
+              <a:rPr lang="zh-CN" altLang="en-US" dirty="0"/>
+              <a:t>提问：在软件的构建过程中， 有什么样的工具，像塔吊那样？ </a:t>
+            </a:r>
+            <a:endParaRPr lang="en-US" altLang="zh-CN" dirty="0"/>
+          </a:p>
+          <a:p>
+            <a:endParaRPr lang="en-US" dirty="0"/>
+          </a:p>
+          <a:p>
+            <a:r>
+              <a:rPr lang="zh-CN" altLang="en-US" dirty="0"/>
+              <a:t>塔吊也有一个设计，建造，安装，使用，拆卸的过程：</a:t>
+            </a:r>
+            <a:endParaRPr lang="en-US" dirty="0"/>
+          </a:p>
+          <a:p>
+            <a:r>
+              <a:rPr lang="en-US" dirty="0"/>
+              <a:t>	http://www.wuji8.com/meta/565085646.html</a:t>
+            </a:r>
+          </a:p>
+          <a:p>
+            <a:endParaRPr lang="en-US" dirty="0"/>
+          </a:p>
+        </p:txBody>
+      </p:sp>
+      <p:sp>
+        <p:nvSpPr>
+          <p:cNvPr id="4" name="灯片编号占位符 3"/>
+          <p:cNvSpPr>
+            <a:spLocks noGrp="1"/>
+          </p:cNvSpPr>
+          <p:nvPr>
+            <p:ph type="sldNum" sz="quarter" idx="10"/>
+          </p:nvPr>
+        </p:nvSpPr>
+        <p:spPr/>
+        <p:txBody>
+          <a:bodyPr/>
+          <a:lstStyle/>
+          <a:p>
+            <a:pPr>
+              <a:defRPr/>
+            </a:pPr>
+            <a:fld id="{C5ADAB1E-5BE0-4555-8709-524C8D586A6B}" type="slidenum">
+              <a:rPr lang="en-US" smtClean="0"/>
+              <a:pPr>
+                <a:defRPr/>
+              </a:pPr>
+              <a:t>55</a:t>
+            </a:fld>
+            <a:endParaRPr lang="en-US"/>
+          </a:p>
+        </p:txBody>
+      </p:sp>
+    </p:spTree>
+    <p:extLst>
+      <p:ext uri="{BB962C8B-B14F-4D97-AF65-F5344CB8AC3E}">
+        <p14:creationId xmlns:p14="http://schemas.microsoft.com/office/powerpoint/2010/main" val="277751624"/>
+      </p:ext>
+    </p:extLst>
+  </p:cSld>
+  <p:clrMapOvr>
+    <a:masterClrMapping/>
+  </p:clrMapOvr>
+</p:notes>
+</file>
+
+<file path=ppt/notesSlides/notesSlide2.xml><?xml version="1.0" encoding="utf-8"?>
+<p:notes xmlns:a="http://schemas.openxmlformats.org/drawingml/2006/main" xmlns:r="http://schemas.openxmlformats.org/officeDocument/2006/relationships" xmlns:p="http://schemas.openxmlformats.org/presentationml/2006/main">
+  <p:cSld>
+    <p:spTree>
+      <p:nvGrpSpPr>
+        <p:cNvPr id="1" name=""/>
+        <p:cNvGrpSpPr/>
+        <p:nvPr/>
+      </p:nvGrpSpPr>
+      <p:grpSpPr>
+        <a:xfrm>
+          <a:off x="0" y="0"/>
+          <a:ext cx="0" cy="0"/>
+          <a:chOff x="0" y="0"/>
+          <a:chExt cx="0" cy="0"/>
+        </a:xfrm>
+      </p:grpSpPr>
+      <p:sp>
+        <p:nvSpPr>
+          <p:cNvPr id="31746" name="Slide Image Placeholder 1"/>
           <p:cNvSpPr>
             <a:spLocks noGrp="1" noRot="1" noChangeAspect="1" noTextEdit="1"/>
           </p:cNvSpPr>
@@ -3453,7 +2277,7 @@
       </p:sp>
       <p:sp>
         <p:nvSpPr>
-          <p:cNvPr id="32771" name="Notes Placeholder 2"/>
+          <p:cNvPr id="3" name="Notes Placeholder 2"/>
           <p:cNvSpPr>
             <a:spLocks noGrp="1"/>
           </p:cNvSpPr>
@@ -3461,234 +2285,276 @@
             <p:ph type="body" idx="1"/>
           </p:nvPr>
         </p:nvSpPr>
-        <p:spPr bwMode="auto">
-          <a:noFill/>
-          <a:extLst>
-            <a:ext uri="{909E8E84-426E-40DD-AFC4-6F175D3DCCD1}">
-              <a14:hiddenFill xmlns:a14="http://schemas.microsoft.com/office/drawing/2010/main">
-                <a:solidFill>
-                  <a:srgbClr val="FFFFFF"/>
-                </a:solidFill>
-              </a14:hiddenFill>
-            </a:ext>
-            <a:ext uri="{91240B29-F687-4F45-9708-019B960494DF}">
-              <a14:hiddenLine xmlns:a14="http://schemas.microsoft.com/office/drawing/2010/main" w="9525">
-                <a:solidFill>
-                  <a:srgbClr val="000000"/>
-                </a:solidFill>
-                <a:miter lim="800000"/>
-                <a:headEnd/>
-                <a:tailEnd/>
-              </a14:hiddenLine>
-            </a:ext>
-          </a:extLst>
-        </p:spPr>
-        <p:txBody>
-          <a:bodyPr wrap="square" numCol="1" anchor="t" anchorCtr="0" compatLnSpc="1">
-            <a:prstTxWarp prst="textNoShape">
-              <a:avLst/>
-            </a:prstTxWarp>
+        <p:spPr/>
+        <p:txBody>
+          <a:bodyPr>
+            <a:normAutofit fontScale="40000" lnSpcReduction="20000"/>
           </a:bodyPr>
           <a:lstStyle/>
           <a:p>
-            <a:r>
-              <a:rPr lang="en-US"/>
-              <a:t>The term </a:t>
-            </a:r>
-            <a:r>
-              <a:rPr lang="en-US" i="1"/>
-              <a:t>software engineering</a:t>
-            </a:r>
-            <a:r>
-              <a:rPr lang="en-US"/>
-              <a:t> was coined by </a:t>
-            </a:r>
-            <a:r>
-              <a:rPr lang="en-US">
-                <a:hlinkClick r:id="rId3" action="ppaction://hlinkfile" tooltip="Brian Randell"/>
-              </a:rPr>
-              <a:t>Brian Randell</a:t>
-            </a:r>
-            <a:r>
-              <a:rPr lang="en-US"/>
-              <a:t> and popularized by </a:t>
-            </a:r>
-            <a:r>
-              <a:rPr lang="en-US">
-                <a:hlinkClick r:id="rId4" action="ppaction://hlinkfile" tooltip="F.L. Bauer"/>
-              </a:rPr>
-              <a:t>F.L. Bauer</a:t>
-            </a:r>
-            <a:r>
-              <a:rPr lang="en-US"/>
-              <a:t> during the NATO Software Engineering Conference in 1968.</a:t>
-            </a:r>
-            <a:r>
-              <a:rPr lang="en-US" baseline="30000">
-                <a:hlinkClick r:id="rId5" action="ppaction://hlinkfile"/>
-              </a:rPr>
-              <a:t>[4]</a:t>
-            </a:r>
-            <a:r>
-              <a:rPr lang="en-US"/>
-              <a:t> The discipline of software engineering includes knowledge, tools, and methods for </a:t>
-            </a:r>
-            <a:r>
-              <a:rPr lang="en-US">
-                <a:hlinkClick r:id="rId6" action="ppaction://hlinkfile" tooltip="Requirements analysis"/>
-              </a:rPr>
-              <a:t>software requirements</a:t>
-            </a:r>
-            <a:r>
-              <a:rPr lang="en-US"/>
-              <a:t>, </a:t>
-            </a:r>
-            <a:r>
-              <a:rPr lang="en-US">
-                <a:hlinkClick r:id="rId7" action="ppaction://hlinkfile" tooltip="Software design"/>
-              </a:rPr>
-              <a:t>software design</a:t>
-            </a:r>
-            <a:r>
-              <a:rPr lang="en-US"/>
-              <a:t>, </a:t>
-            </a:r>
-            <a:r>
-              <a:rPr lang="en-US">
-                <a:hlinkClick r:id="rId8" action="ppaction://hlinkfile" tooltip="Computer programming"/>
-              </a:rPr>
-              <a:t>software construction</a:t>
-            </a:r>
-            <a:r>
-              <a:rPr lang="en-US"/>
-              <a:t>, </a:t>
-            </a:r>
-            <a:r>
-              <a:rPr lang="en-US">
-                <a:hlinkClick r:id="rId9" action="ppaction://hlinkfile" tooltip="Software testing"/>
-              </a:rPr>
-              <a:t>software testing</a:t>
-            </a:r>
-            <a:r>
-              <a:rPr lang="en-US"/>
-              <a:t>, and </a:t>
-            </a:r>
-            <a:r>
-              <a:rPr lang="en-US">
-                <a:hlinkClick r:id="rId10" action="ppaction://hlinkfile" tooltip="Software maintenance"/>
-              </a:rPr>
-              <a:t>software maintenance</a:t>
-            </a:r>
-            <a:r>
-              <a:rPr lang="en-US"/>
-              <a:t> tasks.</a:t>
-            </a:r>
-            <a:r>
-              <a:rPr lang="en-US" baseline="30000">
-                <a:hlinkClick r:id="rId11" action="ppaction://hlinkfile"/>
-              </a:rPr>
-              <a:t>[5]</a:t>
-            </a:r>
-            <a:r>
-              <a:rPr lang="en-US"/>
-              <a:t> Software engineering is related to the disciplines of </a:t>
-            </a:r>
-            <a:r>
-              <a:rPr lang="en-US">
-                <a:hlinkClick r:id="rId12" action="ppaction://hlinkfile" tooltip="Computer science"/>
-              </a:rPr>
-              <a:t>computer science</a:t>
-            </a:r>
-            <a:r>
-              <a:rPr lang="en-US"/>
-              <a:t>, </a:t>
-            </a:r>
-            <a:r>
-              <a:rPr lang="en-US">
-                <a:hlinkClick r:id="rId13" action="ppaction://hlinkfile" tooltip="Computer engineering"/>
-              </a:rPr>
-              <a:t>computer engineering</a:t>
-            </a:r>
-            <a:r>
-              <a:rPr lang="en-US"/>
-              <a:t>, </a:t>
-            </a:r>
-            <a:r>
-              <a:rPr lang="en-US">
-                <a:hlinkClick r:id="rId14" action="ppaction://hlinkfile" tooltip="Management"/>
-              </a:rPr>
-              <a:t>management</a:t>
-            </a:r>
-            <a:r>
-              <a:rPr lang="en-US"/>
-              <a:t>, </a:t>
-            </a:r>
-            <a:r>
-              <a:rPr lang="en-US">
-                <a:hlinkClick r:id="rId15" action="ppaction://hlinkfile" tooltip="Mathematics"/>
-              </a:rPr>
-              <a:t>mathematics</a:t>
-            </a:r>
-            <a:r>
-              <a:rPr lang="en-US"/>
-              <a:t>, </a:t>
-            </a:r>
-            <a:r>
-              <a:rPr lang="en-US">
-                <a:hlinkClick r:id="rId16" action="ppaction://hlinkfile" tooltip="Project management"/>
-              </a:rPr>
-              <a:t>project management</a:t>
-            </a:r>
-            <a:r>
-              <a:rPr lang="en-US"/>
-              <a:t>, </a:t>
-            </a:r>
-            <a:r>
-              <a:rPr lang="en-US">
-                <a:hlinkClick r:id="rId17" action="ppaction://hlinkfile" tooltip="Quality management"/>
-              </a:rPr>
-              <a:t>quality management</a:t>
-            </a:r>
-            <a:r>
-              <a:rPr lang="en-US"/>
-              <a:t>, software </a:t>
-            </a:r>
-            <a:r>
-              <a:rPr lang="en-US">
-                <a:hlinkClick r:id="rId18" action="ppaction://hlinkfile" tooltip="Ergonomics"/>
-              </a:rPr>
-              <a:t>ergonomics</a:t>
-            </a:r>
-            <a:r>
-              <a:rPr lang="en-US"/>
-              <a:t>, and </a:t>
-            </a:r>
-            <a:r>
-              <a:rPr lang="en-US">
-                <a:hlinkClick r:id="rId19" action="ppaction://hlinkfile" tooltip="Systems engineering"/>
-              </a:rPr>
-              <a:t>systems engineering</a:t>
-            </a:r>
-            <a:r>
-              <a:rPr lang="en-US"/>
-              <a:t>.</a:t>
-            </a:r>
-            <a:r>
-              <a:rPr lang="en-US" baseline="30000">
-                <a:hlinkClick r:id="rId20" action="ppaction://hlinkfile"/>
-              </a:rPr>
-              <a:t>[6]</a:t>
-            </a:r>
-            <a:endParaRPr lang="en-US"/>
-          </a:p>
-          <a:p>
-            <a:endParaRPr lang="en-US"/>
-          </a:p>
-        </p:txBody>
-      </p:sp>
-      <p:sp>
-        <p:nvSpPr>
-          <p:cNvPr id="32772" name="Slide Number Placeholder 3"/>
+            <a:pPr eaLnBrk="1" fontAlgn="auto" hangingPunct="1">
+              <a:spcBef>
+                <a:spcPts val="0"/>
+              </a:spcBef>
+              <a:spcAft>
+                <a:spcPts val="0"/>
+              </a:spcAft>
+              <a:defRPr/>
+            </a:pPr>
+            <a:r>
+              <a:rPr lang="en-US" dirty="0"/>
+              <a:t>BEND, Ore. (AP) - Last weekend, Bend gas station owner Kent Couch settled down in his lawn chair with some drinks and snacks - and a parachute.</a:t>
+            </a:r>
+            <a:br>
+              <a:rPr lang="en-US" dirty="0"/>
+            </a:br>
+            <a:br>
+              <a:rPr lang="en-US" dirty="0"/>
+            </a:br>
+            <a:r>
+              <a:rPr lang="en-US" dirty="0"/>
+              <a:t>Attached to the lawn chair were 105 balloons of various colors, each 4 feet around. Bundled together, the balloons rise three stories high.</a:t>
+            </a:r>
+            <a:br>
+              <a:rPr lang="en-US" dirty="0"/>
+            </a:br>
+            <a:br>
+              <a:rPr lang="en-US" dirty="0"/>
+            </a:br>
+            <a:r>
+              <a:rPr lang="en-US" dirty="0"/>
+              <a:t>Couch carried a global positioning system device, a two-way radio, a digital camcorder and a cell phone. He also had instruments to measure his altitude and speed and about four plastic bags holding five gallons of water each to act as a ballast - he could turn a spigot, release water and rise.</a:t>
+            </a:r>
+            <a:br>
+              <a:rPr lang="en-US" dirty="0"/>
+            </a:br>
+            <a:br>
+              <a:rPr lang="en-US" dirty="0"/>
+            </a:br>
+            <a:r>
+              <a:rPr lang="en-US" dirty="0"/>
+              <a:t>Destination: Idaho.</a:t>
+            </a:r>
+            <a:br>
+              <a:rPr lang="en-US" dirty="0"/>
+            </a:br>
+            <a:br>
+              <a:rPr lang="en-US" dirty="0"/>
+            </a:br>
+            <a:r>
+              <a:rPr lang="en-US" dirty="0"/>
+              <a:t>Nearly nine hours later, Couch was short of Idaho. But he was 193 miles from home, in a farmer's field near Union, having crossed much of Oregon at 11,000 feet and higher.</a:t>
+            </a:r>
+            <a:br>
+              <a:rPr lang="en-US" dirty="0"/>
+            </a:br>
+            <a:br>
+              <a:rPr lang="en-US" dirty="0"/>
+            </a:br>
+            <a:r>
+              <a:rPr lang="en-US" dirty="0"/>
+              <a:t>Couch, 47, is the latest American to emulate Larry Walters - who in 1982 rose three miles above Los Angeles in a lawn chair lifted by balloons.</a:t>
+            </a:r>
+            <a:br>
+              <a:rPr lang="en-US" dirty="0"/>
+            </a:br>
+            <a:br>
+              <a:rPr lang="en-US" dirty="0"/>
+            </a:br>
+            <a:r>
+              <a:rPr lang="en-US" dirty="0"/>
+              <a:t>Walters surprised an airline pilot, who radioed the control tower that he had just passed a guy in a lawn chair with a gun. The weapon was to shoot balloons and descend. Walters paid a $1,500 penalty for violating air traffic rules. Eleven years later, he committed suicide at age 44.</a:t>
+            </a:r>
+            <a:br>
+              <a:rPr lang="en-US" dirty="0"/>
+            </a:br>
+            <a:br>
+              <a:rPr lang="en-US" dirty="0"/>
+            </a:br>
+            <a:r>
+              <a:rPr lang="en-US" dirty="0"/>
+              <a:t>Why would Couch try such a flight?</a:t>
+            </a:r>
+            <a:br>
+              <a:rPr lang="en-US" dirty="0"/>
+            </a:br>
+            <a:br>
+              <a:rPr lang="en-US" dirty="0"/>
+            </a:br>
+            <a:r>
+              <a:rPr lang="en-US" dirty="0"/>
+              <a:t>"When you're a little kid and you're holding a helium balloon, it has to cross your mind," he told the Bend Bulletin.</a:t>
+            </a:r>
+            <a:br>
+              <a:rPr lang="en-US" dirty="0"/>
+            </a:br>
+            <a:br>
+              <a:rPr lang="en-US" dirty="0"/>
+            </a:br>
+            <a:r>
+              <a:rPr lang="en-US" dirty="0"/>
+              <a:t>"When you're laying in the grass on a summer day, and you see the clouds, you wish you could jump on them," he told the Bulletin. "This is as close as you can come to jumping on them. It's just like that."</a:t>
+            </a:r>
+            <a:br>
+              <a:rPr lang="en-US" dirty="0"/>
+            </a:br>
+            <a:br>
+              <a:rPr lang="en-US" dirty="0"/>
+            </a:br>
+            <a:r>
+              <a:rPr lang="en-US" dirty="0"/>
+              <a:t>It was Couch's second flight.</a:t>
+            </a:r>
+            <a:br>
+              <a:rPr lang="en-US" dirty="0"/>
+            </a:br>
+            <a:br>
+              <a:rPr lang="en-US" dirty="0"/>
+            </a:br>
+            <a:r>
+              <a:rPr lang="en-US" dirty="0"/>
+              <a:t>In September, he got to 15,000 feet on a six-hour trip. Like Walters, he used a BB gun to pop the balloons, but he went into a rapid descent. He jettisoned his goods, including food, drink and BB gun. Eventually, he parachuted to safety.</a:t>
+            </a:r>
+            <a:br>
+              <a:rPr lang="en-US" dirty="0"/>
+            </a:br>
+            <a:br>
+              <a:rPr lang="en-US" dirty="0"/>
+            </a:br>
+            <a:r>
+              <a:rPr lang="en-US" dirty="0"/>
+              <a:t>This time he was better prepared. The balloons had a new configuration, so it was easier to reach up and release a bit of helium instead of simply cutting off a balloon.</a:t>
+            </a:r>
+            <a:br>
+              <a:rPr lang="en-US" dirty="0"/>
+            </a:br>
+            <a:br>
+              <a:rPr lang="en-US" dirty="0"/>
+            </a:br>
+            <a:r>
+              <a:rPr lang="en-US" dirty="0"/>
+              <a:t>To fly, Couch dressed in shirt, sweater, jeans, work boots and sunglasses handed him at the last minute.</a:t>
+            </a:r>
+            <a:br>
+              <a:rPr lang="en-US" dirty="0"/>
+            </a:br>
+            <a:br>
+              <a:rPr lang="en-US" dirty="0"/>
+            </a:br>
+            <a:r>
+              <a:rPr lang="en-US" dirty="0"/>
+              <a:t>He took off at 6:06 a.m. Saturday after kissing his wife, Susan, goodbye and petting his Chihuahua, Isabella.</a:t>
+            </a:r>
+            <a:br>
+              <a:rPr lang="en-US" dirty="0"/>
+            </a:br>
+            <a:br>
+              <a:rPr lang="en-US" dirty="0"/>
+            </a:br>
+            <a:r>
+              <a:rPr lang="en-US" dirty="0"/>
+              <a:t>"See you in Idaho!" he said.</a:t>
+            </a:r>
+            <a:br>
+              <a:rPr lang="en-US" dirty="0"/>
+            </a:br>
+            <a:br>
+              <a:rPr lang="en-US" dirty="0"/>
+            </a:br>
+            <a:r>
+              <a:rPr lang="en-US" dirty="0"/>
+              <a:t>As he made about 25 miles an hour at altitudes of 11,000 feet to 13,000 feet, chase vehicles followed.</a:t>
+            </a:r>
+            <a:br>
+              <a:rPr lang="en-US" dirty="0"/>
+            </a:br>
+            <a:br>
+              <a:rPr lang="en-US" dirty="0"/>
+            </a:br>
+            <a:r>
+              <a:rPr lang="en-US" dirty="0"/>
+              <a:t>A three-car caravan filled with his friends, family and his dog followed Couch as he traveled from below.</a:t>
+            </a:r>
+            <a:br>
+              <a:rPr lang="en-US" dirty="0"/>
+            </a:br>
+            <a:br>
+              <a:rPr lang="en-US" dirty="0"/>
+            </a:br>
+            <a:r>
+              <a:rPr lang="en-US" dirty="0"/>
+              <a:t>Even at two miles high, Couch said, he could hear cattle lowing and children talking. He heard gunshots, which worried him. A black butterfly flew past. He passed through clouds. He said they were fluffy.</a:t>
+            </a:r>
+            <a:br>
+              <a:rPr lang="en-US" dirty="0"/>
+            </a:br>
+            <a:br>
+              <a:rPr lang="en-US" dirty="0"/>
+            </a:br>
+            <a:r>
+              <a:rPr lang="en-US" dirty="0"/>
+              <a:t>Couch stopped when he was down to a gallon of water and just eight pounds of ballast. Concerned about the rugged terrain outside La Grande, including Hells Canyon, Couch decided to come back to earth.</a:t>
+            </a:r>
+            <a:br>
+              <a:rPr lang="en-US" dirty="0"/>
+            </a:br>
+            <a:br>
+              <a:rPr lang="en-US" dirty="0"/>
+            </a:br>
+            <a:r>
+              <a:rPr lang="en-US" dirty="0"/>
+              <a:t>This time, he was able to pop enough balloons to set the craft down, although he suffered rope burns. But once he was down, he jumped out, and the wind grabbed his gear, chair and remaining balloons, sweeping all aloft.</a:t>
+            </a:r>
+            <a:br>
+              <a:rPr lang="en-US" dirty="0"/>
+            </a:br>
+            <a:br>
+              <a:rPr lang="en-US" dirty="0"/>
+            </a:br>
+            <a:r>
+              <a:rPr lang="en-US" dirty="0"/>
+              <a:t>Afterward, Couch said he's thought about ways to improve the trip, especially the landing, but whether he'll take a third trip is up to his wife.</a:t>
+            </a:r>
+            <a:br>
+              <a:rPr lang="en-US" dirty="0"/>
+            </a:br>
+            <a:br>
+              <a:rPr lang="en-US" dirty="0"/>
+            </a:br>
+            <a:r>
+              <a:rPr lang="en-US" dirty="0"/>
+              <a:t>"I'm not saying I won't do it again, but I told her I'd let her decide if I did it again," he said.</a:t>
+            </a:r>
+            <a:br>
+              <a:rPr lang="en-US" dirty="0"/>
+            </a:br>
+            <a:br>
+              <a:rPr lang="en-US" dirty="0"/>
+            </a:br>
+            <a:r>
+              <a:rPr lang="en-US" dirty="0"/>
+              <a:t>Susan Couch said she's thinking about saying no. But she said she was willing to go along with last weekend's trip.</a:t>
+            </a:r>
+            <a:br>
+              <a:rPr lang="en-US" dirty="0"/>
+            </a:br>
+            <a:br>
+              <a:rPr lang="en-US" dirty="0"/>
+            </a:br>
+            <a:r>
+              <a:rPr lang="en-US" dirty="0"/>
+              <a:t>"I know he'd be thinking about it more and more, it would always be on his mind." she said. "This way, at least he's fulfilled his dream."</a:t>
+            </a:r>
+            <a:br>
+              <a:rPr lang="en-US" dirty="0"/>
+            </a:br>
+            <a:endParaRPr lang="en-US" dirty="0"/>
+          </a:p>
+        </p:txBody>
+      </p:sp>
+      <p:sp>
+        <p:nvSpPr>
+          <p:cNvPr id="31748" name="Slide Number Placeholder 3"/>
           <p:cNvSpPr>
             <a:spLocks noGrp="1"/>
           </p:cNvSpPr>
@@ -3823,10 +2689,10 @@
             </a:lvl9pPr>
           </a:lstStyle>
           <a:p>
-            <a:fld id="{97989AEB-0172-4163-907A-0644FD1BC23F}" type="slidenum">
+            <a:fld id="{2551ACDB-B434-4061-BA28-70898E2A9AA7}" type="slidenum">
               <a:rPr lang="en-US" smtClean="0"/>
               <a:pPr/>
-              <a:t>7</a:t>
+              <a:t>4</a:t>
             </a:fld>
             <a:endParaRPr lang="en-US"/>
           </a:p>
@@ -3835,7 +2701,7 @@
     </p:spTree>
     <p:extLst>
       <p:ext uri="{BB962C8B-B14F-4D97-AF65-F5344CB8AC3E}">
-        <p14:creationId xmlns:p14="http://schemas.microsoft.com/office/powerpoint/2010/main" val="2318913042"/>
+        <p14:creationId xmlns:p14="http://schemas.microsoft.com/office/powerpoint/2010/main" val="4250614303"/>
       </p:ext>
     </p:extLst>
   </p:cSld>
@@ -3845,7 +2711,7 @@
 </p:notes>
 </file>
 
-<file path=ppt/notesSlides/notesSlide4.xml><?xml version="1.0" encoding="utf-8"?>
+<file path=ppt/notesSlides/notesSlide3.xml><?xml version="1.0" encoding="utf-8"?>
 <p:notes xmlns:a="http://schemas.openxmlformats.org/drawingml/2006/main" xmlns:r="http://schemas.openxmlformats.org/officeDocument/2006/relationships" xmlns:p="http://schemas.openxmlformats.org/presentationml/2006/main">
   <p:cSld>
     <p:spTree>
@@ -3864,7 +2730,7 @@
       </p:grpSpPr>
       <p:sp>
         <p:nvSpPr>
-          <p:cNvPr id="33794" name="Slide Image Placeholder 1"/>
+          <p:cNvPr id="32770" name="Slide Image Placeholder 1"/>
           <p:cNvSpPr>
             <a:spLocks noGrp="1" noRot="1" noChangeAspect="1" noTextEdit="1"/>
           </p:cNvSpPr>
@@ -3899,7 +2765,7 @@
       </p:sp>
       <p:sp>
         <p:nvSpPr>
-          <p:cNvPr id="33795" name="Notes Placeholder 2"/>
+          <p:cNvPr id="32771" name="Notes Placeholder 2"/>
           <p:cNvSpPr>
             <a:spLocks noGrp="1"/>
           </p:cNvSpPr>
@@ -3937,14 +2803,204 @@
           </a:bodyPr>
           <a:lstStyle/>
           <a:p>
-            <a:pPr eaLnBrk="1" hangingPunct="1"/>
+            <a:r>
+              <a:rPr lang="en-US"/>
+              <a:t>The term </a:t>
+            </a:r>
+            <a:r>
+              <a:rPr lang="en-US" i="1"/>
+              <a:t>software engineering</a:t>
+            </a:r>
+            <a:r>
+              <a:rPr lang="en-US"/>
+              <a:t> was coined by </a:t>
+            </a:r>
+            <a:r>
+              <a:rPr lang="en-US">
+                <a:hlinkClick r:id="rId3" action="ppaction://hlinkfile" tooltip="Brian Randell"/>
+              </a:rPr>
+              <a:t>Brian Randell</a:t>
+            </a:r>
+            <a:r>
+              <a:rPr lang="en-US"/>
+              <a:t> and popularized by </a:t>
+            </a:r>
+            <a:r>
+              <a:rPr lang="en-US">
+                <a:hlinkClick r:id="rId4" action="ppaction://hlinkfile" tooltip="F.L. Bauer"/>
+              </a:rPr>
+              <a:t>F.L. Bauer</a:t>
+            </a:r>
+            <a:r>
+              <a:rPr lang="en-US"/>
+              <a:t> during the NATO Software Engineering Conference in 1968.</a:t>
+            </a:r>
+            <a:r>
+              <a:rPr lang="en-US" baseline="30000">
+                <a:hlinkClick r:id="rId5" action="ppaction://hlinkfile"/>
+              </a:rPr>
+              <a:t>[4]</a:t>
+            </a:r>
+            <a:r>
+              <a:rPr lang="en-US"/>
+              <a:t> The discipline of software engineering includes knowledge, tools, and methods for </a:t>
+            </a:r>
+            <a:r>
+              <a:rPr lang="en-US">
+                <a:hlinkClick r:id="rId6" action="ppaction://hlinkfile" tooltip="Requirements analysis"/>
+              </a:rPr>
+              <a:t>software requirements</a:t>
+            </a:r>
+            <a:r>
+              <a:rPr lang="en-US"/>
+              <a:t>, </a:t>
+            </a:r>
+            <a:r>
+              <a:rPr lang="en-US">
+                <a:hlinkClick r:id="rId7" action="ppaction://hlinkfile" tooltip="Software design"/>
+              </a:rPr>
+              <a:t>software design</a:t>
+            </a:r>
+            <a:r>
+              <a:rPr lang="en-US"/>
+              <a:t>, </a:t>
+            </a:r>
+            <a:r>
+              <a:rPr lang="en-US">
+                <a:hlinkClick r:id="rId8" action="ppaction://hlinkfile" tooltip="Computer programming"/>
+              </a:rPr>
+              <a:t>software construction</a:t>
+            </a:r>
+            <a:r>
+              <a:rPr lang="en-US"/>
+              <a:t>, </a:t>
+            </a:r>
+            <a:r>
+              <a:rPr lang="en-US">
+                <a:hlinkClick r:id="rId9" action="ppaction://hlinkfile" tooltip="Software testing"/>
+              </a:rPr>
+              <a:t>software testing</a:t>
+            </a:r>
+            <a:r>
+              <a:rPr lang="en-US"/>
+              <a:t>, and </a:t>
+            </a:r>
+            <a:r>
+              <a:rPr lang="en-US">
+                <a:hlinkClick r:id="rId10" action="ppaction://hlinkfile" tooltip="Software maintenance"/>
+              </a:rPr>
+              <a:t>software maintenance</a:t>
+            </a:r>
+            <a:r>
+              <a:rPr lang="en-US"/>
+              <a:t> tasks.</a:t>
+            </a:r>
+            <a:r>
+              <a:rPr lang="en-US" baseline="30000">
+                <a:hlinkClick r:id="rId11" action="ppaction://hlinkfile"/>
+              </a:rPr>
+              <a:t>[5]</a:t>
+            </a:r>
+            <a:r>
+              <a:rPr lang="en-US"/>
+              <a:t> Software engineering is related to the disciplines of </a:t>
+            </a:r>
+            <a:r>
+              <a:rPr lang="en-US">
+                <a:hlinkClick r:id="rId12" action="ppaction://hlinkfile" tooltip="Computer science"/>
+              </a:rPr>
+              <a:t>computer science</a:t>
+            </a:r>
+            <a:r>
+              <a:rPr lang="en-US"/>
+              <a:t>, </a:t>
+            </a:r>
+            <a:r>
+              <a:rPr lang="en-US">
+                <a:hlinkClick r:id="rId13" action="ppaction://hlinkfile" tooltip="Computer engineering"/>
+              </a:rPr>
+              <a:t>computer engineering</a:t>
+            </a:r>
+            <a:r>
+              <a:rPr lang="en-US"/>
+              <a:t>, </a:t>
+            </a:r>
+            <a:r>
+              <a:rPr lang="en-US">
+                <a:hlinkClick r:id="rId14" action="ppaction://hlinkfile" tooltip="Management"/>
+              </a:rPr>
+              <a:t>management</a:t>
+            </a:r>
+            <a:r>
+              <a:rPr lang="en-US"/>
+              <a:t>, </a:t>
+            </a:r>
+            <a:r>
+              <a:rPr lang="en-US">
+                <a:hlinkClick r:id="rId15" action="ppaction://hlinkfile" tooltip="Mathematics"/>
+              </a:rPr>
+              <a:t>mathematics</a:t>
+            </a:r>
+            <a:r>
+              <a:rPr lang="en-US"/>
+              <a:t>, </a:t>
+            </a:r>
+            <a:r>
+              <a:rPr lang="en-US">
+                <a:hlinkClick r:id="rId16" action="ppaction://hlinkfile" tooltip="Project management"/>
+              </a:rPr>
+              <a:t>project management</a:t>
+            </a:r>
+            <a:r>
+              <a:rPr lang="en-US"/>
+              <a:t>, </a:t>
+            </a:r>
+            <a:r>
+              <a:rPr lang="en-US">
+                <a:hlinkClick r:id="rId17" action="ppaction://hlinkfile" tooltip="Quality management"/>
+              </a:rPr>
+              <a:t>quality management</a:t>
+            </a:r>
+            <a:r>
+              <a:rPr lang="en-US"/>
+              <a:t>, software </a:t>
+            </a:r>
+            <a:r>
+              <a:rPr lang="en-US">
+                <a:hlinkClick r:id="rId18" action="ppaction://hlinkfile" tooltip="Ergonomics"/>
+              </a:rPr>
+              <a:t>ergonomics</a:t>
+            </a:r>
+            <a:r>
+              <a:rPr lang="en-US"/>
+              <a:t>, and </a:t>
+            </a:r>
+            <a:r>
+              <a:rPr lang="en-US">
+                <a:hlinkClick r:id="rId19" action="ppaction://hlinkfile" tooltip="Systems engineering"/>
+              </a:rPr>
+              <a:t>systems engineering</a:t>
+            </a:r>
+            <a:r>
+              <a:rPr lang="en-US"/>
+              <a:t>.</a:t>
+            </a:r>
+            <a:r>
+              <a:rPr lang="en-US" baseline="30000">
+                <a:hlinkClick r:id="rId20" action="ppaction://hlinkfile"/>
+              </a:rPr>
+              <a:t>[6]</a:t>
+            </a:r>
             <a:endParaRPr lang="en-US"/>
           </a:p>
-        </p:txBody>
-      </p:sp>
-      <p:sp>
-        <p:nvSpPr>
-          <p:cNvPr id="33796" name="Slide Number Placeholder 3"/>
+          <a:p>
+            <a:endParaRPr lang="en-US"/>
+          </a:p>
+        </p:txBody>
+      </p:sp>
+      <p:sp>
+        <p:nvSpPr>
+          <p:cNvPr id="32772" name="Slide Number Placeholder 3"/>
           <p:cNvSpPr>
             <a:spLocks noGrp="1"/>
           </p:cNvSpPr>
@@ -4079,10 +3135,10 @@
             </a:lvl9pPr>
           </a:lstStyle>
           <a:p>
-            <a:fld id="{C95BD9B2-E9EE-4A05-9F7C-A035C87EA3D1}" type="slidenum">
+            <a:fld id="{97989AEB-0172-4163-907A-0644FD1BC23F}" type="slidenum">
               <a:rPr lang="en-US" smtClean="0"/>
               <a:pPr/>
-              <a:t>19</a:t>
+              <a:t>7</a:t>
             </a:fld>
             <a:endParaRPr lang="en-US"/>
           </a:p>
@@ -4091,7 +3147,7 @@
     </p:spTree>
     <p:extLst>
       <p:ext uri="{BB962C8B-B14F-4D97-AF65-F5344CB8AC3E}">
-        <p14:creationId xmlns:p14="http://schemas.microsoft.com/office/powerpoint/2010/main" val="4138268482"/>
+        <p14:creationId xmlns:p14="http://schemas.microsoft.com/office/powerpoint/2010/main" val="2318913042"/>
       </p:ext>
     </p:extLst>
   </p:cSld>
@@ -4101,7 +3157,7 @@
 </p:notes>
 </file>
 
-<file path=ppt/notesSlides/notesSlide5.xml><?xml version="1.0" encoding="utf-8"?>
+<file path=ppt/notesSlides/notesSlide4.xml><?xml version="1.0" encoding="utf-8"?>
 <p:notes xmlns:a="http://schemas.openxmlformats.org/drawingml/2006/main" xmlns:r="http://schemas.openxmlformats.org/officeDocument/2006/relationships" xmlns:p="http://schemas.openxmlformats.org/presentationml/2006/main">
   <p:cSld>
     <p:spTree>
@@ -4120,7 +3176,7 @@
       </p:grpSpPr>
       <p:sp>
         <p:nvSpPr>
-          <p:cNvPr id="34818" name="Slide Image Placeholder 1"/>
+          <p:cNvPr id="33794" name="Slide Image Placeholder 1"/>
           <p:cNvSpPr>
             <a:spLocks noGrp="1" noRot="1" noChangeAspect="1" noTextEdit="1"/>
           </p:cNvSpPr>
@@ -4155,7 +3211,7 @@
       </p:sp>
       <p:sp>
         <p:nvSpPr>
-          <p:cNvPr id="34819" name="Notes Placeholder 2"/>
+          <p:cNvPr id="33795" name="Notes Placeholder 2"/>
           <p:cNvSpPr>
             <a:spLocks noGrp="1"/>
           </p:cNvSpPr>
@@ -4194,42 +3250,13 @@
           <a:lstStyle/>
           <a:p>
             <a:pPr eaLnBrk="1" hangingPunct="1"/>
-            <a:r>
-              <a:rPr lang="en-US" dirty="0"/>
-              <a:t>Each month, there are about 1-2 flight accidents involving use of flight safety equipment. </a:t>
-            </a:r>
-          </a:p>
-          <a:p>
-            <a:pPr eaLnBrk="1" hangingPunct="1"/>
-            <a:endParaRPr lang="en-US" dirty="0"/>
-          </a:p>
-          <a:p>
-            <a:pPr eaLnBrk="1" hangingPunct="1"/>
-            <a:r>
-              <a:rPr lang="en-US" dirty="0"/>
-              <a:t>The total number of flights scheduled to operate worldwide this month is 2.55 million, offering 306.9 million seats to travelers around the globe. </a:t>
-            </a:r>
-          </a:p>
-          <a:p>
-            <a:pPr eaLnBrk="1" hangingPunct="1"/>
-            <a:endParaRPr lang="en-US" dirty="0"/>
-          </a:p>
-          <a:p>
-            <a:pPr eaLnBrk="1" hangingPunct="1"/>
-            <a:r>
-              <a:rPr lang="en-US" dirty="0"/>
-              <a:t>http://portal.antara.co.id/en/arc/2008/5/16/slowdown-in-growth-rate-of-flights-worldwide/</a:t>
-            </a:r>
-          </a:p>
-          <a:p>
-            <a:pPr eaLnBrk="1" hangingPunct="1"/>
-            <a:endParaRPr lang="en-US" dirty="0"/>
-          </a:p>
-        </p:txBody>
-      </p:sp>
-      <p:sp>
-        <p:nvSpPr>
-          <p:cNvPr id="34820" name="Slide Number Placeholder 3"/>
+            <a:endParaRPr lang="en-US"/>
+          </a:p>
+        </p:txBody>
+      </p:sp>
+      <p:sp>
+        <p:nvSpPr>
+          <p:cNvPr id="33796" name="Slide Number Placeholder 3"/>
           <p:cNvSpPr>
             <a:spLocks noGrp="1"/>
           </p:cNvSpPr>
@@ -4364,10 +3391,10 @@
             </a:lvl9pPr>
           </a:lstStyle>
           <a:p>
-            <a:fld id="{3A2928E0-FC3A-4241-9402-C30252AEB309}" type="slidenum">
+            <a:fld id="{C95BD9B2-E9EE-4A05-9F7C-A035C87EA3D1}" type="slidenum">
               <a:rPr lang="en-US" smtClean="0"/>
               <a:pPr/>
-              <a:t>21</a:t>
+              <a:t>19</a:t>
             </a:fld>
             <a:endParaRPr lang="en-US"/>
           </a:p>
@@ -4376,7 +3403,7 @@
     </p:spTree>
     <p:extLst>
       <p:ext uri="{BB962C8B-B14F-4D97-AF65-F5344CB8AC3E}">
-        <p14:creationId xmlns:p14="http://schemas.microsoft.com/office/powerpoint/2010/main" val="925673886"/>
+        <p14:creationId xmlns:p14="http://schemas.microsoft.com/office/powerpoint/2010/main" val="4138268482"/>
       </p:ext>
     </p:extLst>
   </p:cSld>
@@ -4386,7 +3413,7 @@
 </p:notes>
 </file>
 
-<file path=ppt/notesSlides/notesSlide6.xml><?xml version="1.0" encoding="utf-8"?>
+<file path=ppt/notesSlides/notesSlide5.xml><?xml version="1.0" encoding="utf-8"?>
 <p:notes xmlns:a="http://schemas.openxmlformats.org/drawingml/2006/main" xmlns:r="http://schemas.openxmlformats.org/officeDocument/2006/relationships" xmlns:p="http://schemas.openxmlformats.org/presentationml/2006/main">
   <p:cSld>
     <p:spTree>
@@ -4405,337 +3432,7 @@
       </p:grpSpPr>
       <p:sp>
         <p:nvSpPr>
-          <p:cNvPr id="2" name="幻灯片图像占位符 1"/>
-          <p:cNvSpPr>
-            <a:spLocks noGrp="1" noRot="1" noChangeAspect="1"/>
-          </p:cNvSpPr>
-          <p:nvPr>
-            <p:ph type="sldImg"/>
-          </p:nvPr>
-        </p:nvSpPr>
-        <p:spPr>
-          <a:xfrm>
-            <a:off x="381000" y="685800"/>
-            <a:ext cx="6096000" cy="3429000"/>
-          </a:xfrm>
-        </p:spPr>
-      </p:sp>
-      <p:sp>
-        <p:nvSpPr>
-          <p:cNvPr id="3" name="备注占位符 2"/>
-          <p:cNvSpPr>
-            <a:spLocks noGrp="1"/>
-          </p:cNvSpPr>
-          <p:nvPr>
-            <p:ph type="body" idx="1"/>
-          </p:nvPr>
-        </p:nvSpPr>
-        <p:spPr/>
-        <p:txBody>
-          <a:bodyPr/>
-          <a:lstStyle/>
-          <a:p>
-            <a:r>
-              <a:rPr lang="en-US" dirty="0"/>
-              <a:t>https://en.wikipedia.org/wiki/US_Airways_Flight_1549</a:t>
-            </a:r>
-          </a:p>
-          <a:p>
-            <a:endParaRPr lang="en-US" dirty="0"/>
-          </a:p>
-          <a:p>
-            <a:endParaRPr lang="en-US" dirty="0"/>
-          </a:p>
-          <a:p>
-            <a:r>
-              <a:rPr lang="en-US" dirty="0"/>
-              <a:t>https://www.youtube.com/watch?v=imDFSnklB0k</a:t>
-            </a:r>
-          </a:p>
-          <a:p>
-            <a:endParaRPr lang="en-US" dirty="0"/>
-          </a:p>
-        </p:txBody>
-      </p:sp>
-      <p:sp>
-        <p:nvSpPr>
-          <p:cNvPr id="4" name="灯片编号占位符 3"/>
-          <p:cNvSpPr>
-            <a:spLocks noGrp="1"/>
-          </p:cNvSpPr>
-          <p:nvPr>
-            <p:ph type="sldNum" sz="quarter" idx="10"/>
-          </p:nvPr>
-        </p:nvSpPr>
-        <p:spPr/>
-        <p:txBody>
-          <a:bodyPr/>
-          <a:lstStyle/>
-          <a:p>
-            <a:pPr>
-              <a:defRPr/>
-            </a:pPr>
-            <a:fld id="{C5ADAB1E-5BE0-4555-8709-524C8D586A6B}" type="slidenum">
-              <a:rPr lang="en-US" smtClean="0"/>
-              <a:pPr>
-                <a:defRPr/>
-              </a:pPr>
-              <a:t>23</a:t>
-            </a:fld>
-            <a:endParaRPr lang="en-US"/>
-          </a:p>
-        </p:txBody>
-      </p:sp>
-    </p:spTree>
-    <p:extLst>
-      <p:ext uri="{BB962C8B-B14F-4D97-AF65-F5344CB8AC3E}">
-        <p14:creationId xmlns:p14="http://schemas.microsoft.com/office/powerpoint/2010/main" val="468195310"/>
-      </p:ext>
-    </p:extLst>
-  </p:cSld>
-  <p:clrMapOvr>
-    <a:masterClrMapping/>
-  </p:clrMapOvr>
-</p:notes>
-</file>
-
-<file path=ppt/notesSlides/notesSlide7.xml><?xml version="1.0" encoding="utf-8"?>
-<p:notes xmlns:a="http://schemas.openxmlformats.org/drawingml/2006/main" xmlns:r="http://schemas.openxmlformats.org/officeDocument/2006/relationships" xmlns:p="http://schemas.openxmlformats.org/presentationml/2006/main">
-  <p:cSld>
-    <p:spTree>
-      <p:nvGrpSpPr>
-        <p:cNvPr id="1" name=""/>
-        <p:cNvGrpSpPr/>
-        <p:nvPr/>
-      </p:nvGrpSpPr>
-      <p:grpSpPr>
-        <a:xfrm>
-          <a:off x="0" y="0"/>
-          <a:ext cx="0" cy="0"/>
-          <a:chOff x="0" y="0"/>
-          <a:chExt cx="0" cy="0"/>
-        </a:xfrm>
-      </p:grpSpPr>
-      <p:sp>
-        <p:nvSpPr>
-          <p:cNvPr id="2" name="Slide Image Placeholder 1"/>
-          <p:cNvSpPr>
-            <a:spLocks noGrp="1" noRot="1" noChangeAspect="1"/>
-          </p:cNvSpPr>
-          <p:nvPr>
-            <p:ph type="sldImg"/>
-          </p:nvPr>
-        </p:nvSpPr>
-        <p:spPr>
-          <a:xfrm>
-            <a:off x="381000" y="685800"/>
-            <a:ext cx="6096000" cy="3429000"/>
-          </a:xfrm>
-        </p:spPr>
-      </p:sp>
-      <p:sp>
-        <p:nvSpPr>
-          <p:cNvPr id="3" name="Notes Placeholder 2"/>
-          <p:cNvSpPr>
-            <a:spLocks noGrp="1"/>
-          </p:cNvSpPr>
-          <p:nvPr>
-            <p:ph type="body" idx="1"/>
-          </p:nvPr>
-        </p:nvSpPr>
-        <p:spPr/>
-        <p:txBody>
-          <a:bodyPr/>
-          <a:lstStyle/>
-          <a:p>
-            <a:r>
-              <a:rPr lang="zh-CN" altLang="en-US" dirty="0"/>
-              <a:t>大型软件（操作系统、办公软件、搜索引擎）有超过百万行的源代码，上万个不同的文件。</a:t>
-            </a:r>
-            <a:endParaRPr lang="en-US" dirty="0"/>
-          </a:p>
-        </p:txBody>
-      </p:sp>
-      <p:sp>
-        <p:nvSpPr>
-          <p:cNvPr id="4" name="Slide Number Placeholder 3"/>
-          <p:cNvSpPr>
-            <a:spLocks noGrp="1"/>
-          </p:cNvSpPr>
-          <p:nvPr>
-            <p:ph type="sldNum" sz="quarter" idx="5"/>
-          </p:nvPr>
-        </p:nvSpPr>
-        <p:spPr/>
-        <p:txBody>
-          <a:bodyPr/>
-          <a:lstStyle/>
-          <a:p>
-            <a:pPr>
-              <a:defRPr/>
-            </a:pPr>
-            <a:fld id="{C5ADAB1E-5BE0-4555-8709-524C8D586A6B}" type="slidenum">
-              <a:rPr lang="en-US" smtClean="0"/>
-              <a:pPr>
-                <a:defRPr/>
-              </a:pPr>
-              <a:t>25</a:t>
-            </a:fld>
-            <a:endParaRPr lang="en-US"/>
-          </a:p>
-        </p:txBody>
-      </p:sp>
-    </p:spTree>
-    <p:extLst>
-      <p:ext uri="{BB962C8B-B14F-4D97-AF65-F5344CB8AC3E}">
-        <p14:creationId xmlns:p14="http://schemas.microsoft.com/office/powerpoint/2010/main" val="742410221"/>
-      </p:ext>
-    </p:extLst>
-  </p:cSld>
-  <p:clrMapOvr>
-    <a:masterClrMapping/>
-  </p:clrMapOvr>
-</p:notes>
-</file>
-
-<file path=ppt/notesSlides/notesSlide8.xml><?xml version="1.0" encoding="utf-8"?>
-<p:notes xmlns:a="http://schemas.openxmlformats.org/drawingml/2006/main" xmlns:r="http://schemas.openxmlformats.org/officeDocument/2006/relationships" xmlns:p="http://schemas.openxmlformats.org/presentationml/2006/main">
-  <p:cSld>
-    <p:spTree>
-      <p:nvGrpSpPr>
-        <p:cNvPr id="1" name=""/>
-        <p:cNvGrpSpPr/>
-        <p:nvPr/>
-      </p:nvGrpSpPr>
-      <p:grpSpPr>
-        <a:xfrm>
-          <a:off x="0" y="0"/>
-          <a:ext cx="0" cy="0"/>
-          <a:chOff x="0" y="0"/>
-          <a:chExt cx="0" cy="0"/>
-        </a:xfrm>
-      </p:grpSpPr>
-      <p:sp>
-        <p:nvSpPr>
-          <p:cNvPr id="2" name="Slide Image Placeholder 1"/>
-          <p:cNvSpPr>
-            <a:spLocks noGrp="1" noRot="1" noChangeAspect="1"/>
-          </p:cNvSpPr>
-          <p:nvPr>
-            <p:ph type="sldImg"/>
-          </p:nvPr>
-        </p:nvSpPr>
-        <p:spPr>
-          <a:xfrm>
-            <a:off x="381000" y="685800"/>
-            <a:ext cx="6096000" cy="3429000"/>
-          </a:xfrm>
-        </p:spPr>
-      </p:sp>
-      <p:sp>
-        <p:nvSpPr>
-          <p:cNvPr id="3" name="Notes Placeholder 2"/>
-          <p:cNvSpPr>
-            <a:spLocks noGrp="1"/>
-          </p:cNvSpPr>
-          <p:nvPr>
-            <p:ph type="body" idx="1"/>
-          </p:nvPr>
-        </p:nvSpPr>
-        <p:spPr/>
-        <p:txBody>
-          <a:bodyPr/>
-          <a:lstStyle/>
-          <a:p>
-            <a:pPr marL="0" marR="0" lvl="0" indent="0" algn="l" defTabSz="914400" rtl="0" eaLnBrk="0" fontAlgn="base" latinLnBrk="0" hangingPunct="0">
-              <a:lnSpc>
-                <a:spcPct val="100000"/>
-              </a:lnSpc>
-              <a:spcBef>
-                <a:spcPct val="30000"/>
-              </a:spcBef>
-              <a:spcAft>
-                <a:spcPct val="0"/>
-              </a:spcAft>
-              <a:buClrTx/>
-              <a:buSzTx/>
-              <a:buFontTx/>
-              <a:buNone/>
-              <a:tabLst/>
-              <a:defRPr/>
-            </a:pPr>
-            <a:r>
-              <a:rPr lang="zh-CN" altLang="en-US" dirty="0"/>
-              <a:t>软件的这些本质特性让 “做一个好软件”变得很难，同时也让软件工程有它独特的挑战和魅力。</a:t>
-            </a:r>
-          </a:p>
-          <a:p>
-            <a:endParaRPr lang="en-US" dirty="0"/>
-          </a:p>
-        </p:txBody>
-      </p:sp>
-      <p:sp>
-        <p:nvSpPr>
-          <p:cNvPr id="4" name="Slide Number Placeholder 3"/>
-          <p:cNvSpPr>
-            <a:spLocks noGrp="1"/>
-          </p:cNvSpPr>
-          <p:nvPr>
-            <p:ph type="sldNum" sz="quarter" idx="5"/>
-          </p:nvPr>
-        </p:nvSpPr>
-        <p:spPr/>
-        <p:txBody>
-          <a:bodyPr/>
-          <a:lstStyle/>
-          <a:p>
-            <a:pPr>
-              <a:defRPr/>
-            </a:pPr>
-            <a:fld id="{C5ADAB1E-5BE0-4555-8709-524C8D586A6B}" type="slidenum">
-              <a:rPr lang="en-US" smtClean="0"/>
-              <a:pPr>
-                <a:defRPr/>
-              </a:pPr>
-              <a:t>30</a:t>
-            </a:fld>
-            <a:endParaRPr lang="en-US"/>
-          </a:p>
-        </p:txBody>
-      </p:sp>
-    </p:spTree>
-    <p:extLst>
-      <p:ext uri="{BB962C8B-B14F-4D97-AF65-F5344CB8AC3E}">
-        <p14:creationId xmlns:p14="http://schemas.microsoft.com/office/powerpoint/2010/main" val="2011983867"/>
-      </p:ext>
-    </p:extLst>
-  </p:cSld>
-  <p:clrMapOvr>
-    <a:masterClrMapping/>
-  </p:clrMapOvr>
-</p:notes>
-</file>
-
-<file path=ppt/notesSlides/notesSlide9.xml><?xml version="1.0" encoding="utf-8"?>
-<p:notes xmlns:a="http://schemas.openxmlformats.org/drawingml/2006/main" xmlns:r="http://schemas.openxmlformats.org/officeDocument/2006/relationships" xmlns:p="http://schemas.openxmlformats.org/presentationml/2006/main">
-  <p:cSld>
-    <p:spTree>
-      <p:nvGrpSpPr>
-        <p:cNvPr id="1" name=""/>
-        <p:cNvGrpSpPr/>
-        <p:nvPr/>
-      </p:nvGrpSpPr>
-      <p:grpSpPr>
-        <a:xfrm>
-          <a:off x="0" y="0"/>
-          <a:ext cx="0" cy="0"/>
-          <a:chOff x="0" y="0"/>
-          <a:chExt cx="0" cy="0"/>
-        </a:xfrm>
-      </p:grpSpPr>
-      <p:sp>
-        <p:nvSpPr>
-          <p:cNvPr id="35842" name="Slide Image Placeholder 1"/>
+          <p:cNvPr id="34818" name="Slide Image Placeholder 1"/>
           <p:cNvSpPr>
             <a:spLocks noGrp="1" noRot="1" noChangeAspect="1" noTextEdit="1"/>
           </p:cNvSpPr>
@@ -4770,7 +3467,7 @@
       </p:sp>
       <p:sp>
         <p:nvSpPr>
-          <p:cNvPr id="35843" name="Notes Placeholder 2"/>
+          <p:cNvPr id="34819" name="Notes Placeholder 2"/>
           <p:cNvSpPr>
             <a:spLocks noGrp="1"/>
           </p:cNvSpPr>
@@ -4808,41 +3505,43 @@
           </a:bodyPr>
           <a:lstStyle/>
           <a:p>
-            <a:pPr marL="0" lvl="1" eaLnBrk="1" hangingPunct="1">
-              <a:spcBef>
-                <a:spcPct val="0"/>
-              </a:spcBef>
-            </a:pPr>
-            <a:r>
-              <a:rPr lang="zh-CN" altLang="en-US" sz="2200" dirty="0"/>
-              <a:t>成本很大</a:t>
-            </a:r>
-            <a:endParaRPr lang="en-US" altLang="zh-CN" sz="2200" dirty="0"/>
-          </a:p>
-          <a:p>
-            <a:pPr marL="0" lvl="1" eaLnBrk="1" hangingPunct="1">
-              <a:spcBef>
-                <a:spcPct val="0"/>
-              </a:spcBef>
-            </a:pPr>
-            <a:r>
-              <a:rPr lang="en-US" altLang="zh-CN" sz="2200" dirty="0"/>
-              <a:t>Quiz – housing &amp; 1Billion$</a:t>
-            </a:r>
-          </a:p>
-          <a:p>
-            <a:pPr eaLnBrk="1" hangingPunct="1">
-              <a:spcBef>
-                <a:spcPct val="0"/>
-              </a:spcBef>
-            </a:pPr>
+            <a:pPr eaLnBrk="1" hangingPunct="1"/>
+            <a:r>
+              <a:rPr lang="en-US" dirty="0"/>
+              <a:t>Each month, there are about 1-2 flight accidents involving use of flight safety equipment. </a:t>
+            </a:r>
+          </a:p>
+          <a:p>
+            <a:pPr eaLnBrk="1" hangingPunct="1"/>
             <a:endParaRPr lang="en-US" dirty="0"/>
           </a:p>
-        </p:txBody>
-      </p:sp>
-      <p:sp>
-        <p:nvSpPr>
-          <p:cNvPr id="35844" name="Slide Number Placeholder 3"/>
+          <a:p>
+            <a:pPr eaLnBrk="1" hangingPunct="1"/>
+            <a:r>
+              <a:rPr lang="en-US" dirty="0"/>
+              <a:t>The total number of flights scheduled to operate worldwide this month is 2.55 million, offering 306.9 million seats to travelers around the globe. </a:t>
+            </a:r>
+          </a:p>
+          <a:p>
+            <a:pPr eaLnBrk="1" hangingPunct="1"/>
+            <a:endParaRPr lang="en-US" dirty="0"/>
+          </a:p>
+          <a:p>
+            <a:pPr eaLnBrk="1" hangingPunct="1"/>
+            <a:r>
+              <a:rPr lang="en-US" dirty="0"/>
+              <a:t>http://portal.antara.co.id/en/arc/2008/5/16/slowdown-in-growth-rate-of-flights-worldwide/</a:t>
+            </a:r>
+          </a:p>
+          <a:p>
+            <a:pPr eaLnBrk="1" hangingPunct="1"/>
+            <a:endParaRPr lang="en-US" dirty="0"/>
+          </a:p>
+        </p:txBody>
+      </p:sp>
+      <p:sp>
+        <p:nvSpPr>
+          <p:cNvPr id="34820" name="Slide Number Placeholder 3"/>
           <p:cNvSpPr>
             <a:spLocks noGrp="1"/>
           </p:cNvSpPr>
@@ -4977,10 +3676,10 @@
             </a:lvl9pPr>
           </a:lstStyle>
           <a:p>
-            <a:fld id="{9FA30708-CCA8-4933-B01C-46738CEF215D}" type="slidenum">
+            <a:fld id="{3A2928E0-FC3A-4241-9402-C30252AEB309}" type="slidenum">
               <a:rPr lang="en-US" smtClean="0"/>
               <a:pPr/>
-              <a:t>32</a:t>
+              <a:t>21</a:t>
             </a:fld>
             <a:endParaRPr lang="en-US"/>
           </a:p>
@@ -4989,7 +3688,490 @@
     </p:spTree>
     <p:extLst>
       <p:ext uri="{BB962C8B-B14F-4D97-AF65-F5344CB8AC3E}">
-        <p14:creationId xmlns:p14="http://schemas.microsoft.com/office/powerpoint/2010/main" val="45289420"/>
+        <p14:creationId xmlns:p14="http://schemas.microsoft.com/office/powerpoint/2010/main" val="925673886"/>
+      </p:ext>
+    </p:extLst>
+  </p:cSld>
+  <p:clrMapOvr>
+    <a:masterClrMapping/>
+  </p:clrMapOvr>
+</p:notes>
+</file>
+
+<file path=ppt/notesSlides/notesSlide6.xml><?xml version="1.0" encoding="utf-8"?>
+<p:notes xmlns:a="http://schemas.openxmlformats.org/drawingml/2006/main" xmlns:r="http://schemas.openxmlformats.org/officeDocument/2006/relationships" xmlns:p="http://schemas.openxmlformats.org/presentationml/2006/main">
+  <p:cSld>
+    <p:spTree>
+      <p:nvGrpSpPr>
+        <p:cNvPr id="1" name=""/>
+        <p:cNvGrpSpPr/>
+        <p:nvPr/>
+      </p:nvGrpSpPr>
+      <p:grpSpPr>
+        <a:xfrm>
+          <a:off x="0" y="0"/>
+          <a:ext cx="0" cy="0"/>
+          <a:chOff x="0" y="0"/>
+          <a:chExt cx="0" cy="0"/>
+        </a:xfrm>
+      </p:grpSpPr>
+      <p:sp>
+        <p:nvSpPr>
+          <p:cNvPr id="2" name="幻灯片图像占位符 1"/>
+          <p:cNvSpPr>
+            <a:spLocks noGrp="1" noRot="1" noChangeAspect="1"/>
+          </p:cNvSpPr>
+          <p:nvPr>
+            <p:ph type="sldImg"/>
+          </p:nvPr>
+        </p:nvSpPr>
+        <p:spPr>
+          <a:xfrm>
+            <a:off x="381000" y="685800"/>
+            <a:ext cx="6096000" cy="3429000"/>
+          </a:xfrm>
+        </p:spPr>
+      </p:sp>
+      <p:sp>
+        <p:nvSpPr>
+          <p:cNvPr id="3" name="备注占位符 2"/>
+          <p:cNvSpPr>
+            <a:spLocks noGrp="1"/>
+          </p:cNvSpPr>
+          <p:nvPr>
+            <p:ph type="body" idx="1"/>
+          </p:nvPr>
+        </p:nvSpPr>
+        <p:spPr/>
+        <p:txBody>
+          <a:bodyPr/>
+          <a:lstStyle/>
+          <a:p>
+            <a:r>
+              <a:rPr lang="en-US" dirty="0"/>
+              <a:t>https://en.wikipedia.org/wiki/US_Airways_Flight_1549</a:t>
+            </a:r>
+          </a:p>
+          <a:p>
+            <a:endParaRPr lang="en-US" dirty="0"/>
+          </a:p>
+          <a:p>
+            <a:endParaRPr lang="en-US" dirty="0"/>
+          </a:p>
+          <a:p>
+            <a:r>
+              <a:rPr lang="en-US" dirty="0"/>
+              <a:t>https://www.youtube.com/watch?v=imDFSnklB0k</a:t>
+            </a:r>
+          </a:p>
+          <a:p>
+            <a:endParaRPr lang="en-US" dirty="0"/>
+          </a:p>
+        </p:txBody>
+      </p:sp>
+      <p:sp>
+        <p:nvSpPr>
+          <p:cNvPr id="4" name="灯片编号占位符 3"/>
+          <p:cNvSpPr>
+            <a:spLocks noGrp="1"/>
+          </p:cNvSpPr>
+          <p:nvPr>
+            <p:ph type="sldNum" sz="quarter" idx="10"/>
+          </p:nvPr>
+        </p:nvSpPr>
+        <p:spPr/>
+        <p:txBody>
+          <a:bodyPr/>
+          <a:lstStyle/>
+          <a:p>
+            <a:pPr>
+              <a:defRPr/>
+            </a:pPr>
+            <a:fld id="{C5ADAB1E-5BE0-4555-8709-524C8D586A6B}" type="slidenum">
+              <a:rPr lang="en-US" smtClean="0"/>
+              <a:pPr>
+                <a:defRPr/>
+              </a:pPr>
+              <a:t>23</a:t>
+            </a:fld>
+            <a:endParaRPr lang="en-US"/>
+          </a:p>
+        </p:txBody>
+      </p:sp>
+    </p:spTree>
+    <p:extLst>
+      <p:ext uri="{BB962C8B-B14F-4D97-AF65-F5344CB8AC3E}">
+        <p14:creationId xmlns:p14="http://schemas.microsoft.com/office/powerpoint/2010/main" val="468195310"/>
+      </p:ext>
+    </p:extLst>
+  </p:cSld>
+  <p:clrMapOvr>
+    <a:masterClrMapping/>
+  </p:clrMapOvr>
+</p:notes>
+</file>
+
+<file path=ppt/notesSlides/notesSlide7.xml><?xml version="1.0" encoding="utf-8"?>
+<p:notes xmlns:a="http://schemas.openxmlformats.org/drawingml/2006/main" xmlns:r="http://schemas.openxmlformats.org/officeDocument/2006/relationships" xmlns:p="http://schemas.openxmlformats.org/presentationml/2006/main">
+  <p:cSld>
+    <p:spTree>
+      <p:nvGrpSpPr>
+        <p:cNvPr id="1" name=""/>
+        <p:cNvGrpSpPr/>
+        <p:nvPr/>
+      </p:nvGrpSpPr>
+      <p:grpSpPr>
+        <a:xfrm>
+          <a:off x="0" y="0"/>
+          <a:ext cx="0" cy="0"/>
+          <a:chOff x="0" y="0"/>
+          <a:chExt cx="0" cy="0"/>
+        </a:xfrm>
+      </p:grpSpPr>
+      <p:sp>
+        <p:nvSpPr>
+          <p:cNvPr id="2" name="Slide Image Placeholder 1"/>
+          <p:cNvSpPr>
+            <a:spLocks noGrp="1" noRot="1" noChangeAspect="1"/>
+          </p:cNvSpPr>
+          <p:nvPr>
+            <p:ph type="sldImg"/>
+          </p:nvPr>
+        </p:nvSpPr>
+        <p:spPr>
+          <a:xfrm>
+            <a:off x="381000" y="685800"/>
+            <a:ext cx="6096000" cy="3429000"/>
+          </a:xfrm>
+        </p:spPr>
+      </p:sp>
+      <p:sp>
+        <p:nvSpPr>
+          <p:cNvPr id="3" name="Notes Placeholder 2"/>
+          <p:cNvSpPr>
+            <a:spLocks noGrp="1"/>
+          </p:cNvSpPr>
+          <p:nvPr>
+            <p:ph type="body" idx="1"/>
+          </p:nvPr>
+        </p:nvSpPr>
+        <p:spPr/>
+        <p:txBody>
+          <a:bodyPr/>
+          <a:lstStyle/>
+          <a:p>
+            <a:r>
+              <a:rPr lang="zh-CN" altLang="en-US" dirty="0"/>
+              <a:t>大型软件（操作系统、办公软件、搜索引擎）有超过百万行的源代码，上万个不同的文件。</a:t>
+            </a:r>
+            <a:endParaRPr lang="en-US" dirty="0"/>
+          </a:p>
+        </p:txBody>
+      </p:sp>
+      <p:sp>
+        <p:nvSpPr>
+          <p:cNvPr id="4" name="Slide Number Placeholder 3"/>
+          <p:cNvSpPr>
+            <a:spLocks noGrp="1"/>
+          </p:cNvSpPr>
+          <p:nvPr>
+            <p:ph type="sldNum" sz="quarter" idx="5"/>
+          </p:nvPr>
+        </p:nvSpPr>
+        <p:spPr/>
+        <p:txBody>
+          <a:bodyPr/>
+          <a:lstStyle/>
+          <a:p>
+            <a:pPr>
+              <a:defRPr/>
+            </a:pPr>
+            <a:fld id="{C5ADAB1E-5BE0-4555-8709-524C8D586A6B}" type="slidenum">
+              <a:rPr lang="en-US" smtClean="0"/>
+              <a:pPr>
+                <a:defRPr/>
+              </a:pPr>
+              <a:t>25</a:t>
+            </a:fld>
+            <a:endParaRPr lang="en-US"/>
+          </a:p>
+        </p:txBody>
+      </p:sp>
+    </p:spTree>
+    <p:extLst>
+      <p:ext uri="{BB962C8B-B14F-4D97-AF65-F5344CB8AC3E}">
+        <p14:creationId xmlns:p14="http://schemas.microsoft.com/office/powerpoint/2010/main" val="742410221"/>
+      </p:ext>
+    </p:extLst>
+  </p:cSld>
+  <p:clrMapOvr>
+    <a:masterClrMapping/>
+  </p:clrMapOvr>
+</p:notes>
+</file>
+
+<file path=ppt/notesSlides/notesSlide8.xml><?xml version="1.0" encoding="utf-8"?>
+<p:notes xmlns:a="http://schemas.openxmlformats.org/drawingml/2006/main" xmlns:r="http://schemas.openxmlformats.org/officeDocument/2006/relationships" xmlns:p="http://schemas.openxmlformats.org/presentationml/2006/main">
+  <p:cSld>
+    <p:spTree>
+      <p:nvGrpSpPr>
+        <p:cNvPr id="1" name=""/>
+        <p:cNvGrpSpPr/>
+        <p:nvPr/>
+      </p:nvGrpSpPr>
+      <p:grpSpPr>
+        <a:xfrm>
+          <a:off x="0" y="0"/>
+          <a:ext cx="0" cy="0"/>
+          <a:chOff x="0" y="0"/>
+          <a:chExt cx="0" cy="0"/>
+        </a:xfrm>
+      </p:grpSpPr>
+      <p:sp>
+        <p:nvSpPr>
+          <p:cNvPr id="2" name="幻灯片图像占位符 1"/>
+          <p:cNvSpPr>
+            <a:spLocks noGrp="1" noRot="1" noChangeAspect="1"/>
+          </p:cNvSpPr>
+          <p:nvPr>
+            <p:ph type="sldImg"/>
+          </p:nvPr>
+        </p:nvSpPr>
+        <p:spPr/>
+      </p:sp>
+      <p:sp>
+        <p:nvSpPr>
+          <p:cNvPr id="3" name="备注占位符 2"/>
+          <p:cNvSpPr>
+            <a:spLocks noGrp="1"/>
+          </p:cNvSpPr>
+          <p:nvPr>
+            <p:ph type="body" idx="1"/>
+          </p:nvPr>
+        </p:nvSpPr>
+        <p:spPr/>
+        <p:txBody>
+          <a:bodyPr/>
+          <a:lstStyle/>
+          <a:p>
+            <a:r>
+              <a:rPr lang="zh-CN" altLang="en-US" dirty="0"/>
+              <a:t>彭鑫</a:t>
+            </a:r>
+            <a:r>
+              <a:rPr lang="en-US" altLang="zh-CN" dirty="0"/>
+              <a:t>/</a:t>
+            </a:r>
+            <a:r>
+              <a:rPr lang="zh-CN" altLang="en-US" dirty="0"/>
+              <a:t>复旦大学： 知识缺失。  </a:t>
+            </a:r>
+            <a:endParaRPr lang="en-US" altLang="zh-CN" dirty="0"/>
+          </a:p>
+          <a:p>
+            <a:r>
+              <a:rPr lang="zh-CN" altLang="en-US" dirty="0"/>
+              <a:t>有没有一种可能， 是人们即使能访问到这些 “知识”， 大家还是没有做到位</a:t>
+            </a:r>
+            <a:r>
+              <a:rPr lang="en-US" altLang="zh-CN" dirty="0"/>
+              <a:t>?  </a:t>
+            </a:r>
+            <a:r>
+              <a:rPr lang="zh-CN" altLang="en-US" dirty="0"/>
+              <a:t>例如，项目的代码规范大家都知道，也有人更新，那谁来确保 </a:t>
+            </a:r>
+            <a:r>
+              <a:rPr lang="en-US" altLang="zh-CN" dirty="0"/>
+              <a:t>100% </a:t>
+            </a:r>
+            <a:r>
+              <a:rPr lang="zh-CN" altLang="en-US" dirty="0"/>
+              <a:t>执行呢？</a:t>
+            </a:r>
+            <a:endParaRPr lang="en-US" altLang="zh-CN" dirty="0"/>
+          </a:p>
+          <a:p>
+            <a:r>
+              <a:rPr lang="zh-CN" altLang="en-US" dirty="0"/>
+              <a:t>解决方案： </a:t>
+            </a:r>
+            <a:endParaRPr lang="en-US" altLang="zh-CN" dirty="0"/>
+          </a:p>
+          <a:p>
+            <a:r>
+              <a:rPr lang="en-US" altLang="zh-CN" dirty="0"/>
+              <a:t>1</a:t>
+            </a:r>
+            <a:r>
+              <a:rPr lang="zh-CN" altLang="en-US" dirty="0"/>
+              <a:t>） 知识并不能落地成为可执行的。 如果把所有的知识（约束）变为质量门禁，每次都检查。 </a:t>
+            </a:r>
+            <a:endParaRPr lang="en-US" altLang="zh-CN" dirty="0"/>
+          </a:p>
+          <a:p>
+            <a:r>
+              <a:rPr lang="en-US" altLang="zh-CN" dirty="0"/>
+              <a:t>2</a:t>
+            </a:r>
+            <a:r>
+              <a:rPr lang="zh-CN" altLang="en-US" dirty="0"/>
+              <a:t>）其他方面的知识</a:t>
+            </a:r>
+          </a:p>
+        </p:txBody>
+      </p:sp>
+      <p:sp>
+        <p:nvSpPr>
+          <p:cNvPr id="4" name="灯片编号占位符 3"/>
+          <p:cNvSpPr>
+            <a:spLocks noGrp="1"/>
+          </p:cNvSpPr>
+          <p:nvPr>
+            <p:ph type="sldNum" sz="quarter" idx="5"/>
+          </p:nvPr>
+        </p:nvSpPr>
+        <p:spPr/>
+        <p:txBody>
+          <a:bodyPr/>
+          <a:lstStyle/>
+          <a:p>
+            <a:pPr>
+              <a:defRPr/>
+            </a:pPr>
+            <a:fld id="{C5ADAB1E-5BE0-4555-8709-524C8D586A6B}" type="slidenum">
+              <a:rPr lang="en-US" smtClean="0"/>
+              <a:pPr>
+                <a:defRPr/>
+              </a:pPr>
+              <a:t>28</a:t>
+            </a:fld>
+            <a:endParaRPr lang="en-US"/>
+          </a:p>
+        </p:txBody>
+      </p:sp>
+    </p:spTree>
+    <p:extLst>
+      <p:ext uri="{BB962C8B-B14F-4D97-AF65-F5344CB8AC3E}">
+        <p14:creationId xmlns:p14="http://schemas.microsoft.com/office/powerpoint/2010/main" val="3660476218"/>
+      </p:ext>
+    </p:extLst>
+  </p:cSld>
+  <p:clrMapOvr>
+    <a:masterClrMapping/>
+  </p:clrMapOvr>
+</p:notes>
+</file>
+
+<file path=ppt/notesSlides/notesSlide9.xml><?xml version="1.0" encoding="utf-8"?>
+<p:notes xmlns:a="http://schemas.openxmlformats.org/drawingml/2006/main" xmlns:r="http://schemas.openxmlformats.org/officeDocument/2006/relationships" xmlns:p="http://schemas.openxmlformats.org/presentationml/2006/main">
+  <p:cSld>
+    <p:spTree>
+      <p:nvGrpSpPr>
+        <p:cNvPr id="1" name=""/>
+        <p:cNvGrpSpPr/>
+        <p:nvPr/>
+      </p:nvGrpSpPr>
+      <p:grpSpPr>
+        <a:xfrm>
+          <a:off x="0" y="0"/>
+          <a:ext cx="0" cy="0"/>
+          <a:chOff x="0" y="0"/>
+          <a:chExt cx="0" cy="0"/>
+        </a:xfrm>
+      </p:grpSpPr>
+      <p:sp>
+        <p:nvSpPr>
+          <p:cNvPr id="2" name="Slide Image Placeholder 1"/>
+          <p:cNvSpPr>
+            <a:spLocks noGrp="1" noRot="1" noChangeAspect="1"/>
+          </p:cNvSpPr>
+          <p:nvPr>
+            <p:ph type="sldImg"/>
+          </p:nvPr>
+        </p:nvSpPr>
+        <p:spPr>
+          <a:xfrm>
+            <a:off x="381000" y="685800"/>
+            <a:ext cx="6096000" cy="3429000"/>
+          </a:xfrm>
+        </p:spPr>
+      </p:sp>
+      <p:sp>
+        <p:nvSpPr>
+          <p:cNvPr id="3" name="Notes Placeholder 2"/>
+          <p:cNvSpPr>
+            <a:spLocks noGrp="1"/>
+          </p:cNvSpPr>
+          <p:nvPr>
+            <p:ph type="body" idx="1"/>
+          </p:nvPr>
+        </p:nvSpPr>
+        <p:spPr/>
+        <p:txBody>
+          <a:bodyPr/>
+          <a:lstStyle/>
+          <a:p>
+            <a:pPr marL="0" marR="0" lvl="0" indent="0" algn="l" defTabSz="914400" rtl="0" eaLnBrk="0" fontAlgn="base" latinLnBrk="0" hangingPunct="0">
+              <a:lnSpc>
+                <a:spcPct val="100000"/>
+              </a:lnSpc>
+              <a:spcBef>
+                <a:spcPct val="30000"/>
+              </a:spcBef>
+              <a:spcAft>
+                <a:spcPct val="0"/>
+              </a:spcAft>
+              <a:buClrTx/>
+              <a:buSzTx/>
+              <a:buFontTx/>
+              <a:buNone/>
+              <a:tabLst/>
+              <a:defRPr/>
+            </a:pPr>
+            <a:r>
+              <a:rPr lang="zh-CN" altLang="en-US" dirty="0"/>
+              <a:t>软件的这些本质特性让 “做一个好软件”变得很难，同时也让软件工程有它独特的挑战和魅力。</a:t>
+            </a:r>
+          </a:p>
+          <a:p>
+            <a:endParaRPr lang="en-US" dirty="0"/>
+          </a:p>
+        </p:txBody>
+      </p:sp>
+      <p:sp>
+        <p:nvSpPr>
+          <p:cNvPr id="4" name="Slide Number Placeholder 3"/>
+          <p:cNvSpPr>
+            <a:spLocks noGrp="1"/>
+          </p:cNvSpPr>
+          <p:nvPr>
+            <p:ph type="sldNum" sz="quarter" idx="5"/>
+          </p:nvPr>
+        </p:nvSpPr>
+        <p:spPr/>
+        <p:txBody>
+          <a:bodyPr/>
+          <a:lstStyle/>
+          <a:p>
+            <a:pPr>
+              <a:defRPr/>
+            </a:pPr>
+            <a:fld id="{C5ADAB1E-5BE0-4555-8709-524C8D586A6B}" type="slidenum">
+              <a:rPr lang="en-US" smtClean="0"/>
+              <a:pPr>
+                <a:defRPr/>
+              </a:pPr>
+              <a:t>31</a:t>
+            </a:fld>
+            <a:endParaRPr lang="en-US"/>
+          </a:p>
+        </p:txBody>
+      </p:sp>
+    </p:spTree>
+    <p:extLst>
+      <p:ext uri="{BB962C8B-B14F-4D97-AF65-F5344CB8AC3E}">
+        <p14:creationId xmlns:p14="http://schemas.microsoft.com/office/powerpoint/2010/main" val="2011983867"/>
       </p:ext>
     </p:extLst>
   </p:cSld>
@@ -5195,7 +4377,7 @@
           <a:p>
             <a:fld id="{48A87A34-81AB-432B-8DAE-1953F412C126}" type="datetimeFigureOut">
               <a:rPr lang="en-US" smtClean="0"/>
-              <a:t>9/12/2019</a:t>
+              <a:t>9/24/2025</a:t>
             </a:fld>
             <a:endParaRPr lang="en-US" dirty="0"/>
           </a:p>
@@ -5477,7 +4659,7 @@
             <a:fld id="{48A87A34-81AB-432B-8DAE-1953F412C126}" type="datetimeFigureOut">
               <a:rPr lang="en-US" smtClean="0"/>
               <a:pPr/>
-              <a:t>9/12/2019</a:t>
+              <a:t>9/24/2025</a:t>
             </a:fld>
             <a:endParaRPr lang="en-US" dirty="0"/>
           </a:p>
@@ -5671,7 +4853,7 @@
             <a:fld id="{48A87A34-81AB-432B-8DAE-1953F412C126}" type="datetimeFigureOut">
               <a:rPr lang="en-US" smtClean="0"/>
               <a:pPr/>
-              <a:t>9/12/2019</a:t>
+              <a:t>9/24/2025</a:t>
             </a:fld>
             <a:endParaRPr lang="en-US" dirty="0"/>
           </a:p>
@@ -5934,7 +5116,7 @@
             <a:fld id="{48A87A34-81AB-432B-8DAE-1953F412C126}" type="datetimeFigureOut">
               <a:rPr lang="en-US" smtClean="0"/>
               <a:pPr/>
-              <a:t>9/12/2019</a:t>
+              <a:t>9/24/2025</a:t>
             </a:fld>
             <a:endParaRPr lang="en-US" dirty="0"/>
           </a:p>
@@ -6362,7 +5544,7 @@
             <a:fld id="{48A87A34-81AB-432B-8DAE-1953F412C126}" type="datetimeFigureOut">
               <a:rPr lang="en-US" smtClean="0"/>
               <a:pPr/>
-              <a:t>9/12/2019</a:t>
+              <a:t>9/24/2025</a:t>
             </a:fld>
             <a:endParaRPr lang="en-US" dirty="0"/>
           </a:p>
@@ -6910,7 +6092,7 @@
             <a:fld id="{48A87A34-81AB-432B-8DAE-1953F412C126}" type="datetimeFigureOut">
               <a:rPr lang="en-US" smtClean="0"/>
               <a:pPr/>
-              <a:t>9/12/2019</a:t>
+              <a:t>9/24/2025</a:t>
             </a:fld>
             <a:endParaRPr lang="en-US" dirty="0"/>
           </a:p>
@@ -7743,7 +6925,7 @@
             <a:fld id="{48A87A34-81AB-432B-8DAE-1953F412C126}" type="datetimeFigureOut">
               <a:rPr lang="en-US" smtClean="0"/>
               <a:pPr/>
-              <a:t>9/12/2019</a:t>
+              <a:t>9/24/2025</a:t>
             </a:fld>
             <a:endParaRPr lang="en-US" dirty="0"/>
           </a:p>
@@ -7914,7 +7096,7 @@
           <a:p>
             <a:fld id="{48A87A34-81AB-432B-8DAE-1953F412C126}" type="datetimeFigureOut">
               <a:rPr lang="en-US" smtClean="0"/>
-              <a:t>9/12/2019</a:t>
+              <a:t>9/24/2025</a:t>
             </a:fld>
             <a:endParaRPr lang="en-US" dirty="0"/>
           </a:p>
@@ -8094,7 +7276,7 @@
           <a:p>
             <a:fld id="{48A87A34-81AB-432B-8DAE-1953F412C126}" type="datetimeFigureOut">
               <a:rPr lang="en-US" smtClean="0"/>
-              <a:t>9/12/2019</a:t>
+              <a:t>9/24/2025</a:t>
             </a:fld>
             <a:endParaRPr lang="en-US" dirty="0"/>
           </a:p>
@@ -8264,7 +7446,7 @@
           <a:p>
             <a:fld id="{48A87A34-81AB-432B-8DAE-1953F412C126}" type="datetimeFigureOut">
               <a:rPr lang="en-US" smtClean="0"/>
-              <a:t>9/12/2019</a:t>
+              <a:t>9/24/2025</a:t>
             </a:fld>
             <a:endParaRPr lang="en-US" dirty="0"/>
           </a:p>
@@ -8521,7 +7703,7 @@
           <a:p>
             <a:fld id="{48A87A34-81AB-432B-8DAE-1953F412C126}" type="datetimeFigureOut">
               <a:rPr lang="en-US" smtClean="0"/>
-              <a:t>9/12/2019</a:t>
+              <a:t>9/24/2025</a:t>
             </a:fld>
             <a:endParaRPr lang="en-US" dirty="0"/>
           </a:p>
@@ -8753,7 +7935,7 @@
           <a:p>
             <a:fld id="{48A87A34-81AB-432B-8DAE-1953F412C126}" type="datetimeFigureOut">
               <a:rPr lang="en-US" smtClean="0"/>
-              <a:t>9/12/2019</a:t>
+              <a:t>9/24/2025</a:t>
             </a:fld>
             <a:endParaRPr lang="en-US" dirty="0"/>
           </a:p>
@@ -9146,7 +8328,7 @@
           <a:p>
             <a:fld id="{48A87A34-81AB-432B-8DAE-1953F412C126}" type="datetimeFigureOut">
               <a:rPr lang="en-US" smtClean="0"/>
-              <a:t>9/12/2019</a:t>
+              <a:t>9/24/2025</a:t>
             </a:fld>
             <a:endParaRPr lang="en-US" dirty="0"/>
           </a:p>
@@ -9264,7 +8446,7 @@
           <a:p>
             <a:fld id="{48A87A34-81AB-432B-8DAE-1953F412C126}" type="datetimeFigureOut">
               <a:rPr lang="en-US" smtClean="0"/>
-              <a:t>9/12/2019</a:t>
+              <a:t>9/24/2025</a:t>
             </a:fld>
             <a:endParaRPr lang="en-US" dirty="0"/>
           </a:p>
@@ -9359,7 +8541,7 @@
           <a:p>
             <a:fld id="{48A87A34-81AB-432B-8DAE-1953F412C126}" type="datetimeFigureOut">
               <a:rPr lang="en-US" smtClean="0"/>
-              <a:t>9/12/2019</a:t>
+              <a:t>9/24/2025</a:t>
             </a:fld>
             <a:endParaRPr lang="en-US" dirty="0"/>
           </a:p>
@@ -9632,7 +8814,7 @@
           <a:p>
             <a:fld id="{48A87A34-81AB-432B-8DAE-1953F412C126}" type="datetimeFigureOut">
               <a:rPr lang="en-US" smtClean="0"/>
-              <a:t>9/12/2019</a:t>
+              <a:t>9/24/2025</a:t>
             </a:fld>
             <a:endParaRPr lang="en-US" dirty="0"/>
           </a:p>
@@ -9913,7 +9095,7 @@
           <a:p>
             <a:fld id="{48A87A34-81AB-432B-8DAE-1953F412C126}" type="datetimeFigureOut">
               <a:rPr lang="en-US" smtClean="0"/>
-              <a:t>9/12/2019</a:t>
+              <a:t>9/24/2025</a:t>
             </a:fld>
             <a:endParaRPr lang="en-US" dirty="0"/>
           </a:p>
@@ -10154,7 +9336,7 @@
             <a:fld id="{48A87A34-81AB-432B-8DAE-1953F412C126}" type="datetimeFigureOut">
               <a:rPr lang="en-US" smtClean="0"/>
               <a:pPr/>
-              <a:t>9/12/2019</a:t>
+              <a:t>9/24/2025</a:t>
             </a:fld>
             <a:endParaRPr lang="en-US" dirty="0"/>
           </a:p>
@@ -12229,7 +11411,9 @@
             <a:endParaRPr lang="en-US" altLang="zh-CN" dirty="0"/>
           </a:p>
           <a:p>
-            <a:pPr lvl="1"/>
+            <a:pPr marL="457200" lvl="1" indent="0">
+              <a:buNone/>
+            </a:pPr>
             <a:r>
               <a:rPr lang="zh-CN" altLang="en-US" dirty="0"/>
               <a:t>。。。</a:t>
@@ -13909,7 +13093,19 @@
           <a:bodyPr/>
           <a:lstStyle/>
           <a:p>
-            <a:endParaRPr lang="en-US"/>
+            <a:r>
+              <a:rPr lang="zh-CN" altLang="en-US" dirty="0"/>
+              <a:t>易变性（</a:t>
+            </a:r>
+            <a:r>
+              <a:rPr lang="en-US" altLang="zh-CN" dirty="0"/>
+              <a:t>Changeability</a:t>
+            </a:r>
+            <a:r>
+              <a:rPr lang="zh-CN" altLang="en-US" dirty="0"/>
+              <a:t>）</a:t>
+            </a:r>
+            <a:endParaRPr lang="en-US" dirty="0"/>
           </a:p>
         </p:txBody>
       </p:sp>
@@ -13946,6 +13142,9 @@
               <a:rPr lang="zh-CN" altLang="en-US" dirty="0"/>
               <a:t>） 软件看上去很容易修改，修改软件比修改硬件容易多了。人们自然地期 待软件能在下面两种情况下“改变”： </a:t>
             </a:r>
+            <a:endParaRPr lang="en-US" altLang="zh-CN" dirty="0"/>
+          </a:p>
+          <a:p>
             <a:r>
               <a:rPr lang="en-US" altLang="zh-CN" dirty="0"/>
               <a:t>a) </a:t>
@@ -13954,21 +13153,26 @@
               <a:rPr lang="zh-CN" altLang="en-US" dirty="0"/>
               <a:t>让软件做新的事情；</a:t>
             </a:r>
+            <a:endParaRPr lang="en-US" altLang="zh-CN" dirty="0"/>
+          </a:p>
+          <a:p>
             <a:r>
               <a:rPr lang="en-US" altLang="zh-CN" dirty="0"/>
               <a:t>b) </a:t>
             </a:r>
             <a:r>
               <a:rPr lang="zh-CN" altLang="en-US" dirty="0"/>
-              <a:t>让软件 适应新的硬件。但是与此同时，正确地修改软件是一件很困难的事情 </a:t>
-            </a:r>
-            <a:r>
-              <a:rPr lang="en-US" altLang="zh-CN" dirty="0"/>
-              <a:t>9</a:t>
-            </a:r>
-            <a:r>
-              <a:rPr lang="zh-CN" altLang="en-US" dirty="0"/>
-              <a:t>。</a:t>
+              <a:t>让软件 适应新的硬件。</a:t>
+            </a:r>
+            <a:endParaRPr lang="en-US" altLang="zh-CN" dirty="0"/>
+          </a:p>
+          <a:p>
+            <a:endParaRPr lang="en-US" altLang="zh-CN" dirty="0"/>
+          </a:p>
+          <a:p>
+            <a:r>
+              <a:rPr lang="zh-CN" altLang="en-US" dirty="0"/>
+              <a:t>但是与此同时，正确地修改软件是一件很困难的事情。</a:t>
             </a:r>
           </a:p>
           <a:p>
@@ -14008,10 +13212,10 @@
       </p:grpSpPr>
       <p:sp>
         <p:nvSpPr>
-          <p:cNvPr id="2" name="Title 1">
+          <p:cNvPr id="2" name="标题 1">
             <a:extLst>
               <a:ext uri="{FF2B5EF4-FFF2-40B4-BE49-F238E27FC236}">
-                <a16:creationId xmlns:a16="http://schemas.microsoft.com/office/drawing/2014/main" id="{BF4A00D8-3956-4483-821E-2C87CA5085BE}"/>
+                <a16:creationId xmlns:a16="http://schemas.microsoft.com/office/drawing/2014/main" id="{5EA60B4C-B131-1B47-28AD-D2684BFDFFCC}"/>
               </a:ext>
             </a:extLst>
           </p:cNvPr>
@@ -14024,56 +13228,78 @@
         </p:nvSpPr>
         <p:spPr/>
         <p:txBody>
-          <a:bodyPr/>
+          <a:bodyPr>
+            <a:normAutofit/>
+          </a:bodyPr>
           <a:lstStyle/>
           <a:p>
-            <a:endParaRPr lang="en-US"/>
-          </a:p>
-        </p:txBody>
-      </p:sp>
-      <p:sp>
-        <p:nvSpPr>
-          <p:cNvPr id="3" name="Content Placeholder 2">
+            <a:r>
+              <a:rPr lang="en-US" altLang="zh-CN" sz="4400" dirty="0"/>
+              <a:t>Knowledge: </a:t>
+            </a:r>
+            <a:r>
+              <a:rPr lang="en-US" altLang="zh-CN" sz="3600" dirty="0"/>
+              <a:t>Invisible</a:t>
+            </a:r>
+            <a:r>
+              <a:rPr lang="zh-CN" altLang="en-US" sz="3600" dirty="0"/>
+              <a:t>，</a:t>
+            </a:r>
+            <a:r>
+              <a:rPr lang="en-US" altLang="zh-CN" sz="3600" dirty="0"/>
+              <a:t>fragmented</a:t>
+            </a:r>
+            <a:r>
+              <a:rPr lang="zh-CN" altLang="en-US" sz="3600" dirty="0"/>
+              <a:t>，</a:t>
+            </a:r>
+            <a:r>
+              <a:rPr lang="en-US" altLang="zh-CN" sz="3600" dirty="0"/>
+              <a:t>missing… </a:t>
+            </a:r>
+            <a:endParaRPr lang="zh-CN" altLang="en-US" sz="4400" dirty="0"/>
+          </a:p>
+        </p:txBody>
+      </p:sp>
+      <p:pic>
+        <p:nvPicPr>
+          <p:cNvPr id="5" name="内容占位符 4" descr="一些文字和图片的手机截图&#10;&#10;AI 生成的内容可能不正确。">
             <a:extLst>
               <a:ext uri="{FF2B5EF4-FFF2-40B4-BE49-F238E27FC236}">
-                <a16:creationId xmlns:a16="http://schemas.microsoft.com/office/drawing/2014/main" id="{33FAEA2C-2297-4D36-A6D1-9C6D93E4E91A}"/>
+                <a16:creationId xmlns:a16="http://schemas.microsoft.com/office/drawing/2014/main" id="{B7129103-77F6-F549-B9CA-610ABA4B30C9}"/>
               </a:ext>
             </a:extLst>
           </p:cNvPr>
-          <p:cNvSpPr>
-            <a:spLocks noGrp="1"/>
-          </p:cNvSpPr>
+          <p:cNvPicPr>
+            <a:picLocks noGrp="1" noChangeAspect="1"/>
+          </p:cNvPicPr>
           <p:nvPr>
             <p:ph idx="1"/>
           </p:nvPr>
-        </p:nvSpPr>
-        <p:spPr/>
-        <p:txBody>
-          <a:bodyPr/>
-          <a:lstStyle/>
-          <a:p>
-            <a:r>
-              <a:rPr lang="zh-CN" altLang="en-US" dirty="0"/>
-              <a:t>服从性（</a:t>
-            </a:r>
-            <a:r>
-              <a:rPr lang="en-US" altLang="zh-CN" dirty="0"/>
-              <a:t>Conformity</a:t>
-            </a:r>
-            <a:r>
-              <a:rPr lang="zh-CN" altLang="en-US" dirty="0"/>
-              <a:t>） 软件不能独立存在，它总是要运行在硬件上面，它要服从系统中其他组 成部分的要求，它还要服从用户的要求、行业系统的要求（例如银行利 率的变化）。</a:t>
-            </a:r>
-          </a:p>
-          <a:p>
-            <a:endParaRPr lang="en-US" dirty="0"/>
-          </a:p>
-        </p:txBody>
-      </p:sp>
+        </p:nvPicPr>
+        <p:blipFill>
+          <a:blip r:embed="rId3">
+            <a:extLst>
+              <a:ext uri="{28A0092B-C50C-407E-A947-70E740481C1C}">
+                <a14:useLocalDpi xmlns:a14="http://schemas.microsoft.com/office/drawing/2010/main" val="0"/>
+              </a:ext>
+            </a:extLst>
+          </a:blip>
+          <a:stretch>
+            <a:fillRect/>
+          </a:stretch>
+        </p:blipFill>
+        <p:spPr>
+          <a:xfrm>
+            <a:off x="2410048" y="1825625"/>
+            <a:ext cx="7654479" cy="4351338"/>
+          </a:xfrm>
+        </p:spPr>
+      </p:pic>
     </p:spTree>
     <p:extLst>
       <p:ext uri="{BB962C8B-B14F-4D97-AF65-F5344CB8AC3E}">
-        <p14:creationId xmlns:p14="http://schemas.microsoft.com/office/powerpoint/2010/main" val="2123279561"/>
+        <p14:creationId xmlns:p14="http://schemas.microsoft.com/office/powerpoint/2010/main" val="3836370380"/>
       </p:ext>
     </p:extLst>
   </p:cSld>
@@ -14105,7 +13331,7 @@
           <p:cNvPr id="2" name="Title 1">
             <a:extLst>
               <a:ext uri="{FF2B5EF4-FFF2-40B4-BE49-F238E27FC236}">
-                <a16:creationId xmlns:a16="http://schemas.microsoft.com/office/drawing/2014/main" id="{162AED86-CD5A-478A-A45A-4F9B2D208EC4}"/>
+                <a16:creationId xmlns:a16="http://schemas.microsoft.com/office/drawing/2014/main" id="{BF4A00D8-3956-4483-821E-2C87CA5085BE}"/>
               </a:ext>
             </a:extLst>
           </p:cNvPr>
@@ -14123,11 +13349,11 @@
           <a:p>
             <a:r>
               <a:rPr lang="zh-CN" altLang="en-US" dirty="0"/>
-              <a:t>非连续性（</a:t>
+              <a:t>服从性（</a:t>
             </a:r>
             <a:r>
               <a:rPr lang="en-US" altLang="zh-CN" dirty="0"/>
-              <a:t>Discontinuity</a:t>
+              <a:t>Conformity</a:t>
             </a:r>
             <a:r>
               <a:rPr lang="zh-CN" altLang="en-US" dirty="0"/>
@@ -14142,7 +13368,7 @@
           <p:cNvPr id="3" name="Content Placeholder 2">
             <a:extLst>
               <a:ext uri="{FF2B5EF4-FFF2-40B4-BE49-F238E27FC236}">
-                <a16:creationId xmlns:a16="http://schemas.microsoft.com/office/drawing/2014/main" id="{FC6F580A-2846-4332-949E-4192AB137126}"/>
+                <a16:creationId xmlns:a16="http://schemas.microsoft.com/office/drawing/2014/main" id="{33FAEA2C-2297-4D36-A6D1-9C6D93E4E91A}"/>
               </a:ext>
             </a:extLst>
           </p:cNvPr>
@@ -14160,14 +13386,15 @@
           <a:p>
             <a:r>
               <a:rPr lang="zh-CN" altLang="en-US" dirty="0"/>
-              <a:t>人们比较容易理解连续的系统：增加输入，就能看到相应输出的增加。</a:t>
-            </a:r>
-            <a:endParaRPr lang="en-US" altLang="zh-CN" dirty="0"/>
-          </a:p>
-          <a:p>
-            <a:r>
-              <a:rPr lang="zh-CN" altLang="en-US" dirty="0"/>
-              <a:t>但是许多软件系统却没有这样的特性，有时输入上很小的变化，会 引起输出上极大的变化。</a:t>
+              <a:t>服从性（</a:t>
+            </a:r>
+            <a:r>
+              <a:rPr lang="en-US" altLang="zh-CN" dirty="0"/>
+              <a:t>Conformity</a:t>
+            </a:r>
+            <a:r>
+              <a:rPr lang="zh-CN" altLang="en-US" dirty="0"/>
+              <a:t>） 软件不能独立存在，它总是要运行在硬件上面，它要服从系统中其他组 成部分的要求，它还要服从用户的要求、行业系统的要求（例如银行利 率的变化）。</a:t>
             </a:r>
           </a:p>
           <a:p>
@@ -14178,7 +13405,7 @@
     </p:spTree>
     <p:extLst>
       <p:ext uri="{BB962C8B-B14F-4D97-AF65-F5344CB8AC3E}">
-        <p14:creationId xmlns:p14="http://schemas.microsoft.com/office/powerpoint/2010/main" val="463745865"/>
+        <p14:creationId xmlns:p14="http://schemas.microsoft.com/office/powerpoint/2010/main" val="2123279561"/>
       </p:ext>
     </p:extLst>
   </p:cSld>
@@ -14314,7 +13541,7 @@
           <p:cNvPr id="2" name="Title 1">
             <a:extLst>
               <a:ext uri="{FF2B5EF4-FFF2-40B4-BE49-F238E27FC236}">
-                <a16:creationId xmlns:a16="http://schemas.microsoft.com/office/drawing/2014/main" id="{73BF1C45-F79D-4715-A111-8C79ADF369FD}"/>
+                <a16:creationId xmlns:a16="http://schemas.microsoft.com/office/drawing/2014/main" id="{162AED86-CD5A-478A-A45A-4F9B2D208EC4}"/>
               </a:ext>
             </a:extLst>
           </p:cNvPr>
@@ -14332,7 +13559,15 @@
           <a:p>
             <a:r>
               <a:rPr lang="zh-CN" altLang="en-US" dirty="0"/>
-              <a:t>软件的其他特性</a:t>
+              <a:t>非连续性（</a:t>
+            </a:r>
+            <a:r>
+              <a:rPr lang="en-US" altLang="zh-CN" dirty="0"/>
+              <a:t>Discontinuity</a:t>
+            </a:r>
+            <a:r>
+              <a:rPr lang="zh-CN" altLang="en-US" dirty="0"/>
+              <a:t>）</a:t>
             </a:r>
             <a:endParaRPr lang="en-US" dirty="0"/>
           </a:p>
@@ -14343,7 +13578,7 @@
           <p:cNvPr id="3" name="Content Placeholder 2">
             <a:extLst>
               <a:ext uri="{FF2B5EF4-FFF2-40B4-BE49-F238E27FC236}">
-                <a16:creationId xmlns:a16="http://schemas.microsoft.com/office/drawing/2014/main" id="{0FA4E4D2-BEFC-49ED-A9B3-D81606F857E8}"/>
+                <a16:creationId xmlns:a16="http://schemas.microsoft.com/office/drawing/2014/main" id="{FC6F580A-2846-4332-949E-4192AB137126}"/>
               </a:ext>
             </a:extLst>
           </p:cNvPr>
@@ -14356,150 +13591,22 @@
         </p:nvSpPr>
         <p:spPr/>
         <p:txBody>
-          <a:bodyPr>
-            <a:normAutofit fontScale="62500" lnSpcReduction="20000"/>
-          </a:bodyPr>
+          <a:bodyPr/>
           <a:lstStyle/>
           <a:p>
-            <a:pPr marL="118872" indent="0">
-              <a:lnSpc>
-                <a:spcPct val="120000"/>
-              </a:lnSpc>
-              <a:buNone/>
-            </a:pPr>
-            <a:r>
-              <a:rPr lang="zh-CN" altLang="en-US" dirty="0"/>
-              <a:t>新特性：</a:t>
+            <a:r>
+              <a:rPr lang="zh-CN" altLang="en-US" dirty="0"/>
+              <a:t>人们比较容易理解连续的系统：增加输入，就能看到相应输出的增加。</a:t>
             </a:r>
             <a:endParaRPr lang="en-US" altLang="zh-CN" dirty="0"/>
           </a:p>
           <a:p>
-            <a:pPr>
-              <a:lnSpc>
-                <a:spcPct val="120000"/>
-              </a:lnSpc>
-            </a:pPr>
-            <a:r>
-              <a:rPr lang="zh-CN" altLang="en-US" dirty="0"/>
-              <a:t>有许多不同的程序设计语言、</a:t>
-            </a:r>
-            <a:endParaRPr lang="en-US" altLang="zh-CN" dirty="0"/>
-          </a:p>
-          <a:p>
-            <a:pPr>
-              <a:lnSpc>
-                <a:spcPct val="120000"/>
-              </a:lnSpc>
-            </a:pPr>
-            <a:r>
-              <a:rPr lang="zh-CN" altLang="en-US" dirty="0"/>
-              <a:t>软件工具和软件开发平台</a:t>
-            </a:r>
-            <a:endParaRPr lang="en-US" altLang="zh-CN" dirty="0"/>
-          </a:p>
-          <a:p>
-            <a:pPr>
-              <a:lnSpc>
-                <a:spcPct val="120000"/>
-              </a:lnSpc>
-            </a:pPr>
-            <a:r>
-              <a:rPr lang="zh-CN" altLang="en-US" dirty="0"/>
-              <a:t>存在许多不同的软件开发流程</a:t>
-            </a:r>
-            <a:endParaRPr lang="en-US" altLang="zh-CN" dirty="0"/>
-          </a:p>
-          <a:p>
-            <a:pPr>
-              <a:lnSpc>
-                <a:spcPct val="120000"/>
-              </a:lnSpc>
-            </a:pPr>
-            <a:r>
-              <a:rPr lang="zh-CN" altLang="en-US" dirty="0"/>
-              <a:t>软件团队中存在许多不同的角色</a:t>
-            </a:r>
-            <a:endParaRPr lang="en-US" altLang="zh-CN" dirty="0"/>
-          </a:p>
-          <a:p>
-            <a:pPr>
-              <a:lnSpc>
-                <a:spcPct val="120000"/>
-              </a:lnSpc>
-            </a:pPr>
-            <a:r>
-              <a:rPr lang="zh-CN" altLang="en-US" dirty="0"/>
-              <a:t>软件通常既可以存储在磁带上，也可以存储在</a:t>
-            </a:r>
-            <a:r>
-              <a:rPr lang="en-US" altLang="zh-CN" dirty="0"/>
-              <a:t>CD/DVD</a:t>
-            </a:r>
-            <a:r>
-              <a:rPr lang="zh-CN" altLang="en-US" dirty="0"/>
-              <a:t>上</a:t>
-            </a:r>
-            <a:endParaRPr lang="en-US" altLang="zh-CN" dirty="0"/>
-          </a:p>
-          <a:p>
-            <a:pPr>
-              <a:lnSpc>
-                <a:spcPct val="120000"/>
-              </a:lnSpc>
-            </a:pPr>
-            <a:r>
-              <a:rPr lang="en-US" altLang="zh-CN" dirty="0"/>
-              <a:t>AI </a:t>
-            </a:r>
-            <a:r>
-              <a:rPr lang="zh-CN" altLang="en-US" dirty="0"/>
-              <a:t>可以写程序， </a:t>
-            </a:r>
-            <a:r>
-              <a:rPr lang="en-US" altLang="zh-CN" dirty="0"/>
-              <a:t>GitHub </a:t>
-            </a:r>
-            <a:r>
-              <a:rPr lang="zh-CN" altLang="en-US" dirty="0"/>
-              <a:t>社区</a:t>
-            </a:r>
-          </a:p>
-          <a:p>
-            <a:pPr marL="118872" indent="0">
-              <a:lnSpc>
-                <a:spcPct val="120000"/>
-              </a:lnSpc>
-              <a:buNone/>
-            </a:pPr>
-            <a:endParaRPr lang="en-US" altLang="zh-CN" dirty="0"/>
-          </a:p>
-          <a:p>
-            <a:pPr marL="118872" indent="0">
-              <a:lnSpc>
-                <a:spcPct val="120000"/>
-              </a:lnSpc>
-              <a:buNone/>
-            </a:pPr>
-            <a:r>
-              <a:rPr lang="zh-CN" altLang="en-US" dirty="0"/>
-              <a:t>但是这些非本质、临时的特性并不能决定软件工程的本质问题。例如，有人发明 了一种新的程序设计语言，或者又出现了一个新的软件开发流程，或者网上出现 了又一个程序员技术社区</a:t>
-            </a:r>
-            <a:r>
-              <a:rPr lang="en-US" altLang="zh-CN" dirty="0"/>
-              <a:t>……</a:t>
-            </a:r>
-            <a:r>
-              <a:rPr lang="zh-CN" altLang="en-US" dirty="0"/>
-              <a:t>这些事并不能改变软件工程的根本难度，这也是著 名的“没有银弹（</a:t>
-            </a:r>
-            <a:r>
-              <a:rPr lang="en-US" altLang="zh-CN" dirty="0"/>
-              <a:t>No Silver Bullet</a:t>
-            </a:r>
-            <a:r>
-              <a:rPr lang="zh-CN" altLang="en-US" dirty="0"/>
-              <a:t>）”论断所阐述的道理。</a:t>
-            </a:r>
+            <a:r>
+              <a:rPr lang="zh-CN" altLang="en-US" dirty="0"/>
+              <a:t>但是许多软件系统却没有这样的特性，有时输入上很小的变化，会 引起输出上极大的变化。</a:t>
+            </a:r>
+          </a:p>
+          <a:p>
             <a:endParaRPr lang="en-US" dirty="0"/>
           </a:p>
         </p:txBody>
@@ -14507,7 +13614,7 @@
     </p:spTree>
     <p:extLst>
       <p:ext uri="{BB962C8B-B14F-4D97-AF65-F5344CB8AC3E}">
-        <p14:creationId xmlns:p14="http://schemas.microsoft.com/office/powerpoint/2010/main" val="1373211857"/>
+        <p14:creationId xmlns:p14="http://schemas.microsoft.com/office/powerpoint/2010/main" val="463745865"/>
       </p:ext>
     </p:extLst>
   </p:cSld>
@@ -14536,6 +13643,231 @@
       </p:grpSpPr>
       <p:sp>
         <p:nvSpPr>
+          <p:cNvPr id="2" name="Title 1">
+            <a:extLst>
+              <a:ext uri="{FF2B5EF4-FFF2-40B4-BE49-F238E27FC236}">
+                <a16:creationId xmlns:a16="http://schemas.microsoft.com/office/drawing/2014/main" id="{73BF1C45-F79D-4715-A111-8C79ADF369FD}"/>
+              </a:ext>
+            </a:extLst>
+          </p:cNvPr>
+          <p:cNvSpPr>
+            <a:spLocks noGrp="1"/>
+          </p:cNvSpPr>
+          <p:nvPr>
+            <p:ph type="title"/>
+          </p:nvPr>
+        </p:nvSpPr>
+        <p:spPr/>
+        <p:txBody>
+          <a:bodyPr/>
+          <a:lstStyle/>
+          <a:p>
+            <a:r>
+              <a:rPr lang="zh-CN" altLang="en-US" dirty="0"/>
+              <a:t>软件的其他特性</a:t>
+            </a:r>
+            <a:endParaRPr lang="en-US" dirty="0"/>
+          </a:p>
+        </p:txBody>
+      </p:sp>
+      <p:sp>
+        <p:nvSpPr>
+          <p:cNvPr id="3" name="Content Placeholder 2">
+            <a:extLst>
+              <a:ext uri="{FF2B5EF4-FFF2-40B4-BE49-F238E27FC236}">
+                <a16:creationId xmlns:a16="http://schemas.microsoft.com/office/drawing/2014/main" id="{0FA4E4D2-BEFC-49ED-A9B3-D81606F857E8}"/>
+              </a:ext>
+            </a:extLst>
+          </p:cNvPr>
+          <p:cNvSpPr>
+            <a:spLocks noGrp="1"/>
+          </p:cNvSpPr>
+          <p:nvPr>
+            <p:ph idx="1"/>
+          </p:nvPr>
+        </p:nvSpPr>
+        <p:spPr/>
+        <p:txBody>
+          <a:bodyPr>
+            <a:normAutofit fontScale="70000" lnSpcReduction="20000"/>
+          </a:bodyPr>
+          <a:lstStyle/>
+          <a:p>
+            <a:pPr marL="118872" indent="0">
+              <a:lnSpc>
+                <a:spcPct val="120000"/>
+              </a:lnSpc>
+              <a:buNone/>
+            </a:pPr>
+            <a:r>
+              <a:rPr lang="zh-CN" altLang="en-US" dirty="0"/>
+              <a:t>新特性：</a:t>
+            </a:r>
+            <a:endParaRPr lang="en-US" altLang="zh-CN" dirty="0"/>
+          </a:p>
+          <a:p>
+            <a:pPr lvl="1">
+              <a:lnSpc>
+                <a:spcPct val="120000"/>
+              </a:lnSpc>
+            </a:pPr>
+            <a:r>
+              <a:rPr lang="zh-CN" altLang="en-US" dirty="0"/>
+              <a:t>有许多不同的程序设计语言、</a:t>
+            </a:r>
+            <a:endParaRPr lang="en-US" altLang="zh-CN" dirty="0"/>
+          </a:p>
+          <a:p>
+            <a:pPr lvl="1">
+              <a:lnSpc>
+                <a:spcPct val="120000"/>
+              </a:lnSpc>
+            </a:pPr>
+            <a:r>
+              <a:rPr lang="zh-CN" altLang="en-US" dirty="0"/>
+              <a:t>软件工具和软件开发平台</a:t>
+            </a:r>
+            <a:endParaRPr lang="en-US" altLang="zh-CN" dirty="0"/>
+          </a:p>
+          <a:p>
+            <a:pPr lvl="1">
+              <a:lnSpc>
+                <a:spcPct val="120000"/>
+              </a:lnSpc>
+            </a:pPr>
+            <a:r>
+              <a:rPr lang="zh-CN" altLang="en-US" dirty="0"/>
+              <a:t>存在许多不同的软件开发流程</a:t>
+            </a:r>
+            <a:endParaRPr lang="en-US" altLang="zh-CN" dirty="0"/>
+          </a:p>
+          <a:p>
+            <a:pPr lvl="1">
+              <a:lnSpc>
+                <a:spcPct val="120000"/>
+              </a:lnSpc>
+            </a:pPr>
+            <a:r>
+              <a:rPr lang="zh-CN" altLang="en-US" dirty="0"/>
+              <a:t>软件团队中存在许多不同的角色</a:t>
+            </a:r>
+            <a:endParaRPr lang="en-US" altLang="zh-CN" dirty="0"/>
+          </a:p>
+          <a:p>
+            <a:pPr lvl="1">
+              <a:lnSpc>
+                <a:spcPct val="120000"/>
+              </a:lnSpc>
+            </a:pPr>
+            <a:r>
+              <a:rPr lang="zh-CN" altLang="en-US" dirty="0"/>
+              <a:t>软件通常既可以存储在磁带上，也可以存储在</a:t>
+            </a:r>
+            <a:r>
+              <a:rPr lang="en-US" altLang="zh-CN" dirty="0"/>
+              <a:t>CD/DVD</a:t>
+            </a:r>
+            <a:r>
+              <a:rPr lang="zh-CN" altLang="en-US" dirty="0"/>
+              <a:t>上</a:t>
+            </a:r>
+            <a:endParaRPr lang="en-US" altLang="zh-CN" dirty="0"/>
+          </a:p>
+          <a:p>
+            <a:pPr lvl="1">
+              <a:lnSpc>
+                <a:spcPct val="120000"/>
+              </a:lnSpc>
+            </a:pPr>
+            <a:r>
+              <a:rPr lang="en-US" altLang="zh-CN" dirty="0"/>
+              <a:t>AI </a:t>
+            </a:r>
+            <a:r>
+              <a:rPr lang="zh-CN" altLang="en-US" dirty="0"/>
+              <a:t>可以写程序， </a:t>
+            </a:r>
+            <a:r>
+              <a:rPr lang="en-US" altLang="zh-CN" dirty="0"/>
+              <a:t>GitHub </a:t>
+            </a:r>
+            <a:r>
+              <a:rPr lang="zh-CN" altLang="en-US" dirty="0"/>
+              <a:t>社区</a:t>
+            </a:r>
+          </a:p>
+          <a:p>
+            <a:pPr marL="118872" indent="0">
+              <a:lnSpc>
+                <a:spcPct val="120000"/>
+              </a:lnSpc>
+              <a:buNone/>
+            </a:pPr>
+            <a:endParaRPr lang="en-US" altLang="zh-CN" dirty="0"/>
+          </a:p>
+          <a:p>
+            <a:pPr marL="118872" indent="0">
+              <a:lnSpc>
+                <a:spcPct val="120000"/>
+              </a:lnSpc>
+              <a:buNone/>
+            </a:pPr>
+            <a:r>
+              <a:rPr lang="zh-CN" altLang="en-US" dirty="0"/>
+              <a:t>但是这些非本质、临时的特性并不能决定软件工程的本质问题。例如，有人发明 了一种新的程序设计语言，或者又出现了一个新的软件开发流程，或者网上出现 了又一个程序员技术社区</a:t>
+            </a:r>
+            <a:r>
+              <a:rPr lang="en-US" altLang="zh-CN" dirty="0"/>
+              <a:t>……</a:t>
+            </a:r>
+            <a:r>
+              <a:rPr lang="zh-CN" altLang="en-US" dirty="0"/>
+              <a:t>这些事并不能改变软件工程的根本难度，这也是著 名的“没有银弹（</a:t>
+            </a:r>
+            <a:r>
+              <a:rPr lang="en-US" altLang="zh-CN" dirty="0"/>
+              <a:t>No Silver Bullet</a:t>
+            </a:r>
+            <a:r>
+              <a:rPr lang="zh-CN" altLang="en-US" dirty="0"/>
+              <a:t>）”论断所阐述的道理。</a:t>
+            </a:r>
+            <a:endParaRPr lang="en-US" dirty="0"/>
+          </a:p>
+        </p:txBody>
+      </p:sp>
+    </p:spTree>
+    <p:extLst>
+      <p:ext uri="{BB962C8B-B14F-4D97-AF65-F5344CB8AC3E}">
+        <p14:creationId xmlns:p14="http://schemas.microsoft.com/office/powerpoint/2010/main" val="1373211857"/>
+      </p:ext>
+    </p:extLst>
+  </p:cSld>
+  <p:clrMapOvr>
+    <a:masterClrMapping/>
+  </p:clrMapOvr>
+</p:sld>
+</file>
+
+<file path=ppt/slides/slide32.xml><?xml version="1.0" encoding="utf-8"?>
+<p:sld xmlns:a="http://schemas.openxmlformats.org/drawingml/2006/main" xmlns:r="http://schemas.openxmlformats.org/officeDocument/2006/relationships" xmlns:p="http://schemas.openxmlformats.org/presentationml/2006/main">
+  <p:cSld>
+    <p:spTree>
+      <p:nvGrpSpPr>
+        <p:cNvPr id="1" name=""/>
+        <p:cNvGrpSpPr/>
+        <p:nvPr/>
+      </p:nvGrpSpPr>
+      <p:grpSpPr>
+        <a:xfrm>
+          <a:off x="0" y="0"/>
+          <a:ext cx="0" cy="0"/>
+          <a:chOff x="0" y="0"/>
+          <a:chExt cx="0" cy="0"/>
+        </a:xfrm>
+      </p:grpSpPr>
+      <p:sp>
+        <p:nvSpPr>
           <p:cNvPr id="2" name="Title 1"/>
           <p:cNvSpPr>
             <a:spLocks noGrp="1"/>
@@ -14652,7 +13984,7 @@
 </p:sld>
 </file>
 
-<file path=ppt/slides/slide32.xml><?xml version="1.0" encoding="utf-8"?>
+<file path=ppt/slides/slide33.xml><?xml version="1.0" encoding="utf-8"?>
 <p:sld xmlns:a="http://schemas.openxmlformats.org/drawingml/2006/main" xmlns:r="http://schemas.openxmlformats.org/officeDocument/2006/relationships" xmlns:p="http://schemas.openxmlformats.org/presentationml/2006/main" showMasterPhAnim="0">
   <p:cSld>
     <p:spTree>
@@ -14754,8 +14086,12 @@
           <a:p>
             <a:pPr lvl="1" eaLnBrk="1" hangingPunct="1"/>
             <a:r>
+              <a:rPr lang="en-US" altLang="zh-CN" sz="2200"/>
+              <a:t>(picture </a:t>
+            </a:r>
+            <a:r>
               <a:rPr lang="en-US" altLang="zh-CN" sz="2200" dirty="0"/>
-              <a:t>(see picture)</a:t>
+              <a:t>missing)</a:t>
             </a:r>
           </a:p>
         </p:txBody>
@@ -14768,7 +14104,7 @@
 </p:sld>
 </file>
 
-<file path=ppt/slides/slide33.xml><?xml version="1.0" encoding="utf-8"?>
+<file path=ppt/slides/slide34.xml><?xml version="1.0" encoding="utf-8"?>
 <p:sld xmlns:a="http://schemas.openxmlformats.org/drawingml/2006/main" xmlns:r="http://schemas.openxmlformats.org/officeDocument/2006/relationships" xmlns:p="http://schemas.openxmlformats.org/presentationml/2006/main">
   <p:cSld>
     <p:spTree>
@@ -14842,7 +14178,7 @@
         </p:nvSpPr>
         <p:spPr>
           <a:xfrm>
-            <a:off x="1981200" y="1775192"/>
+            <a:off x="838200" y="1690688"/>
             <a:ext cx="5715000" cy="4927361"/>
           </a:xfrm>
         </p:spPr>
@@ -15031,452 +14367,6 @@
 </p:sld>
 </file>
 
-<file path=ppt/slides/slide34.xml><?xml version="1.0" encoding="utf-8"?>
-<p:sld xmlns:a="http://schemas.openxmlformats.org/drawingml/2006/main" xmlns:r="http://schemas.openxmlformats.org/officeDocument/2006/relationships" xmlns:p="http://schemas.openxmlformats.org/presentationml/2006/main">
-  <p:cSld>
-    <p:spTree>
-      <p:nvGrpSpPr>
-        <p:cNvPr id="1" name=""/>
-        <p:cNvGrpSpPr/>
-        <p:nvPr/>
-      </p:nvGrpSpPr>
-      <p:grpSpPr>
-        <a:xfrm>
-          <a:off x="0" y="0"/>
-          <a:ext cx="0" cy="0"/>
-          <a:chOff x="0" y="0"/>
-          <a:chExt cx="0" cy="0"/>
-        </a:xfrm>
-      </p:grpSpPr>
-      <p:sp>
-        <p:nvSpPr>
-          <p:cNvPr id="2" name="Title 1">
-            <a:extLst>
-              <a:ext uri="{FF2B5EF4-FFF2-40B4-BE49-F238E27FC236}">
-                <a16:creationId xmlns:a16="http://schemas.microsoft.com/office/drawing/2014/main" id="{729BBF23-2373-4FD4-9AE4-69D1D32A5AB6}"/>
-              </a:ext>
-            </a:extLst>
-          </p:cNvPr>
-          <p:cNvSpPr>
-            <a:spLocks noGrp="1"/>
-          </p:cNvSpPr>
-          <p:nvPr>
-            <p:ph type="title"/>
-          </p:nvPr>
-        </p:nvSpPr>
-        <p:spPr/>
-        <p:txBody>
-          <a:bodyPr>
-            <a:normAutofit/>
-          </a:bodyPr>
-          <a:lstStyle/>
-          <a:p>
-            <a:r>
-              <a:rPr lang="zh-CN" altLang="en-US" sz="4800" dirty="0"/>
-              <a:t>事故的调查</a:t>
-            </a:r>
-            <a:endParaRPr lang="en-US" dirty="0"/>
-          </a:p>
-        </p:txBody>
-      </p:sp>
-      <p:sp>
-        <p:nvSpPr>
-          <p:cNvPr id="3" name="Content Placeholder 2">
-            <a:extLst>
-              <a:ext uri="{FF2B5EF4-FFF2-40B4-BE49-F238E27FC236}">
-                <a16:creationId xmlns:a16="http://schemas.microsoft.com/office/drawing/2014/main" id="{05105991-655B-4992-8AC4-905DE58F2176}"/>
-              </a:ext>
-            </a:extLst>
-          </p:cNvPr>
-          <p:cNvSpPr>
-            <a:spLocks noGrp="1"/>
-          </p:cNvSpPr>
-          <p:nvPr>
-            <p:ph idx="1"/>
-          </p:nvPr>
-        </p:nvSpPr>
-        <p:spPr>
-          <a:xfrm>
-            <a:off x="914400" y="1371600"/>
-            <a:ext cx="10363200" cy="5121275"/>
-          </a:xfrm>
-        </p:spPr>
-        <p:txBody>
-          <a:bodyPr>
-            <a:normAutofit fontScale="92500" lnSpcReduction="20000"/>
-          </a:bodyPr>
-          <a:lstStyle/>
-          <a:p>
-            <a:pPr marL="633222" indent="-514350">
-              <a:lnSpc>
-                <a:spcPct val="120000"/>
-              </a:lnSpc>
-              <a:buFont typeface="+mj-lt"/>
-              <a:buAutoNum type="arabicPeriod"/>
-            </a:pPr>
-            <a:r>
-              <a:rPr lang="zh-CN" altLang="en-US" sz="1800" dirty="0"/>
-              <a:t>软件外包公司对于 </a:t>
-            </a:r>
-            <a:r>
-              <a:rPr lang="en-US" altLang="zh-CN" sz="1800" dirty="0"/>
-              <a:t>mission-critical </a:t>
-            </a:r>
-            <a:r>
-              <a:rPr lang="zh-CN" altLang="en-US" sz="1800" dirty="0"/>
-              <a:t>的软件模块有很完备的检查和测试，但是对于其他模块则没有完备的管理</a:t>
-            </a:r>
-            <a:endParaRPr lang="en-US" altLang="zh-CN" sz="1800" dirty="0"/>
-          </a:p>
-          <a:p>
-            <a:pPr marL="633222" indent="-514350">
-              <a:lnSpc>
-                <a:spcPct val="120000"/>
-              </a:lnSpc>
-              <a:buFont typeface="+mj-lt"/>
-              <a:buAutoNum type="arabicPeriod"/>
-            </a:pPr>
-            <a:r>
-              <a:rPr lang="zh-CN" altLang="en-US" sz="1800" dirty="0"/>
-              <a:t>程序员写了一个不重要的</a:t>
-            </a:r>
-            <a:r>
-              <a:rPr lang="en-US" altLang="zh-CN" sz="1800" dirty="0"/>
-              <a:t>log </a:t>
-            </a:r>
-            <a:r>
-              <a:rPr lang="zh-CN" altLang="en-US" sz="1800" dirty="0"/>
-              <a:t>功能，其中用英制 </a:t>
-            </a:r>
-            <a:r>
-              <a:rPr lang="en-US" altLang="zh-CN" sz="1800" dirty="0"/>
-              <a:t>(</a:t>
-            </a:r>
-            <a:r>
-              <a:rPr lang="zh-CN" altLang="en-US" sz="1800" dirty="0"/>
-              <a:t>磅* 英尺</a:t>
-            </a:r>
-            <a:r>
-              <a:rPr lang="en-US" altLang="zh-CN" sz="1800" dirty="0"/>
-              <a:t>) </a:t>
-            </a:r>
-            <a:r>
-              <a:rPr lang="zh-CN" altLang="en-US" sz="1800" dirty="0"/>
-              <a:t>表示力</a:t>
-            </a:r>
-            <a:r>
-              <a:rPr lang="en-US" altLang="zh-CN" sz="1800" dirty="0"/>
-              <a:t>,  </a:t>
-            </a:r>
-            <a:r>
-              <a:rPr lang="zh-CN" altLang="en-US" sz="1800" dirty="0"/>
-              <a:t>但是 </a:t>
-            </a:r>
-            <a:r>
-              <a:rPr lang="en-US" altLang="zh-CN" sz="1800" dirty="0"/>
-              <a:t>NASA </a:t>
-            </a:r>
-            <a:r>
-              <a:rPr lang="zh-CN" altLang="en-US" sz="1800" dirty="0"/>
-              <a:t>用“牛顿”</a:t>
-            </a:r>
-            <a:r>
-              <a:rPr lang="en-US" altLang="zh-CN" sz="1800" dirty="0"/>
-              <a:t>=  </a:t>
-            </a:r>
-            <a:r>
-              <a:rPr lang="zh-CN" altLang="en-US" sz="1800" dirty="0"/>
-              <a:t>千克*米</a:t>
-            </a:r>
-            <a:r>
-              <a:rPr lang="en-US" altLang="zh-CN" sz="1800" dirty="0"/>
-              <a:t>/(</a:t>
-            </a:r>
-            <a:r>
-              <a:rPr lang="zh-CN" altLang="en-US" sz="1800" dirty="0"/>
-              <a:t>秒*秒</a:t>
-            </a:r>
-            <a:r>
-              <a:rPr lang="en-US" altLang="zh-CN" sz="1800" dirty="0"/>
-              <a:t>)</a:t>
-            </a:r>
-          </a:p>
-          <a:p>
-            <a:pPr marL="633222" indent="-514350">
-              <a:lnSpc>
-                <a:spcPct val="120000"/>
-              </a:lnSpc>
-              <a:buFont typeface="+mj-lt"/>
-              <a:buAutoNum type="arabicPeriod"/>
-            </a:pPr>
-            <a:r>
-              <a:rPr lang="zh-CN" altLang="en-US" sz="1800" dirty="0"/>
-              <a:t>外包公司接到一个新的工程，他们进行了软件重用，</a:t>
-            </a:r>
-            <a:r>
-              <a:rPr lang="en-US" altLang="zh-CN" sz="1800" dirty="0"/>
-              <a:t>log </a:t>
-            </a:r>
-            <a:r>
-              <a:rPr lang="zh-CN" altLang="en-US" sz="1800" dirty="0"/>
-              <a:t>功能中记录的力被重用为导航功能的输入参数，成为 </a:t>
-            </a:r>
-            <a:r>
-              <a:rPr lang="en-US" altLang="zh-CN" sz="1800" dirty="0"/>
-              <a:t>mission-critical </a:t>
-            </a:r>
-            <a:r>
-              <a:rPr lang="zh-CN" altLang="en-US" sz="1800" dirty="0"/>
-              <a:t>的模块。</a:t>
-            </a:r>
-          </a:p>
-          <a:p>
-            <a:pPr marL="633222" indent="-514350">
-              <a:lnSpc>
-                <a:spcPct val="120000"/>
-              </a:lnSpc>
-              <a:buFont typeface="+mj-lt"/>
-              <a:buAutoNum type="arabicPeriod"/>
-            </a:pPr>
-            <a:r>
-              <a:rPr lang="zh-CN" altLang="en-US" sz="1800" dirty="0"/>
-              <a:t>这个新的工程由发包公司 </a:t>
-            </a:r>
-            <a:r>
-              <a:rPr lang="en-US" altLang="zh-CN" sz="1800" dirty="0"/>
-              <a:t>Lockheed (</a:t>
-            </a:r>
-            <a:r>
-              <a:rPr lang="zh-CN" altLang="en-US" sz="1800" dirty="0"/>
-              <a:t>洛克希德公司</a:t>
-            </a:r>
-            <a:r>
-              <a:rPr lang="en-US" altLang="zh-CN" sz="1800" dirty="0"/>
-              <a:t>) </a:t>
-            </a:r>
-            <a:r>
-              <a:rPr lang="zh-CN" altLang="en-US" sz="1800" dirty="0"/>
-              <a:t>交给了客户 </a:t>
-            </a:r>
-            <a:r>
-              <a:rPr lang="en-US" altLang="zh-CN" sz="1800" dirty="0"/>
-              <a:t>JPL (</a:t>
-            </a:r>
-            <a:r>
-              <a:rPr lang="zh-CN" altLang="en-US" sz="1800" dirty="0"/>
-              <a:t>喷气推进实验室</a:t>
-            </a:r>
-            <a:endParaRPr lang="en-US" altLang="zh-CN" sz="1800" dirty="0"/>
-          </a:p>
-          <a:p>
-            <a:pPr marL="633222" indent="-514350">
-              <a:lnSpc>
-                <a:spcPct val="120000"/>
-              </a:lnSpc>
-              <a:buFont typeface="+mj-lt"/>
-              <a:buAutoNum type="arabicPeriod"/>
-            </a:pPr>
-            <a:r>
-              <a:rPr lang="zh-CN" altLang="en-US" sz="1800" dirty="0"/>
-              <a:t>火箭带着卫星发射了，在</a:t>
-            </a:r>
-            <a:r>
-              <a:rPr lang="en-US" altLang="zh-CN" sz="1800" dirty="0"/>
-              <a:t>10</a:t>
-            </a:r>
-            <a:r>
-              <a:rPr lang="zh-CN" altLang="en-US" sz="1800" dirty="0"/>
-              <a:t>个月的飞行中，</a:t>
-            </a:r>
-            <a:r>
-              <a:rPr lang="en-US" altLang="zh-CN" sz="1800" dirty="0"/>
-              <a:t>JPL  </a:t>
-            </a:r>
-            <a:r>
-              <a:rPr lang="zh-CN" altLang="en-US" sz="1800" dirty="0"/>
-              <a:t>可以每天两次启动小推进器，来调整太空船的航向，在这一过程中，有人发现了导航功能的一些不正常现象</a:t>
-            </a:r>
-            <a:r>
-              <a:rPr lang="en-US" altLang="zh-CN" sz="1800" dirty="0"/>
-              <a:t>, </a:t>
-            </a:r>
-            <a:r>
-              <a:rPr lang="zh-CN" altLang="en-US" sz="1800" dirty="0"/>
-              <a:t>于是 </a:t>
-            </a:r>
-            <a:r>
-              <a:rPr lang="en-US" altLang="zh-CN" sz="1800" dirty="0"/>
-              <a:t>-  </a:t>
-            </a:r>
-          </a:p>
-          <a:p>
-            <a:pPr marL="925830" lvl="1" indent="-514350">
-              <a:lnSpc>
-                <a:spcPct val="120000"/>
-              </a:lnSpc>
-              <a:buFont typeface="+mj-lt"/>
-              <a:buAutoNum type="arabicPeriod"/>
-            </a:pPr>
-            <a:r>
-              <a:rPr lang="en-US" altLang="zh-CN" sz="1400" dirty="0"/>
-              <a:t>JPL </a:t>
-            </a:r>
-            <a:r>
-              <a:rPr lang="zh-CN" altLang="en-US" sz="1400" dirty="0"/>
-              <a:t>发邮件给 </a:t>
-            </a:r>
-            <a:r>
-              <a:rPr lang="en-US" altLang="zh-CN" sz="1400" dirty="0"/>
-              <a:t>Lockheed, </a:t>
-            </a:r>
-            <a:r>
-              <a:rPr lang="zh-CN" altLang="en-US" sz="1400" dirty="0"/>
-              <a:t>说 </a:t>
-            </a:r>
-            <a:r>
-              <a:rPr lang="en-US" altLang="zh-CN" sz="1400" dirty="0"/>
-              <a:t>– </a:t>
-            </a:r>
-            <a:r>
-              <a:rPr lang="zh-CN" altLang="en-US" sz="1400" dirty="0"/>
-              <a:t>这个模块有些参数看起来好像不正常</a:t>
-            </a:r>
-            <a:r>
-              <a:rPr lang="en-US" altLang="zh-CN" sz="1400" dirty="0"/>
-              <a:t>…</a:t>
-            </a:r>
-          </a:p>
-          <a:p>
-            <a:pPr marL="925830" lvl="1" indent="-514350">
-              <a:lnSpc>
-                <a:spcPct val="120000"/>
-              </a:lnSpc>
-              <a:buFont typeface="+mj-lt"/>
-              <a:buAutoNum type="arabicPeriod"/>
-            </a:pPr>
-            <a:r>
-              <a:rPr lang="en-US" altLang="zh-CN" sz="1400" dirty="0"/>
-              <a:t>Lockheed </a:t>
-            </a:r>
-            <a:r>
-              <a:rPr lang="zh-CN" altLang="en-US" sz="1400" dirty="0"/>
-              <a:t>回邮件</a:t>
-            </a:r>
-            <a:r>
-              <a:rPr lang="en-US" altLang="zh-CN" sz="1400" dirty="0"/>
-              <a:t>…</a:t>
-            </a:r>
-          </a:p>
-          <a:p>
-            <a:pPr marL="925830" lvl="1" indent="-514350">
-              <a:lnSpc>
-                <a:spcPct val="120000"/>
-              </a:lnSpc>
-              <a:buFont typeface="+mj-lt"/>
-              <a:buAutoNum type="arabicPeriod"/>
-            </a:pPr>
-            <a:r>
-              <a:rPr lang="en-US" altLang="zh-CN" sz="1400" dirty="0"/>
-              <a:t>JPL </a:t>
-            </a:r>
-            <a:r>
-              <a:rPr lang="zh-CN" altLang="en-US" sz="1400" dirty="0"/>
-              <a:t>再发邮件</a:t>
-            </a:r>
-            <a:r>
-              <a:rPr lang="en-US" altLang="zh-CN" sz="1400" dirty="0"/>
-              <a:t>…</a:t>
-            </a:r>
-          </a:p>
-          <a:p>
-            <a:pPr marL="925830" lvl="1" indent="-514350">
-              <a:lnSpc>
-                <a:spcPct val="120000"/>
-              </a:lnSpc>
-              <a:buFont typeface="+mj-lt"/>
-              <a:buAutoNum type="arabicPeriod"/>
-            </a:pPr>
-            <a:r>
-              <a:rPr lang="zh-CN" altLang="en-US" sz="1400" dirty="0"/>
-              <a:t>最后没有人再发邮件了</a:t>
-            </a:r>
-          </a:p>
-          <a:p>
-            <a:pPr marL="633222" indent="-514350">
-              <a:lnSpc>
-                <a:spcPct val="120000"/>
-              </a:lnSpc>
-              <a:buFont typeface="+mj-lt"/>
-              <a:buAutoNum type="arabicPeriod"/>
-            </a:pPr>
-            <a:r>
-              <a:rPr lang="zh-CN" altLang="en-US" sz="1800" dirty="0"/>
-              <a:t>后来</a:t>
-            </a:r>
-            <a:r>
-              <a:rPr lang="en-US" altLang="zh-CN" sz="1800" dirty="0"/>
-              <a:t>, JPL</a:t>
-            </a:r>
-            <a:r>
-              <a:rPr lang="zh-CN" altLang="en-US" sz="1800" dirty="0"/>
-              <a:t>的同志认为， </a:t>
-            </a:r>
-            <a:r>
-              <a:rPr lang="en-US" altLang="zh-CN" sz="1800" dirty="0"/>
-              <a:t>Lockheed </a:t>
-            </a:r>
-            <a:r>
-              <a:rPr lang="zh-CN" altLang="en-US" sz="1800" dirty="0"/>
-              <a:t>的同志们估计已经搞定了。   </a:t>
-            </a:r>
-            <a:r>
-              <a:rPr lang="en-US" altLang="zh-CN" sz="1800" dirty="0"/>
-              <a:t>Lockheed </a:t>
-            </a:r>
-            <a:r>
-              <a:rPr lang="zh-CN" altLang="en-US" sz="1800" dirty="0"/>
-              <a:t>的同志认为， </a:t>
-            </a:r>
-            <a:r>
-              <a:rPr lang="en-US" altLang="zh-CN" sz="1800" dirty="0"/>
-              <a:t>JPL </a:t>
-            </a:r>
-            <a:r>
-              <a:rPr lang="zh-CN" altLang="en-US" sz="1800" dirty="0"/>
-              <a:t>的同志们没再追问这个问题，可能已经不是问题了</a:t>
-            </a:r>
-            <a:r>
-              <a:rPr lang="en-US" altLang="zh-CN" sz="1800" dirty="0"/>
-              <a:t> </a:t>
-            </a:r>
-          </a:p>
-          <a:p>
-            <a:pPr>
-              <a:lnSpc>
-                <a:spcPct val="120000"/>
-              </a:lnSpc>
-            </a:pPr>
-            <a:r>
-              <a:rPr lang="zh-CN" altLang="en-US" sz="1800" dirty="0"/>
-              <a:t>十个月之后， 卫星抵达火星大气层，错误的导航参数造成卫星坠入大气层烧毁。 </a:t>
-            </a:r>
-            <a:endParaRPr lang="en-US" sz="1800" dirty="0"/>
-          </a:p>
-        </p:txBody>
-      </p:sp>
-    </p:spTree>
-    <p:extLst>
-      <p:ext uri="{BB962C8B-B14F-4D97-AF65-F5344CB8AC3E}">
-        <p14:creationId xmlns:p14="http://schemas.microsoft.com/office/powerpoint/2010/main" val="398621879"/>
-      </p:ext>
-    </p:extLst>
-  </p:cSld>
-  <p:clrMapOvr>
-    <a:masterClrMapping/>
-  </p:clrMapOvr>
-</p:sld>
-</file>
-
 <file path=ppt/slides/slide35.xml><?xml version="1.0" encoding="utf-8"?>
 <p:sld xmlns:a="http://schemas.openxmlformats.org/drawingml/2006/main" xmlns:r="http://schemas.openxmlformats.org/officeDocument/2006/relationships" xmlns:p="http://schemas.openxmlformats.org/presentationml/2006/main">
   <p:cSld>
@@ -15499,7 +14389,7 @@
           <p:cNvPr id="2" name="Title 1">
             <a:extLst>
               <a:ext uri="{FF2B5EF4-FFF2-40B4-BE49-F238E27FC236}">
-                <a16:creationId xmlns:a16="http://schemas.microsoft.com/office/drawing/2014/main" id="{75F5FD93-C02B-49F3-9B90-E278FF3C3DE8}"/>
+                <a16:creationId xmlns:a16="http://schemas.microsoft.com/office/drawing/2014/main" id="{729BBF23-2373-4FD4-9AE4-69D1D32A5AB6}"/>
               </a:ext>
             </a:extLst>
           </p:cNvPr>
@@ -15508,35 +14398,6 @@
           </p:cNvSpPr>
           <p:nvPr>
             <p:ph type="title"/>
-          </p:nvPr>
-        </p:nvSpPr>
-        <p:spPr/>
-        <p:txBody>
-          <a:bodyPr/>
-          <a:lstStyle/>
-          <a:p>
-            <a:r>
-              <a:rPr lang="zh-CN" altLang="en-US" dirty="0"/>
-              <a:t>错误根源？</a:t>
-            </a:r>
-            <a:endParaRPr lang="en-US" dirty="0"/>
-          </a:p>
-        </p:txBody>
-      </p:sp>
-      <p:sp>
-        <p:nvSpPr>
-          <p:cNvPr id="3" name="Content Placeholder 2">
-            <a:extLst>
-              <a:ext uri="{FF2B5EF4-FFF2-40B4-BE49-F238E27FC236}">
-                <a16:creationId xmlns:a16="http://schemas.microsoft.com/office/drawing/2014/main" id="{AFC80473-C2CB-4379-8AD6-61591627ED9F}"/>
-              </a:ext>
-            </a:extLst>
-          </p:cNvPr>
-          <p:cNvSpPr>
-            <a:spLocks noGrp="1"/>
-          </p:cNvSpPr>
-          <p:nvPr>
-            <p:ph idx="1"/>
           </p:nvPr>
         </p:nvSpPr>
         <p:spPr/>
@@ -15547,100 +14408,402 @@
           <a:lstStyle/>
           <a:p>
             <a:r>
-              <a:rPr lang="zh-CN" altLang="en-US" dirty="0"/>
-              <a:t>错误</a:t>
-            </a:r>
-            <a:r>
-              <a:rPr lang="en-US" altLang="zh-CN" dirty="0"/>
-              <a:t>1: </a:t>
-            </a:r>
-          </a:p>
-          <a:p>
-            <a:pPr lvl="1"/>
-            <a:r>
-              <a:rPr lang="zh-CN" altLang="en-US" dirty="0"/>
-              <a:t>一个模块从 </a:t>
-            </a:r>
-            <a:r>
-              <a:rPr lang="en-US" altLang="zh-CN" dirty="0"/>
-              <a:t>non-mission-critical </a:t>
-            </a:r>
-            <a:r>
-              <a:rPr lang="zh-CN" altLang="en-US" dirty="0"/>
-              <a:t>变成 </a:t>
-            </a:r>
-            <a:r>
-              <a:rPr lang="en-US" altLang="zh-CN" dirty="0"/>
+              <a:rPr lang="zh-CN" altLang="en-US" sz="4800" dirty="0"/>
+              <a:t>事故的调查</a:t>
+            </a:r>
+            <a:endParaRPr lang="en-US" dirty="0"/>
+          </a:p>
+        </p:txBody>
+      </p:sp>
+      <p:sp>
+        <p:nvSpPr>
+          <p:cNvPr id="3" name="Content Placeholder 2">
+            <a:extLst>
+              <a:ext uri="{FF2B5EF4-FFF2-40B4-BE49-F238E27FC236}">
+                <a16:creationId xmlns:a16="http://schemas.microsoft.com/office/drawing/2014/main" id="{05105991-655B-4992-8AC4-905DE58F2176}"/>
+              </a:ext>
+            </a:extLst>
+          </p:cNvPr>
+          <p:cNvSpPr>
+            <a:spLocks noGrp="1"/>
+          </p:cNvSpPr>
+          <p:nvPr>
+            <p:ph idx="1"/>
+          </p:nvPr>
+        </p:nvSpPr>
+        <p:spPr>
+          <a:xfrm>
+            <a:off x="914400" y="1371600"/>
+            <a:ext cx="10363200" cy="5121275"/>
+          </a:xfrm>
+        </p:spPr>
+        <p:txBody>
+          <a:bodyPr>
+            <a:normAutofit fontScale="92500" lnSpcReduction="20000"/>
+          </a:bodyPr>
+          <a:lstStyle/>
+          <a:p>
+            <a:pPr marL="633222" indent="-514350">
+              <a:lnSpc>
+                <a:spcPct val="120000"/>
+              </a:lnSpc>
+              <a:buFont typeface="+mj-lt"/>
+              <a:buAutoNum type="arabicPeriod"/>
+            </a:pPr>
+            <a:r>
+              <a:rPr lang="zh-CN" altLang="en-US" sz="1800" dirty="0"/>
+              <a:t>软件外包公司对于 </a:t>
+            </a:r>
+            <a:r>
+              <a:rPr lang="en-US" altLang="zh-CN" sz="1800" dirty="0"/>
               <a:t>mission-critical </a:t>
             </a:r>
             <a:r>
-              <a:rPr lang="zh-CN" altLang="en-US" dirty="0"/>
-              <a:t>没有经历必要的复审和测试。</a:t>
-            </a:r>
-            <a:endParaRPr lang="en-US" altLang="zh-CN" dirty="0"/>
-          </a:p>
-          <a:p>
-            <a:endParaRPr lang="en-US" altLang="zh-CN" dirty="0"/>
-          </a:p>
-          <a:p>
-            <a:r>
-              <a:rPr lang="zh-CN" altLang="en-US" dirty="0"/>
-              <a:t>错误</a:t>
-            </a:r>
-            <a:r>
-              <a:rPr lang="en-US" altLang="zh-CN" dirty="0"/>
-              <a:t>2: </a:t>
-            </a:r>
-          </a:p>
-          <a:p>
-            <a:pPr lvl="1"/>
-            <a:r>
-              <a:rPr lang="zh-CN" altLang="en-US" dirty="0"/>
-              <a:t>这个问题从来没有收录到</a:t>
-            </a:r>
-            <a:r>
-              <a:rPr lang="en-US" altLang="zh-CN" dirty="0"/>
+              <a:rPr lang="zh-CN" altLang="en-US" sz="1800" dirty="0"/>
+              <a:t>的软件模块有很完备的检查和测试，但是对于其他模块则没有完备的管理</a:t>
+            </a:r>
+            <a:endParaRPr lang="en-US" altLang="zh-CN" sz="1800" dirty="0"/>
+          </a:p>
+          <a:p>
+            <a:pPr marL="633222" indent="-514350">
+              <a:lnSpc>
+                <a:spcPct val="120000"/>
+              </a:lnSpc>
+              <a:buFont typeface="+mj-lt"/>
+              <a:buAutoNum type="arabicPeriod"/>
+            </a:pPr>
+            <a:r>
+              <a:rPr lang="zh-CN" altLang="en-US" sz="1800" dirty="0"/>
+              <a:t>程序员写了一个不重要的</a:t>
+            </a:r>
+            <a:r>
+              <a:rPr lang="en-US" altLang="zh-CN" sz="1800" dirty="0"/>
+              <a:t>log </a:t>
+            </a:r>
+            <a:r>
+              <a:rPr lang="zh-CN" altLang="en-US" sz="1800" dirty="0"/>
+              <a:t>功能，其中用英制 </a:t>
+            </a:r>
+            <a:r>
+              <a:rPr lang="en-US" altLang="zh-CN" sz="1800" dirty="0"/>
+              <a:t>(</a:t>
+            </a:r>
+            <a:r>
+              <a:rPr lang="zh-CN" altLang="en-US" sz="1800" dirty="0"/>
+              <a:t>磅* 英尺</a:t>
+            </a:r>
+            <a:r>
+              <a:rPr lang="en-US" altLang="zh-CN" sz="1800" dirty="0"/>
+              <a:t>) </a:t>
+            </a:r>
+            <a:r>
+              <a:rPr lang="zh-CN" altLang="en-US" sz="1800" dirty="0"/>
+              <a:t>表示力</a:t>
+            </a:r>
+            <a:r>
+              <a:rPr lang="en-US" altLang="zh-CN" sz="1800" dirty="0"/>
+              <a:t>,  </a:t>
+            </a:r>
+            <a:r>
+              <a:rPr lang="zh-CN" altLang="en-US" sz="1800" dirty="0"/>
+              <a:t>但是 </a:t>
+            </a:r>
+            <a:r>
+              <a:rPr lang="en-US" altLang="zh-CN" sz="1800" dirty="0"/>
               <a:t>NASA </a:t>
             </a:r>
             <a:r>
-              <a:rPr lang="zh-CN" altLang="en-US" dirty="0"/>
-              <a:t>的错误跟踪系统 </a:t>
-            </a:r>
-            <a:r>
-              <a:rPr lang="en-US" altLang="zh-CN" dirty="0"/>
-              <a:t>(Bug tracking system)</a:t>
-            </a:r>
-            <a:r>
-              <a:rPr lang="zh-CN" altLang="en-US" dirty="0"/>
-              <a:t>，只是在</a:t>
-            </a:r>
-            <a:r>
-              <a:rPr lang="en-US" altLang="zh-CN" dirty="0"/>
-              <a:t>email </a:t>
-            </a:r>
-            <a:r>
-              <a:rPr lang="zh-CN" altLang="en-US" dirty="0"/>
-              <a:t>中交流，导致最后没有人对这个问题负责。在错误跟踪系统中，总得有一个人“拥有”这一个</a:t>
-            </a:r>
-            <a:r>
-              <a:rPr lang="en-US" altLang="zh-CN" dirty="0"/>
-              <a:t>bug</a:t>
-            </a:r>
-            <a:r>
-              <a:rPr lang="zh-CN" altLang="en-US" dirty="0"/>
-              <a:t>，这样可以避免推诿责任。</a:t>
-            </a:r>
-            <a:endParaRPr lang="en-US" altLang="zh-CN" dirty="0"/>
-          </a:p>
-          <a:p>
-            <a:endParaRPr lang="en-US" dirty="0"/>
+              <a:rPr lang="zh-CN" altLang="en-US" sz="1800" dirty="0"/>
+              <a:t>用“牛顿”</a:t>
+            </a:r>
+            <a:r>
+              <a:rPr lang="en-US" altLang="zh-CN" sz="1800" dirty="0"/>
+              <a:t>=  </a:t>
+            </a:r>
+            <a:r>
+              <a:rPr lang="zh-CN" altLang="en-US" sz="1800" dirty="0"/>
+              <a:t>千克*米</a:t>
+            </a:r>
+            <a:r>
+              <a:rPr lang="en-US" altLang="zh-CN" sz="1800" dirty="0"/>
+              <a:t>/(</a:t>
+            </a:r>
+            <a:r>
+              <a:rPr lang="zh-CN" altLang="en-US" sz="1800" dirty="0"/>
+              <a:t>秒*秒</a:t>
+            </a:r>
+            <a:r>
+              <a:rPr lang="en-US" altLang="zh-CN" sz="1800" dirty="0"/>
+              <a:t>)</a:t>
+            </a:r>
+          </a:p>
+          <a:p>
+            <a:pPr marL="633222" indent="-514350">
+              <a:lnSpc>
+                <a:spcPct val="120000"/>
+              </a:lnSpc>
+              <a:buFont typeface="+mj-lt"/>
+              <a:buAutoNum type="arabicPeriod"/>
+            </a:pPr>
+            <a:r>
+              <a:rPr lang="zh-CN" altLang="en-US" sz="1800" dirty="0"/>
+              <a:t>外包公司接到一个新的工程，他们进行了软件重用，</a:t>
+            </a:r>
+            <a:r>
+              <a:rPr lang="en-US" altLang="zh-CN" sz="1800" dirty="0"/>
+              <a:t>log </a:t>
+            </a:r>
+            <a:r>
+              <a:rPr lang="zh-CN" altLang="en-US" sz="1800" dirty="0"/>
+              <a:t>功能中记录的力被重用为导航功能的输入参数，成为 </a:t>
+            </a:r>
+            <a:r>
+              <a:rPr lang="en-US" altLang="zh-CN" sz="1800" dirty="0"/>
+              <a:t>mission-critical </a:t>
+            </a:r>
+            <a:r>
+              <a:rPr lang="zh-CN" altLang="en-US" sz="1800" dirty="0"/>
+              <a:t>的模块。</a:t>
+            </a:r>
+          </a:p>
+          <a:p>
+            <a:pPr marL="633222" indent="-514350">
+              <a:lnSpc>
+                <a:spcPct val="120000"/>
+              </a:lnSpc>
+              <a:buFont typeface="+mj-lt"/>
+              <a:buAutoNum type="arabicPeriod"/>
+            </a:pPr>
+            <a:r>
+              <a:rPr lang="zh-CN" altLang="en-US" sz="1800" dirty="0"/>
+              <a:t>这个新的工程由发包公司 </a:t>
+            </a:r>
+            <a:r>
+              <a:rPr lang="en-US" altLang="zh-CN" sz="1800" dirty="0"/>
+              <a:t>Lockheed (</a:t>
+            </a:r>
+            <a:r>
+              <a:rPr lang="zh-CN" altLang="en-US" sz="1800" dirty="0"/>
+              <a:t>洛克希德公司</a:t>
+            </a:r>
+            <a:r>
+              <a:rPr lang="en-US" altLang="zh-CN" sz="1800" dirty="0"/>
+              <a:t>) </a:t>
+            </a:r>
+            <a:r>
+              <a:rPr lang="zh-CN" altLang="en-US" sz="1800" dirty="0"/>
+              <a:t>交给了客户 </a:t>
+            </a:r>
+            <a:r>
+              <a:rPr lang="en-US" altLang="zh-CN" sz="1800" dirty="0"/>
+              <a:t>JPL (</a:t>
+            </a:r>
+            <a:r>
+              <a:rPr lang="zh-CN" altLang="en-US" sz="1800" dirty="0"/>
+              <a:t>喷气推进实验室</a:t>
+            </a:r>
+            <a:endParaRPr lang="en-US" altLang="zh-CN" sz="1800" dirty="0"/>
+          </a:p>
+          <a:p>
+            <a:pPr marL="633222" indent="-514350">
+              <a:lnSpc>
+                <a:spcPct val="120000"/>
+              </a:lnSpc>
+              <a:buFont typeface="+mj-lt"/>
+              <a:buAutoNum type="arabicPeriod"/>
+            </a:pPr>
+            <a:r>
+              <a:rPr lang="zh-CN" altLang="en-US" sz="1800" dirty="0"/>
+              <a:t>火箭带着卫星发射了，在</a:t>
+            </a:r>
+            <a:r>
+              <a:rPr lang="en-US" altLang="zh-CN" sz="1800" dirty="0"/>
+              <a:t>10</a:t>
+            </a:r>
+            <a:r>
+              <a:rPr lang="zh-CN" altLang="en-US" sz="1800" dirty="0"/>
+              <a:t>个月的飞行中，</a:t>
+            </a:r>
+            <a:r>
+              <a:rPr lang="en-US" altLang="zh-CN" sz="1800" dirty="0"/>
+              <a:t>JPL  </a:t>
+            </a:r>
+            <a:r>
+              <a:rPr lang="zh-CN" altLang="en-US" sz="1800" dirty="0"/>
+              <a:t>可以每天两次启动小推进器，来调整太空船的航向，在这一过程中，有人发现了导航功能的一些不正常现象</a:t>
+            </a:r>
+            <a:r>
+              <a:rPr lang="en-US" altLang="zh-CN" sz="1800" dirty="0"/>
+              <a:t>, </a:t>
+            </a:r>
+            <a:r>
+              <a:rPr lang="zh-CN" altLang="en-US" sz="1800" dirty="0"/>
+              <a:t>于是 </a:t>
+            </a:r>
+            <a:r>
+              <a:rPr lang="en-US" altLang="zh-CN" sz="1800" dirty="0"/>
+              <a:t>-  </a:t>
+            </a:r>
+          </a:p>
+          <a:p>
+            <a:pPr marL="925830" lvl="1" indent="-514350">
+              <a:lnSpc>
+                <a:spcPct val="120000"/>
+              </a:lnSpc>
+              <a:buFont typeface="+mj-lt"/>
+              <a:buAutoNum type="arabicPeriod"/>
+            </a:pPr>
+            <a:r>
+              <a:rPr lang="en-US" altLang="zh-CN" sz="1400" dirty="0"/>
+              <a:t>JPL </a:t>
+            </a:r>
+            <a:r>
+              <a:rPr lang="zh-CN" altLang="en-US" sz="1400" dirty="0"/>
+              <a:t>发邮件给 </a:t>
+            </a:r>
+            <a:r>
+              <a:rPr lang="en-US" altLang="zh-CN" sz="1400" dirty="0"/>
+              <a:t>Lockheed, </a:t>
+            </a:r>
+            <a:r>
+              <a:rPr lang="zh-CN" altLang="en-US" sz="1400" dirty="0"/>
+              <a:t>说 </a:t>
+            </a:r>
+            <a:r>
+              <a:rPr lang="en-US" altLang="zh-CN" sz="1400" dirty="0"/>
+              <a:t>– </a:t>
+            </a:r>
+            <a:r>
+              <a:rPr lang="zh-CN" altLang="en-US" sz="1400" dirty="0"/>
+              <a:t>这个模块有些参数看起来好像不正常</a:t>
+            </a:r>
+            <a:r>
+              <a:rPr lang="en-US" altLang="zh-CN" sz="1400" dirty="0"/>
+              <a:t>…</a:t>
+            </a:r>
+          </a:p>
+          <a:p>
+            <a:pPr marL="925830" lvl="1" indent="-514350">
+              <a:lnSpc>
+                <a:spcPct val="120000"/>
+              </a:lnSpc>
+              <a:buFont typeface="+mj-lt"/>
+              <a:buAutoNum type="arabicPeriod"/>
+            </a:pPr>
+            <a:r>
+              <a:rPr lang="en-US" altLang="zh-CN" sz="1400" dirty="0"/>
+              <a:t>Lockheed </a:t>
+            </a:r>
+            <a:r>
+              <a:rPr lang="zh-CN" altLang="en-US" sz="1400" dirty="0"/>
+              <a:t>回邮件</a:t>
+            </a:r>
+            <a:r>
+              <a:rPr lang="en-US" altLang="zh-CN" sz="1400" dirty="0"/>
+              <a:t>…</a:t>
+            </a:r>
+          </a:p>
+          <a:p>
+            <a:pPr marL="925830" lvl="1" indent="-514350">
+              <a:lnSpc>
+                <a:spcPct val="120000"/>
+              </a:lnSpc>
+              <a:buFont typeface="+mj-lt"/>
+              <a:buAutoNum type="arabicPeriod"/>
+            </a:pPr>
+            <a:r>
+              <a:rPr lang="en-US" altLang="zh-CN" sz="1400" dirty="0"/>
+              <a:t>JPL </a:t>
+            </a:r>
+            <a:r>
+              <a:rPr lang="zh-CN" altLang="en-US" sz="1400" dirty="0"/>
+              <a:t>再发邮件</a:t>
+            </a:r>
+            <a:r>
+              <a:rPr lang="en-US" altLang="zh-CN" sz="1400" dirty="0"/>
+              <a:t>…</a:t>
+            </a:r>
+          </a:p>
+          <a:p>
+            <a:pPr marL="925830" lvl="1" indent="-514350">
+              <a:lnSpc>
+                <a:spcPct val="120000"/>
+              </a:lnSpc>
+              <a:buFont typeface="+mj-lt"/>
+              <a:buAutoNum type="arabicPeriod"/>
+            </a:pPr>
+            <a:r>
+              <a:rPr lang="zh-CN" altLang="en-US" sz="1400" dirty="0"/>
+              <a:t>最后没有人再发邮件了</a:t>
+            </a:r>
+          </a:p>
+          <a:p>
+            <a:pPr marL="633222" indent="-514350">
+              <a:lnSpc>
+                <a:spcPct val="120000"/>
+              </a:lnSpc>
+              <a:buFont typeface="+mj-lt"/>
+              <a:buAutoNum type="arabicPeriod"/>
+            </a:pPr>
+            <a:r>
+              <a:rPr lang="zh-CN" altLang="en-US" sz="1800" dirty="0"/>
+              <a:t>后来</a:t>
+            </a:r>
+            <a:r>
+              <a:rPr lang="en-US" altLang="zh-CN" sz="1800" dirty="0"/>
+              <a:t>, JPL</a:t>
+            </a:r>
+            <a:r>
+              <a:rPr lang="zh-CN" altLang="en-US" sz="1800" dirty="0"/>
+              <a:t>的同志认为， </a:t>
+            </a:r>
+            <a:r>
+              <a:rPr lang="en-US" altLang="zh-CN" sz="1800" dirty="0"/>
+              <a:t>Lockheed </a:t>
+            </a:r>
+            <a:r>
+              <a:rPr lang="zh-CN" altLang="en-US" sz="1800" dirty="0"/>
+              <a:t>的同志们估计已经搞定了。   </a:t>
+            </a:r>
+            <a:r>
+              <a:rPr lang="en-US" altLang="zh-CN" sz="1800" dirty="0"/>
+              <a:t>Lockheed </a:t>
+            </a:r>
+            <a:r>
+              <a:rPr lang="zh-CN" altLang="en-US" sz="1800" dirty="0"/>
+              <a:t>的同志认为， </a:t>
+            </a:r>
+            <a:r>
+              <a:rPr lang="en-US" altLang="zh-CN" sz="1800" dirty="0"/>
+              <a:t>JPL </a:t>
+            </a:r>
+            <a:r>
+              <a:rPr lang="zh-CN" altLang="en-US" sz="1800" dirty="0"/>
+              <a:t>的同志们没再追问这个问题，可能已经不是问题了</a:t>
+            </a:r>
+            <a:r>
+              <a:rPr lang="en-US" altLang="zh-CN" sz="1800" dirty="0"/>
+              <a:t> </a:t>
+            </a:r>
+          </a:p>
+          <a:p>
+            <a:pPr>
+              <a:lnSpc>
+                <a:spcPct val="120000"/>
+              </a:lnSpc>
+            </a:pPr>
+            <a:r>
+              <a:rPr lang="zh-CN" altLang="en-US" sz="1800" dirty="0"/>
+              <a:t>十个月之后， 卫星抵达火星大气层，错误的导航参数造成卫星坠入大气层烧毁。 </a:t>
+            </a:r>
+            <a:endParaRPr lang="en-US" sz="1800" dirty="0"/>
           </a:p>
         </p:txBody>
       </p:sp>
     </p:spTree>
     <p:extLst>
       <p:ext uri="{BB962C8B-B14F-4D97-AF65-F5344CB8AC3E}">
-        <p14:creationId xmlns:p14="http://schemas.microsoft.com/office/powerpoint/2010/main" val="2232409806"/>
+        <p14:creationId xmlns:p14="http://schemas.microsoft.com/office/powerpoint/2010/main" val="398621879"/>
       </p:ext>
     </p:extLst>
   </p:cSld>
@@ -15669,7 +14832,13 @@
       </p:grpSpPr>
       <p:sp>
         <p:nvSpPr>
-          <p:cNvPr id="22530" name="Title 1"/>
+          <p:cNvPr id="2" name="Title 1">
+            <a:extLst>
+              <a:ext uri="{FF2B5EF4-FFF2-40B4-BE49-F238E27FC236}">
+                <a16:creationId xmlns:a16="http://schemas.microsoft.com/office/drawing/2014/main" id="{75F5FD93-C02B-49F3-9B90-E278FF3C3DE8}"/>
+              </a:ext>
+            </a:extLst>
+          </p:cNvPr>
           <p:cNvSpPr>
             <a:spLocks noGrp="1"/>
           </p:cNvSpPr>
@@ -15682,14 +14851,9 @@
           <a:bodyPr/>
           <a:lstStyle/>
           <a:p>
-            <a:pPr eaLnBrk="1" hangingPunct="1"/>
-            <a:r>
-              <a:rPr lang="zh-CN" altLang="en-US" dirty="0"/>
-              <a:t>我们碰到的</a:t>
-            </a:r>
-            <a:r>
-              <a:rPr lang="en-US" altLang="zh-CN" dirty="0"/>
-              <a:t>bug</a:t>
+            <a:r>
+              <a:rPr lang="zh-CN" altLang="en-US" dirty="0"/>
+              <a:t>错误根源？</a:t>
             </a:r>
             <a:endParaRPr lang="en-US" dirty="0"/>
           </a:p>
@@ -15697,7 +14861,13 @@
       </p:sp>
       <p:sp>
         <p:nvSpPr>
-          <p:cNvPr id="22531" name="Content Placeholder 2"/>
+          <p:cNvPr id="3" name="Content Placeholder 2">
+            <a:extLst>
+              <a:ext uri="{FF2B5EF4-FFF2-40B4-BE49-F238E27FC236}">
+                <a16:creationId xmlns:a16="http://schemas.microsoft.com/office/drawing/2014/main" id="{AFC80473-C2CB-4379-8AD6-61591627ED9F}"/>
+              </a:ext>
+            </a:extLst>
+          </p:cNvPr>
           <p:cNvSpPr>
             <a:spLocks noGrp="1"/>
           </p:cNvSpPr>
@@ -15712,127 +14882,103 @@
           </a:bodyPr>
           <a:lstStyle/>
           <a:p>
-            <a:pPr eaLnBrk="1" hangingPunct="1"/>
-            <a:r>
-              <a:rPr lang="zh-CN" altLang="en-US" dirty="0"/>
-              <a:t>请举例说明你碰到的 </a:t>
+            <a:r>
+              <a:rPr lang="zh-CN" altLang="en-US" dirty="0"/>
+              <a:t>错误 </a:t>
+            </a:r>
+            <a:r>
+              <a:rPr lang="en-US" altLang="zh-CN" dirty="0"/>
+              <a:t>1: </a:t>
+            </a:r>
+          </a:p>
+          <a:p>
+            <a:pPr lvl="1"/>
+            <a:r>
+              <a:rPr lang="zh-CN" altLang="en-US" dirty="0"/>
+              <a:t>一个模块从 </a:t>
+            </a:r>
+            <a:r>
+              <a:rPr lang="en-US" altLang="zh-CN" dirty="0"/>
+              <a:t>non-mission-critical </a:t>
+            </a:r>
+            <a:r>
+              <a:rPr lang="zh-CN" altLang="en-US" dirty="0"/>
+              <a:t>变成 </a:t>
+            </a:r>
+            <a:r>
+              <a:rPr lang="en-US" altLang="zh-CN" dirty="0"/>
+              <a:t>mission-critical </a:t>
+            </a:r>
+            <a:r>
+              <a:rPr lang="zh-CN" altLang="en-US" dirty="0"/>
+              <a:t>没有经历必要的复审和测试。</a:t>
+            </a:r>
+            <a:endParaRPr lang="en-US" altLang="zh-CN" dirty="0"/>
+          </a:p>
+          <a:p>
+            <a:endParaRPr lang="en-US" altLang="zh-CN" dirty="0"/>
+          </a:p>
+          <a:p>
+            <a:r>
+              <a:rPr lang="zh-CN" altLang="en-US" dirty="0"/>
+              <a:t>错误 </a:t>
+            </a:r>
+            <a:r>
+              <a:rPr lang="en-US" altLang="zh-CN" dirty="0"/>
+              <a:t>2: </a:t>
+            </a:r>
+          </a:p>
+          <a:p>
+            <a:pPr lvl="1"/>
+            <a:r>
+              <a:rPr lang="zh-CN" altLang="en-US" dirty="0"/>
+              <a:t>这个问题从来没有收录到</a:t>
+            </a:r>
+            <a:r>
+              <a:rPr lang="en-US" altLang="zh-CN" dirty="0"/>
+              <a:t>NASA </a:t>
+            </a:r>
+            <a:r>
+              <a:rPr lang="zh-CN" altLang="en-US" dirty="0"/>
+              <a:t>的错误跟踪系统 </a:t>
+            </a:r>
+            <a:r>
+              <a:rPr lang="en-US" altLang="zh-CN" dirty="0"/>
+              <a:t>(Bug tracking system)</a:t>
+            </a:r>
+            <a:r>
+              <a:rPr lang="zh-CN" altLang="en-US" dirty="0"/>
+              <a:t>，只是在</a:t>
+            </a:r>
+            <a:r>
+              <a:rPr lang="en-US" altLang="zh-CN" dirty="0"/>
+              <a:t>email </a:t>
+            </a:r>
+            <a:r>
+              <a:rPr lang="zh-CN" altLang="en-US" dirty="0"/>
+              <a:t>中交流，导致最后没有人对这个问题负责。在错误跟踪系统中，总得有一个人“拥有”这一个</a:t>
             </a:r>
             <a:r>
               <a:rPr lang="en-US" altLang="zh-CN" dirty="0"/>
               <a:t>bug</a:t>
             </a:r>
-          </a:p>
-          <a:p>
-            <a:pPr lvl="1"/>
-            <a:r>
-              <a:rPr lang="en-US" altLang="zh-CN" dirty="0"/>
-              <a:t>5 </a:t>
-            </a:r>
-            <a:r>
-              <a:rPr lang="zh-CN" altLang="en-US" dirty="0"/>
-              <a:t>分钟， </a:t>
-            </a:r>
-            <a:r>
-              <a:rPr lang="en-US" altLang="zh-CN" dirty="0"/>
-              <a:t>3 </a:t>
-            </a:r>
-            <a:r>
-              <a:rPr lang="zh-CN" altLang="en-US" dirty="0"/>
-              <a:t>个同学来说明</a:t>
-            </a:r>
+            <a:r>
+              <a:rPr lang="zh-CN" altLang="en-US" dirty="0"/>
+              <a:t>，这样可以避免推诿责任。</a:t>
+            </a:r>
+            <a:endParaRPr lang="en-US" altLang="zh-CN" dirty="0"/>
+          </a:p>
+          <a:p>
             <a:endParaRPr lang="en-US" dirty="0"/>
           </a:p>
-          <a:p>
-            <a:pPr eaLnBrk="1" hangingPunct="1"/>
-            <a:r>
-              <a:rPr lang="zh-CN" altLang="en-US" dirty="0"/>
-              <a:t>软件的行为和用户的期望值不一样</a:t>
-            </a:r>
-            <a:endParaRPr lang="en-US" dirty="0"/>
-          </a:p>
-          <a:p>
-            <a:pPr lvl="1" eaLnBrk="1" hangingPunct="1"/>
-            <a:r>
-              <a:rPr lang="zh-CN" altLang="en-US" dirty="0"/>
-              <a:t>崩溃</a:t>
-            </a:r>
-            <a:r>
-              <a:rPr lang="en-US" dirty="0"/>
-              <a:t>Crash, </a:t>
-            </a:r>
-            <a:r>
-              <a:rPr lang="zh-CN" altLang="en-US" dirty="0"/>
-              <a:t>死锁</a:t>
-            </a:r>
-            <a:endParaRPr lang="en-US" dirty="0"/>
-          </a:p>
-          <a:p>
-            <a:pPr lvl="1" eaLnBrk="1" hangingPunct="1"/>
-            <a:r>
-              <a:rPr lang="zh-CN" altLang="en-US" dirty="0"/>
-              <a:t>数据丢失，错误</a:t>
-            </a:r>
-            <a:endParaRPr lang="en-US" dirty="0"/>
-          </a:p>
-          <a:p>
-            <a:pPr lvl="1" eaLnBrk="1" hangingPunct="1"/>
-            <a:r>
-              <a:rPr lang="zh-CN" altLang="en-US" dirty="0"/>
-              <a:t>达不到预期功能</a:t>
-            </a:r>
-            <a:endParaRPr lang="en-US" dirty="0"/>
-          </a:p>
-          <a:p>
-            <a:pPr lvl="1" eaLnBrk="1" hangingPunct="1"/>
-            <a:r>
-              <a:rPr lang="zh-CN" altLang="en-US" dirty="0"/>
-              <a:t>难用</a:t>
-            </a:r>
-            <a:endParaRPr lang="en-US" dirty="0"/>
-          </a:p>
-          <a:p>
-            <a:pPr eaLnBrk="1" hangingPunct="1"/>
-            <a:r>
-              <a:rPr lang="zh-CN" altLang="en-US" dirty="0"/>
-              <a:t>期望值从哪里来？</a:t>
-            </a:r>
-            <a:endParaRPr lang="en-US" altLang="zh-CN" dirty="0"/>
-          </a:p>
-          <a:p>
-            <a:pPr lvl="1" eaLnBrk="1" hangingPunct="1"/>
-            <a:r>
-              <a:rPr lang="zh-CN" altLang="en-US" dirty="0"/>
-              <a:t>用户</a:t>
-            </a:r>
-            <a:r>
-              <a:rPr lang="en-US" altLang="zh-CN" dirty="0"/>
-              <a:t>/</a:t>
-            </a:r>
-            <a:r>
-              <a:rPr lang="zh-CN" altLang="en-US" dirty="0"/>
-              <a:t>顾客</a:t>
-            </a:r>
-            <a:r>
-              <a:rPr lang="en-US" altLang="zh-CN" dirty="0"/>
-              <a:t>/</a:t>
-            </a:r>
-            <a:r>
-              <a:rPr lang="zh-CN" altLang="en-US" dirty="0"/>
-              <a:t>产品</a:t>
-            </a:r>
-            <a:r>
-              <a:rPr lang="en-US" altLang="zh-CN" dirty="0"/>
-              <a:t>/</a:t>
-            </a:r>
-            <a:r>
-              <a:rPr lang="zh-CN" altLang="en-US" dirty="0"/>
-              <a:t>文化</a:t>
-            </a:r>
-            <a:endParaRPr lang="en-US" dirty="0"/>
-          </a:p>
         </p:txBody>
       </p:sp>
     </p:spTree>
+    <p:extLst>
+      <p:ext uri="{BB962C8B-B14F-4D97-AF65-F5344CB8AC3E}">
+        <p14:creationId xmlns:p14="http://schemas.microsoft.com/office/powerpoint/2010/main" val="2232409806"/>
+      </p:ext>
+    </p:extLst>
   </p:cSld>
   <p:clrMapOvr>
     <a:masterClrMapping/>
@@ -15859,12 +15005,40 @@
       </p:grpSpPr>
       <p:sp>
         <p:nvSpPr>
-          <p:cNvPr id="23554" name="Title 1"/>
+          <p:cNvPr id="22530" name="Title 1"/>
           <p:cNvSpPr>
             <a:spLocks noGrp="1"/>
           </p:cNvSpPr>
           <p:nvPr>
             <p:ph type="title"/>
+          </p:nvPr>
+        </p:nvSpPr>
+        <p:spPr/>
+        <p:txBody>
+          <a:bodyPr/>
+          <a:lstStyle/>
+          <a:p>
+            <a:pPr eaLnBrk="1" hangingPunct="1"/>
+            <a:r>
+              <a:rPr lang="zh-CN" altLang="en-US" dirty="0"/>
+              <a:t>我们碰到的</a:t>
+            </a:r>
+            <a:r>
+              <a:rPr lang="en-US" altLang="zh-CN" dirty="0"/>
+              <a:t>bug</a:t>
+            </a:r>
+            <a:endParaRPr lang="en-US" dirty="0"/>
+          </a:p>
+        </p:txBody>
+      </p:sp>
+      <p:sp>
+        <p:nvSpPr>
+          <p:cNvPr id="22531" name="Content Placeholder 2"/>
+          <p:cNvSpPr>
+            <a:spLocks noGrp="1"/>
+          </p:cNvSpPr>
+          <p:nvPr>
+            <p:ph idx="1"/>
           </p:nvPr>
         </p:nvSpPr>
         <p:spPr/>
@@ -15876,113 +15050,121 @@
           <a:p>
             <a:pPr eaLnBrk="1" hangingPunct="1"/>
             <a:r>
-              <a:rPr lang="en-US" sz="4400" dirty="0"/>
-              <a:t>Bug? </a:t>
-            </a:r>
-            <a:r>
-              <a:rPr lang="zh-CN" altLang="en-US" sz="4400" dirty="0"/>
-              <a:t>取决于你看问题的角度</a:t>
-            </a:r>
-            <a:endParaRPr lang="en-US" sz="4400" dirty="0"/>
-          </a:p>
-        </p:txBody>
-      </p:sp>
-      <p:sp>
-        <p:nvSpPr>
-          <p:cNvPr id="23555" name="Content Placeholder 2"/>
-          <p:cNvSpPr>
-            <a:spLocks noGrp="1"/>
-          </p:cNvSpPr>
-          <p:nvPr>
-            <p:ph idx="1"/>
-          </p:nvPr>
-        </p:nvSpPr>
-        <p:spPr/>
-        <p:txBody>
-          <a:bodyPr>
-            <a:normAutofit/>
-          </a:bodyPr>
-          <a:lstStyle/>
+              <a:rPr lang="zh-CN" altLang="en-US" dirty="0"/>
+              <a:t>请举例说明你碰到的 </a:t>
+            </a:r>
+            <a:r>
+              <a:rPr lang="en-US" altLang="zh-CN" dirty="0"/>
+              <a:t>bug</a:t>
+            </a:r>
+          </a:p>
+          <a:p>
+            <a:pPr lvl="1"/>
+            <a:r>
+              <a:rPr lang="en-US" altLang="zh-CN" dirty="0"/>
+              <a:t>5 </a:t>
+            </a:r>
+            <a:r>
+              <a:rPr lang="zh-CN" altLang="en-US" dirty="0"/>
+              <a:t>分钟， </a:t>
+            </a:r>
+            <a:r>
+              <a:rPr lang="en-US" altLang="zh-CN" dirty="0"/>
+              <a:t>3 </a:t>
+            </a:r>
+            <a:r>
+              <a:rPr lang="zh-CN" altLang="en-US" dirty="0"/>
+              <a:t>个同学来说明</a:t>
+            </a:r>
+            <a:endParaRPr lang="en-US" dirty="0"/>
+          </a:p>
           <a:p>
             <a:pPr eaLnBrk="1" hangingPunct="1"/>
             <a:r>
-              <a:rPr lang="zh-CN" altLang="en-US" sz="2000"/>
-              <a:t>伙计取下壁上挂的一块乌黑油腻的东西，请他们赏鉴，嘴里连说：“好味道！”引得自己口水要流，生怕经这几位客人的馋眼睛一看，肥肉会减瘦了。肉上一条蛆虫从腻睡里惊醒，</a:t>
-            </a:r>
-            <a:r>
-              <a:rPr lang="en-US" altLang="zh-CN" sz="2000"/>
-              <a:t>…</a:t>
-            </a:r>
+              <a:rPr lang="zh-CN" altLang="en-US" dirty="0"/>
+              <a:t>软件的行为和用户的期望值不一样</a:t>
+            </a:r>
+            <a:endParaRPr lang="en-US" dirty="0"/>
+          </a:p>
+          <a:p>
+            <a:pPr lvl="1" eaLnBrk="1" hangingPunct="1"/>
+            <a:r>
+              <a:rPr lang="zh-CN" altLang="en-US" dirty="0"/>
+              <a:t>崩溃</a:t>
+            </a:r>
+            <a:r>
+              <a:rPr lang="en-US" dirty="0"/>
+              <a:t>Crash, </a:t>
+            </a:r>
+            <a:r>
+              <a:rPr lang="zh-CN" altLang="en-US" dirty="0"/>
+              <a:t>死锁</a:t>
+            </a:r>
+            <a:endParaRPr lang="en-US" dirty="0"/>
+          </a:p>
+          <a:p>
+            <a:pPr lvl="1" eaLnBrk="1" hangingPunct="1"/>
+            <a:r>
+              <a:rPr lang="zh-CN" altLang="en-US" dirty="0"/>
+              <a:t>数据丢失，错误</a:t>
+            </a:r>
+            <a:endParaRPr lang="en-US" dirty="0"/>
+          </a:p>
+          <a:p>
+            <a:pPr lvl="1" eaLnBrk="1" hangingPunct="1"/>
+            <a:r>
+              <a:rPr lang="zh-CN" altLang="en-US" dirty="0"/>
+              <a:t>达不到预期功能</a:t>
+            </a:r>
+            <a:endParaRPr lang="en-US" dirty="0"/>
+          </a:p>
+          <a:p>
+            <a:pPr lvl="1" eaLnBrk="1" hangingPunct="1"/>
+            <a:r>
+              <a:rPr lang="zh-CN" altLang="en-US" dirty="0"/>
+              <a:t>难用</a:t>
+            </a:r>
+            <a:endParaRPr lang="en-US" dirty="0"/>
           </a:p>
           <a:p>
             <a:pPr eaLnBrk="1" hangingPunct="1"/>
             <a:r>
-              <a:rPr lang="zh-CN" altLang="en-US" sz="2000"/>
-              <a:t>伙计忙伸指头按着这嫩肥软白的东西，轻轻一捺，在肉面的尘垢上划了一条乌光油润的痕迹，像新浇的柏油路，一壁说：“没有什么呀！”顾尔谦冒火，连声质问他：“难道我们眼睛是瞎的？”大家也说：“岂有此理！”</a:t>
-            </a:r>
-            <a:r>
-              <a:rPr lang="en-US" altLang="zh-CN" sz="2000"/>
-              <a:t>…</a:t>
-            </a:r>
-          </a:p>
-          <a:p>
-            <a:pPr eaLnBrk="1" hangingPunct="1"/>
-            <a:r>
-              <a:rPr lang="zh-CN" altLang="en-US" sz="2000"/>
-              <a:t>肉里另有两条蛆也闻声探头出现。伙计再没法毁尸灭迹，只反复说：“你们不吃，有人要吃</a:t>
-            </a:r>
-            <a:r>
-              <a:rPr lang="en-US" altLang="zh-CN" sz="2000"/>
-              <a:t>——</a:t>
-            </a:r>
-            <a:r>
-              <a:rPr lang="zh-CN" altLang="en-US" sz="2000"/>
-              <a:t>我吃给你们看</a:t>
-            </a:r>
-            <a:r>
-              <a:rPr lang="en-US" altLang="zh-CN" sz="2000"/>
-              <a:t>——”</a:t>
-            </a:r>
-            <a:r>
-              <a:rPr lang="zh-CN" altLang="en-US" sz="2000"/>
-              <a:t>店主拔出嘴里的旱烟筒，劝告道：“</a:t>
-            </a:r>
-            <a:r>
-              <a:rPr lang="zh-CN" altLang="en-US" sz="2000" b="1"/>
-              <a:t>这不是虫呀，没有关系的，这叫‘肉芽’</a:t>
-            </a:r>
-            <a:r>
-              <a:rPr lang="en-US" altLang="zh-CN" sz="2000"/>
-              <a:t>——‘</a:t>
-            </a:r>
-            <a:r>
-              <a:rPr lang="zh-CN" altLang="en-US" sz="2000"/>
-              <a:t>肉’</a:t>
-            </a:r>
-            <a:r>
-              <a:rPr lang="en-US" altLang="zh-CN" sz="2000"/>
-              <a:t>——‘</a:t>
-            </a:r>
-            <a:r>
-              <a:rPr lang="zh-CN" altLang="en-US" sz="2000"/>
-              <a:t>芽’。”方鸿渐引申说：“你们这店里吃的东西都会发芽，不但是肉。”</a:t>
-            </a:r>
-            <a:endParaRPr lang="en-US" altLang="zh-CN" sz="2000"/>
-          </a:p>
-          <a:p>
-            <a:pPr eaLnBrk="1" hangingPunct="1"/>
-            <a:r>
-              <a:rPr lang="en-US" altLang="zh-CN" sz="2000"/>
-              <a:t>Bug?  Or </a:t>
-            </a:r>
-            <a:r>
-              <a:rPr lang="zh-CN" altLang="en-US" sz="2000"/>
-              <a:t>肉芽</a:t>
-            </a:r>
-            <a:r>
-              <a:rPr lang="en-US" altLang="zh-CN" sz="2000"/>
-              <a:t>? </a:t>
-            </a:r>
+              <a:rPr lang="zh-CN" altLang="en-US" dirty="0"/>
+              <a:t>期望值从哪里来？</a:t>
+            </a:r>
+            <a:endParaRPr lang="en-US" altLang="zh-CN" dirty="0"/>
+          </a:p>
+          <a:p>
+            <a:pPr lvl="1" eaLnBrk="1" hangingPunct="1"/>
+            <a:r>
+              <a:rPr lang="zh-CN" altLang="en-US" dirty="0"/>
+              <a:t>用户</a:t>
+            </a:r>
+            <a:r>
+              <a:rPr lang="en-US" altLang="zh-CN" dirty="0"/>
+              <a:t>/</a:t>
+            </a:r>
+            <a:r>
+              <a:rPr lang="zh-CN" altLang="en-US" dirty="0"/>
+              <a:t>顾客</a:t>
+            </a:r>
+            <a:r>
+              <a:rPr lang="en-US" altLang="zh-CN" dirty="0"/>
+              <a:t>/</a:t>
+            </a:r>
+            <a:r>
+              <a:rPr lang="zh-CN" altLang="en-US" dirty="0"/>
+              <a:t>产品</a:t>
+            </a:r>
+            <a:r>
+              <a:rPr lang="en-US" altLang="zh-CN" dirty="0"/>
+              <a:t>/</a:t>
+            </a:r>
+            <a:r>
+              <a:rPr lang="zh-CN" altLang="en-US" dirty="0"/>
+              <a:t>文化</a:t>
+            </a:r>
+            <a:endParaRPr lang="en-US" dirty="0"/>
           </a:p>
         </p:txBody>
       </p:sp>
@@ -16013,7 +15195,7 @@
       </p:grpSpPr>
       <p:sp>
         <p:nvSpPr>
-          <p:cNvPr id="24578" name="Title 1"/>
+          <p:cNvPr id="23554" name="Title 1"/>
           <p:cNvSpPr>
             <a:spLocks noGrp="1"/>
           </p:cNvSpPr>
@@ -16023,137 +15205,120 @@
         </p:nvSpPr>
         <p:spPr/>
         <p:txBody>
-          <a:bodyPr/>
-          <a:lstStyle/>
-          <a:p>
-            <a:pPr eaLnBrk="1" hangingPunct="1"/>
-            <a:r>
-              <a:rPr lang="zh-CN" altLang="en-US" dirty="0"/>
-              <a:t>例子</a:t>
-            </a:r>
-            <a:endParaRPr lang="en-US" dirty="0"/>
-          </a:p>
-        </p:txBody>
-      </p:sp>
-      <p:sp>
-        <p:nvSpPr>
-          <p:cNvPr id="24579" name="Content Placeholder 2"/>
-          <p:cNvSpPr>
-            <a:spLocks noGrp="1"/>
-          </p:cNvSpPr>
-          <p:nvPr>
-            <p:ph idx="1"/>
-          </p:nvPr>
-        </p:nvSpPr>
-        <p:spPr/>
-        <p:txBody>
           <a:bodyPr>
-            <a:normAutofit lnSpcReduction="10000"/>
+            <a:normAutofit/>
           </a:bodyPr>
           <a:lstStyle/>
           <a:p>
-            <a:pPr eaLnBrk="1" hangingPunct="1">
-              <a:buFont typeface="Wingdings 2" pitchFamily="18" charset="2"/>
-              <a:buNone/>
-            </a:pPr>
-            <a:r>
-              <a:rPr lang="zh-CN" altLang="en-US" dirty="0"/>
-              <a:t>某大学食堂豆腐丝充肉荤 引大学学生不满</a:t>
-            </a:r>
-            <a:endParaRPr lang="en-US" altLang="zh-CN" dirty="0"/>
-          </a:p>
-          <a:p>
             <a:pPr eaLnBrk="1" hangingPunct="1"/>
             <a:r>
-              <a:rPr lang="zh-CN" altLang="en-US" dirty="0"/>
-              <a:t>学生：</a:t>
-            </a:r>
-            <a:endParaRPr lang="en-US" altLang="zh-CN" dirty="0"/>
-          </a:p>
-          <a:p>
-            <a:pPr lvl="1" eaLnBrk="1" hangingPunct="1"/>
-            <a:r>
-              <a:rPr lang="zh-CN" altLang="en-US" dirty="0"/>
-              <a:t>荤菜里肉丝寥寥</a:t>
-            </a:r>
-            <a:r>
-              <a:rPr lang="en-US" altLang="zh-CN" dirty="0"/>
-              <a:t>, </a:t>
-            </a:r>
-            <a:r>
-              <a:rPr lang="zh-CN" altLang="en-US" dirty="0"/>
-              <a:t>豆腐丝很多</a:t>
-            </a:r>
-            <a:endParaRPr lang="en-US" altLang="zh-CN" dirty="0"/>
-          </a:p>
-          <a:p>
-            <a:pPr lvl="1" eaLnBrk="1" hangingPunct="1"/>
-            <a:r>
-              <a:rPr lang="zh-CN" altLang="en-US" dirty="0"/>
-              <a:t>食堂有愚弄学生之嫌</a:t>
-            </a:r>
-            <a:endParaRPr lang="en-US" altLang="zh-CN" dirty="0"/>
-          </a:p>
-          <a:p>
-            <a:pPr lvl="1" eaLnBrk="1" hangingPunct="1"/>
-            <a:r>
-              <a:rPr lang="en-US" altLang="zh-CN" dirty="0"/>
-              <a:t>It’s a bug!</a:t>
-            </a:r>
-          </a:p>
+              <a:rPr lang="en-US" sz="4400" dirty="0"/>
+              <a:t>Bug? </a:t>
+            </a:r>
+            <a:r>
+              <a:rPr lang="zh-CN" altLang="en-US" sz="4400" dirty="0"/>
+              <a:t>取决于你看问题的角度</a:t>
+            </a:r>
+            <a:endParaRPr lang="en-US" sz="4400" dirty="0"/>
+          </a:p>
+        </p:txBody>
+      </p:sp>
+      <p:sp>
+        <p:nvSpPr>
+          <p:cNvPr id="23555" name="Content Placeholder 2"/>
+          <p:cNvSpPr>
+            <a:spLocks noGrp="1"/>
+          </p:cNvSpPr>
+          <p:nvPr>
+            <p:ph idx="1"/>
+          </p:nvPr>
+        </p:nvSpPr>
+        <p:spPr/>
+        <p:txBody>
+          <a:bodyPr>
+            <a:normAutofit/>
+          </a:bodyPr>
+          <a:lstStyle/>
           <a:p>
             <a:pPr eaLnBrk="1" hangingPunct="1"/>
             <a:r>
-              <a:rPr lang="zh-CN" altLang="en-US" dirty="0"/>
-              <a:t>校方：</a:t>
-            </a:r>
-            <a:endParaRPr lang="en-US" altLang="zh-CN" dirty="0"/>
-          </a:p>
-          <a:p>
-            <a:pPr lvl="1" eaLnBrk="1" hangingPunct="1"/>
-            <a:r>
-              <a:rPr lang="zh-CN" altLang="en-US" dirty="0"/>
-              <a:t>豆腐丝 </a:t>
-            </a:r>
-            <a:r>
-              <a:rPr lang="en-US" altLang="zh-CN" dirty="0"/>
-              <a:t>=</a:t>
-            </a:r>
-            <a:r>
-              <a:rPr lang="zh-CN" altLang="en-US" dirty="0"/>
-              <a:t>素肉</a:t>
-            </a:r>
-            <a:endParaRPr lang="en-US" altLang="zh-CN" dirty="0"/>
-          </a:p>
-          <a:p>
-            <a:pPr lvl="1" eaLnBrk="1" hangingPunct="1"/>
-            <a:r>
-              <a:rPr lang="zh-CN" altLang="en-US" dirty="0"/>
-              <a:t>加入素肉为营养均衡</a:t>
-            </a:r>
-            <a:r>
-              <a:rPr lang="en-US" altLang="zh-CN" dirty="0"/>
-              <a:t>, </a:t>
-            </a:r>
-            <a:r>
-              <a:rPr lang="zh-CN" altLang="en-US" dirty="0"/>
-              <a:t>“植物蛋白”</a:t>
-            </a:r>
-            <a:endParaRPr lang="en-US" altLang="zh-CN" dirty="0"/>
-          </a:p>
-          <a:p>
-            <a:pPr lvl="1" eaLnBrk="1" hangingPunct="1"/>
-            <a:r>
-              <a:rPr lang="en-US" altLang="zh-CN" dirty="0"/>
-              <a:t>It’s a feature!</a:t>
-            </a:r>
-            <a:br>
-              <a:rPr lang="zh-CN" altLang="en-US" dirty="0"/>
-            </a:br>
-            <a:br>
-              <a:rPr lang="zh-CN" altLang="en-US" dirty="0"/>
-            </a:br>
-            <a:endParaRPr lang="en-US" dirty="0"/>
+              <a:rPr lang="zh-CN" altLang="en-US" sz="2000"/>
+              <a:t>伙计取下壁上挂的一块乌黑油腻的东西，请他们赏鉴，嘴里连说：“好味道！”引得自己口水要流，生怕经这几位客人的馋眼睛一看，肥肉会减瘦了。肉上一条蛆虫从腻睡里惊醒，</a:t>
+            </a:r>
+            <a:r>
+              <a:rPr lang="en-US" altLang="zh-CN" sz="2000"/>
+              <a:t>…</a:t>
+            </a:r>
+          </a:p>
+          <a:p>
+            <a:pPr eaLnBrk="1" hangingPunct="1"/>
+            <a:r>
+              <a:rPr lang="zh-CN" altLang="en-US" sz="2000"/>
+              <a:t>伙计忙伸指头按着这嫩肥软白的东西，轻轻一捺，在肉面的尘垢上划了一条乌光油润的痕迹，像新浇的柏油路，一壁说：“没有什么呀！”顾尔谦冒火，连声质问他：“难道我们眼睛是瞎的？”大家也说：“岂有此理！”</a:t>
+            </a:r>
+            <a:r>
+              <a:rPr lang="en-US" altLang="zh-CN" sz="2000"/>
+              <a:t>…</a:t>
+            </a:r>
+          </a:p>
+          <a:p>
+            <a:pPr eaLnBrk="1" hangingPunct="1"/>
+            <a:r>
+              <a:rPr lang="zh-CN" altLang="en-US" sz="2000"/>
+              <a:t>肉里另有两条蛆也闻声探头出现。伙计再没法毁尸灭迹，只反复说：“你们不吃，有人要吃</a:t>
+            </a:r>
+            <a:r>
+              <a:rPr lang="en-US" altLang="zh-CN" sz="2000"/>
+              <a:t>——</a:t>
+            </a:r>
+            <a:r>
+              <a:rPr lang="zh-CN" altLang="en-US" sz="2000"/>
+              <a:t>我吃给你们看</a:t>
+            </a:r>
+            <a:r>
+              <a:rPr lang="en-US" altLang="zh-CN" sz="2000"/>
+              <a:t>——”</a:t>
+            </a:r>
+            <a:r>
+              <a:rPr lang="zh-CN" altLang="en-US" sz="2000"/>
+              <a:t>店主拔出嘴里的旱烟筒，劝告道：“</a:t>
+            </a:r>
+            <a:r>
+              <a:rPr lang="zh-CN" altLang="en-US" sz="2000" b="1"/>
+              <a:t>这不是虫呀，没有关系的，这叫‘肉芽’</a:t>
+            </a:r>
+            <a:r>
+              <a:rPr lang="en-US" altLang="zh-CN" sz="2000"/>
+              <a:t>——‘</a:t>
+            </a:r>
+            <a:r>
+              <a:rPr lang="zh-CN" altLang="en-US" sz="2000"/>
+              <a:t>肉’</a:t>
+            </a:r>
+            <a:r>
+              <a:rPr lang="en-US" altLang="zh-CN" sz="2000"/>
+              <a:t>——‘</a:t>
+            </a:r>
+            <a:r>
+              <a:rPr lang="zh-CN" altLang="en-US" sz="2000"/>
+              <a:t>芽’。”方鸿渐引申说：“你们这店里吃的东西都会发芽，不但是肉。”</a:t>
+            </a:r>
+            <a:endParaRPr lang="en-US" altLang="zh-CN" sz="2000"/>
+          </a:p>
+          <a:p>
+            <a:pPr eaLnBrk="1" hangingPunct="1"/>
+            <a:r>
+              <a:rPr lang="en-US" altLang="zh-CN" sz="2000"/>
+              <a:t>Bug?  Or </a:t>
+            </a:r>
+            <a:r>
+              <a:rPr lang="zh-CN" altLang="en-US" sz="2000"/>
+              <a:t>肉芽</a:t>
+            </a:r>
+            <a:r>
+              <a:rPr lang="en-US" altLang="zh-CN" sz="2000"/>
+              <a:t>? </a:t>
+            </a:r>
           </a:p>
         </p:txBody>
       </p:sp>
@@ -16166,6 +15331,279 @@
 </file>
 
 <file path=ppt/slides/slide39.xml><?xml version="1.0" encoding="utf-8"?>
+<p:sld xmlns:a="http://schemas.openxmlformats.org/drawingml/2006/main" xmlns:r="http://schemas.openxmlformats.org/officeDocument/2006/relationships" xmlns:p="http://schemas.openxmlformats.org/presentationml/2006/main">
+  <p:cSld>
+    <p:spTree>
+      <p:nvGrpSpPr>
+        <p:cNvPr id="1" name=""/>
+        <p:cNvGrpSpPr/>
+        <p:nvPr/>
+      </p:nvGrpSpPr>
+      <p:grpSpPr>
+        <a:xfrm>
+          <a:off x="0" y="0"/>
+          <a:ext cx="0" cy="0"/>
+          <a:chOff x="0" y="0"/>
+          <a:chExt cx="0" cy="0"/>
+        </a:xfrm>
+      </p:grpSpPr>
+      <p:sp>
+        <p:nvSpPr>
+          <p:cNvPr id="24578" name="Title 1"/>
+          <p:cNvSpPr>
+            <a:spLocks noGrp="1"/>
+          </p:cNvSpPr>
+          <p:nvPr>
+            <p:ph type="title"/>
+          </p:nvPr>
+        </p:nvSpPr>
+        <p:spPr/>
+        <p:txBody>
+          <a:bodyPr/>
+          <a:lstStyle/>
+          <a:p>
+            <a:pPr eaLnBrk="1" hangingPunct="1"/>
+            <a:r>
+              <a:rPr lang="zh-CN" altLang="en-US" dirty="0"/>
+              <a:t>例子</a:t>
+            </a:r>
+            <a:endParaRPr lang="en-US" dirty="0"/>
+          </a:p>
+        </p:txBody>
+      </p:sp>
+      <p:sp>
+        <p:nvSpPr>
+          <p:cNvPr id="24579" name="Content Placeholder 2"/>
+          <p:cNvSpPr>
+            <a:spLocks noGrp="1"/>
+          </p:cNvSpPr>
+          <p:nvPr>
+            <p:ph idx="1"/>
+          </p:nvPr>
+        </p:nvSpPr>
+        <p:spPr/>
+        <p:txBody>
+          <a:bodyPr>
+            <a:normAutofit lnSpcReduction="10000"/>
+          </a:bodyPr>
+          <a:lstStyle/>
+          <a:p>
+            <a:pPr eaLnBrk="1" hangingPunct="1">
+              <a:buFont typeface="Wingdings 2" pitchFamily="18" charset="2"/>
+              <a:buNone/>
+            </a:pPr>
+            <a:r>
+              <a:rPr lang="zh-CN" altLang="en-US" dirty="0"/>
+              <a:t>某大学食堂豆腐丝充肉荤 引大学学生不满</a:t>
+            </a:r>
+            <a:endParaRPr lang="en-US" altLang="zh-CN" dirty="0"/>
+          </a:p>
+          <a:p>
+            <a:pPr eaLnBrk="1" hangingPunct="1"/>
+            <a:r>
+              <a:rPr lang="zh-CN" altLang="en-US" dirty="0"/>
+              <a:t>学生：</a:t>
+            </a:r>
+            <a:endParaRPr lang="en-US" altLang="zh-CN" dirty="0"/>
+          </a:p>
+          <a:p>
+            <a:pPr lvl="1" eaLnBrk="1" hangingPunct="1"/>
+            <a:r>
+              <a:rPr lang="zh-CN" altLang="en-US" dirty="0"/>
+              <a:t>荤菜里肉丝寥寥</a:t>
+            </a:r>
+            <a:r>
+              <a:rPr lang="en-US" altLang="zh-CN" dirty="0"/>
+              <a:t>, </a:t>
+            </a:r>
+            <a:r>
+              <a:rPr lang="zh-CN" altLang="en-US" dirty="0"/>
+              <a:t>豆腐丝很多</a:t>
+            </a:r>
+            <a:endParaRPr lang="en-US" altLang="zh-CN" dirty="0"/>
+          </a:p>
+          <a:p>
+            <a:pPr lvl="1" eaLnBrk="1" hangingPunct="1"/>
+            <a:r>
+              <a:rPr lang="zh-CN" altLang="en-US" dirty="0"/>
+              <a:t>食堂有愚弄学生之嫌</a:t>
+            </a:r>
+            <a:endParaRPr lang="en-US" altLang="zh-CN" dirty="0"/>
+          </a:p>
+          <a:p>
+            <a:pPr lvl="1" eaLnBrk="1" hangingPunct="1"/>
+            <a:r>
+              <a:rPr lang="en-US" altLang="zh-CN" dirty="0"/>
+              <a:t>It’s a bug!</a:t>
+            </a:r>
+          </a:p>
+          <a:p>
+            <a:pPr eaLnBrk="1" hangingPunct="1"/>
+            <a:r>
+              <a:rPr lang="zh-CN" altLang="en-US" dirty="0"/>
+              <a:t>校方：</a:t>
+            </a:r>
+            <a:endParaRPr lang="en-US" altLang="zh-CN" dirty="0"/>
+          </a:p>
+          <a:p>
+            <a:pPr lvl="1" eaLnBrk="1" hangingPunct="1"/>
+            <a:r>
+              <a:rPr lang="zh-CN" altLang="en-US" dirty="0"/>
+              <a:t>豆腐丝 </a:t>
+            </a:r>
+            <a:r>
+              <a:rPr lang="en-US" altLang="zh-CN" dirty="0"/>
+              <a:t>=</a:t>
+            </a:r>
+            <a:r>
+              <a:rPr lang="zh-CN" altLang="en-US" dirty="0"/>
+              <a:t>素肉</a:t>
+            </a:r>
+            <a:endParaRPr lang="en-US" altLang="zh-CN" dirty="0"/>
+          </a:p>
+          <a:p>
+            <a:pPr lvl="1" eaLnBrk="1" hangingPunct="1"/>
+            <a:r>
+              <a:rPr lang="zh-CN" altLang="en-US" dirty="0"/>
+              <a:t>加入素肉为营养均衡</a:t>
+            </a:r>
+            <a:r>
+              <a:rPr lang="en-US" altLang="zh-CN" dirty="0"/>
+              <a:t>, </a:t>
+            </a:r>
+            <a:r>
+              <a:rPr lang="zh-CN" altLang="en-US" dirty="0"/>
+              <a:t>“植物蛋白”</a:t>
+            </a:r>
+            <a:endParaRPr lang="en-US" altLang="zh-CN" dirty="0"/>
+          </a:p>
+          <a:p>
+            <a:pPr lvl="1" eaLnBrk="1" hangingPunct="1"/>
+            <a:r>
+              <a:rPr lang="en-US" altLang="zh-CN" dirty="0"/>
+              <a:t>It’s a feature!</a:t>
+            </a:r>
+            <a:br>
+              <a:rPr lang="zh-CN" altLang="en-US" dirty="0"/>
+            </a:br>
+            <a:br>
+              <a:rPr lang="zh-CN" altLang="en-US" dirty="0"/>
+            </a:br>
+            <a:endParaRPr lang="en-US" dirty="0"/>
+          </a:p>
+        </p:txBody>
+      </p:sp>
+    </p:spTree>
+  </p:cSld>
+  <p:clrMapOvr>
+    <a:masterClrMapping/>
+  </p:clrMapOvr>
+</p:sld>
+</file>
+
+<file path=ppt/slides/slide4.xml><?xml version="1.0" encoding="utf-8"?>
+<p:sld xmlns:a="http://schemas.openxmlformats.org/drawingml/2006/main" xmlns:r="http://schemas.openxmlformats.org/officeDocument/2006/relationships" xmlns:p="http://schemas.openxmlformats.org/presentationml/2006/main">
+  <p:cSld>
+    <p:spTree>
+      <p:nvGrpSpPr>
+        <p:cNvPr id="1" name=""/>
+        <p:cNvGrpSpPr/>
+        <p:nvPr/>
+      </p:nvGrpSpPr>
+      <p:grpSpPr>
+        <a:xfrm>
+          <a:off x="0" y="0"/>
+          <a:ext cx="0" cy="0"/>
+          <a:chOff x="0" y="0"/>
+          <a:chExt cx="0" cy="0"/>
+        </a:xfrm>
+      </p:grpSpPr>
+      <p:sp>
+        <p:nvSpPr>
+          <p:cNvPr id="7170" name="Title 1"/>
+          <p:cNvSpPr>
+            <a:spLocks noGrp="1"/>
+          </p:cNvSpPr>
+          <p:nvPr>
+            <p:ph type="title"/>
+          </p:nvPr>
+        </p:nvSpPr>
+        <p:spPr/>
+        <p:txBody>
+          <a:bodyPr/>
+          <a:lstStyle/>
+          <a:p>
+            <a:pPr eaLnBrk="1" hangingPunct="1"/>
+            <a:r>
+              <a:rPr lang="en-US"/>
+              <a:t>Hobbyist: Lawn chair, balloon</a:t>
+            </a:r>
+          </a:p>
+        </p:txBody>
+      </p:sp>
+      <p:pic>
+        <p:nvPicPr>
+          <p:cNvPr id="7171" name="Picture 2" descr="Oregon man takes lawn chair up to 13,000 feet"/>
+          <p:cNvPicPr>
+            <a:picLocks noChangeAspect="1" noChangeArrowheads="1"/>
+          </p:cNvPicPr>
+          <p:nvPr/>
+        </p:nvPicPr>
+        <p:blipFill>
+          <a:blip r:embed="rId3">
+            <a:extLst>
+              <a:ext uri="{28A0092B-C50C-407E-A947-70E740481C1C}">
+                <a14:useLocalDpi xmlns:a14="http://schemas.microsoft.com/office/drawing/2010/main" val="0"/>
+              </a:ext>
+            </a:extLst>
+          </a:blip>
+          <a:srcRect/>
+          <a:stretch>
+            <a:fillRect/>
+          </a:stretch>
+        </p:blipFill>
+        <p:spPr bwMode="auto">
+          <a:xfrm>
+            <a:off x="2514600" y="1714500"/>
+            <a:ext cx="6858000" cy="5143500"/>
+          </a:xfrm>
+          <a:prstGeom prst="rect">
+            <a:avLst/>
+          </a:prstGeom>
+          <a:noFill/>
+          <a:ln>
+            <a:noFill/>
+          </a:ln>
+          <a:extLst>
+            <a:ext uri="{909E8E84-426E-40DD-AFC4-6F175D3DCCD1}">
+              <a14:hiddenFill xmlns:a14="http://schemas.microsoft.com/office/drawing/2010/main">
+                <a:solidFill>
+                  <a:srgbClr val="FFFFFF"/>
+                </a:solidFill>
+              </a14:hiddenFill>
+            </a:ext>
+            <a:ext uri="{91240B29-F687-4F45-9708-019B960494DF}">
+              <a14:hiddenLine xmlns:a14="http://schemas.microsoft.com/office/drawing/2010/main" w="9525">
+                <a:solidFill>
+                  <a:srgbClr val="000000"/>
+                </a:solidFill>
+                <a:miter lim="800000"/>
+                <a:headEnd/>
+                <a:tailEnd/>
+              </a14:hiddenLine>
+            </a:ext>
+          </a:extLst>
+        </p:spPr>
+      </p:pic>
+    </p:spTree>
+  </p:cSld>
+  <p:clrMapOvr>
+    <a:masterClrMapping/>
+  </p:clrMapOvr>
+</p:sld>
+</file>
+
+<file path=ppt/slides/slide40.xml><?xml version="1.0" encoding="utf-8"?>
 <p:sld xmlns:a="http://schemas.openxmlformats.org/drawingml/2006/main" xmlns:r="http://schemas.openxmlformats.org/officeDocument/2006/relationships" xmlns:p="http://schemas.openxmlformats.org/presentationml/2006/main">
   <p:cSld>
     <p:spTree>
@@ -16497,7 +15935,7 @@
 </p:sld>
 </file>
 
-<file path=ppt/slides/slide4.xml><?xml version="1.0" encoding="utf-8"?>
+<file path=ppt/slides/slide41.xml><?xml version="1.0" encoding="utf-8"?>
 <p:sld xmlns:a="http://schemas.openxmlformats.org/drawingml/2006/main" xmlns:r="http://schemas.openxmlformats.org/officeDocument/2006/relationships" xmlns:p="http://schemas.openxmlformats.org/presentationml/2006/main">
   <p:cSld>
     <p:spTree>
@@ -16516,108 +15954,6 @@
       </p:grpSpPr>
       <p:sp>
         <p:nvSpPr>
-          <p:cNvPr id="7170" name="Title 1"/>
-          <p:cNvSpPr>
-            <a:spLocks noGrp="1"/>
-          </p:cNvSpPr>
-          <p:nvPr>
-            <p:ph type="title"/>
-          </p:nvPr>
-        </p:nvSpPr>
-        <p:spPr/>
-        <p:txBody>
-          <a:bodyPr/>
-          <a:lstStyle/>
-          <a:p>
-            <a:pPr eaLnBrk="1" hangingPunct="1"/>
-            <a:r>
-              <a:rPr lang="en-US"/>
-              <a:t>Hobbyist: Lawn chair, balloon</a:t>
-            </a:r>
-          </a:p>
-        </p:txBody>
-      </p:sp>
-      <p:pic>
-        <p:nvPicPr>
-          <p:cNvPr id="7171" name="Picture 2" descr="Oregon man takes lawn chair up to 13,000 feet"/>
-          <p:cNvPicPr>
-            <a:picLocks noChangeAspect="1" noChangeArrowheads="1"/>
-          </p:cNvPicPr>
-          <p:nvPr/>
-        </p:nvPicPr>
-        <p:blipFill>
-          <a:blip r:embed="rId3">
-            <a:extLst>
-              <a:ext uri="{28A0092B-C50C-407E-A947-70E740481C1C}">
-                <a14:useLocalDpi xmlns:a14="http://schemas.microsoft.com/office/drawing/2010/main" val="0"/>
-              </a:ext>
-            </a:extLst>
-          </a:blip>
-          <a:srcRect/>
-          <a:stretch>
-            <a:fillRect/>
-          </a:stretch>
-        </p:blipFill>
-        <p:spPr bwMode="auto">
-          <a:xfrm>
-            <a:off x="2514600" y="1714500"/>
-            <a:ext cx="6858000" cy="5143500"/>
-          </a:xfrm>
-          <a:prstGeom prst="rect">
-            <a:avLst/>
-          </a:prstGeom>
-          <a:noFill/>
-          <a:ln>
-            <a:noFill/>
-          </a:ln>
-          <a:extLst>
-            <a:ext uri="{909E8E84-426E-40DD-AFC4-6F175D3DCCD1}">
-              <a14:hiddenFill xmlns:a14="http://schemas.microsoft.com/office/drawing/2010/main">
-                <a:solidFill>
-                  <a:srgbClr val="FFFFFF"/>
-                </a:solidFill>
-              </a14:hiddenFill>
-            </a:ext>
-            <a:ext uri="{91240B29-F687-4F45-9708-019B960494DF}">
-              <a14:hiddenLine xmlns:a14="http://schemas.microsoft.com/office/drawing/2010/main" w="9525">
-                <a:solidFill>
-                  <a:srgbClr val="000000"/>
-                </a:solidFill>
-                <a:miter lim="800000"/>
-                <a:headEnd/>
-                <a:tailEnd/>
-              </a14:hiddenLine>
-            </a:ext>
-          </a:extLst>
-        </p:spPr>
-      </p:pic>
-    </p:spTree>
-  </p:cSld>
-  <p:clrMapOvr>
-    <a:masterClrMapping/>
-  </p:clrMapOvr>
-</p:sld>
-</file>
-
-<file path=ppt/slides/slide40.xml><?xml version="1.0" encoding="utf-8"?>
-<p:sld xmlns:a="http://schemas.openxmlformats.org/drawingml/2006/main" xmlns:r="http://schemas.openxmlformats.org/officeDocument/2006/relationships" xmlns:p="http://schemas.openxmlformats.org/presentationml/2006/main">
-  <p:cSld>
-    <p:spTree>
-      <p:nvGrpSpPr>
-        <p:cNvPr id="1" name=""/>
-        <p:cNvGrpSpPr/>
-        <p:nvPr/>
-      </p:nvGrpSpPr>
-      <p:grpSpPr>
-        <a:xfrm>
-          <a:off x="0" y="0"/>
-          <a:ext cx="0" cy="0"/>
-          <a:chOff x="0" y="0"/>
-          <a:chExt cx="0" cy="0"/>
-        </a:xfrm>
-      </p:grpSpPr>
-      <p:sp>
-        <p:nvSpPr>
           <p:cNvPr id="2" name="Title 1"/>
           <p:cNvSpPr>
             <a:spLocks noGrp="1"/>
@@ -16654,10 +15990,15 @@
         <p:spPr/>
         <p:txBody>
           <a:bodyPr>
-            <a:normAutofit fontScale="92500" lnSpcReduction="10000"/>
+            <a:normAutofit fontScale="85000" lnSpcReduction="20000"/>
           </a:bodyPr>
           <a:lstStyle/>
           <a:p>
+            <a:pPr>
+              <a:lnSpc>
+                <a:spcPct val="110000"/>
+              </a:lnSpc>
+            </a:pPr>
             <a:r>
               <a:rPr lang="zh-CN" altLang="en-US" dirty="0"/>
               <a:t>计算机科学中的理论</a:t>
@@ -16665,7 +16006,11 @@
             <a:endParaRPr lang="en-US" altLang="zh-CN" dirty="0"/>
           </a:p>
           <a:p>
-            <a:pPr lvl="1"/>
+            <a:pPr lvl="1">
+              <a:lnSpc>
+                <a:spcPct val="110000"/>
+              </a:lnSpc>
+            </a:pPr>
             <a:r>
               <a:rPr lang="zh-CN" altLang="en-US" dirty="0"/>
               <a:t>大多可以从形式上证明，和数学，离散数学，数理逻辑密切相关</a:t>
@@ -16673,6 +16018,11 @@
             <a:endParaRPr lang="en-US" altLang="zh-CN" dirty="0"/>
           </a:p>
           <a:p>
+            <a:pPr>
+              <a:lnSpc>
+                <a:spcPct val="110000"/>
+              </a:lnSpc>
+            </a:pPr>
             <a:r>
               <a:rPr lang="zh-CN" altLang="en-US" dirty="0"/>
               <a:t>计算机科学的实践</a:t>
@@ -16680,7 +16030,11 @@
             <a:endParaRPr lang="en-US" altLang="zh-CN" dirty="0"/>
           </a:p>
           <a:p>
-            <a:pPr lvl="1"/>
+            <a:pPr lvl="1">
+              <a:lnSpc>
+                <a:spcPct val="110000"/>
+              </a:lnSpc>
+            </a:pPr>
             <a:r>
               <a:rPr lang="zh-CN" altLang="en-US" dirty="0"/>
               <a:t>和数据，以及其它学科结合，把各种理论运用在 “计算和通讯” 的场景中</a:t>
@@ -16688,6 +16042,11 @@
             <a:endParaRPr lang="en-US" altLang="zh-CN" dirty="0"/>
           </a:p>
           <a:p>
+            <a:pPr>
+              <a:lnSpc>
+                <a:spcPct val="110000"/>
+              </a:lnSpc>
+            </a:pPr>
             <a:r>
               <a:rPr lang="zh-CN" altLang="en-US" dirty="0"/>
               <a:t>软件工程</a:t>
@@ -16695,7 +16054,11 @@
             <a:endParaRPr lang="en-US" altLang="zh-CN" dirty="0"/>
           </a:p>
           <a:p>
-            <a:pPr lvl="1"/>
+            <a:pPr lvl="1">
+              <a:lnSpc>
+                <a:spcPct val="110000"/>
+              </a:lnSpc>
+            </a:pPr>
             <a:r>
               <a:rPr lang="zh-CN" altLang="en-US" dirty="0"/>
               <a:t>和人的行为，现实的需求息息相关。软件工程的研究目标（软件的开发</a:t>
@@ -16719,6 +16082,11 @@
             <a:endParaRPr lang="en-US" altLang="zh-CN" dirty="0"/>
           </a:p>
           <a:p>
+            <a:pPr>
+              <a:lnSpc>
+                <a:spcPct val="110000"/>
+              </a:lnSpc>
+            </a:pPr>
             <a:r>
               <a:rPr lang="zh-CN" altLang="en-US" dirty="0"/>
               <a:t>人</a:t>
@@ -16726,7 +16094,11 @@
             <a:endParaRPr lang="en-US" altLang="zh-CN" dirty="0"/>
           </a:p>
           <a:p>
-            <a:pPr lvl="1"/>
+            <a:pPr lvl="1">
+              <a:lnSpc>
+                <a:spcPct val="110000"/>
+              </a:lnSpc>
+            </a:pPr>
             <a:r>
               <a:rPr lang="zh-CN" altLang="en-US" dirty="0"/>
               <a:t>项目需求的提供者，</a:t>
@@ -16734,7 +16106,11 @@
             <a:endParaRPr lang="en-US" altLang="zh-CN" dirty="0"/>
           </a:p>
           <a:p>
-            <a:pPr lvl="1"/>
+            <a:pPr lvl="1">
+              <a:lnSpc>
+                <a:spcPct val="110000"/>
+              </a:lnSpc>
+            </a:pPr>
             <a:r>
               <a:rPr lang="zh-CN" altLang="en-US" dirty="0"/>
               <a:t>软件的开发人员，</a:t>
@@ -16742,7 +16118,11 @@
             <a:endParaRPr lang="en-US" altLang="zh-CN" dirty="0"/>
           </a:p>
           <a:p>
-            <a:pPr lvl="1"/>
+            <a:pPr lvl="1">
+              <a:lnSpc>
+                <a:spcPct val="110000"/>
+              </a:lnSpc>
+            </a:pPr>
             <a:r>
               <a:rPr lang="zh-CN" altLang="en-US" dirty="0"/>
               <a:t>软件的用户</a:t>
@@ -16764,7 +16144,7 @@
 </p:sld>
 </file>
 
-<file path=ppt/slides/slide41.xml><?xml version="1.0" encoding="utf-8"?>
+<file path=ppt/slides/slide42.xml><?xml version="1.0" encoding="utf-8"?>
 <p:sld xmlns:a="http://schemas.openxmlformats.org/drawingml/2006/main" xmlns:r="http://schemas.openxmlformats.org/officeDocument/2006/relationships" xmlns:p="http://schemas.openxmlformats.org/presentationml/2006/main">
   <p:cSld>
     <p:spTree>
@@ -16854,7 +16234,7 @@
 </p:sld>
 </file>
 
-<file path=ppt/slides/slide42.xml><?xml version="1.0" encoding="utf-8"?>
+<file path=ppt/slides/slide43.xml><?xml version="1.0" encoding="utf-8"?>
 <p:sld xmlns:a="http://schemas.openxmlformats.org/drawingml/2006/main" xmlns:r="http://schemas.openxmlformats.org/officeDocument/2006/relationships" xmlns:p="http://schemas.openxmlformats.org/presentationml/2006/main">
   <p:cSld>
     <p:spTree>
@@ -16933,155 +16313,6 @@
 </p:sld>
 </file>
 
-<file path=ppt/slides/slide43.xml><?xml version="1.0" encoding="utf-8"?>
-<p:sld xmlns:a="http://schemas.openxmlformats.org/drawingml/2006/main" xmlns:r="http://schemas.openxmlformats.org/officeDocument/2006/relationships" xmlns:p="http://schemas.openxmlformats.org/presentationml/2006/main">
-  <p:cSld>
-    <p:spTree>
-      <p:nvGrpSpPr>
-        <p:cNvPr id="1" name=""/>
-        <p:cNvGrpSpPr/>
-        <p:nvPr/>
-      </p:nvGrpSpPr>
-      <p:grpSpPr>
-        <a:xfrm>
-          <a:off x="0" y="0"/>
-          <a:ext cx="0" cy="0"/>
-          <a:chOff x="0" y="0"/>
-          <a:chExt cx="0" cy="0"/>
-        </a:xfrm>
-      </p:grpSpPr>
-      <p:sp>
-        <p:nvSpPr>
-          <p:cNvPr id="2" name="标题 1"/>
-          <p:cNvSpPr>
-            <a:spLocks noGrp="1"/>
-          </p:cNvSpPr>
-          <p:nvPr>
-            <p:ph type="title"/>
-          </p:nvPr>
-        </p:nvSpPr>
-        <p:spPr/>
-        <p:txBody>
-          <a:bodyPr/>
-          <a:lstStyle/>
-          <a:p>
-            <a:r>
-              <a:rPr lang="zh-CN" altLang="en-US" dirty="0"/>
-              <a:t>计算机系 </a:t>
-            </a:r>
-            <a:r>
-              <a:rPr lang="en-US" altLang="zh-CN" dirty="0"/>
-              <a:t>vs </a:t>
-            </a:r>
-            <a:r>
-              <a:rPr lang="zh-CN" altLang="en-US" dirty="0"/>
-              <a:t>软件学院</a:t>
-            </a:r>
-            <a:endParaRPr lang="en-US" dirty="0"/>
-          </a:p>
-        </p:txBody>
-      </p:sp>
-      <p:sp>
-        <p:nvSpPr>
-          <p:cNvPr id="3" name="内容占位符 2"/>
-          <p:cNvSpPr>
-            <a:spLocks noGrp="1"/>
-          </p:cNvSpPr>
-          <p:nvPr>
-            <p:ph idx="1"/>
-          </p:nvPr>
-        </p:nvSpPr>
-        <p:spPr/>
-        <p:txBody>
-          <a:bodyPr/>
-          <a:lstStyle/>
-          <a:p>
-            <a:pPr marL="118872" indent="0">
-              <a:buNone/>
-            </a:pPr>
-            <a:r>
-              <a:rPr lang="zh-CN" altLang="en-US" dirty="0"/>
-              <a:t>如果你遇到一个</a:t>
-            </a:r>
-            <a:endParaRPr lang="en-US" altLang="zh-CN" dirty="0"/>
-          </a:p>
-          <a:p>
-            <a:r>
-              <a:rPr lang="zh-CN" altLang="en-US" dirty="0"/>
-              <a:t>计算机系的老师</a:t>
-            </a:r>
-            <a:r>
-              <a:rPr lang="en-US" altLang="zh-CN" dirty="0"/>
-              <a:t>/</a:t>
-            </a:r>
-            <a:r>
-              <a:rPr lang="zh-CN" altLang="en-US" dirty="0"/>
-              <a:t>学生</a:t>
-            </a:r>
-            <a:endParaRPr lang="en-US" altLang="zh-CN" dirty="0"/>
-          </a:p>
-          <a:p>
-            <a:pPr lvl="1"/>
-            <a:r>
-              <a:rPr lang="zh-CN" altLang="en-US" dirty="0"/>
-              <a:t>你要问：你在计算机科学长期真理的研究方面，做出了哪些成果？</a:t>
-            </a:r>
-            <a:endParaRPr lang="en-US" altLang="zh-CN" dirty="0"/>
-          </a:p>
-          <a:p>
-            <a:pPr lvl="1"/>
-            <a:r>
-              <a:rPr lang="zh-CN" altLang="en-US" dirty="0"/>
-              <a:t>你发现了什么真理？</a:t>
-            </a:r>
-            <a:endParaRPr lang="en-US" altLang="zh-CN" dirty="0"/>
-          </a:p>
-          <a:p>
-            <a:r>
-              <a:rPr lang="zh-CN" altLang="en-US" dirty="0"/>
-              <a:t>软件学院的老师</a:t>
-            </a:r>
-            <a:r>
-              <a:rPr lang="en-US" altLang="zh-CN" dirty="0"/>
-              <a:t>/</a:t>
-            </a:r>
-            <a:r>
-              <a:rPr lang="zh-CN" altLang="en-US" dirty="0"/>
-              <a:t>学生</a:t>
-            </a:r>
-            <a:endParaRPr lang="en-US" altLang="zh-CN" dirty="0"/>
-          </a:p>
-          <a:p>
-            <a:pPr lvl="1"/>
-            <a:r>
-              <a:rPr lang="zh-CN" altLang="en-US" dirty="0"/>
-              <a:t>你要问：你在软件构建方面，有什么具体的，实用的贡献？</a:t>
-            </a:r>
-            <a:endParaRPr lang="en-US" altLang="zh-CN" dirty="0"/>
-          </a:p>
-          <a:p>
-            <a:pPr lvl="1"/>
-            <a:r>
-              <a:rPr lang="zh-CN" altLang="en-US" dirty="0"/>
-              <a:t>你构建了什么有价值的软件？</a:t>
-            </a:r>
-            <a:endParaRPr lang="en-US" dirty="0"/>
-          </a:p>
-        </p:txBody>
-      </p:sp>
-    </p:spTree>
-    <p:extLst>
-      <p:ext uri="{BB962C8B-B14F-4D97-AF65-F5344CB8AC3E}">
-        <p14:creationId xmlns:p14="http://schemas.microsoft.com/office/powerpoint/2010/main" val="2778667451"/>
-      </p:ext>
-    </p:extLst>
-  </p:cSld>
-  <p:clrMapOvr>
-    <a:masterClrMapping/>
-  </p:clrMapOvr>
-</p:sld>
-</file>
-
 <file path=ppt/slides/slide44.xml><?xml version="1.0" encoding="utf-8"?>
 <p:sld xmlns:a="http://schemas.openxmlformats.org/drawingml/2006/main" xmlns:r="http://schemas.openxmlformats.org/officeDocument/2006/relationships" xmlns:p="http://schemas.openxmlformats.org/presentationml/2006/main">
   <p:cSld>
@@ -17101,6 +16332,155 @@
       </p:grpSpPr>
       <p:sp>
         <p:nvSpPr>
+          <p:cNvPr id="2" name="标题 1"/>
+          <p:cNvSpPr>
+            <a:spLocks noGrp="1"/>
+          </p:cNvSpPr>
+          <p:nvPr>
+            <p:ph type="title"/>
+          </p:nvPr>
+        </p:nvSpPr>
+        <p:spPr/>
+        <p:txBody>
+          <a:bodyPr/>
+          <a:lstStyle/>
+          <a:p>
+            <a:r>
+              <a:rPr lang="zh-CN" altLang="en-US" dirty="0"/>
+              <a:t>计算机系 </a:t>
+            </a:r>
+            <a:r>
+              <a:rPr lang="en-US" altLang="zh-CN" dirty="0"/>
+              <a:t>vs </a:t>
+            </a:r>
+            <a:r>
+              <a:rPr lang="zh-CN" altLang="en-US" dirty="0"/>
+              <a:t>软件学院</a:t>
+            </a:r>
+            <a:endParaRPr lang="en-US" dirty="0"/>
+          </a:p>
+        </p:txBody>
+      </p:sp>
+      <p:sp>
+        <p:nvSpPr>
+          <p:cNvPr id="3" name="内容占位符 2"/>
+          <p:cNvSpPr>
+            <a:spLocks noGrp="1"/>
+          </p:cNvSpPr>
+          <p:nvPr>
+            <p:ph idx="1"/>
+          </p:nvPr>
+        </p:nvSpPr>
+        <p:spPr/>
+        <p:txBody>
+          <a:bodyPr/>
+          <a:lstStyle/>
+          <a:p>
+            <a:pPr marL="118872" indent="0">
+              <a:buNone/>
+            </a:pPr>
+            <a:r>
+              <a:rPr lang="zh-CN" altLang="en-US" dirty="0"/>
+              <a:t>如果你遇到一个</a:t>
+            </a:r>
+            <a:endParaRPr lang="en-US" altLang="zh-CN" dirty="0"/>
+          </a:p>
+          <a:p>
+            <a:r>
+              <a:rPr lang="zh-CN" altLang="en-US" dirty="0"/>
+              <a:t>计算机系的老师</a:t>
+            </a:r>
+            <a:r>
+              <a:rPr lang="en-US" altLang="zh-CN" dirty="0"/>
+              <a:t>/</a:t>
+            </a:r>
+            <a:r>
+              <a:rPr lang="zh-CN" altLang="en-US" dirty="0"/>
+              <a:t>学生</a:t>
+            </a:r>
+            <a:endParaRPr lang="en-US" altLang="zh-CN" dirty="0"/>
+          </a:p>
+          <a:p>
+            <a:pPr lvl="1"/>
+            <a:r>
+              <a:rPr lang="zh-CN" altLang="en-US" dirty="0"/>
+              <a:t>你要问：你在计算机科学长期真理的研究方面，做出了哪些成果？</a:t>
+            </a:r>
+            <a:endParaRPr lang="en-US" altLang="zh-CN" dirty="0"/>
+          </a:p>
+          <a:p>
+            <a:pPr lvl="1"/>
+            <a:r>
+              <a:rPr lang="zh-CN" altLang="en-US" dirty="0"/>
+              <a:t>你发现了什么真理？</a:t>
+            </a:r>
+            <a:endParaRPr lang="en-US" altLang="zh-CN" dirty="0"/>
+          </a:p>
+          <a:p>
+            <a:r>
+              <a:rPr lang="zh-CN" altLang="en-US" dirty="0"/>
+              <a:t>软件学院的老师</a:t>
+            </a:r>
+            <a:r>
+              <a:rPr lang="en-US" altLang="zh-CN" dirty="0"/>
+              <a:t>/</a:t>
+            </a:r>
+            <a:r>
+              <a:rPr lang="zh-CN" altLang="en-US" dirty="0"/>
+              <a:t>学生</a:t>
+            </a:r>
+            <a:endParaRPr lang="en-US" altLang="zh-CN" dirty="0"/>
+          </a:p>
+          <a:p>
+            <a:pPr lvl="1"/>
+            <a:r>
+              <a:rPr lang="zh-CN" altLang="en-US" dirty="0"/>
+              <a:t>你要问：你在软件构建方面，有什么具体的，实用的贡献？</a:t>
+            </a:r>
+            <a:endParaRPr lang="en-US" altLang="zh-CN" dirty="0"/>
+          </a:p>
+          <a:p>
+            <a:pPr lvl="1"/>
+            <a:r>
+              <a:rPr lang="zh-CN" altLang="en-US" dirty="0"/>
+              <a:t>你构建了什么有价值的软件？</a:t>
+            </a:r>
+            <a:endParaRPr lang="en-US" dirty="0"/>
+          </a:p>
+        </p:txBody>
+      </p:sp>
+    </p:spTree>
+    <p:extLst>
+      <p:ext uri="{BB962C8B-B14F-4D97-AF65-F5344CB8AC3E}">
+        <p14:creationId xmlns:p14="http://schemas.microsoft.com/office/powerpoint/2010/main" val="2778667451"/>
+      </p:ext>
+    </p:extLst>
+  </p:cSld>
+  <p:clrMapOvr>
+    <a:masterClrMapping/>
+  </p:clrMapOvr>
+</p:sld>
+</file>
+
+<file path=ppt/slides/slide45.xml><?xml version="1.0" encoding="utf-8"?>
+<p:sld xmlns:a="http://schemas.openxmlformats.org/drawingml/2006/main" xmlns:r="http://schemas.openxmlformats.org/officeDocument/2006/relationships" xmlns:p="http://schemas.openxmlformats.org/presentationml/2006/main">
+  <p:cSld>
+    <p:spTree>
+      <p:nvGrpSpPr>
+        <p:cNvPr id="1" name=""/>
+        <p:cNvGrpSpPr/>
+        <p:nvPr/>
+      </p:nvGrpSpPr>
+      <p:grpSpPr>
+        <a:xfrm>
+          <a:off x="0" y="0"/>
+          <a:ext cx="0" cy="0"/>
+          <a:chOff x="0" y="0"/>
+          <a:chExt cx="0" cy="0"/>
+        </a:xfrm>
+      </p:grpSpPr>
+      <p:sp>
+        <p:nvSpPr>
           <p:cNvPr id="2" name="Title 1"/>
           <p:cNvSpPr>
             <a:spLocks noGrp="1"/>
@@ -17184,7 +16564,7 @@
 </p:sld>
 </file>
 
-<file path=ppt/slides/slide45.xml><?xml version="1.0" encoding="utf-8"?>
+<file path=ppt/slides/slide46.xml><?xml version="1.0" encoding="utf-8"?>
 <p:sld xmlns:a="http://schemas.openxmlformats.org/drawingml/2006/main" xmlns:r="http://schemas.openxmlformats.org/officeDocument/2006/relationships" xmlns:p="http://schemas.openxmlformats.org/presentationml/2006/main">
   <p:cSld>
     <p:spTree>
@@ -17634,7 +17014,7 @@
 </p:sld>
 </file>
 
-<file path=ppt/slides/slide46.xml><?xml version="1.0" encoding="utf-8"?>
+<file path=ppt/slides/slide47.xml><?xml version="1.0" encoding="utf-8"?>
 <p:sld xmlns:a="http://schemas.openxmlformats.org/drawingml/2006/main" xmlns:r="http://schemas.openxmlformats.org/officeDocument/2006/relationships" xmlns:p="http://schemas.openxmlformats.org/presentationml/2006/main">
   <p:cSld>
     <p:spTree>
@@ -17728,209 +17108,6 @@
 </p:sld>
 </file>
 
-<file path=ppt/slides/slide47.xml><?xml version="1.0" encoding="utf-8"?>
-<p:sld xmlns:a="http://schemas.openxmlformats.org/drawingml/2006/main" xmlns:r="http://schemas.openxmlformats.org/officeDocument/2006/relationships" xmlns:p="http://schemas.openxmlformats.org/presentationml/2006/main">
-  <p:cSld>
-    <p:spTree>
-      <p:nvGrpSpPr>
-        <p:cNvPr id="1" name=""/>
-        <p:cNvGrpSpPr/>
-        <p:nvPr/>
-      </p:nvGrpSpPr>
-      <p:grpSpPr>
-        <a:xfrm>
-          <a:off x="0" y="0"/>
-          <a:ext cx="0" cy="0"/>
-          <a:chOff x="0" y="0"/>
-          <a:chExt cx="0" cy="0"/>
-        </a:xfrm>
-      </p:grpSpPr>
-      <p:sp>
-        <p:nvSpPr>
-          <p:cNvPr id="2" name="Title 1"/>
-          <p:cNvSpPr>
-            <a:spLocks noGrp="1"/>
-          </p:cNvSpPr>
-          <p:nvPr>
-            <p:ph type="title"/>
-          </p:nvPr>
-        </p:nvSpPr>
-        <p:spPr/>
-        <p:txBody>
-          <a:bodyPr>
-            <a:normAutofit/>
-          </a:bodyPr>
-          <a:lstStyle/>
-          <a:p>
-            <a:r>
-              <a:rPr lang="zh-CN" altLang="en-US" dirty="0"/>
-              <a:t>软件工程的知识领域</a:t>
-            </a:r>
-            <a:endParaRPr lang="en-US" dirty="0"/>
-          </a:p>
-        </p:txBody>
-      </p:sp>
-      <p:sp>
-        <p:nvSpPr>
-          <p:cNvPr id="3" name="Content Placeholder 2"/>
-          <p:cNvSpPr>
-            <a:spLocks noGrp="1"/>
-          </p:cNvSpPr>
-          <p:nvPr>
-            <p:ph idx="1"/>
-          </p:nvPr>
-        </p:nvSpPr>
-        <p:spPr/>
-        <p:txBody>
-          <a:bodyPr>
-            <a:normAutofit fontScale="85000" lnSpcReduction="20000"/>
-          </a:bodyPr>
-          <a:lstStyle/>
-          <a:p>
-            <a:r>
-              <a:rPr lang="zh-CN" altLang="en-US" dirty="0"/>
-              <a:t>软件工程的三大类基础知识领域：</a:t>
-            </a:r>
-            <a:endParaRPr lang="en-US" altLang="zh-CN" dirty="0"/>
-          </a:p>
-          <a:p>
-            <a:pPr lvl="1"/>
-            <a:r>
-              <a:rPr lang="zh-CN" altLang="en-US" dirty="0"/>
-              <a:t>计算机基础；数学基础；工程基础。</a:t>
-            </a:r>
-            <a:endParaRPr lang="en-US" altLang="zh-CN" dirty="0"/>
-          </a:p>
-          <a:p>
-            <a:r>
-              <a:rPr lang="zh-CN" altLang="en-US" dirty="0"/>
-              <a:t>软件工程这个学科包含了</a:t>
-            </a:r>
-            <a:r>
-              <a:rPr lang="en-US" dirty="0"/>
-              <a:t>12</a:t>
-            </a:r>
-            <a:r>
-              <a:rPr lang="zh-CN" altLang="en-US" dirty="0"/>
-              <a:t>个知识领域 （</a:t>
-            </a:r>
-            <a:r>
-              <a:rPr lang="en-US" dirty="0"/>
-              <a:t>Knowledge Area</a:t>
-            </a:r>
-            <a:r>
-              <a:rPr lang="zh-CN" altLang="en-US" dirty="0"/>
-              <a:t>，</a:t>
-            </a:r>
-            <a:r>
-              <a:rPr lang="en-US" dirty="0"/>
-              <a:t>KA</a:t>
-            </a:r>
-            <a:r>
-              <a:rPr lang="zh-CN" altLang="en-US" dirty="0"/>
-              <a:t>）：</a:t>
-            </a:r>
-            <a:endParaRPr lang="en-US" dirty="0"/>
-          </a:p>
-          <a:p>
-            <a:pPr lvl="1"/>
-            <a:r>
-              <a:rPr lang="en-US" dirty="0"/>
-              <a:t>Software Requirements</a:t>
-            </a:r>
-          </a:p>
-          <a:p>
-            <a:pPr lvl="1"/>
-            <a:r>
-              <a:rPr lang="en-US" dirty="0"/>
-              <a:t>Software Design</a:t>
-            </a:r>
-          </a:p>
-          <a:p>
-            <a:pPr lvl="1"/>
-            <a:r>
-              <a:rPr lang="en-US" dirty="0"/>
-              <a:t>Software Construction</a:t>
-            </a:r>
-          </a:p>
-          <a:p>
-            <a:pPr lvl="1"/>
-            <a:r>
-              <a:rPr lang="en-US" dirty="0"/>
-              <a:t>Software Testing</a:t>
-            </a:r>
-          </a:p>
-          <a:p>
-            <a:pPr lvl="1"/>
-            <a:r>
-              <a:rPr lang="en-US" dirty="0"/>
-              <a:t>Software Maintenance</a:t>
-            </a:r>
-          </a:p>
-          <a:p>
-            <a:pPr lvl="1"/>
-            <a:r>
-              <a:rPr lang="en-US" dirty="0"/>
-              <a:t>Software Configuration Management</a:t>
-            </a:r>
-          </a:p>
-          <a:p>
-            <a:pPr lvl="1"/>
-            <a:r>
-              <a:rPr lang="en-US" dirty="0"/>
-              <a:t>Software Engineering Management</a:t>
-            </a:r>
-          </a:p>
-          <a:p>
-            <a:pPr lvl="1"/>
-            <a:r>
-              <a:rPr lang="en-US" dirty="0"/>
-              <a:t>Software Engineering Process</a:t>
-            </a:r>
-          </a:p>
-          <a:p>
-            <a:pPr lvl="1"/>
-            <a:r>
-              <a:rPr lang="en-US" dirty="0"/>
-              <a:t>Software Engineering Models and Methods</a:t>
-            </a:r>
-          </a:p>
-          <a:p>
-            <a:pPr lvl="1"/>
-            <a:r>
-              <a:rPr lang="en-US" dirty="0"/>
-              <a:t>Software Quality</a:t>
-            </a:r>
-          </a:p>
-          <a:p>
-            <a:pPr lvl="1"/>
-            <a:r>
-              <a:rPr lang="en-US" dirty="0"/>
-              <a:t>Software Engineering Professional Practice</a:t>
-            </a:r>
-          </a:p>
-          <a:p>
-            <a:pPr lvl="1"/>
-            <a:r>
-              <a:rPr lang="en-US" dirty="0"/>
-              <a:t>Software Engineering Economics</a:t>
-            </a:r>
-          </a:p>
-        </p:txBody>
-      </p:sp>
-    </p:spTree>
-    <p:extLst>
-      <p:ext uri="{BB962C8B-B14F-4D97-AF65-F5344CB8AC3E}">
-        <p14:creationId xmlns:p14="http://schemas.microsoft.com/office/powerpoint/2010/main" val="905460715"/>
-      </p:ext>
-    </p:extLst>
-  </p:cSld>
-  <p:clrMapOvr>
-    <a:masterClrMapping/>
-  </p:clrMapOvr>
-</p:sld>
-</file>
-
 <file path=ppt/slides/slide48.xml><?xml version="1.0" encoding="utf-8"?>
 <p:sld xmlns:a="http://schemas.openxmlformats.org/drawingml/2006/main" xmlns:r="http://schemas.openxmlformats.org/officeDocument/2006/relationships" xmlns:p="http://schemas.openxmlformats.org/presentationml/2006/main">
   <p:cSld>
@@ -17950,13 +17127,7 @@
       </p:grpSpPr>
       <p:sp>
         <p:nvSpPr>
-          <p:cNvPr id="2" name="Title 1">
-            <a:extLst>
-              <a:ext uri="{FF2B5EF4-FFF2-40B4-BE49-F238E27FC236}">
-                <a16:creationId xmlns:a16="http://schemas.microsoft.com/office/drawing/2014/main" id="{31B71AFA-30C0-4DAF-A7BF-4F4B50CDA3FE}"/>
-              </a:ext>
-            </a:extLst>
-          </p:cNvPr>
+          <p:cNvPr id="2" name="Title 1"/>
           <p:cNvSpPr>
             <a:spLocks noGrp="1"/>
           </p:cNvSpPr>
@@ -17966,12 +17137,14 @@
         </p:nvSpPr>
         <p:spPr/>
         <p:txBody>
-          <a:bodyPr/>
+          <a:bodyPr>
+            <a:normAutofit/>
+          </a:bodyPr>
           <a:lstStyle/>
           <a:p>
             <a:r>
               <a:rPr lang="zh-CN" altLang="en-US" dirty="0"/>
-              <a:t>软件工程的规律</a:t>
+              <a:t>软件工程的知识领域</a:t>
             </a:r>
             <a:endParaRPr lang="en-US" dirty="0"/>
           </a:p>
@@ -17979,13 +17152,7 @@
       </p:sp>
       <p:sp>
         <p:nvSpPr>
-          <p:cNvPr id="3" name="Content Placeholder 2">
-            <a:extLst>
-              <a:ext uri="{FF2B5EF4-FFF2-40B4-BE49-F238E27FC236}">
-                <a16:creationId xmlns:a16="http://schemas.microsoft.com/office/drawing/2014/main" id="{67053C4F-420C-45C2-97BC-F7BCEA9BF982}"/>
-              </a:ext>
-            </a:extLst>
-          </p:cNvPr>
+          <p:cNvPr id="3" name="Content Placeholder 2"/>
           <p:cNvSpPr>
             <a:spLocks noGrp="1"/>
           </p:cNvSpPr>
@@ -17995,47 +17162,146 @@
         </p:nvSpPr>
         <p:spPr/>
         <p:txBody>
-          <a:bodyPr/>
+          <a:bodyPr>
+            <a:normAutofit fontScale="85000" lnSpcReduction="20000"/>
+          </a:bodyPr>
           <a:lstStyle/>
           <a:p>
             <a:r>
               <a:rPr lang="zh-CN" altLang="en-US" dirty="0"/>
-              <a:t>没有银弹： “不会有任何单一软件工程上的突破，能够让程序开发的生产力得到一个数量级（</a:t>
+              <a:t>软件工程的三大类基础知识领域：</a:t>
+            </a:r>
+            <a:endParaRPr lang="en-US" altLang="zh-CN" dirty="0"/>
+          </a:p>
+          <a:p>
+            <a:pPr lvl="1"/>
+            <a:r>
+              <a:rPr lang="zh-CN" altLang="en-US" dirty="0"/>
+              <a:t>计算机基础；数学基础；工程基础。</a:t>
+            </a:r>
+            <a:endParaRPr lang="en-US" altLang="zh-CN" dirty="0"/>
+          </a:p>
+          <a:p>
+            <a:r>
+              <a:rPr lang="zh-CN" altLang="en-US" dirty="0"/>
+              <a:t>软件工程这个学科包含了</a:t>
             </a:r>
             <a:r>
               <a:rPr lang="en-US" dirty="0"/>
-              <a:t>10</a:t>
-            </a:r>
-            <a:r>
-              <a:rPr lang="zh-CN" altLang="en-US" dirty="0"/>
-              <a:t>倍）的提升。”</a:t>
+              <a:t>12</a:t>
+            </a:r>
+            <a:r>
+              <a:rPr lang="zh-CN" altLang="en-US" dirty="0"/>
+              <a:t>个知识领域 （</a:t>
             </a:r>
             <a:r>
               <a:rPr lang="en-US" dirty="0"/>
-              <a:t> </a:t>
-            </a:r>
-          </a:p>
-          <a:p>
-            <a:r>
-              <a:rPr lang="zh-CN" altLang="en-US" dirty="0"/>
-              <a:t>如果多种软件工程上的突破结合起来，能否让软件开发的效率得到</a:t>
+              <a:t>Knowledge Area</a:t>
+            </a:r>
+            <a:r>
+              <a:rPr lang="zh-CN" altLang="en-US" dirty="0"/>
+              <a:t>，</a:t>
             </a:r>
             <a:r>
               <a:rPr lang="en-US" dirty="0"/>
-              <a:t>10</a:t>
-            </a:r>
-            <a:r>
-              <a:rPr lang="zh-CN" altLang="en-US" dirty="0"/>
-              <a:t>倍的提高呢？</a:t>
+              <a:t>KA</a:t>
+            </a:r>
+            <a:r>
+              <a:rPr lang="zh-CN" altLang="en-US" dirty="0"/>
+              <a:t>）：</a:t>
             </a:r>
             <a:endParaRPr lang="en-US" dirty="0"/>
+          </a:p>
+          <a:p>
+            <a:pPr lvl="1"/>
+            <a:r>
+              <a:rPr lang="en-US" dirty="0"/>
+              <a:t>Software Requirements</a:t>
+            </a:r>
+          </a:p>
+          <a:p>
+            <a:pPr lvl="1"/>
+            <a:r>
+              <a:rPr lang="en-US" dirty="0"/>
+              <a:t>Software Design</a:t>
+            </a:r>
+          </a:p>
+          <a:p>
+            <a:pPr lvl="1"/>
+            <a:r>
+              <a:rPr lang="en-US" dirty="0"/>
+              <a:t>Software Construction</a:t>
+            </a:r>
+          </a:p>
+          <a:p>
+            <a:pPr lvl="1"/>
+            <a:r>
+              <a:rPr lang="en-US" dirty="0"/>
+              <a:t>Software Testing</a:t>
+            </a:r>
+          </a:p>
+          <a:p>
+            <a:pPr lvl="1"/>
+            <a:r>
+              <a:rPr lang="en-US" dirty="0"/>
+              <a:t>Software Maintenance</a:t>
+            </a:r>
+          </a:p>
+          <a:p>
+            <a:pPr lvl="1"/>
+            <a:r>
+              <a:rPr lang="en-US" dirty="0"/>
+              <a:t>Software Configuration Management</a:t>
+            </a:r>
+          </a:p>
+          <a:p>
+            <a:pPr lvl="1"/>
+            <a:r>
+              <a:rPr lang="en-US" dirty="0"/>
+              <a:t>Software Engineering Management</a:t>
+            </a:r>
+          </a:p>
+          <a:p>
+            <a:pPr lvl="1"/>
+            <a:r>
+              <a:rPr lang="en-US" dirty="0"/>
+              <a:t>Software Engineering Process</a:t>
+            </a:r>
+          </a:p>
+          <a:p>
+            <a:pPr lvl="1"/>
+            <a:r>
+              <a:rPr lang="en-US" dirty="0"/>
+              <a:t>Software Engineering Models and Methods</a:t>
+            </a:r>
+          </a:p>
+          <a:p>
+            <a:pPr lvl="1"/>
+            <a:r>
+              <a:rPr lang="en-US" dirty="0"/>
+              <a:t>Software Quality</a:t>
+            </a:r>
+          </a:p>
+          <a:p>
+            <a:pPr lvl="1"/>
+            <a:r>
+              <a:rPr lang="en-US" dirty="0"/>
+              <a:t>Software Engineering Professional Practice</a:t>
+            </a:r>
+          </a:p>
+          <a:p>
+            <a:pPr lvl="1"/>
+            <a:r>
+              <a:rPr lang="en-US" dirty="0"/>
+              <a:t>Software Engineering Economics</a:t>
+            </a:r>
           </a:p>
         </p:txBody>
       </p:sp>
     </p:spTree>
     <p:extLst>
       <p:ext uri="{BB962C8B-B14F-4D97-AF65-F5344CB8AC3E}">
-        <p14:creationId xmlns:p14="http://schemas.microsoft.com/office/powerpoint/2010/main" val="2338638659"/>
+        <p14:creationId xmlns:p14="http://schemas.microsoft.com/office/powerpoint/2010/main" val="905460715"/>
       </p:ext>
     </p:extLst>
   </p:cSld>
@@ -18107,10 +17373,226 @@
             <p:ph idx="1"/>
           </p:nvPr>
         </p:nvSpPr>
+        <p:spPr/>
+        <p:txBody>
+          <a:bodyPr/>
+          <a:lstStyle/>
+          <a:p>
+            <a:r>
+              <a:rPr lang="zh-CN" altLang="en-US" dirty="0"/>
+              <a:t>没有银弹： “不会有任何单一软件工程上的突破，能够让程序开发的生产力得到一个数量级（</a:t>
+            </a:r>
+            <a:r>
+              <a:rPr lang="en-US" dirty="0"/>
+              <a:t>10</a:t>
+            </a:r>
+            <a:r>
+              <a:rPr lang="zh-CN" altLang="en-US" dirty="0"/>
+              <a:t>倍）的提升。”</a:t>
+            </a:r>
+            <a:r>
+              <a:rPr lang="en-US" dirty="0"/>
+              <a:t> </a:t>
+            </a:r>
+          </a:p>
+          <a:p>
+            <a:r>
+              <a:rPr lang="zh-CN" altLang="en-US" dirty="0"/>
+              <a:t>如果多种软件工程上的突破结合起来，能否让软件开发的效率得到</a:t>
+            </a:r>
+            <a:r>
+              <a:rPr lang="en-US" dirty="0"/>
+              <a:t>10</a:t>
+            </a:r>
+            <a:r>
+              <a:rPr lang="zh-CN" altLang="en-US" dirty="0"/>
+              <a:t>倍的提高呢？</a:t>
+            </a:r>
+            <a:endParaRPr lang="en-US" dirty="0"/>
+          </a:p>
+        </p:txBody>
+      </p:sp>
+    </p:spTree>
+    <p:extLst>
+      <p:ext uri="{BB962C8B-B14F-4D97-AF65-F5344CB8AC3E}">
+        <p14:creationId xmlns:p14="http://schemas.microsoft.com/office/powerpoint/2010/main" val="2338638659"/>
+      </p:ext>
+    </p:extLst>
+  </p:cSld>
+  <p:clrMapOvr>
+    <a:masterClrMapping/>
+  </p:clrMapOvr>
+</p:sld>
+</file>
+
+<file path=ppt/slides/slide5.xml><?xml version="1.0" encoding="utf-8"?>
+<p:sld xmlns:a="http://schemas.openxmlformats.org/drawingml/2006/main" xmlns:r="http://schemas.openxmlformats.org/officeDocument/2006/relationships" xmlns:p="http://schemas.openxmlformats.org/presentationml/2006/main">
+  <p:cSld>
+    <p:spTree>
+      <p:nvGrpSpPr>
+        <p:cNvPr id="1" name=""/>
+        <p:cNvGrpSpPr/>
+        <p:nvPr/>
+      </p:nvGrpSpPr>
+      <p:grpSpPr>
+        <a:xfrm>
+          <a:off x="0" y="0"/>
+          <a:ext cx="0" cy="0"/>
+          <a:chOff x="0" y="0"/>
+          <a:chExt cx="0" cy="0"/>
+        </a:xfrm>
+      </p:grpSpPr>
+      <p:sp>
+        <p:nvSpPr>
+          <p:cNvPr id="8194" name="Title 1"/>
+          <p:cNvSpPr>
+            <a:spLocks noGrp="1"/>
+          </p:cNvSpPr>
+          <p:nvPr>
+            <p:ph type="title"/>
+          </p:nvPr>
+        </p:nvSpPr>
+        <p:spPr/>
+        <p:txBody>
+          <a:bodyPr/>
+          <a:lstStyle/>
+          <a:p>
+            <a:pPr eaLnBrk="1" hangingPunct="1"/>
+            <a:r>
+              <a:rPr lang="en-US" dirty="0"/>
+              <a:t>Prototype: Wright Brother</a:t>
+            </a:r>
+          </a:p>
+        </p:txBody>
+      </p:sp>
+      <p:pic>
+        <p:nvPicPr>
+          <p:cNvPr id="8195" name="Picture 2" descr="Wright Brothers' First Flight, December 17, 1903"/>
+          <p:cNvPicPr>
+            <a:picLocks noChangeAspect="1" noChangeArrowheads="1"/>
+          </p:cNvPicPr>
+          <p:nvPr/>
+        </p:nvPicPr>
+        <p:blipFill>
+          <a:blip r:embed="rId2">
+            <a:extLst>
+              <a:ext uri="{28A0092B-C50C-407E-A947-70E740481C1C}">
+                <a14:useLocalDpi xmlns:a14="http://schemas.microsoft.com/office/drawing/2010/main" val="0"/>
+              </a:ext>
+            </a:extLst>
+          </a:blip>
+          <a:srcRect/>
+          <a:stretch>
+            <a:fillRect/>
+          </a:stretch>
+        </p:blipFill>
+        <p:spPr bwMode="auto">
+          <a:xfrm>
+            <a:off x="2590800" y="1636714"/>
+            <a:ext cx="6781800" cy="5221287"/>
+          </a:xfrm>
+          <a:prstGeom prst="rect">
+            <a:avLst/>
+          </a:prstGeom>
+          <a:noFill/>
+          <a:ln>
+            <a:noFill/>
+          </a:ln>
+          <a:extLst>
+            <a:ext uri="{909E8E84-426E-40DD-AFC4-6F175D3DCCD1}">
+              <a14:hiddenFill xmlns:a14="http://schemas.microsoft.com/office/drawing/2010/main">
+                <a:solidFill>
+                  <a:srgbClr val="FFFFFF"/>
+                </a:solidFill>
+              </a14:hiddenFill>
+            </a:ext>
+            <a:ext uri="{91240B29-F687-4F45-9708-019B960494DF}">
+              <a14:hiddenLine xmlns:a14="http://schemas.microsoft.com/office/drawing/2010/main" w="9525">
+                <a:solidFill>
+                  <a:srgbClr val="000000"/>
+                </a:solidFill>
+                <a:miter lim="800000"/>
+                <a:headEnd/>
+                <a:tailEnd/>
+              </a14:hiddenLine>
+            </a:ext>
+          </a:extLst>
+        </p:spPr>
+      </p:pic>
+    </p:spTree>
+  </p:cSld>
+  <p:clrMapOvr>
+    <a:masterClrMapping/>
+  </p:clrMapOvr>
+</p:sld>
+</file>
+
+<file path=ppt/slides/slide50.xml><?xml version="1.0" encoding="utf-8"?>
+<p:sld xmlns:a="http://schemas.openxmlformats.org/drawingml/2006/main" xmlns:r="http://schemas.openxmlformats.org/officeDocument/2006/relationships" xmlns:p="http://schemas.openxmlformats.org/presentationml/2006/main">
+  <p:cSld>
+    <p:spTree>
+      <p:nvGrpSpPr>
+        <p:cNvPr id="1" name=""/>
+        <p:cNvGrpSpPr/>
+        <p:nvPr/>
+      </p:nvGrpSpPr>
+      <p:grpSpPr>
+        <a:xfrm>
+          <a:off x="0" y="0"/>
+          <a:ext cx="0" cy="0"/>
+          <a:chOff x="0" y="0"/>
+          <a:chExt cx="0" cy="0"/>
+        </a:xfrm>
+      </p:grpSpPr>
+      <p:sp>
+        <p:nvSpPr>
+          <p:cNvPr id="2" name="Title 1">
+            <a:extLst>
+              <a:ext uri="{FF2B5EF4-FFF2-40B4-BE49-F238E27FC236}">
+                <a16:creationId xmlns:a16="http://schemas.microsoft.com/office/drawing/2014/main" id="{31B71AFA-30C0-4DAF-A7BF-4F4B50CDA3FE}"/>
+              </a:ext>
+            </a:extLst>
+          </p:cNvPr>
+          <p:cNvSpPr>
+            <a:spLocks noGrp="1"/>
+          </p:cNvSpPr>
+          <p:nvPr>
+            <p:ph type="title"/>
+          </p:nvPr>
+        </p:nvSpPr>
+        <p:spPr/>
+        <p:txBody>
+          <a:bodyPr/>
+          <a:lstStyle/>
+          <a:p>
+            <a:r>
+              <a:rPr lang="zh-CN" altLang="en-US" dirty="0"/>
+              <a:t>软件工程的规律</a:t>
+            </a:r>
+            <a:endParaRPr lang="en-US" dirty="0"/>
+          </a:p>
+        </p:txBody>
+      </p:sp>
+      <p:sp>
+        <p:nvSpPr>
+          <p:cNvPr id="3" name="Content Placeholder 2">
+            <a:extLst>
+              <a:ext uri="{FF2B5EF4-FFF2-40B4-BE49-F238E27FC236}">
+                <a16:creationId xmlns:a16="http://schemas.microsoft.com/office/drawing/2014/main" id="{67053C4F-420C-45C2-97BC-F7BCEA9BF982}"/>
+              </a:ext>
+            </a:extLst>
+          </p:cNvPr>
+          <p:cNvSpPr>
+            <a:spLocks noGrp="1"/>
+          </p:cNvSpPr>
+          <p:nvPr>
+            <p:ph idx="1"/>
+          </p:nvPr>
+        </p:nvSpPr>
         <p:spPr>
           <a:xfrm>
-            <a:off x="1981200" y="1775192"/>
-            <a:ext cx="5715000" cy="4625609"/>
+            <a:off x="900932" y="1690688"/>
+            <a:ext cx="6490467" cy="4625609"/>
           </a:xfrm>
         </p:spPr>
         <p:txBody>
@@ -18319,8 +17801,8 @@
         </p:blipFill>
         <p:spPr bwMode="auto">
           <a:xfrm>
-            <a:off x="8752393" y="5410200"/>
-            <a:ext cx="1905000" cy="1447800"/>
+            <a:off x="7863394" y="4343399"/>
+            <a:ext cx="2728406" cy="2073589"/>
           </a:xfrm>
           <a:prstGeom prst="rect">
             <a:avLst/>
@@ -18350,7 +17832,7 @@
 </p:sld>
 </file>
 
-<file path=ppt/slides/slide5.xml><?xml version="1.0" encoding="utf-8"?>
+<file path=ppt/slides/slide51.xml><?xml version="1.0" encoding="utf-8"?>
 <p:sld xmlns:a="http://schemas.openxmlformats.org/drawingml/2006/main" xmlns:r="http://schemas.openxmlformats.org/officeDocument/2006/relationships" xmlns:p="http://schemas.openxmlformats.org/presentationml/2006/main">
   <p:cSld>
     <p:spTree>
@@ -18369,108 +17851,6 @@
       </p:grpSpPr>
       <p:sp>
         <p:nvSpPr>
-          <p:cNvPr id="8194" name="Title 1"/>
-          <p:cNvSpPr>
-            <a:spLocks noGrp="1"/>
-          </p:cNvSpPr>
-          <p:nvPr>
-            <p:ph type="title"/>
-          </p:nvPr>
-        </p:nvSpPr>
-        <p:spPr/>
-        <p:txBody>
-          <a:bodyPr/>
-          <a:lstStyle/>
-          <a:p>
-            <a:pPr eaLnBrk="1" hangingPunct="1"/>
-            <a:r>
-              <a:rPr lang="en-US" dirty="0"/>
-              <a:t>Prototype: Wright Brother</a:t>
-            </a:r>
-          </a:p>
-        </p:txBody>
-      </p:sp>
-      <p:pic>
-        <p:nvPicPr>
-          <p:cNvPr id="8195" name="Picture 2" descr="Wright Brothers' First Flight, December 17, 1903"/>
-          <p:cNvPicPr>
-            <a:picLocks noChangeAspect="1" noChangeArrowheads="1"/>
-          </p:cNvPicPr>
-          <p:nvPr/>
-        </p:nvPicPr>
-        <p:blipFill>
-          <a:blip r:embed="rId2">
-            <a:extLst>
-              <a:ext uri="{28A0092B-C50C-407E-A947-70E740481C1C}">
-                <a14:useLocalDpi xmlns:a14="http://schemas.microsoft.com/office/drawing/2010/main" val="0"/>
-              </a:ext>
-            </a:extLst>
-          </a:blip>
-          <a:srcRect/>
-          <a:stretch>
-            <a:fillRect/>
-          </a:stretch>
-        </p:blipFill>
-        <p:spPr bwMode="auto">
-          <a:xfrm>
-            <a:off x="2590800" y="1636714"/>
-            <a:ext cx="6781800" cy="5221287"/>
-          </a:xfrm>
-          <a:prstGeom prst="rect">
-            <a:avLst/>
-          </a:prstGeom>
-          <a:noFill/>
-          <a:ln>
-            <a:noFill/>
-          </a:ln>
-          <a:extLst>
-            <a:ext uri="{909E8E84-426E-40DD-AFC4-6F175D3DCCD1}">
-              <a14:hiddenFill xmlns:a14="http://schemas.microsoft.com/office/drawing/2010/main">
-                <a:solidFill>
-                  <a:srgbClr val="FFFFFF"/>
-                </a:solidFill>
-              </a14:hiddenFill>
-            </a:ext>
-            <a:ext uri="{91240B29-F687-4F45-9708-019B960494DF}">
-              <a14:hiddenLine xmlns:a14="http://schemas.microsoft.com/office/drawing/2010/main" w="9525">
-                <a:solidFill>
-                  <a:srgbClr val="000000"/>
-                </a:solidFill>
-                <a:miter lim="800000"/>
-                <a:headEnd/>
-                <a:tailEnd/>
-              </a14:hiddenLine>
-            </a:ext>
-          </a:extLst>
-        </p:spPr>
-      </p:pic>
-    </p:spTree>
-  </p:cSld>
-  <p:clrMapOvr>
-    <a:masterClrMapping/>
-  </p:clrMapOvr>
-</p:sld>
-</file>
-
-<file path=ppt/slides/slide50.xml><?xml version="1.0" encoding="utf-8"?>
-<p:sld xmlns:a="http://schemas.openxmlformats.org/drawingml/2006/main" xmlns:r="http://schemas.openxmlformats.org/officeDocument/2006/relationships" xmlns:p="http://schemas.openxmlformats.org/presentationml/2006/main">
-  <p:cSld>
-    <p:spTree>
-      <p:nvGrpSpPr>
-        <p:cNvPr id="1" name=""/>
-        <p:cNvGrpSpPr/>
-        <p:nvPr/>
-      </p:nvGrpSpPr>
-      <p:grpSpPr>
-        <a:xfrm>
-          <a:off x="0" y="0"/>
-          <a:ext cx="0" cy="0"/>
-          <a:chOff x="0" y="0"/>
-          <a:chExt cx="0" cy="0"/>
-        </a:xfrm>
-      </p:grpSpPr>
-      <p:sp>
-        <p:nvSpPr>
           <p:cNvPr id="2" name="Title 1">
             <a:extLst>
               <a:ext uri="{FF2B5EF4-FFF2-40B4-BE49-F238E27FC236}">
@@ -18526,29 +17906,32 @@
           <a:lstStyle/>
           <a:p>
             <a:r>
-              <a:rPr lang="zh-CN" altLang="en-US" dirty="0"/>
+              <a:rPr lang="zh-CN" altLang="en-US" sz="2400" dirty="0"/>
               <a:t>发展于</a:t>
             </a:r>
             <a:r>
-              <a:rPr lang="en-US" dirty="0"/>
+              <a:rPr lang="en-US" sz="2400" dirty="0"/>
               <a:t>1980 </a:t>
             </a:r>
             <a:r>
-              <a:rPr lang="zh-CN" altLang="en-US" dirty="0"/>
+              <a:rPr lang="zh-CN" altLang="en-US" sz="2400" dirty="0"/>
               <a:t>年代的</a:t>
             </a:r>
             <a:r>
-              <a:rPr lang="en-US" dirty="0" err="1"/>
+              <a:rPr lang="en-US" sz="2400" dirty="0" err="1"/>
               <a:t>Cocomo</a:t>
             </a:r>
             <a:r>
-              <a:rPr lang="en-US" dirty="0"/>
+              <a:rPr lang="en-US" sz="2400" dirty="0"/>
               <a:t> </a:t>
             </a:r>
             <a:r>
-              <a:rPr lang="zh-CN" altLang="en-US" dirty="0"/>
+              <a:rPr lang="zh-CN" altLang="en-US" sz="2400" dirty="0"/>
               <a:t>模型，认为某种项目的时间花费（人月）遵守这样的公式：</a:t>
             </a:r>
+            <a:endParaRPr lang="en-US" altLang="zh-CN" sz="2400" dirty="0"/>
+          </a:p>
+          <a:p>
             <a:endParaRPr lang="en-US" dirty="0"/>
           </a:p>
           <a:p>
@@ -18575,110 +17958,113 @@
             </a:r>
           </a:p>
           <a:p>
-            <a:r>
-              <a:rPr lang="zh-CN" altLang="en-US" dirty="0"/>
+            <a:endParaRPr lang="en-US" altLang="zh-CN" dirty="0"/>
+          </a:p>
+          <a:p>
+            <a:r>
+              <a:rPr lang="zh-CN" altLang="en-US" sz="2400" dirty="0"/>
               <a:t>其中，</a:t>
             </a:r>
             <a:r>
-              <a:rPr lang="en-US" dirty="0" err="1"/>
+              <a:rPr lang="en-US" sz="2400" dirty="0" err="1"/>
               <a:t>KLoC</a:t>
             </a:r>
             <a:r>
-              <a:rPr lang="en-US" dirty="0"/>
+              <a:rPr lang="en-US" sz="2400" dirty="0"/>
               <a:t> </a:t>
             </a:r>
             <a:r>
-              <a:rPr lang="zh-CN" altLang="en-US" dirty="0"/>
+              <a:rPr lang="zh-CN" altLang="en-US" sz="2400" dirty="0"/>
               <a:t>表示一千行代码，例如，如果估计的代码量是</a:t>
             </a:r>
             <a:r>
-              <a:rPr lang="en-US" dirty="0"/>
+              <a:rPr lang="en-US" sz="2400" dirty="0"/>
               <a:t>10</a:t>
             </a:r>
             <a:r>
-              <a:rPr lang="zh-CN" altLang="en-US" dirty="0"/>
+              <a:rPr lang="zh-CN" altLang="en-US" sz="2400" dirty="0"/>
               <a:t>万行（</a:t>
             </a:r>
             <a:r>
-              <a:rPr lang="en-US" dirty="0" err="1"/>
+              <a:rPr lang="en-US" sz="2400" dirty="0" err="1"/>
               <a:t>KLoC</a:t>
             </a:r>
             <a:r>
-              <a:rPr lang="en-US" dirty="0"/>
+              <a:rPr lang="en-US" sz="2400" dirty="0"/>
               <a:t> =100</a:t>
             </a:r>
             <a:r>
-              <a:rPr lang="zh-CN" altLang="en-US" dirty="0"/>
+              <a:rPr lang="zh-CN" altLang="en-US" sz="2400" dirty="0"/>
               <a:t>），那么时间花费就是</a:t>
             </a:r>
             <a:r>
-              <a:rPr lang="en-US" dirty="0"/>
+              <a:rPr lang="en-US" sz="2400" dirty="0"/>
               <a:t> 2.4*100</a:t>
             </a:r>
             <a:r>
-              <a:rPr lang="en-US" baseline="30000" dirty="0"/>
+              <a:rPr lang="en-US" sz="2400" baseline="30000" dirty="0"/>
               <a:t>1.05</a:t>
             </a:r>
             <a:r>
-              <a:rPr lang="en-US" dirty="0"/>
+              <a:rPr lang="en-US" sz="2400" dirty="0"/>
               <a:t> = 302 </a:t>
             </a:r>
             <a:r>
-              <a:rPr lang="zh-CN" altLang="en-US" dirty="0"/>
+              <a:rPr lang="zh-CN" altLang="en-US" sz="2400" dirty="0"/>
               <a:t>人月。</a:t>
             </a:r>
-            <a:endParaRPr lang="en-US" altLang="zh-CN" dirty="0"/>
-          </a:p>
-          <a:p>
-            <a:r>
-              <a:rPr lang="zh-CN" altLang="en-US" dirty="0"/>
+            <a:endParaRPr lang="en-US" altLang="zh-CN" sz="2400" dirty="0"/>
+          </a:p>
+          <a:p>
+            <a:r>
+              <a:rPr lang="zh-CN" altLang="en-US" sz="2400" dirty="0"/>
               <a:t>如果你的团队有</a:t>
             </a:r>
             <a:r>
-              <a:rPr lang="en-US" dirty="0"/>
+              <a:rPr lang="en-US" sz="2400" dirty="0"/>
               <a:t>15</a:t>
             </a:r>
             <a:r>
-              <a:rPr lang="zh-CN" altLang="en-US" dirty="0"/>
+              <a:rPr lang="zh-CN" altLang="en-US" sz="2400" dirty="0"/>
               <a:t>人，那就要花</a:t>
             </a:r>
             <a:r>
-              <a:rPr lang="en-US" dirty="0"/>
+              <a:rPr lang="en-US" sz="2400" dirty="0"/>
               <a:t>20</a:t>
             </a:r>
             <a:r>
-              <a:rPr lang="zh-CN" altLang="en-US" dirty="0"/>
+              <a:rPr lang="zh-CN" altLang="en-US" sz="2400" dirty="0"/>
               <a:t>个月的时间。在</a:t>
             </a:r>
             <a:r>
-              <a:rPr lang="en-US" dirty="0"/>
+              <a:rPr lang="en-US" sz="2400" dirty="0"/>
               <a:t>201</a:t>
             </a:r>
             <a:r>
-              <a:rPr lang="en-US" altLang="zh-CN" dirty="0"/>
+              <a:rPr lang="en-US" altLang="zh-CN" sz="2400" dirty="0"/>
               <a:t>9</a:t>
             </a:r>
             <a:r>
-              <a:rPr lang="zh-CN" altLang="en-US" dirty="0"/>
+              <a:rPr lang="zh-CN" altLang="en-US" sz="2400" dirty="0"/>
               <a:t>年的实际项目中，项目经理真的会用</a:t>
             </a:r>
             <a:r>
-              <a:rPr lang="en-US" dirty="0"/>
+              <a:rPr lang="en-US" sz="2400" dirty="0"/>
               <a:t> 2.4</a:t>
             </a:r>
             <a:r>
-              <a:rPr lang="zh-CN" altLang="en-US" dirty="0"/>
+              <a:rPr lang="zh-CN" altLang="en-US" sz="2400" dirty="0"/>
               <a:t>，和</a:t>
             </a:r>
             <a:r>
-              <a:rPr lang="en-US" dirty="0"/>
+              <a:rPr lang="en-US" sz="2400" dirty="0"/>
               <a:t>1.05 </a:t>
             </a:r>
             <a:r>
-              <a:rPr lang="zh-CN" altLang="en-US" dirty="0"/>
+              <a:rPr lang="zh-CN" altLang="en-US" sz="2400" dirty="0"/>
               <a:t>来进行计算么？</a:t>
             </a:r>
-            <a:endParaRPr lang="en-US" dirty="0"/>
+            <a:endParaRPr lang="en-US" sz="2400" dirty="0"/>
           </a:p>
         </p:txBody>
       </p:sp>
@@ -18695,7 +18081,7 @@
 </p:sld>
 </file>
 
-<file path=ppt/slides/slide51.xml><?xml version="1.0" encoding="utf-8"?>
+<file path=ppt/slides/slide52.xml><?xml version="1.0" encoding="utf-8"?>
 <p:sld xmlns:a="http://schemas.openxmlformats.org/drawingml/2006/main" xmlns:r="http://schemas.openxmlformats.org/officeDocument/2006/relationships" xmlns:p="http://schemas.openxmlformats.org/presentationml/2006/main">
   <p:cSld>
     <p:spTree>
@@ -18949,163 +18335,6 @@
 </p:sld>
 </file>
 
-<file path=ppt/slides/slide52.xml><?xml version="1.0" encoding="utf-8"?>
-<p:sld xmlns:a="http://schemas.openxmlformats.org/drawingml/2006/main" xmlns:r="http://schemas.openxmlformats.org/officeDocument/2006/relationships" xmlns:p="http://schemas.openxmlformats.org/presentationml/2006/main">
-  <p:cSld>
-    <p:spTree>
-      <p:nvGrpSpPr>
-        <p:cNvPr id="1" name=""/>
-        <p:cNvGrpSpPr/>
-        <p:nvPr/>
-      </p:nvGrpSpPr>
-      <p:grpSpPr>
-        <a:xfrm>
-          <a:off x="0" y="0"/>
-          <a:ext cx="0" cy="0"/>
-          <a:chOff x="0" y="0"/>
-          <a:chExt cx="0" cy="0"/>
-        </a:xfrm>
-      </p:grpSpPr>
-      <p:sp>
-        <p:nvSpPr>
-          <p:cNvPr id="2" name="Title 1">
-            <a:extLst>
-              <a:ext uri="{FF2B5EF4-FFF2-40B4-BE49-F238E27FC236}">
-                <a16:creationId xmlns:a16="http://schemas.microsoft.com/office/drawing/2014/main" id="{31B71AFA-30C0-4DAF-A7BF-4F4B50CDA3FE}"/>
-              </a:ext>
-            </a:extLst>
-          </p:cNvPr>
-          <p:cNvSpPr>
-            <a:spLocks noGrp="1"/>
-          </p:cNvSpPr>
-          <p:nvPr>
-            <p:ph type="title"/>
-          </p:nvPr>
-        </p:nvSpPr>
-        <p:spPr/>
-        <p:txBody>
-          <a:bodyPr/>
-          <a:lstStyle/>
-          <a:p>
-            <a:r>
-              <a:rPr lang="zh-CN" altLang="en-US" dirty="0"/>
-              <a:t>如何发现，掌握规律</a:t>
-            </a:r>
-            <a:endParaRPr lang="en-US" dirty="0"/>
-          </a:p>
-        </p:txBody>
-      </p:sp>
-      <p:sp>
-        <p:nvSpPr>
-          <p:cNvPr id="3" name="Content Placeholder 2">
-            <a:extLst>
-              <a:ext uri="{FF2B5EF4-FFF2-40B4-BE49-F238E27FC236}">
-                <a16:creationId xmlns:a16="http://schemas.microsoft.com/office/drawing/2014/main" id="{67053C4F-420C-45C2-97BC-F7BCEA9BF982}"/>
-              </a:ext>
-            </a:extLst>
-          </p:cNvPr>
-          <p:cNvSpPr>
-            <a:spLocks noGrp="1"/>
-          </p:cNvSpPr>
-          <p:nvPr>
-            <p:ph idx="1"/>
-          </p:nvPr>
-        </p:nvSpPr>
-        <p:spPr/>
-        <p:txBody>
-          <a:bodyPr>
-            <a:normAutofit/>
-          </a:bodyPr>
-          <a:lstStyle/>
-          <a:p>
-            <a:pPr marL="118872" indent="0">
-              <a:buNone/>
-            </a:pPr>
-            <a:r>
-              <a:rPr lang="zh-CN" altLang="en-US" dirty="0"/>
-              <a:t>软件工程有很多名词和概念</a:t>
-            </a:r>
-            <a:endParaRPr lang="en-US" altLang="zh-CN" dirty="0"/>
-          </a:p>
-          <a:p>
-            <a:endParaRPr lang="en-US" altLang="zh-CN" dirty="0"/>
-          </a:p>
-          <a:p>
-            <a:r>
-              <a:rPr lang="zh-CN" altLang="en-US" sz="2800" dirty="0"/>
-              <a:t>“你可以知道一种鸟的名字在全世界各种语言中怎么说，但是说完之后，你还是不了解这个鸟。 所以我们要观察这个鸟的行动 </a:t>
-            </a:r>
-            <a:r>
-              <a:rPr lang="en-US" sz="2800" dirty="0"/>
-              <a:t>– </a:t>
-            </a:r>
-            <a:r>
-              <a:rPr lang="zh-CN" altLang="en-US" sz="2800" dirty="0"/>
-              <a:t>这才是最重要的。” </a:t>
-            </a:r>
-            <a:endParaRPr lang="en-US" altLang="zh-CN" sz="2800" dirty="0"/>
-          </a:p>
-          <a:p>
-            <a:pPr marL="118872" indent="0" algn="r">
-              <a:buNone/>
-            </a:pPr>
-            <a:r>
-              <a:rPr lang="en-US" altLang="zh-CN" sz="2800" dirty="0">
-                <a:hlinkClick r:id="rId2"/>
-              </a:rPr>
-              <a:t>Richard Feynman</a:t>
-            </a:r>
-            <a:r>
-              <a:rPr lang="zh-CN" altLang="en-US" sz="2800" dirty="0"/>
-              <a:t>（</a:t>
-            </a:r>
-            <a:r>
-              <a:rPr lang="en-US" altLang="zh-CN" sz="2800" dirty="0"/>
-              <a:t>video</a:t>
-            </a:r>
-            <a:r>
-              <a:rPr lang="zh-CN" altLang="en-US" sz="2800" dirty="0"/>
-              <a:t>）</a:t>
-            </a:r>
-            <a:endParaRPr lang="en-US" altLang="zh-CN" sz="2800" dirty="0"/>
-          </a:p>
-          <a:p>
-            <a:r>
-              <a:rPr lang="zh-CN" altLang="en-US" dirty="0"/>
-              <a:t>如何研究规律？</a:t>
-            </a:r>
-            <a:endParaRPr lang="en-US" altLang="zh-CN" dirty="0"/>
-          </a:p>
-          <a:p>
-            <a:pPr lvl="1"/>
-            <a:r>
-              <a:rPr lang="zh-CN" altLang="en-US" dirty="0"/>
-              <a:t>观察它的行动</a:t>
-            </a:r>
-            <a:endParaRPr lang="en-US" altLang="zh-CN" dirty="0"/>
-          </a:p>
-          <a:p>
-            <a:pPr lvl="1"/>
-            <a:r>
-              <a:rPr lang="en-US" dirty="0"/>
-              <a:t>Learning by doing. </a:t>
-            </a:r>
-          </a:p>
-        </p:txBody>
-      </p:sp>
-    </p:spTree>
-    <p:extLst>
-      <p:ext uri="{BB962C8B-B14F-4D97-AF65-F5344CB8AC3E}">
-        <p14:creationId xmlns:p14="http://schemas.microsoft.com/office/powerpoint/2010/main" val="2264470809"/>
-      </p:ext>
-    </p:extLst>
-  </p:cSld>
-  <p:clrMapOvr>
-    <a:masterClrMapping/>
-  </p:clrMapOvr>
-</p:sld>
-</file>
-
 <file path=ppt/slides/slide53.xml><?xml version="1.0" encoding="utf-8"?>
 <p:sld xmlns:a="http://schemas.openxmlformats.org/drawingml/2006/main" xmlns:r="http://schemas.openxmlformats.org/officeDocument/2006/relationships" xmlns:p="http://schemas.openxmlformats.org/presentationml/2006/main">
   <p:cSld>
@@ -19125,6 +18354,163 @@
       </p:grpSpPr>
       <p:sp>
         <p:nvSpPr>
+          <p:cNvPr id="2" name="Title 1">
+            <a:extLst>
+              <a:ext uri="{FF2B5EF4-FFF2-40B4-BE49-F238E27FC236}">
+                <a16:creationId xmlns:a16="http://schemas.microsoft.com/office/drawing/2014/main" id="{31B71AFA-30C0-4DAF-A7BF-4F4B50CDA3FE}"/>
+              </a:ext>
+            </a:extLst>
+          </p:cNvPr>
+          <p:cNvSpPr>
+            <a:spLocks noGrp="1"/>
+          </p:cNvSpPr>
+          <p:nvPr>
+            <p:ph type="title"/>
+          </p:nvPr>
+        </p:nvSpPr>
+        <p:spPr/>
+        <p:txBody>
+          <a:bodyPr/>
+          <a:lstStyle/>
+          <a:p>
+            <a:r>
+              <a:rPr lang="zh-CN" altLang="en-US" dirty="0"/>
+              <a:t>如何发现，掌握规律</a:t>
+            </a:r>
+            <a:endParaRPr lang="en-US" dirty="0"/>
+          </a:p>
+        </p:txBody>
+      </p:sp>
+      <p:sp>
+        <p:nvSpPr>
+          <p:cNvPr id="3" name="Content Placeholder 2">
+            <a:extLst>
+              <a:ext uri="{FF2B5EF4-FFF2-40B4-BE49-F238E27FC236}">
+                <a16:creationId xmlns:a16="http://schemas.microsoft.com/office/drawing/2014/main" id="{67053C4F-420C-45C2-97BC-F7BCEA9BF982}"/>
+              </a:ext>
+            </a:extLst>
+          </p:cNvPr>
+          <p:cNvSpPr>
+            <a:spLocks noGrp="1"/>
+          </p:cNvSpPr>
+          <p:nvPr>
+            <p:ph idx="1"/>
+          </p:nvPr>
+        </p:nvSpPr>
+        <p:spPr/>
+        <p:txBody>
+          <a:bodyPr>
+            <a:normAutofit/>
+          </a:bodyPr>
+          <a:lstStyle/>
+          <a:p>
+            <a:pPr marL="118872" indent="0">
+              <a:buNone/>
+            </a:pPr>
+            <a:r>
+              <a:rPr lang="zh-CN" altLang="en-US" dirty="0"/>
+              <a:t>软件工程有很多名词和概念</a:t>
+            </a:r>
+            <a:endParaRPr lang="en-US" altLang="zh-CN" dirty="0"/>
+          </a:p>
+          <a:p>
+            <a:endParaRPr lang="en-US" altLang="zh-CN" dirty="0"/>
+          </a:p>
+          <a:p>
+            <a:r>
+              <a:rPr lang="zh-CN" altLang="en-US" sz="2800" dirty="0"/>
+              <a:t>“你可以知道一种鸟的名字在全世界各种语言中怎么说，但是说完之后，你还是不了解这个鸟。 所以我们要观察这个鸟的行动 </a:t>
+            </a:r>
+            <a:r>
+              <a:rPr lang="en-US" sz="2800" dirty="0"/>
+              <a:t>– </a:t>
+            </a:r>
+            <a:r>
+              <a:rPr lang="zh-CN" altLang="en-US" sz="2800" dirty="0"/>
+              <a:t>这才是最重要的。” </a:t>
+            </a:r>
+            <a:endParaRPr lang="en-US" altLang="zh-CN" sz="2800" dirty="0"/>
+          </a:p>
+          <a:p>
+            <a:pPr marL="118872" indent="0" algn="r">
+              <a:buNone/>
+            </a:pPr>
+            <a:r>
+              <a:rPr lang="en-US" altLang="zh-CN" sz="2800" dirty="0">
+                <a:hlinkClick r:id="rId2"/>
+              </a:rPr>
+              <a:t>Richard Feynman</a:t>
+            </a:r>
+            <a:r>
+              <a:rPr lang="zh-CN" altLang="en-US" sz="2800" dirty="0"/>
+              <a:t>（</a:t>
+            </a:r>
+            <a:r>
+              <a:rPr lang="en-US" altLang="zh-CN" sz="2800" dirty="0"/>
+              <a:t>video</a:t>
+            </a:r>
+            <a:r>
+              <a:rPr lang="zh-CN" altLang="en-US" sz="2800" dirty="0"/>
+              <a:t>）</a:t>
+            </a:r>
+            <a:endParaRPr lang="en-US" altLang="zh-CN" sz="2800" dirty="0"/>
+          </a:p>
+          <a:p>
+            <a:r>
+              <a:rPr lang="zh-CN" altLang="en-US" dirty="0"/>
+              <a:t>如何研究规律？</a:t>
+            </a:r>
+            <a:endParaRPr lang="en-US" altLang="zh-CN" dirty="0"/>
+          </a:p>
+          <a:p>
+            <a:pPr lvl="1"/>
+            <a:r>
+              <a:rPr lang="zh-CN" altLang="en-US" dirty="0"/>
+              <a:t>观察它的行动</a:t>
+            </a:r>
+            <a:endParaRPr lang="en-US" altLang="zh-CN" dirty="0"/>
+          </a:p>
+          <a:p>
+            <a:pPr lvl="1"/>
+            <a:r>
+              <a:rPr lang="en-US" dirty="0"/>
+              <a:t>Learning by doing. </a:t>
+            </a:r>
+          </a:p>
+        </p:txBody>
+      </p:sp>
+    </p:spTree>
+    <p:extLst>
+      <p:ext uri="{BB962C8B-B14F-4D97-AF65-F5344CB8AC3E}">
+        <p14:creationId xmlns:p14="http://schemas.microsoft.com/office/powerpoint/2010/main" val="2264470809"/>
+      </p:ext>
+    </p:extLst>
+  </p:cSld>
+  <p:clrMapOvr>
+    <a:masterClrMapping/>
+  </p:clrMapOvr>
+</p:sld>
+</file>
+
+<file path=ppt/slides/slide54.xml><?xml version="1.0" encoding="utf-8"?>
+<p:sld xmlns:a="http://schemas.openxmlformats.org/drawingml/2006/main" xmlns:r="http://schemas.openxmlformats.org/officeDocument/2006/relationships" xmlns:p="http://schemas.openxmlformats.org/presentationml/2006/main">
+  <p:cSld>
+    <p:spTree>
+      <p:nvGrpSpPr>
+        <p:cNvPr id="1" name=""/>
+        <p:cNvGrpSpPr/>
+        <p:nvPr/>
+      </p:nvGrpSpPr>
+      <p:grpSpPr>
+        <a:xfrm>
+          <a:off x="0" y="0"/>
+          <a:ext cx="0" cy="0"/>
+          <a:chOff x="0" y="0"/>
+          <a:chExt cx="0" cy="0"/>
+        </a:xfrm>
+      </p:grpSpPr>
+      <p:sp>
+        <p:nvSpPr>
           <p:cNvPr id="2" name="Title 1"/>
           <p:cNvSpPr>
             <a:spLocks noGrp="1"/>
@@ -19242,7 +18628,7 @@
 </p:sld>
 </file>
 
-<file path=ppt/slides/slide54.xml><?xml version="1.0" encoding="utf-8"?>
+<file path=ppt/slides/slide55.xml><?xml version="1.0" encoding="utf-8"?>
 <p:sld xmlns:a="http://schemas.openxmlformats.org/drawingml/2006/main" xmlns:r="http://schemas.openxmlformats.org/officeDocument/2006/relationships" xmlns:p="http://schemas.openxmlformats.org/presentationml/2006/main">
   <p:cSld>
     <p:spTree>
@@ -19836,8 +19222,8 @@
 </p:sld>
 </file>
 
-<file path=ppt/slides/slide55.xml><?xml version="1.0" encoding="utf-8"?>
-<p:sld xmlns:a="http://schemas.openxmlformats.org/drawingml/2006/main" xmlns:r="http://schemas.openxmlformats.org/officeDocument/2006/relationships" xmlns:p="http://schemas.openxmlformats.org/presentationml/2006/main">
+<file path=ppt/slides/slide56.xml><?xml version="1.0" encoding="utf-8"?>
+<p:sld xmlns:a="http://schemas.openxmlformats.org/drawingml/2006/main" xmlns:r="http://schemas.openxmlformats.org/officeDocument/2006/relationships" xmlns:p="http://schemas.openxmlformats.org/presentationml/2006/main" show="0">
   <p:cSld>
     <p:spTree>
       <p:nvGrpSpPr>
@@ -20110,87 +19496,6 @@
         </p:txBody>
       </p:sp>
     </p:spTree>
-  </p:cSld>
-  <p:clrMapOvr>
-    <a:masterClrMapping/>
-  </p:clrMapOvr>
-</p:sld>
-</file>
-
-<file path=ppt/slides/slide56.xml><?xml version="1.0" encoding="utf-8"?>
-<p:sld xmlns:a="http://schemas.openxmlformats.org/drawingml/2006/main" xmlns:r="http://schemas.openxmlformats.org/officeDocument/2006/relationships" xmlns:p="http://schemas.openxmlformats.org/presentationml/2006/main">
-  <p:cSld>
-    <p:spTree>
-      <p:nvGrpSpPr>
-        <p:cNvPr id="1" name=""/>
-        <p:cNvGrpSpPr/>
-        <p:nvPr/>
-      </p:nvGrpSpPr>
-      <p:grpSpPr>
-        <a:xfrm>
-          <a:off x="0" y="0"/>
-          <a:ext cx="0" cy="0"/>
-          <a:chOff x="0" y="0"/>
-          <a:chExt cx="0" cy="0"/>
-        </a:xfrm>
-      </p:grpSpPr>
-      <p:sp>
-        <p:nvSpPr>
-          <p:cNvPr id="2" name="Title 1"/>
-          <p:cNvSpPr>
-            <a:spLocks noGrp="1"/>
-          </p:cNvSpPr>
-          <p:nvPr>
-            <p:ph type="title"/>
-          </p:nvPr>
-        </p:nvSpPr>
-        <p:spPr/>
-        <p:txBody>
-          <a:bodyPr/>
-          <a:lstStyle/>
-          <a:p>
-            <a:r>
-              <a:rPr lang="zh-CN" altLang="en-US" dirty="0"/>
-              <a:t>更多作业和讨论</a:t>
-            </a:r>
-            <a:endParaRPr lang="en-US" dirty="0"/>
-          </a:p>
-        </p:txBody>
-      </p:sp>
-      <p:sp>
-        <p:nvSpPr>
-          <p:cNvPr id="3" name="Content Placeholder 2"/>
-          <p:cNvSpPr>
-            <a:spLocks noGrp="1"/>
-          </p:cNvSpPr>
-          <p:nvPr>
-            <p:ph idx="1"/>
-          </p:nvPr>
-        </p:nvSpPr>
-        <p:spPr/>
-        <p:txBody>
-          <a:bodyPr/>
-          <a:lstStyle/>
-          <a:p>
-            <a:r>
-              <a:rPr lang="en-US" dirty="0">
-                <a:hlinkClick r:id="rId2"/>
-              </a:rPr>
-              <a:t>http://www.cnblogs.com/xinz/p/3803035.html</a:t>
-            </a:r>
-            <a:endParaRPr lang="en-US" dirty="0"/>
-          </a:p>
-          <a:p>
-            <a:endParaRPr lang="en-US" dirty="0"/>
-          </a:p>
-        </p:txBody>
-      </p:sp>
-    </p:spTree>
-    <p:extLst>
-      <p:ext uri="{BB962C8B-B14F-4D97-AF65-F5344CB8AC3E}">
-        <p14:creationId xmlns:p14="http://schemas.microsoft.com/office/powerpoint/2010/main" val="2211337153"/>
-      </p:ext>
-    </p:extLst>
   </p:cSld>
   <p:clrMapOvr>
     <a:masterClrMapping/>
@@ -20232,6 +19537,87 @@
           <a:p>
             <a:r>
               <a:rPr lang="zh-CN" altLang="en-US" dirty="0"/>
+              <a:t>更多作业和讨论</a:t>
+            </a:r>
+            <a:endParaRPr lang="en-US" dirty="0"/>
+          </a:p>
+        </p:txBody>
+      </p:sp>
+      <p:sp>
+        <p:nvSpPr>
+          <p:cNvPr id="3" name="Content Placeholder 2"/>
+          <p:cNvSpPr>
+            <a:spLocks noGrp="1"/>
+          </p:cNvSpPr>
+          <p:nvPr>
+            <p:ph idx="1"/>
+          </p:nvPr>
+        </p:nvSpPr>
+        <p:spPr/>
+        <p:txBody>
+          <a:bodyPr/>
+          <a:lstStyle/>
+          <a:p>
+            <a:r>
+              <a:rPr lang="en-US" dirty="0">
+                <a:hlinkClick r:id="rId2"/>
+              </a:rPr>
+              <a:t>http://www.cnblogs.com/xinz/p/3803035.html</a:t>
+            </a:r>
+            <a:endParaRPr lang="en-US" dirty="0"/>
+          </a:p>
+          <a:p>
+            <a:endParaRPr lang="en-US" dirty="0"/>
+          </a:p>
+        </p:txBody>
+      </p:sp>
+    </p:spTree>
+    <p:extLst>
+      <p:ext uri="{BB962C8B-B14F-4D97-AF65-F5344CB8AC3E}">
+        <p14:creationId xmlns:p14="http://schemas.microsoft.com/office/powerpoint/2010/main" val="2211337153"/>
+      </p:ext>
+    </p:extLst>
+  </p:cSld>
+  <p:clrMapOvr>
+    <a:masterClrMapping/>
+  </p:clrMapOvr>
+</p:sld>
+</file>
+
+<file path=ppt/slides/slide58.xml><?xml version="1.0" encoding="utf-8"?>
+<p:sld xmlns:a="http://schemas.openxmlformats.org/drawingml/2006/main" xmlns:r="http://schemas.openxmlformats.org/officeDocument/2006/relationships" xmlns:p="http://schemas.openxmlformats.org/presentationml/2006/main">
+  <p:cSld>
+    <p:spTree>
+      <p:nvGrpSpPr>
+        <p:cNvPr id="1" name=""/>
+        <p:cNvGrpSpPr/>
+        <p:nvPr/>
+      </p:nvGrpSpPr>
+      <p:grpSpPr>
+        <a:xfrm>
+          <a:off x="0" y="0"/>
+          <a:ext cx="0" cy="0"/>
+          <a:chOff x="0" y="0"/>
+          <a:chExt cx="0" cy="0"/>
+        </a:xfrm>
+      </p:grpSpPr>
+      <p:sp>
+        <p:nvSpPr>
+          <p:cNvPr id="2" name="Title 1"/>
+          <p:cNvSpPr>
+            <a:spLocks noGrp="1"/>
+          </p:cNvSpPr>
+          <p:nvPr>
+            <p:ph type="title"/>
+          </p:nvPr>
+        </p:nvSpPr>
+        <p:spPr/>
+        <p:txBody>
+          <a:bodyPr/>
+          <a:lstStyle/>
+          <a:p>
+            <a:r>
+              <a:rPr lang="zh-CN" altLang="en-US" dirty="0"/>
               <a:t>构建软件的不同目的</a:t>
             </a:r>
             <a:endParaRPr lang="en-US" dirty="0"/>
@@ -20329,7 +19715,7 @@
 </p:sld>
 </file>
 
-<file path=ppt/slides/slide58.xml><?xml version="1.0" encoding="utf-8"?>
+<file path=ppt/slides/slide59.xml><?xml version="1.0" encoding="utf-8"?>
 <p:sld xmlns:a="http://schemas.openxmlformats.org/drawingml/2006/main" xmlns:r="http://schemas.openxmlformats.org/officeDocument/2006/relationships" xmlns:p="http://schemas.openxmlformats.org/presentationml/2006/main">
   <p:cSld>
     <p:spTree>
@@ -21419,15 +20805,6 @@
 </file>
 
 <file path=customXml/item1.xml><?xml version="1.0" encoding="utf-8"?>
-<?mso-contentType ?>
-<FormTemplates xmlns="http://schemas.microsoft.com/sharepoint/v3/contenttype/forms">
-  <Display>DocumentLibraryForm</Display>
-  <Edit>DocumentLibraryForm</Edit>
-  <New>DocumentLibraryForm</New>
-</FormTemplates>
-</file>
-
-<file path=customXml/item2.xml><?xml version="1.0" encoding="utf-8"?>
 <ct:contentTypeSchema xmlns:ct="http://schemas.microsoft.com/office/2006/metadata/contentType" xmlns:ma="http://schemas.microsoft.com/office/2006/metadata/properties/metaAttributes" ct:_="" ma:_="" ma:contentTypeName="Document" ma:contentTypeID="0x0101006371182FA640024E8A2815D490E1EF25" ma:contentTypeVersion="0" ma:contentTypeDescription="Create a new document." ma:contentTypeScope="" ma:versionID="3591aab47f172a2900f307f59d422227">
   <xsd:schema xmlns:xsd="http://www.w3.org/2001/XMLSchema" xmlns:xs="http://www.w3.org/2001/XMLSchema" xmlns:p="http://schemas.microsoft.com/office/2006/metadata/properties" targetNamespace="http://schemas.microsoft.com/office/2006/metadata/properties" ma:root="true" ma:fieldsID="1f28ea01430cdfb20a10736313f817e3">
     <xsd:element name="properties">
@@ -21541,21 +20918,22 @@
 </ct:contentTypeSchema>
 </file>
 
-<file path=customXml/item3.xml><?xml version="1.0" encoding="utf-8"?>
+<file path=customXml/item2.xml><?xml version="1.0" encoding="utf-8"?>
 <p:properties xmlns:p="http://schemas.microsoft.com/office/2006/metadata/properties" xmlns:xsi="http://www.w3.org/2001/XMLSchema-instance" xmlns:pc="http://schemas.microsoft.com/office/infopath/2007/PartnerControls">
   <documentManagement/>
 </p:properties>
 </file>
 
-<file path=customXml/itemProps1.xml><?xml version="1.0" encoding="utf-8"?>
-<ds:datastoreItem xmlns:ds="http://schemas.openxmlformats.org/officeDocument/2006/customXml" ds:itemID="{152C3F0E-25C3-4B31-B914-3A618B652002}">
-  <ds:schemaRefs>
-    <ds:schemaRef ds:uri="http://schemas.microsoft.com/sharepoint/v3/contenttype/forms"/>
-  </ds:schemaRefs>
-</ds:datastoreItem>
+<file path=customXml/item3.xml><?xml version="1.0" encoding="utf-8"?>
+<?mso-contentType ?>
+<FormTemplates xmlns="http://schemas.microsoft.com/sharepoint/v3/contenttype/forms">
+  <Display>DocumentLibraryForm</Display>
+  <Edit>DocumentLibraryForm</Edit>
+  <New>DocumentLibraryForm</New>
+</FormTemplates>
 </file>
 
-<file path=customXml/itemProps2.xml><?xml version="1.0" encoding="utf-8"?>
+<file path=customXml/itemProps1.xml><?xml version="1.0" encoding="utf-8"?>
 <ds:datastoreItem xmlns:ds="http://schemas.openxmlformats.org/officeDocument/2006/customXml" ds:itemID="{3A578484-EFC7-41EF-A5B1-C62DDCF2E328}">
   <ds:schemaRefs>
     <ds:schemaRef ds:uri="http://schemas.microsoft.com/office/2006/metadata/contentType"/>
@@ -21571,11 +20949,19 @@
 </ds:datastoreItem>
 </file>
 
-<file path=customXml/itemProps3.xml><?xml version="1.0" encoding="utf-8"?>
+<file path=customXml/itemProps2.xml><?xml version="1.0" encoding="utf-8"?>
 <ds:datastoreItem xmlns:ds="http://schemas.openxmlformats.org/officeDocument/2006/customXml" ds:itemID="{D5495DD4-04CD-4725-AADE-F45F611A52AA}">
   <ds:schemaRefs>
     <ds:schemaRef ds:uri="http://schemas.microsoft.com/office/2006/metadata/properties"/>
     <ds:schemaRef ds:uri="http://schemas.microsoft.com/office/infopath/2007/PartnerControls"/>
   </ds:schemaRefs>
 </ds:datastoreItem>
+</file>
+
+<file path=customXml/itemProps3.xml><?xml version="1.0" encoding="utf-8"?>
+<ds:datastoreItem xmlns:ds="http://schemas.openxmlformats.org/officeDocument/2006/customXml" ds:itemID="{152C3F0E-25C3-4B31-B914-3A618B652002}">
+  <ds:schemaRefs>
+    <ds:schemaRef ds:uri="http://schemas.microsoft.com/sharepoint/v3/contenttype/forms"/>
+  </ds:schemaRefs>
+</ds:datastoreItem>
 </file>